--- a/public/submission/Raingentic-Hackathon-Deck.pptx
+++ b/public/submission/Raingentic-Hackathon-Deck.pptx
@@ -2,23 +2,25 @@
 <file path=ppt/presentation.xml><?xml version="1.0" encoding="utf-8"?>
 <p:presentation xmlns:p="http://schemas.openxmlformats.org/presentationml/2006/main">
   <p:sldMasterIdLst>
-    <p:sldMasterId xmlns:r="http://schemas.openxmlformats.org/officeDocument/2006/relationships" id="2147483648" r:id="Ra89bf26862e2472a"/>
+    <p:sldMasterId xmlns:r="http://schemas.openxmlformats.org/officeDocument/2006/relationships" id="2147483648" r:id="Red4bf1a3792343d5"/>
   </p:sldMasterIdLst>
   <p:notesMasterIdLst>
-    <p:notesMasterId xmlns:r="http://schemas.openxmlformats.org/officeDocument/2006/relationships" r:id="Rd1cedf8a16024373"/>
+    <p:notesMasterId xmlns:r="http://schemas.openxmlformats.org/officeDocument/2006/relationships" r:id="R2df4dcfa048f4ed4"/>
   </p:notesMasterIdLst>
   <p:sldIdLst>
-    <p:sldId xmlns:r="http://schemas.openxmlformats.org/officeDocument/2006/relationships" id="256" r:id="R088c32bcbb2d408f"/>
-    <p:sldId xmlns:r="http://schemas.openxmlformats.org/officeDocument/2006/relationships" id="257" r:id="Rbc4dda990773478f"/>
-    <p:sldId xmlns:r="http://schemas.openxmlformats.org/officeDocument/2006/relationships" id="258" r:id="R04cfb0832b4f4e30"/>
-    <p:sldId xmlns:r="http://schemas.openxmlformats.org/officeDocument/2006/relationships" id="259" r:id="R7fd676d597c74549"/>
-    <p:sldId xmlns:r="http://schemas.openxmlformats.org/officeDocument/2006/relationships" id="260" r:id="Re379e2acf5224966"/>
-    <p:sldId xmlns:r="http://schemas.openxmlformats.org/officeDocument/2006/relationships" id="261" r:id="Re9408a3e43694929"/>
-    <p:sldId xmlns:r="http://schemas.openxmlformats.org/officeDocument/2006/relationships" id="262" r:id="R52fdebf61d1642cc"/>
-    <p:sldId xmlns:r="http://schemas.openxmlformats.org/officeDocument/2006/relationships" id="263" r:id="R1f5b68f643bb4692"/>
-    <p:sldId xmlns:r="http://schemas.openxmlformats.org/officeDocument/2006/relationships" id="264" r:id="R612632ffb41248c7"/>
-    <p:sldId xmlns:r="http://schemas.openxmlformats.org/officeDocument/2006/relationships" id="265" r:id="Ra73ac4846c494747"/>
-    <p:sldId xmlns:r="http://schemas.openxmlformats.org/officeDocument/2006/relationships" id="266" r:id="Rdc3e4939282a44e4"/>
+    <p:sldId xmlns:r="http://schemas.openxmlformats.org/officeDocument/2006/relationships" id="256" r:id="R81401f3c8ce74040"/>
+    <p:sldId xmlns:r="http://schemas.openxmlformats.org/officeDocument/2006/relationships" id="257" r:id="R67e4a37d03f1402e"/>
+    <p:sldId xmlns:r="http://schemas.openxmlformats.org/officeDocument/2006/relationships" id="258" r:id="Rff02ef87c1f9455f"/>
+    <p:sldId xmlns:r="http://schemas.openxmlformats.org/officeDocument/2006/relationships" id="259" r:id="R7e0d9cf3c0ac400b"/>
+    <p:sldId xmlns:r="http://schemas.openxmlformats.org/officeDocument/2006/relationships" id="260" r:id="R3f51729c492742e7"/>
+    <p:sldId xmlns:r="http://schemas.openxmlformats.org/officeDocument/2006/relationships" id="261" r:id="R512a64c428724e54"/>
+    <p:sldId xmlns:r="http://schemas.openxmlformats.org/officeDocument/2006/relationships" id="262" r:id="R43415116cf5840f1"/>
+    <p:sldId xmlns:r="http://schemas.openxmlformats.org/officeDocument/2006/relationships" id="263" r:id="R28b1707359d1449c"/>
+    <p:sldId xmlns:r="http://schemas.openxmlformats.org/officeDocument/2006/relationships" id="264" r:id="R02b41299ca82482c"/>
+    <p:sldId xmlns:r="http://schemas.openxmlformats.org/officeDocument/2006/relationships" id="265" r:id="Rf3f59f476aaf4d3e"/>
+    <p:sldId xmlns:r="http://schemas.openxmlformats.org/officeDocument/2006/relationships" id="266" r:id="R292dd0b410bf4dad"/>
+    <p:sldId xmlns:r="http://schemas.openxmlformats.org/officeDocument/2006/relationships" id="267" r:id="R669ae9b29abe4a41"/>
+    <p:sldId xmlns:r="http://schemas.openxmlformats.org/officeDocument/2006/relationships" id="268" r:id="R54adcc4dd8e24fc5"/>
   </p:sldIdLst>
   <p:sldSz cx="12192000" cy="6858000"/>
   <p:notesSz cx="6858000" cy="9144000"/>
@@ -542,7 +544,7 @@
           <a:lstStyle xmlns:a="http://schemas.openxmlformats.org/drawingml/2006/main"/>
           <a:p xmlns:a="http://schemas.openxmlformats.org/drawingml/2006/main">
             <a:r>
-              <a:t>Judges should trust the demo because it labels exactly what is production-like, testnet, sandbox, and controlled.</a:t>
+              <a:t>Rain provides the bridge to existing merchants and the treasury surface needed for stablecoin movement. The demo includes scoped-card lifecycle plus payment-account and route operations, on-ramp, and off-ramp simulations.</a:t>
             </a:r>
           </a:p>
           <a:p xmlns:a="http://schemas.openxmlformats.org/drawingml/2006/main">
@@ -557,17 +559,12 @@
           </a:p>
           <a:p xmlns:a="http://schemas.openxmlformats.org/drawingml/2006/main">
             <a:r>
-              <a:t>- Production verification on August 9, 2026</a:t>
-            </a:r>
-          </a:p>
-          <a:p xmlns:a="http://schemas.openxmlformats.org/drawingml/2006/main">
-            <a:r>
-              <a:t>- Repository README.md</a:t>
-            </a:r>
-          </a:p>
-          <a:p xmlns:a="http://schemas.openxmlformats.org/drawingml/2006/main">
-            <a:r>
-              <a:t>- https://preflight.saibolla.com/openapi.json</a:t>
+              <a:t>- Repository src/lib/rain.ts</a:t>
+            </a:r>
+          </a:p>
+          <a:p xmlns:a="http://schemas.openxmlformats.org/drawingml/2006/main">
+            <a:r>
+              <a:t>- Rain sandbox documentation supplied for the hackathon</a:t>
             </a:r>
           </a:p>
         </p:txBody>
@@ -637,7 +634,187 @@
           <a:lstStyle xmlns:a="http://schemas.openxmlformats.org/drawingml/2006/main"/>
           <a:p xmlns:a="http://schemas.openxmlformats.org/drawingml/2006/main">
             <a:r>
-              <a:t>Close by connecting the product to the judging criteria, then repeat the memorable product definition.</a:t>
+              <a:t>The receipt ties commercial agreement, authorization, settlement, and delivery to the same mandate. This is the audit layer businesses need before agents can transact autonomously.</a:t>
+            </a:r>
+          </a:p>
+          <a:p xmlns:a="http://schemas.openxmlformats.org/drawingml/2006/main">
+            <a:r>
+              <a:t/>
+            </a:r>
+          </a:p>
+          <a:p xmlns:a="http://schemas.openxmlformats.org/drawingml/2006/main">
+            <a:r>
+              <a:t>[Sources]</a:t>
+            </a:r>
+          </a:p>
+          <a:p xmlns:a="http://schemas.openxmlformats.org/drawingml/2006/main">
+            <a:r>
+              <a:t>- Repository src/app/api/purchases/run/route.ts</a:t>
+            </a:r>
+          </a:p>
+          <a:p xmlns:a="http://schemas.openxmlformats.org/drawingml/2006/main">
+            <a:r>
+              <a:t>- Repository src/components/commerce-doc-components.tsx</a:t>
+            </a:r>
+          </a:p>
+        </p:txBody>
+      </p:sp>
+      <p:sp>
+        <p:nvSpPr>
+          <p:cNvPr id="4" name="Slide Number Placeholder 3"/>
+          <p:cNvSpPr>
+            <a:spLocks xmlns:a="http://schemas.openxmlformats.org/drawingml/2006/main" noGrp="1"/>
+          </p:cNvSpPr>
+          <p:nvPr>
+            <p:ph type="sldNum" idx="5"/>
+          </p:nvPr>
+        </p:nvSpPr>
+        <p:spPr/>
+        <p:txBody>
+          <a:bodyPr xmlns:a="http://schemas.openxmlformats.org/drawingml/2006/main"/>
+          <a:lstStyle xmlns:a="http://schemas.openxmlformats.org/drawingml/2006/main"/>
+          <a:p xmlns:a="http://schemas.openxmlformats.org/drawingml/2006/main"/>
+        </p:txBody>
+      </p:sp>
+    </p:spTree>
+  </p:cSld>
+  <p:clrMapOvr>
+    <a:masterClrMapping xmlns:a="http://schemas.openxmlformats.org/drawingml/2006/main"/>
+  </p:clrMapOvr>
+</p:notes>
+</file>
+
+<file path=ppt/notesSlides/notesSlide12.xml><?xml version="1.0" encoding="utf-8"?>
+<p:notes xmlns:p="http://schemas.openxmlformats.org/presentationml/2006/main">
+  <p:cSld>
+    <p:spTree>
+      <p:nvGrpSpPr>
+        <p:cNvPr id="1" name=""/>
+        <p:cNvGrpSpPr/>
+        <p:nvPr/>
+      </p:nvGrpSpPr>
+      <p:grpSpPr>
+        <a:xfrm xmlns:a="http://schemas.openxmlformats.org/drawingml/2006/main"/>
+      </p:grpSpPr>
+      <p:sp>
+        <p:nvSpPr>
+          <p:cNvPr id="2" name="Slide Image Placeholder 1"/>
+          <p:cNvSpPr>
+            <a:spLocks xmlns:a="http://schemas.openxmlformats.org/drawingml/2006/main" noGrp="1"/>
+          </p:cNvSpPr>
+          <p:nvPr>
+            <p:ph type="sldImg" idx="0"/>
+          </p:nvPr>
+        </p:nvSpPr>
+        <p:spPr/>
+      </p:sp>
+      <p:sp>
+        <p:nvSpPr>
+          <p:cNvPr id="3" name="Notes Placeholder 2"/>
+          <p:cNvSpPr>
+            <a:spLocks xmlns:a="http://schemas.openxmlformats.org/drawingml/2006/main" noGrp="1"/>
+          </p:cNvSpPr>
+          <p:nvPr>
+            <p:ph type="body" idx="1"/>
+          </p:nvPr>
+        </p:nvSpPr>
+        <p:spPr/>
+        <p:txBody>
+          <a:bodyPr xmlns:a="http://schemas.openxmlformats.org/drawingml/2006/main"/>
+          <a:lstStyle xmlns:a="http://schemas.openxmlformats.org/drawingml/2006/main"/>
+          <a:p xmlns:a="http://schemas.openxmlformats.org/drawingml/2006/main">
+            <a:r>
+              <a:t>Walk across the full system: seller setup, buyer negotiation, deterministic controls, AP2, payment routing, delivery, evidence provenance, and treasury experiments.</a:t>
+            </a:r>
+          </a:p>
+          <a:p xmlns:a="http://schemas.openxmlformats.org/drawingml/2006/main">
+            <a:r>
+              <a:t/>
+            </a:r>
+          </a:p>
+          <a:p xmlns:a="http://schemas.openxmlformats.org/drawingml/2006/main">
+            <a:r>
+              <a:t>[Sources]</a:t>
+            </a:r>
+          </a:p>
+          <a:p xmlns:a="http://schemas.openxmlformats.org/drawingml/2006/main">
+            <a:r>
+              <a:t>- Repository docs/architecture.svg</a:t>
+            </a:r>
+          </a:p>
+          <a:p xmlns:a="http://schemas.openxmlformats.org/drawingml/2006/main">
+            <a:r>
+              <a:t>- Repository docs/architecture.excalidraw</a:t>
+            </a:r>
+          </a:p>
+        </p:txBody>
+      </p:sp>
+      <p:sp>
+        <p:nvSpPr>
+          <p:cNvPr id="4" name="Slide Number Placeholder 3"/>
+          <p:cNvSpPr>
+            <a:spLocks xmlns:a="http://schemas.openxmlformats.org/drawingml/2006/main" noGrp="1"/>
+          </p:cNvSpPr>
+          <p:nvPr>
+            <p:ph type="sldNum" idx="5"/>
+          </p:nvPr>
+        </p:nvSpPr>
+        <p:spPr/>
+        <p:txBody>
+          <a:bodyPr xmlns:a="http://schemas.openxmlformats.org/drawingml/2006/main"/>
+          <a:lstStyle xmlns:a="http://schemas.openxmlformats.org/drawingml/2006/main"/>
+          <a:p xmlns:a="http://schemas.openxmlformats.org/drawingml/2006/main"/>
+        </p:txBody>
+      </p:sp>
+    </p:spTree>
+  </p:cSld>
+  <p:clrMapOvr>
+    <a:masterClrMapping xmlns:a="http://schemas.openxmlformats.org/drawingml/2006/main"/>
+  </p:clrMapOvr>
+</p:notes>
+</file>
+
+<file path=ppt/notesSlides/notesSlide13.xml><?xml version="1.0" encoding="utf-8"?>
+<p:notes xmlns:p="http://schemas.openxmlformats.org/presentationml/2006/main">
+  <p:cSld>
+    <p:spTree>
+      <p:nvGrpSpPr>
+        <p:cNvPr id="1" name=""/>
+        <p:cNvGrpSpPr/>
+        <p:nvPr/>
+      </p:nvGrpSpPr>
+      <p:grpSpPr>
+        <a:xfrm xmlns:a="http://schemas.openxmlformats.org/drawingml/2006/main"/>
+      </p:grpSpPr>
+      <p:sp>
+        <p:nvSpPr>
+          <p:cNvPr id="2" name="Slide Image Placeholder 1"/>
+          <p:cNvSpPr>
+            <a:spLocks xmlns:a="http://schemas.openxmlformats.org/drawingml/2006/main" noGrp="1"/>
+          </p:cNvSpPr>
+          <p:nvPr>
+            <p:ph type="sldImg" idx="0"/>
+          </p:nvPr>
+        </p:nvSpPr>
+        <p:spPr/>
+      </p:sp>
+      <p:sp>
+        <p:nvSpPr>
+          <p:cNvPr id="3" name="Notes Placeholder 2"/>
+          <p:cNvSpPr>
+            <a:spLocks xmlns:a="http://schemas.openxmlformats.org/drawingml/2006/main" noGrp="1"/>
+          </p:cNvSpPr>
+          <p:nvPr>
+            <p:ph type="body" idx="1"/>
+          </p:nvPr>
+        </p:nvSpPr>
+        <p:spPr/>
+        <p:txBody>
+          <a:bodyPr xmlns:a="http://schemas.openxmlformats.org/drawingml/2006/main"/>
+          <a:lstStyle xmlns:a="http://schemas.openxmlformats.org/drawingml/2006/main"/>
+          <a:p xmlns:a="http://schemas.openxmlformats.org/drawingml/2006/main">
+            <a:r>
+              <a:t>Close on adoption, not protocol novelty. Raingentic makes Rain and Monad usable by existing businesses without rebuilding their operations.</a:t>
             </a:r>
           </a:p>
           <a:p xmlns:a="http://schemas.openxmlformats.org/drawingml/2006/main">
@@ -822,7 +999,7 @@
           <a:lstStyle xmlns:a="http://schemas.openxmlformats.org/drawingml/2006/main"/>
           <a:p xmlns:a="http://schemas.openxmlformats.org/drawingml/2006/main">
             <a:r>
-              <a:t>Explain the two-sided platform. A business configures the same policy and payment layer for what it buys and what it sells.</a:t>
+              <a:t>This is the product claim: businesses connect what they already have and become agent-commerce ready in hours. The included skill makes implementation agent-led instead of documentation-led.</a:t>
             </a:r>
           </a:p>
           <a:p xmlns:a="http://schemas.openxmlformats.org/drawingml/2006/main">
@@ -837,12 +1014,17 @@
           </a:p>
           <a:p xmlns:a="http://schemas.openxmlformats.org/drawingml/2006/main">
             <a:r>
-              <a:t>- https://raingentic.saibolla.com/dashboard</a:t>
-            </a:r>
-          </a:p>
-          <a:p xmlns:a="http://schemas.openxmlformats.org/drawingml/2006/main">
-            <a:r>
-              <a:t>- Repository src/components/commerce-dashboard.tsx</a:t>
+              <a:t>- Repository skills/</a:t>
+            </a:r>
+          </a:p>
+          <a:p xmlns:a="http://schemas.openxmlformats.org/drawingml/2006/main">
+            <a:r>
+              <a:t>- Repository src/lib/setup-agent.ts</a:t>
+            </a:r>
+          </a:p>
+          <a:p xmlns:a="http://schemas.openxmlformats.org/drawingml/2006/main">
+            <a:r>
+              <a:t>- https://raingentic.saibolla.com</a:t>
             </a:r>
           </a:p>
         </p:txBody>
@@ -912,7 +1094,7 @@
           <a:lstStyle xmlns:a="http://schemas.openxmlformats.org/drawingml/2006/main"/>
           <a:p xmlns:a="http://schemas.openxmlformats.org/drawingml/2006/main">
             <a:r>
-              <a:t>Walk left to right: existing business inputs, agent control plane, exact AP2 permission, Monad or Rain execution, then delivery verification. Call out the live evidence layer at the bottom.</a:t>
+              <a:t>Raingentic is not a new storefront. The same company configuration governs purchasing agents and seller agents around the systems the business already operates.</a:t>
             </a:r>
           </a:p>
           <a:p xmlns:a="http://schemas.openxmlformats.org/drawingml/2006/main">
@@ -927,12 +1109,12 @@
           </a:p>
           <a:p xmlns:a="http://schemas.openxmlformats.org/drawingml/2006/main">
             <a:r>
-              <a:t>- Repository docs/architecture.svg</a:t>
-            </a:r>
-          </a:p>
-          <a:p xmlns:a="http://schemas.openxmlformats.org/drawingml/2006/main">
-            <a:r>
-              <a:t>- Repository docs/architecture.excalidraw</a:t>
+              <a:t>- https://raingentic.saibolla.com/dashboard</a:t>
+            </a:r>
+          </a:p>
+          <a:p xmlns:a="http://schemas.openxmlformats.org/drawingml/2006/main">
+            <a:r>
+              <a:t>- Repository src/components/commerce-dashboard.tsx</a:t>
             </a:r>
           </a:p>
         </p:txBody>
@@ -1092,7 +1274,7 @@
           <a:lstStyle xmlns:a="http://schemas.openxmlformats.org/drawingml/2006/main"/>
           <a:p xmlns:a="http://schemas.openxmlformats.org/drawingml/2006/main">
             <a:r>
-              <a:t>This is the core safety moment. A2A reached agreement, but the deterministic threshold pauses execution and clearly states that no money has moved.</a:t>
+              <a:t>The buying interface is conversational, but the result is a structured mandate enforced by normal application code.</a:t>
             </a:r>
           </a:p>
           <a:p xmlns:a="http://schemas.openxmlformats.org/drawingml/2006/main">
@@ -1107,7 +1289,7 @@
           </a:p>
           <a:p xmlns:a="http://schemas.openxmlformats.org/drawingml/2006/main">
             <a:r>
-              <a:t>- https://raingentic.saibolla.com/dashboard</a:t>
+              <a:t>- Repository src/lib/agent.ts</a:t>
             </a:r>
           </a:p>
           <a:p xmlns:a="http://schemas.openxmlformats.org/drawingml/2006/main">
@@ -1182,7 +1364,7 @@
           <a:lstStyle xmlns:a="http://schemas.openxmlformats.org/drawingml/2006/main"/>
           <a:p xmlns:a="http://schemas.openxmlformats.org/drawingml/2006/main">
             <a:r>
-              <a:t>A2A handles communication. AP2 handles authorization. Deterministic policy and human approval sit between them.</a:t>
+              <a:t>A2A is the commercial conversation layer. The demo publishes an official v1.0 Agent Card and performs discovery, requests, counteroffers, and agreement through JSON-RPC and streaming events.</a:t>
             </a:r>
           </a:p>
           <a:p xmlns:a="http://schemas.openxmlformats.org/drawingml/2006/main">
@@ -1202,17 +1384,7 @@
           </a:p>
           <a:p xmlns:a="http://schemas.openxmlformats.org/drawingml/2006/main">
             <a:r>
-              <a:t>- https://github.com/google-agentic-commerce/AP2</a:t>
-            </a:r>
-          </a:p>
-          <a:p xmlns:a="http://schemas.openxmlformats.org/drawingml/2006/main">
-            <a:r>
               <a:t>- Repository src/lib/a2a.ts</a:t>
-            </a:r>
-          </a:p>
-          <a:p xmlns:a="http://schemas.openxmlformats.org/drawingml/2006/main">
-            <a:r>
-              <a:t>- Repository src/lib/ap2.ts</a:t>
             </a:r>
           </a:p>
         </p:txBody>
@@ -1282,7 +1454,7 @@
           <a:lstStyle xmlns:a="http://schemas.openxmlformats.org/drawingml/2006/main"/>
           <a:p xmlns:a="http://schemas.openxmlformats.org/drawingml/2006/main">
             <a:r>
-              <a:t>Monad is necessary for the machine-readable sale. The escrow extends the same authorization model to high-value terms.</a:t>
+              <a:t>Policy and approval decide whether the agreement is acceptable. Google's official AP2 SDK then signs the exact permitted payment. Tampered amounts, wrong recipients, products, or expirations fail.</a:t>
             </a:r>
           </a:p>
           <a:p xmlns:a="http://schemas.openxmlformats.org/drawingml/2006/main">
@@ -1297,17 +1469,17 @@
           </a:p>
           <a:p xmlns:a="http://schemas.openxmlformats.org/drawingml/2006/main">
             <a:r>
-              <a:t>- Repository src/lib/monad.ts</a:t>
-            </a:r>
-          </a:p>
-          <a:p xmlns:a="http://schemas.openxmlformats.org/drawingml/2006/main">
-            <a:r>
-              <a:t>- Repository contracts/RaingenticCommerceEscrow.sol</a:t>
-            </a:r>
-          </a:p>
-          <a:p xmlns:a="http://schemas.openxmlformats.org/drawingml/2006/main">
-            <a:r>
-              <a:t>- https://monadvision.com/address/0x2403498812e217ab86dd0e937e60fe09bfe73fb1</a:t>
+              <a:t>- https://github.com/google-agentic-commerce/AP2</a:t>
+            </a:r>
+          </a:p>
+          <a:p xmlns:a="http://schemas.openxmlformats.org/drawingml/2006/main">
+            <a:r>
+              <a:t>- Repository src/lib/ap2.ts</a:t>
+            </a:r>
+          </a:p>
+          <a:p xmlns:a="http://schemas.openxmlformats.org/drawingml/2006/main">
+            <a:r>
+              <a:t>- Repository src/app/api/purchases/run/route.ts</a:t>
             </a:r>
           </a:p>
         </p:txBody>
@@ -1377,7 +1549,7 @@
           <a:lstStyle xmlns:a="http://schemas.openxmlformats.org/drawingml/2006/main"/>
           <a:p xmlns:a="http://schemas.openxmlformats.org/drawingml/2006/main">
             <a:r>
-              <a:t>Rain bridges agents to the traditional merchant world. Emphasize the decline demonstration and the second AP2 check before card creation.</a:t>
+              <a:t>The business does not choose one rail forever. Product type and company policy route each authorized purchase to Monad x402, Rain, escrow, or the checkout already in place.</a:t>
             </a:r>
           </a:p>
           <a:p xmlns:a="http://schemas.openxmlformats.org/drawingml/2006/main">
@@ -1392,17 +1564,17 @@
           </a:p>
           <a:p xmlns:a="http://schemas.openxmlformats.org/drawingml/2006/main">
             <a:r>
+              <a:t>- Repository src/lib/monad.ts</a:t>
+            </a:r>
+          </a:p>
+          <a:p xmlns:a="http://schemas.openxmlformats.org/drawingml/2006/main">
+            <a:r>
               <a:t>- Repository src/lib/rain.ts</a:t>
             </a:r>
           </a:p>
           <a:p xmlns:a="http://schemas.openxmlformats.org/drawingml/2006/main">
             <a:r>
-              <a:t>- Repository src/app/api/purchases/run/route.ts</a:t>
-            </a:r>
-          </a:p>
-          <a:p xmlns:a="http://schemas.openxmlformats.org/drawingml/2006/main">
-            <a:r>
-              <a:t>- Rain sandbox documentation supplied for the hackathon</a:t>
+              <a:t>- Repository contracts/RaingenticCommerceEscrow.sol</a:t>
             </a:r>
           </a:p>
         </p:txBody>
@@ -1470,7 +1642,7 @@
   </p:cSld>
   <p:clrMap bg1="lt1" tx1="dk1" bg2="lt2" tx2="dk2" accent1="accent1" accent2="accent2" accent3="accent3" accent4="accent4" accent5="accent5" accent6="accent6" hlink="hlink" folHlink="folHlink"/>
   <p:sldLayoutIdLst>
-    <p:sldLayoutId xmlns:r="http://schemas.openxmlformats.org/officeDocument/2006/relationships" id="2147483649" r:id="R65e8ed092d6b4dbe"/>
+    <p:sldLayoutId xmlns:r="http://schemas.openxmlformats.org/officeDocument/2006/relationships" id="2147483649" r:id="R3eb24d607793443b"/>
   </p:sldLayoutIdLst>
   <p:txStyles>
     <p:titleStyle>
@@ -2025,7 +2197,7 @@
           <p:nvPr/>
         </p:nvPicPr>
         <p:blipFill>
-          <a:blip xmlns:r="http://schemas.openxmlformats.org/officeDocument/2006/relationships" xmlns:a="http://schemas.openxmlformats.org/drawingml/2006/main" r:embed="R35bf11515cde4558"/>
+          <a:blip xmlns:r="http://schemas.openxmlformats.org/officeDocument/2006/relationships" xmlns:a="http://schemas.openxmlformats.org/drawingml/2006/main" r:embed="R692f1e8d7c274ad9"/>
           <a:srcRect xmlns:a="http://schemas.openxmlformats.org/drawingml/2006/main" l="25602" t="0" r="25602" b="0"/>
           <a:stretch xmlns:a="http://schemas.openxmlformats.org/drawingml/2006/main">
             <a:fillRect l="0" t="0" r="0" b="0"/>
@@ -2046,7 +2218,7 @@
           <p:cNvPr id="2" name="">
             <a:extLst xmlns:a="http://schemas.openxmlformats.org/drawingml/2006/main">
               <a:ext uri="{FF2B5EF4-FFF2-40B4-BE49-F238E27FC236}">
-                <a16:creationId xmlns:a16="http://schemas.microsoft.com/office/drawing/2014/main" id="{F7837E95-C01C-438F-96A5-3B5F14CA2FE7}"/>
+                <a16:creationId xmlns:a16="http://schemas.microsoft.com/office/drawing/2014/main" id="{760269B4-C9B1-4299-BBC5-E6C3067B2F94}"/>
               </a:ext>
             </a:extLst>
           </p:cNvPr>
@@ -2081,7 +2253,7 @@
           <p:cNvPr id="3" name="">
             <a:extLst xmlns:a="http://schemas.openxmlformats.org/drawingml/2006/main">
               <a:ext uri="{FF2B5EF4-FFF2-40B4-BE49-F238E27FC236}">
-                <a16:creationId xmlns:a16="http://schemas.microsoft.com/office/drawing/2014/main" id="{7C29FFE3-2EC1-46A2-9D6A-12DCE45C5D24}"/>
+                <a16:creationId xmlns:a16="http://schemas.microsoft.com/office/drawing/2014/main" id="{9C5BE4C0-79DC-4D3D-AFD1-AC0D1F43A11F}"/>
               </a:ext>
             </a:extLst>
           </p:cNvPr>
@@ -2114,7 +2286,7 @@
           <p:cNvPr id="4" name="">
             <a:extLst xmlns:a="http://schemas.openxmlformats.org/drawingml/2006/main">
               <a:ext uri="{FF2B5EF4-FFF2-40B4-BE49-F238E27FC236}">
-                <a16:creationId xmlns:a16="http://schemas.microsoft.com/office/drawing/2014/main" id="{8A75477D-0B4C-4449-A37E-B82CF3C3D9EA}"/>
+                <a16:creationId xmlns:a16="http://schemas.microsoft.com/office/drawing/2014/main" id="{4AEC29DB-D1D4-4D56-886A-DCAE8466A7A6}"/>
               </a:ext>
             </a:extLst>
           </p:cNvPr>
@@ -2164,7 +2336,7 @@
           <p:cNvPr id="5" name="">
             <a:extLst xmlns:a="http://schemas.openxmlformats.org/drawingml/2006/main">
               <a:ext uri="{FF2B5EF4-FFF2-40B4-BE49-F238E27FC236}">
-                <a16:creationId xmlns:a16="http://schemas.microsoft.com/office/drawing/2014/main" id="{A353BE56-2582-4DE5-8813-A882D796D759}"/>
+                <a16:creationId xmlns:a16="http://schemas.microsoft.com/office/drawing/2014/main" id="{5497303F-D3DB-4AE5-AEFC-F9FED08DCEDA}"/>
               </a:ext>
             </a:extLst>
           </p:cNvPr>
@@ -2176,35 +2348,35 @@
         <p:spPr>
           <a:xfrm xmlns:a="http://schemas.openxmlformats.org/drawingml/2006/main">
             <a:off x="609600" y="2076450"/>
-            <a:ext cx="4762500" cy="1047750"/>
-          </a:xfrm>
-          <a:prstGeom xmlns:a="http://schemas.openxmlformats.org/drawingml/2006/main" prst="rect">
-            <a:avLst/>
-          </a:prstGeom>
-          <a:noFill xmlns:a="http://schemas.openxmlformats.org/drawingml/2006/main"/>
-          <a:ln xmlns:a="http://schemas.openxmlformats.org/drawingml/2006/main" w="0">
-            <a:noFill/>
-            <a:prstDash val="solid"/>
-          </a:ln>
-        </p:spPr>
-        <p:txBody>
-          <a:bodyPr xmlns:a="http://schemas.openxmlformats.org/drawingml/2006/main"/>
-          <a:lstStyle xmlns:a="http://schemas.openxmlformats.org/drawingml/2006/main"/>
-          <a:p xmlns:a="http://schemas.openxmlformats.org/drawingml/2006/main">
-            <a:pPr algn="l">
-              <a:defRPr sz="2250" b="1">
+            <a:ext cx="4857750" cy="1143000"/>
+          </a:xfrm>
+          <a:prstGeom xmlns:a="http://schemas.openxmlformats.org/drawingml/2006/main" prst="rect">
+            <a:avLst/>
+          </a:prstGeom>
+          <a:noFill xmlns:a="http://schemas.openxmlformats.org/drawingml/2006/main"/>
+          <a:ln xmlns:a="http://schemas.openxmlformats.org/drawingml/2006/main" w="0">
+            <a:noFill/>
+            <a:prstDash val="solid"/>
+          </a:ln>
+        </p:spPr>
+        <p:txBody>
+          <a:bodyPr xmlns:a="http://schemas.openxmlformats.org/drawingml/2006/main"/>
+          <a:lstStyle xmlns:a="http://schemas.openxmlformats.org/drawingml/2006/main"/>
+          <a:p xmlns:a="http://schemas.openxmlformats.org/drawingml/2006/main">
+            <a:pPr algn="l">
+              <a:defRPr sz="2175" b="1">
                 <a:solidFill>
                   <a:srgbClr val="F5F7F6"/>
                 </a:solidFill>
               </a:defRPr>
             </a:pPr>
             <a:r>
-              <a:rPr sz="2250" b="1">
+              <a:rPr sz="2175" b="1">
                 <a:solidFill>
                   <a:srgbClr val="F5F7F6"/>
                 </a:solidFill>
               </a:rPr>
-              <a:t>The business control plane for agent commerce</a:t>
+              <a:t>Make your existing business agent-commerce ready in hours</a:t>
             </a:r>
           </a:p>
         </p:txBody>
@@ -2214,7 +2386,7 @@
           <p:cNvPr id="6" name="">
             <a:extLst xmlns:a="http://schemas.openxmlformats.org/drawingml/2006/main">
               <a:ext uri="{FF2B5EF4-FFF2-40B4-BE49-F238E27FC236}">
-                <a16:creationId xmlns:a16="http://schemas.microsoft.com/office/drawing/2014/main" id="{59AA60F9-C86E-49A6-B6D8-AC80A7BFC2CE}"/>
+                <a16:creationId xmlns:a16="http://schemas.microsoft.com/office/drawing/2014/main" id="{CA4DE83D-2273-4F05-965E-DF6A8AF288AF}"/>
               </a:ext>
             </a:extLst>
           </p:cNvPr>
@@ -2226,35 +2398,35 @@
         <p:spPr>
           <a:xfrm xmlns:a="http://schemas.openxmlformats.org/drawingml/2006/main">
             <a:off x="609600" y="3333750"/>
-            <a:ext cx="4762500" cy="876300"/>
-          </a:xfrm>
-          <a:prstGeom xmlns:a="http://schemas.openxmlformats.org/drawingml/2006/main" prst="rect">
-            <a:avLst/>
-          </a:prstGeom>
-          <a:noFill xmlns:a="http://schemas.openxmlformats.org/drawingml/2006/main"/>
-          <a:ln xmlns:a="http://schemas.openxmlformats.org/drawingml/2006/main" w="0">
-            <a:noFill/>
-            <a:prstDash val="solid"/>
-          </a:ln>
-        </p:spPr>
-        <p:txBody>
-          <a:bodyPr xmlns:a="http://schemas.openxmlformats.org/drawingml/2006/main"/>
-          <a:lstStyle xmlns:a="http://schemas.openxmlformats.org/drawingml/2006/main"/>
-          <a:p xmlns:a="http://schemas.openxmlformats.org/drawingml/2006/main">
-            <a:pPr algn="l">
-              <a:defRPr sz="1425" b="0">
-                <a:solidFill>
-                  <a:srgbClr val="98A19F"/>
-                </a:solidFill>
-              </a:defRPr>
-            </a:pPr>
-            <a:r>
-              <a:rPr sz="1425" b="0">
-                <a:solidFill>
-                  <a:srgbClr val="98A19F"/>
-                </a:solidFill>
-              </a:rPr>
-              <a:t>A2A negotiation. AP2 authorization. Monad settlement. Rain-controlled procurement.</a:t>
+            <a:ext cx="4762500" cy="1219200"/>
+          </a:xfrm>
+          <a:prstGeom xmlns:a="http://schemas.openxmlformats.org/drawingml/2006/main" prst="rect">
+            <a:avLst/>
+          </a:prstGeom>
+          <a:noFill xmlns:a="http://schemas.openxmlformats.org/drawingml/2006/main"/>
+          <a:ln xmlns:a="http://schemas.openxmlformats.org/drawingml/2006/main" w="0">
+            <a:noFill/>
+            <a:prstDash val="solid"/>
+          </a:ln>
+        </p:spPr>
+        <p:txBody>
+          <a:bodyPr xmlns:a="http://schemas.openxmlformats.org/drawingml/2006/main"/>
+          <a:lstStyle xmlns:a="http://schemas.openxmlformats.org/drawingml/2006/main"/>
+          <a:p xmlns:a="http://schemas.openxmlformats.org/drawingml/2006/main">
+            <a:pPr algn="l">
+              <a:defRPr sz="1350" b="0">
+                <a:solidFill>
+                  <a:srgbClr val="98A19F"/>
+                </a:solidFill>
+              </a:defRPr>
+            </a:pPr>
+            <a:r>
+              <a:rPr sz="1350" b="0">
+                <a:solidFill>
+                  <a:srgbClr val="98A19F"/>
+                </a:solidFill>
+              </a:rPr>
+              <a:t>Connect an API or online store. Raingentic configures the products, policies, agent skills, and payment rails needed to buy and sell through agents.</a:t>
             </a:r>
           </a:p>
         </p:txBody>
@@ -2264,7 +2436,7 @@
           <p:cNvPr id="7" name="">
             <a:extLst xmlns:a="http://schemas.openxmlformats.org/drawingml/2006/main">
               <a:ext uri="{FF2B5EF4-FFF2-40B4-BE49-F238E27FC236}">
-                <a16:creationId xmlns:a16="http://schemas.microsoft.com/office/drawing/2014/main" id="{1F00298F-ED57-4CF8-AC44-E830CC5B0835}"/>
+                <a16:creationId xmlns:a16="http://schemas.microsoft.com/office/drawing/2014/main" id="{E76F31F9-4255-4E7C-B7BA-093F50CCAF34}"/>
               </a:ext>
             </a:extLst>
           </p:cNvPr>
@@ -2312,7 +2484,7 @@
     </p:spTree>
     <p:extLst>
       <p:ext uri="{BB962C8B-B14F-4D97-AF65-F5344CB8AC3E}">
-        <p14:creationId xmlns:p14="http://schemas.microsoft.com/office/powerpoint/2010/main" val="2128443618"/>
+        <p14:creationId xmlns:p14="http://schemas.microsoft.com/office/powerpoint/2010/main" val="129440770"/>
       </p:ext>
     </p:extLst>
   </p:cSld>
@@ -2340,10 +2512,10 @@
       </p:grpSpPr>
       <p:sp>
         <p:nvSpPr>
-          <p:cNvPr id="17" name="">
-            <a:extLst xmlns:a="http://schemas.openxmlformats.org/drawingml/2006/main">
-              <a:ext uri="{FF2B5EF4-FFF2-40B4-BE49-F238E27FC236}">
-                <a16:creationId xmlns:a16="http://schemas.microsoft.com/office/drawing/2014/main" id="{BB7076FE-056E-4290-8095-119410CA4E1D}"/>
+          <p:cNvPr id="11" name="">
+            <a:extLst xmlns:a="http://schemas.openxmlformats.org/drawingml/2006/main">
+              <a:ext uri="{FF2B5EF4-FFF2-40B4-BE49-F238E27FC236}">
+                <a16:creationId xmlns:a16="http://schemas.microsoft.com/office/drawing/2014/main" id="{B06E968E-0AE8-42CA-9D7A-A2BD5702D567}"/>
               </a:ext>
             </a:extLst>
           </p:cNvPr>
@@ -2383,7 +2555,7 @@
                   <a:srgbClr val="F2ED55"/>
                 </a:solidFill>
               </a:rPr>
-              <a:t>EVIDENCE</a:t>
+              <a:t>RAIN</a:t>
             </a:r>
           </a:p>
         </p:txBody>
@@ -2393,7 +2565,7 @@
           <p:cNvPr id="2" name="">
             <a:extLst xmlns:a="http://schemas.openxmlformats.org/drawingml/2006/main">
               <a:ext uri="{FF2B5EF4-FFF2-40B4-BE49-F238E27FC236}">
-                <a16:creationId xmlns:a16="http://schemas.microsoft.com/office/drawing/2014/main" id="{7BB7D3D1-8D06-4C6C-BAEC-1B32E96FA12A}"/>
+                <a16:creationId xmlns:a16="http://schemas.microsoft.com/office/drawing/2014/main" id="{1B057ECA-DDAB-48D1-B60C-DA51119BE5F0}"/>
               </a:ext>
             </a:extLst>
           </p:cNvPr>
@@ -2433,7 +2605,7 @@
                   <a:srgbClr val="F5F7F6"/>
                 </a:solidFill>
               </a:rPr>
-              <a:t>The technical proof is working, and its boundaries are explicit.</a:t>
+              <a:t>Rain connects agent commerce to cards and treasury operations.</a:t>
             </a:r>
           </a:p>
         </p:txBody>
@@ -2443,7 +2615,7 @@
           <p:cNvPr id="3" name="">
             <a:extLst xmlns:a="http://schemas.openxmlformats.org/drawingml/2006/main">
               <a:ext uri="{FF2B5EF4-FFF2-40B4-BE49-F238E27FC236}">
-                <a16:creationId xmlns:a16="http://schemas.microsoft.com/office/drawing/2014/main" id="{FD86AF03-C7E7-4CAD-89F3-74B9D405EE9A}"/>
+                <a16:creationId xmlns:a16="http://schemas.microsoft.com/office/drawing/2014/main" id="{3047D1EE-6FB1-48CE-9F6F-54AB4373A938}"/>
               </a:ext>
             </a:extLst>
           </p:cNvPr>
@@ -2476,7 +2648,7 @@
           <p:cNvPr id="4" name="">
             <a:extLst xmlns:a="http://schemas.openxmlformats.org/drawingml/2006/main">
               <a:ext uri="{FF2B5EF4-FFF2-40B4-BE49-F238E27FC236}">
-                <a16:creationId xmlns:a16="http://schemas.microsoft.com/office/drawing/2014/main" id="{23913D20-A58D-4F6B-80B8-FBBD65B48DC4}"/>
+                <a16:creationId xmlns:a16="http://schemas.microsoft.com/office/drawing/2014/main" id="{40E824EA-CD5F-4FAC-8587-7368777A9E2C}"/>
               </a:ext>
             </a:extLst>
           </p:cNvPr>
@@ -2521,220 +2693,106 @@
           </a:p>
         </p:txBody>
       </p:sp>
-      <p:sp>
-        <p:nvSpPr>
-          <p:cNvPr id="5" name="">
-            <a:extLst xmlns:a="http://schemas.openxmlformats.org/drawingml/2006/main">
-              <a:ext uri="{FF2B5EF4-FFF2-40B4-BE49-F238E27FC236}">
-                <a16:creationId xmlns:a16="http://schemas.microsoft.com/office/drawing/2014/main" id="{1C40728E-950B-46A9-BE5C-891D57AAF73A}"/>
-              </a:ext>
-            </a:extLst>
-          </p:cNvPr>
-          <p:cNvSpPr>
-            <a:spLocks xmlns:a="http://schemas.openxmlformats.org/drawingml/2006/main" noGrp="1"/>
-          </p:cNvSpPr>
-          <p:nvPr/>
-        </p:nvSpPr>
-        <p:spPr>
-          <a:xfrm xmlns:a="http://schemas.openxmlformats.org/drawingml/2006/main">
-            <a:off x="666750" y="1762125"/>
-            <a:ext cx="2095500" cy="304800"/>
-          </a:xfrm>
-          <a:prstGeom xmlns:a="http://schemas.openxmlformats.org/drawingml/2006/main" prst="rect">
-            <a:avLst/>
-          </a:prstGeom>
-          <a:noFill xmlns:a="http://schemas.openxmlformats.org/drawingml/2006/main"/>
-          <a:ln xmlns:a="http://schemas.openxmlformats.org/drawingml/2006/main" w="0">
-            <a:noFill/>
-            <a:prstDash val="solid"/>
-          </a:ln>
-        </p:spPr>
-        <p:txBody>
-          <a:bodyPr xmlns:a="http://schemas.openxmlformats.org/drawingml/2006/main"/>
-          <a:lstStyle xmlns:a="http://schemas.openxmlformats.org/drawingml/2006/main"/>
-          <a:p xmlns:a="http://schemas.openxmlformats.org/drawingml/2006/main">
-            <a:pPr algn="l">
-              <a:defRPr sz="1200" b="1">
-                <a:solidFill>
-                  <a:srgbClr val="45D29B"/>
-                </a:solidFill>
-              </a:defRPr>
-            </a:pPr>
-            <a:r>
-              <a:rPr sz="1200" b="1">
-                <a:solidFill>
-                  <a:srgbClr val="45D29B"/>
-                </a:solidFill>
-              </a:rPr>
-              <a:t>WORKING</a:t>
-            </a:r>
-          </a:p>
-        </p:txBody>
-      </p:sp>
-      <p:sp>
-        <p:nvSpPr>
-          <p:cNvPr id="6" name="">
-            <a:extLst xmlns:a="http://schemas.openxmlformats.org/drawingml/2006/main">
-              <a:ext uri="{FF2B5EF4-FFF2-40B4-BE49-F238E27FC236}">
-                <a16:creationId xmlns:a16="http://schemas.microsoft.com/office/drawing/2014/main" id="{4166B88C-F3DD-4481-84B0-3AE790B420C7}"/>
-              </a:ext>
-            </a:extLst>
-          </p:cNvPr>
-          <p:cNvSpPr>
-            <a:spLocks xmlns:a="http://schemas.openxmlformats.org/drawingml/2006/main" noGrp="1"/>
-          </p:cNvSpPr>
-          <p:nvPr/>
-        </p:nvSpPr>
-        <p:spPr>
-          <a:xfrm xmlns:a="http://schemas.openxmlformats.org/drawingml/2006/main">
-            <a:off x="666750" y="2286000"/>
-            <a:ext cx="2286000" cy="2000250"/>
-          </a:xfrm>
-          <a:prstGeom xmlns:a="http://schemas.openxmlformats.org/drawingml/2006/main" prst="rect">
-            <a:avLst/>
-          </a:prstGeom>
-          <a:noFill xmlns:a="http://schemas.openxmlformats.org/drawingml/2006/main"/>
-          <a:ln xmlns:a="http://schemas.openxmlformats.org/drawingml/2006/main" w="0">
-            <a:noFill/>
-            <a:prstDash val="solid"/>
-          </a:ln>
-        </p:spPr>
-        <p:txBody>
-          <a:bodyPr xmlns:a="http://schemas.openxmlformats.org/drawingml/2006/main"/>
-          <a:lstStyle xmlns:a="http://schemas.openxmlformats.org/drawingml/2006/main"/>
-          <a:p xmlns:a="http://schemas.openxmlformats.org/drawingml/2006/main">
-            <a:pPr algn="l">
-              <a:defRPr sz="1500" b="0">
-                <a:solidFill>
-                  <a:srgbClr val="F5F7F6"/>
-                </a:solidFill>
-              </a:defRPr>
-            </a:pPr>
-            <a:r>
-              <a:rPr sz="1500" b="0">
-                <a:solidFill>
-                  <a:srgbClr val="F5F7F6"/>
-                </a:solidFill>
-              </a:rPr>
-              <a:t>A2A v1.0</a:t>
-            </a:r>
-          </a:p>
-          <a:p xmlns:a="http://schemas.openxmlformats.org/drawingml/2006/main">
-            <a:pPr algn="l">
-              <a:defRPr sz="1500" b="0">
-                <a:solidFill>
-                  <a:srgbClr val="F5F7F6"/>
-                </a:solidFill>
-              </a:defRPr>
-            </a:pPr>
-            <a:r>
-              <a:rPr sz="1500" b="0">
-                <a:solidFill>
-                  <a:srgbClr val="F5F7F6"/>
-                </a:solidFill>
-              </a:rPr>
-              <a:t>Deterministic controls</a:t>
-            </a:r>
-          </a:p>
-          <a:p xmlns:a="http://schemas.openxmlformats.org/drawingml/2006/main">
-            <a:pPr algn="l">
-              <a:defRPr sz="1500" b="0">
-                <a:solidFill>
-                  <a:srgbClr val="F5F7F6"/>
-                </a:solidFill>
-              </a:defRPr>
-            </a:pPr>
-            <a:r>
-              <a:rPr sz="1500" b="0">
-                <a:solidFill>
-                  <a:srgbClr val="F5F7F6"/>
-                </a:solidFill>
-              </a:rPr>
-              <a:t>Human approval</a:t>
-            </a:r>
-          </a:p>
-          <a:p xmlns:a="http://schemas.openxmlformats.org/drawingml/2006/main">
-            <a:pPr algn="l">
-              <a:defRPr sz="1500" b="0">
-                <a:solidFill>
-                  <a:srgbClr val="F5F7F6"/>
-                </a:solidFill>
-              </a:defRPr>
-            </a:pPr>
-            <a:r>
-              <a:rPr sz="1500" b="0">
-                <a:solidFill>
-                  <a:srgbClr val="F5F7F6"/>
-                </a:solidFill>
-              </a:rPr>
-              <a:t>Official AP2</a:t>
-            </a:r>
-          </a:p>
-          <a:p xmlns:a="http://schemas.openxmlformats.org/drawingml/2006/main">
-            <a:pPr algn="l">
-              <a:defRPr sz="1500" b="0">
-                <a:solidFill>
-                  <a:srgbClr val="F5F7F6"/>
-                </a:solidFill>
-              </a:defRPr>
-            </a:pPr>
-            <a:r>
-              <a:rPr sz="1500" b="0">
-                <a:solidFill>
-                  <a:srgbClr val="F5F7F6"/>
-                </a:solidFill>
-              </a:rPr>
-              <a:t>Delivery verification</a:t>
-            </a:r>
-          </a:p>
-        </p:txBody>
-      </p:sp>
+      <p:pic>
+        <p:nvPicPr>
+          <p:cNvPr id="15" name=""/>
+          <p:cNvPicPr>
+            <a:picLocks xmlns:a="http://schemas.openxmlformats.org/drawingml/2006/main" noChangeAspect="1"/>
+          </p:cNvPicPr>
+          <p:nvPr/>
+        </p:nvPicPr>
+        <p:blipFill>
+          <a:blip xmlns:r="http://schemas.openxmlformats.org/officeDocument/2006/relationships" xmlns:a="http://schemas.openxmlformats.org/drawingml/2006/main" r:embed="Rc10eb42174cd4e1e"/>
+          <a:srcRect xmlns:a="http://schemas.openxmlformats.org/drawingml/2006/main" l="19808" t="0" r="19808" b="0"/>
+          <a:stretch xmlns:a="http://schemas.openxmlformats.org/drawingml/2006/main">
+            <a:fillRect l="0" t="0" r="0" b="0"/>
+          </a:stretch>
+        </p:blipFill>
+        <p:spPr>
+          <a:xfrm xmlns:a="http://schemas.openxmlformats.org/drawingml/2006/main">
+            <a:off x="523875" y="1571625"/>
+            <a:ext cx="5191125" cy="4191000"/>
+          </a:xfrm>
+          <a:prstGeom xmlns:a="http://schemas.openxmlformats.org/drawingml/2006/main" prst="roundRect">
+            <a:avLst>
+              <a:gd name="adj" fmla="val 2727"/>
+            </a:avLst>
+          </a:prstGeom>
+        </p:spPr>
+      </p:pic>
+      <p:pic>
+        <p:nvPicPr>
+          <p:cNvPr id="16" name=""/>
+          <p:cNvPicPr>
+            <a:picLocks xmlns:a="http://schemas.openxmlformats.org/drawingml/2006/main" noChangeAspect="1"/>
+          </p:cNvPicPr>
+          <p:nvPr/>
+        </p:nvPicPr>
+        <p:blipFill>
+          <a:blip xmlns:r="http://schemas.openxmlformats.org/officeDocument/2006/relationships" xmlns:a="http://schemas.openxmlformats.org/drawingml/2006/main" r:embed="Rc1936bb401a2491d"/>
+          <a:srcRect xmlns:a="http://schemas.openxmlformats.org/drawingml/2006/main" l="18146" t="0" r="18146" b="0"/>
+          <a:stretch xmlns:a="http://schemas.openxmlformats.org/drawingml/2006/main">
+            <a:fillRect l="0" t="0" r="0" b="0"/>
+          </a:stretch>
+        </p:blipFill>
+        <p:spPr>
+          <a:xfrm xmlns:a="http://schemas.openxmlformats.org/drawingml/2006/main">
+            <a:off x="6048375" y="1571625"/>
+            <a:ext cx="5476875" cy="4191000"/>
+          </a:xfrm>
+          <a:prstGeom xmlns:a="http://schemas.openxmlformats.org/drawingml/2006/main" prst="roundRect">
+            <a:avLst>
+              <a:gd name="adj" fmla="val 2727"/>
+            </a:avLst>
+          </a:prstGeom>
+        </p:spPr>
+      </p:pic>
       <p:sp>
         <p:nvSpPr>
           <p:cNvPr id="7" name="">
             <a:extLst xmlns:a="http://schemas.openxmlformats.org/drawingml/2006/main">
               <a:ext uri="{FF2B5EF4-FFF2-40B4-BE49-F238E27FC236}">
-                <a16:creationId xmlns:a16="http://schemas.microsoft.com/office/drawing/2014/main" id="{4F77AF7E-4A06-4F4D-8BD5-54F80B170724}"/>
-              </a:ext>
-            </a:extLst>
-          </p:cNvPr>
-          <p:cNvSpPr>
-            <a:spLocks xmlns:a="http://schemas.openxmlformats.org/drawingml/2006/main" noGrp="1"/>
-          </p:cNvSpPr>
-          <p:nvPr/>
-        </p:nvSpPr>
-        <p:spPr>
-          <a:xfrm xmlns:a="http://schemas.openxmlformats.org/drawingml/2006/main">
-            <a:off x="3524250" y="1762125"/>
-            <a:ext cx="2095500" cy="304800"/>
-          </a:xfrm>
-          <a:prstGeom xmlns:a="http://schemas.openxmlformats.org/drawingml/2006/main" prst="rect">
-            <a:avLst/>
-          </a:prstGeom>
-          <a:noFill xmlns:a="http://schemas.openxmlformats.org/drawingml/2006/main"/>
-          <a:ln xmlns:a="http://schemas.openxmlformats.org/drawingml/2006/main" w="0">
-            <a:noFill/>
-            <a:prstDash val="solid"/>
-          </a:ln>
-        </p:spPr>
-        <p:txBody>
-          <a:bodyPr xmlns:a="http://schemas.openxmlformats.org/drawingml/2006/main"/>
-          <a:lstStyle xmlns:a="http://schemas.openxmlformats.org/drawingml/2006/main"/>
-          <a:p xmlns:a="http://schemas.openxmlformats.org/drawingml/2006/main">
-            <a:pPr algn="l">
-              <a:defRPr sz="1200" b="1">
-                <a:solidFill>
-                  <a:srgbClr val="9270FF"/>
-                </a:solidFill>
-              </a:defRPr>
-            </a:pPr>
-            <a:r>
-              <a:rPr sz="1200" b="1">
-                <a:solidFill>
-                  <a:srgbClr val="9270FF"/>
-                </a:solidFill>
-              </a:rPr>
-              <a:t>TESTNET</a:t>
+                <a16:creationId xmlns:a16="http://schemas.microsoft.com/office/drawing/2014/main" id="{0A78D853-6134-477E-BD64-EED716FDAC03}"/>
+              </a:ext>
+            </a:extLst>
+          </p:cNvPr>
+          <p:cNvSpPr>
+            <a:spLocks xmlns:a="http://schemas.openxmlformats.org/drawingml/2006/main" noGrp="1"/>
+          </p:cNvSpPr>
+          <p:nvPr/>
+        </p:nvSpPr>
+        <p:spPr>
+          <a:xfrm xmlns:a="http://schemas.openxmlformats.org/drawingml/2006/main">
+            <a:off x="714375" y="5905500"/>
+            <a:ext cx="3143250" cy="285750"/>
+          </a:xfrm>
+          <a:prstGeom xmlns:a="http://schemas.openxmlformats.org/drawingml/2006/main" prst="rect">
+            <a:avLst/>
+          </a:prstGeom>
+          <a:noFill xmlns:a="http://schemas.openxmlformats.org/drawingml/2006/main"/>
+          <a:ln xmlns:a="http://schemas.openxmlformats.org/drawingml/2006/main" w="0">
+            <a:noFill/>
+            <a:prstDash val="solid"/>
+          </a:ln>
+        </p:spPr>
+        <p:txBody>
+          <a:bodyPr xmlns:a="http://schemas.openxmlformats.org/drawingml/2006/main"/>
+          <a:lstStyle xmlns:a="http://schemas.openxmlformats.org/drawingml/2006/main"/>
+          <a:p xmlns:a="http://schemas.openxmlformats.org/drawingml/2006/main">
+            <a:pPr algn="l">
+              <a:defRPr sz="1350" b="1">
+                <a:solidFill>
+                  <a:srgbClr val="42BDEA"/>
+                </a:solidFill>
+              </a:defRPr>
+            </a:pPr>
+            <a:r>
+              <a:rPr sz="1350" b="1">
+                <a:solidFill>
+                  <a:srgbClr val="42BDEA"/>
+                </a:solidFill>
+              </a:rPr>
+              <a:t>Controlled procurement</a:t>
             </a:r>
           </a:p>
         </p:txBody>
@@ -2744,98 +2802,47 @@
           <p:cNvPr id="8" name="">
             <a:extLst xmlns:a="http://schemas.openxmlformats.org/drawingml/2006/main">
               <a:ext uri="{FF2B5EF4-FFF2-40B4-BE49-F238E27FC236}">
-                <a16:creationId xmlns:a16="http://schemas.microsoft.com/office/drawing/2014/main" id="{D3086DBC-AE6F-4869-B4DE-CE555E22C468}"/>
-              </a:ext>
-            </a:extLst>
-          </p:cNvPr>
-          <p:cNvSpPr>
-            <a:spLocks xmlns:a="http://schemas.openxmlformats.org/drawingml/2006/main" noGrp="1"/>
-          </p:cNvSpPr>
-          <p:nvPr/>
-        </p:nvSpPr>
-        <p:spPr>
-          <a:xfrm xmlns:a="http://schemas.openxmlformats.org/drawingml/2006/main">
-            <a:off x="3524250" y="2286000"/>
-            <a:ext cx="2286000" cy="1714500"/>
-          </a:xfrm>
-          <a:prstGeom xmlns:a="http://schemas.openxmlformats.org/drawingml/2006/main" prst="rect">
-            <a:avLst/>
-          </a:prstGeom>
-          <a:noFill xmlns:a="http://schemas.openxmlformats.org/drawingml/2006/main"/>
-          <a:ln xmlns:a="http://schemas.openxmlformats.org/drawingml/2006/main" w="0">
-            <a:noFill/>
-            <a:prstDash val="solid"/>
-          </a:ln>
-        </p:spPr>
-        <p:txBody>
-          <a:bodyPr xmlns:a="http://schemas.openxmlformats.org/drawingml/2006/main"/>
-          <a:lstStyle xmlns:a="http://schemas.openxmlformats.org/drawingml/2006/main"/>
-          <a:p xmlns:a="http://schemas.openxmlformats.org/drawingml/2006/main">
-            <a:pPr algn="l">
-              <a:defRPr sz="1500" b="0">
-                <a:solidFill>
-                  <a:srgbClr val="F5F7F6"/>
-                </a:solidFill>
-              </a:defRPr>
-            </a:pPr>
-            <a:r>
-              <a:rPr sz="1500" b="0">
-                <a:solidFill>
-                  <a:srgbClr val="F5F7F6"/>
-                </a:solidFill>
-              </a:rPr>
-              <a:t>Monad x402</a:t>
-            </a:r>
-          </a:p>
-          <a:p xmlns:a="http://schemas.openxmlformats.org/drawingml/2006/main">
-            <a:pPr algn="l">
-              <a:defRPr sz="1500" b="0">
-                <a:solidFill>
-                  <a:srgbClr val="F5F7F6"/>
-                </a:solidFill>
-              </a:defRPr>
-            </a:pPr>
-            <a:r>
-              <a:rPr sz="1500" b="0">
-                <a:solidFill>
-                  <a:srgbClr val="F5F7F6"/>
-                </a:solidFill>
-              </a:rPr>
-              <a:t>Test USDC</a:t>
-            </a:r>
-          </a:p>
-          <a:p xmlns:a="http://schemas.openxmlformats.org/drawingml/2006/main">
-            <a:pPr algn="l">
-              <a:defRPr sz="1500" b="0">
-                <a:solidFill>
-                  <a:srgbClr val="F5F7F6"/>
-                </a:solidFill>
-              </a:defRPr>
-            </a:pPr>
-            <a:r>
-              <a:rPr sz="1500" b="0">
-                <a:solidFill>
-                  <a:srgbClr val="F5F7F6"/>
-                </a:solidFill>
-              </a:rPr>
-              <a:t>Buyer and seller wallets</a:t>
-            </a:r>
-          </a:p>
-          <a:p xmlns:a="http://schemas.openxmlformats.org/drawingml/2006/main">
-            <a:pPr algn="l">
-              <a:defRPr sz="1500" b="0">
-                <a:solidFill>
-                  <a:srgbClr val="F5F7F6"/>
-                </a:solidFill>
-              </a:defRPr>
-            </a:pPr>
-            <a:r>
-              <a:rPr sz="1500" b="0">
-                <a:solidFill>
-                  <a:srgbClr val="F5F7F6"/>
-                </a:solidFill>
-              </a:rPr>
-              <a:t>Solidity escrow</a:t>
+                <a16:creationId xmlns:a16="http://schemas.microsoft.com/office/drawing/2014/main" id="{53E319F5-7E92-4AF9-8FCB-EE7DB6F5C0FC}"/>
+              </a:ext>
+            </a:extLst>
+          </p:cNvPr>
+          <p:cNvSpPr>
+            <a:spLocks xmlns:a="http://schemas.openxmlformats.org/drawingml/2006/main" noGrp="1"/>
+          </p:cNvSpPr>
+          <p:nvPr/>
+        </p:nvSpPr>
+        <p:spPr>
+          <a:xfrm xmlns:a="http://schemas.openxmlformats.org/drawingml/2006/main">
+            <a:off x="6191250" y="5905500"/>
+            <a:ext cx="2857500" cy="285750"/>
+          </a:xfrm>
+          <a:prstGeom xmlns:a="http://schemas.openxmlformats.org/drawingml/2006/main" prst="rect">
+            <a:avLst/>
+          </a:prstGeom>
+          <a:noFill xmlns:a="http://schemas.openxmlformats.org/drawingml/2006/main"/>
+          <a:ln xmlns:a="http://schemas.openxmlformats.org/drawingml/2006/main" w="0">
+            <a:noFill/>
+            <a:prstDash val="solid"/>
+          </a:ln>
+        </p:spPr>
+        <p:txBody>
+          <a:bodyPr xmlns:a="http://schemas.openxmlformats.org/drawingml/2006/main"/>
+          <a:lstStyle xmlns:a="http://schemas.openxmlformats.org/drawingml/2006/main"/>
+          <a:p xmlns:a="http://schemas.openxmlformats.org/drawingml/2006/main">
+            <a:pPr algn="l">
+              <a:defRPr sz="1350" b="1">
+                <a:solidFill>
+                  <a:srgbClr val="F2ED55"/>
+                </a:solidFill>
+              </a:defRPr>
+            </a:pPr>
+            <a:r>
+              <a:rPr sz="1350" b="1">
+                <a:solidFill>
+                  <a:srgbClr val="F2ED55"/>
+                </a:solidFill>
+              </a:rPr>
+              <a:t>Payment accounts and routes</a:t>
             </a:r>
           </a:p>
         </p:txBody>
@@ -2845,47 +2852,47 @@
           <p:cNvPr id="9" name="">
             <a:extLst xmlns:a="http://schemas.openxmlformats.org/drawingml/2006/main">
               <a:ext uri="{FF2B5EF4-FFF2-40B4-BE49-F238E27FC236}">
-                <a16:creationId xmlns:a16="http://schemas.microsoft.com/office/drawing/2014/main" id="{8B81EFA4-BA66-4A9A-920A-EEDDBDC691B1}"/>
-              </a:ext>
-            </a:extLst>
-          </p:cNvPr>
-          <p:cNvSpPr>
-            <a:spLocks xmlns:a="http://schemas.openxmlformats.org/drawingml/2006/main" noGrp="1"/>
-          </p:cNvSpPr>
-          <p:nvPr/>
-        </p:nvSpPr>
-        <p:spPr>
-          <a:xfrm xmlns:a="http://schemas.openxmlformats.org/drawingml/2006/main">
-            <a:off x="6381750" y="1762125"/>
-            <a:ext cx="2095500" cy="304800"/>
-          </a:xfrm>
-          <a:prstGeom xmlns:a="http://schemas.openxmlformats.org/drawingml/2006/main" prst="rect">
-            <a:avLst/>
-          </a:prstGeom>
-          <a:noFill xmlns:a="http://schemas.openxmlformats.org/drawingml/2006/main"/>
-          <a:ln xmlns:a="http://schemas.openxmlformats.org/drawingml/2006/main" w="0">
-            <a:noFill/>
-            <a:prstDash val="solid"/>
-          </a:ln>
-        </p:spPr>
-        <p:txBody>
-          <a:bodyPr xmlns:a="http://schemas.openxmlformats.org/drawingml/2006/main"/>
-          <a:lstStyle xmlns:a="http://schemas.openxmlformats.org/drawingml/2006/main"/>
-          <a:p xmlns:a="http://schemas.openxmlformats.org/drawingml/2006/main">
-            <a:pPr algn="l">
-              <a:defRPr sz="1200" b="1">
-                <a:solidFill>
-                  <a:srgbClr val="42BDEA"/>
-                </a:solidFill>
-              </a:defRPr>
-            </a:pPr>
-            <a:r>
-              <a:rPr sz="1200" b="1">
-                <a:solidFill>
-                  <a:srgbClr val="42BDEA"/>
-                </a:solidFill>
-              </a:rPr>
-              <a:t>SANDBOX</a:t>
+                <a16:creationId xmlns:a16="http://schemas.microsoft.com/office/drawing/2014/main" id="{538B211B-8D37-4F8A-871A-4704EE217840}"/>
+              </a:ext>
+            </a:extLst>
+          </p:cNvPr>
+          <p:cNvSpPr>
+            <a:spLocks xmlns:a="http://schemas.openxmlformats.org/drawingml/2006/main" noGrp="1"/>
+          </p:cNvSpPr>
+          <p:nvPr/>
+        </p:nvSpPr>
+        <p:spPr>
+          <a:xfrm xmlns:a="http://schemas.openxmlformats.org/drawingml/2006/main">
+            <a:off x="714375" y="6238875"/>
+            <a:ext cx="4476750" cy="238125"/>
+          </a:xfrm>
+          <a:prstGeom xmlns:a="http://schemas.openxmlformats.org/drawingml/2006/main" prst="rect">
+            <a:avLst/>
+          </a:prstGeom>
+          <a:noFill xmlns:a="http://schemas.openxmlformats.org/drawingml/2006/main"/>
+          <a:ln xmlns:a="http://schemas.openxmlformats.org/drawingml/2006/main" w="0">
+            <a:noFill/>
+            <a:prstDash val="solid"/>
+          </a:ln>
+        </p:spPr>
+        <p:txBody>
+          <a:bodyPr xmlns:a="http://schemas.openxmlformats.org/drawingml/2006/main"/>
+          <a:lstStyle xmlns:a="http://schemas.openxmlformats.org/drawingml/2006/main"/>
+          <a:p xmlns:a="http://schemas.openxmlformats.org/drawingml/2006/main">
+            <a:pPr algn="l">
+              <a:defRPr sz="1125" b="0">
+                <a:solidFill>
+                  <a:srgbClr val="98A19F"/>
+                </a:solidFill>
+              </a:defRPr>
+            </a:pPr>
+            <a:r>
+              <a:rPr sz="1125" b="0">
+                <a:solidFill>
+                  <a:srgbClr val="98A19F"/>
+                </a:solidFill>
+              </a:rPr>
+              <a:t>Create, restrict, decline, authorize, settle, retrieve</a:t>
             </a:r>
           </a:p>
         </p:txBody>
@@ -2895,432 +2902,47 @@
           <p:cNvPr id="10" name="">
             <a:extLst xmlns:a="http://schemas.openxmlformats.org/drawingml/2006/main">
               <a:ext uri="{FF2B5EF4-FFF2-40B4-BE49-F238E27FC236}">
-                <a16:creationId xmlns:a16="http://schemas.microsoft.com/office/drawing/2014/main" id="{F7391A6A-B5AA-4BA3-8FCB-4CE77038C757}"/>
-              </a:ext>
-            </a:extLst>
-          </p:cNvPr>
-          <p:cNvSpPr>
-            <a:spLocks xmlns:a="http://schemas.openxmlformats.org/drawingml/2006/main" noGrp="1"/>
-          </p:cNvSpPr>
-          <p:nvPr/>
-        </p:nvSpPr>
-        <p:spPr>
-          <a:xfrm xmlns:a="http://schemas.openxmlformats.org/drawingml/2006/main">
-            <a:off x="6381750" y="2286000"/>
-            <a:ext cx="2286000" cy="1714500"/>
-          </a:xfrm>
-          <a:prstGeom xmlns:a="http://schemas.openxmlformats.org/drawingml/2006/main" prst="rect">
-            <a:avLst/>
-          </a:prstGeom>
-          <a:noFill xmlns:a="http://schemas.openxmlformats.org/drawingml/2006/main"/>
-          <a:ln xmlns:a="http://schemas.openxmlformats.org/drawingml/2006/main" w="0">
-            <a:noFill/>
-            <a:prstDash val="solid"/>
-          </a:ln>
-        </p:spPr>
-        <p:txBody>
-          <a:bodyPr xmlns:a="http://schemas.openxmlformats.org/drawingml/2006/main"/>
-          <a:lstStyle xmlns:a="http://schemas.openxmlformats.org/drawingml/2006/main"/>
-          <a:p xmlns:a="http://schemas.openxmlformats.org/drawingml/2006/main">
-            <a:pPr algn="l">
-              <a:defRPr sz="1500" b="0">
-                <a:solidFill>
-                  <a:srgbClr val="F5F7F6"/>
-                </a:solidFill>
-              </a:defRPr>
-            </a:pPr>
-            <a:r>
-              <a:rPr sz="1500" b="0">
-                <a:solidFill>
-                  <a:srgbClr val="F5F7F6"/>
-                </a:solidFill>
-              </a:rPr>
-              <a:t>Rain cards</a:t>
-            </a:r>
-          </a:p>
-          <a:p xmlns:a="http://schemas.openxmlformats.org/drawingml/2006/main">
-            <a:pPr algn="l">
-              <a:defRPr sz="1500" b="0">
-                <a:solidFill>
-                  <a:srgbClr val="F5F7F6"/>
-                </a:solidFill>
-              </a:defRPr>
-            </a:pPr>
-            <a:r>
-              <a:rPr sz="1500" b="0">
-                <a:solidFill>
-                  <a:srgbClr val="F5F7F6"/>
-                </a:solidFill>
-              </a:rPr>
-              <a:t>Authorization and settlement</a:t>
-            </a:r>
-          </a:p>
-          <a:p xmlns:a="http://schemas.openxmlformats.org/drawingml/2006/main">
-            <a:pPr algn="l">
-              <a:defRPr sz="1500" b="0">
-                <a:solidFill>
-                  <a:srgbClr val="F5F7F6"/>
-                </a:solidFill>
-              </a:defRPr>
-            </a:pPr>
-            <a:r>
-              <a:rPr sz="1500" b="0">
-                <a:solidFill>
-                  <a:srgbClr val="F5F7F6"/>
-                </a:solidFill>
-              </a:rPr>
-              <a:t>Transactions</a:t>
-            </a:r>
-          </a:p>
-          <a:p xmlns:a="http://schemas.openxmlformats.org/drawingml/2006/main">
-            <a:pPr algn="l">
-              <a:defRPr sz="1500" b="0">
-                <a:solidFill>
-                  <a:srgbClr val="F5F7F6"/>
-                </a:solidFill>
-              </a:defRPr>
-            </a:pPr>
-            <a:r>
-              <a:rPr sz="1500" b="0">
-                <a:solidFill>
-                  <a:srgbClr val="F5F7F6"/>
-                </a:solidFill>
-              </a:rPr>
-              <a:t>Treasury routes</a:t>
-            </a:r>
-          </a:p>
-        </p:txBody>
-      </p:sp>
-      <p:sp>
-        <p:nvSpPr>
-          <p:cNvPr id="11" name="">
-            <a:extLst xmlns:a="http://schemas.openxmlformats.org/drawingml/2006/main">
-              <a:ext uri="{FF2B5EF4-FFF2-40B4-BE49-F238E27FC236}">
-                <a16:creationId xmlns:a16="http://schemas.microsoft.com/office/drawing/2014/main" id="{1EA03B66-0019-4B38-9182-DE7A9F859A8A}"/>
-              </a:ext>
-            </a:extLst>
-          </p:cNvPr>
-          <p:cNvSpPr>
-            <a:spLocks xmlns:a="http://schemas.openxmlformats.org/drawingml/2006/main" noGrp="1"/>
-          </p:cNvSpPr>
-          <p:nvPr/>
-        </p:nvSpPr>
-        <p:spPr>
-          <a:xfrm xmlns:a="http://schemas.openxmlformats.org/drawingml/2006/main">
-            <a:off x="9239250" y="1762125"/>
-            <a:ext cx="2095500" cy="304800"/>
-          </a:xfrm>
-          <a:prstGeom xmlns:a="http://schemas.openxmlformats.org/drawingml/2006/main" prst="rect">
-            <a:avLst/>
-          </a:prstGeom>
-          <a:noFill xmlns:a="http://schemas.openxmlformats.org/drawingml/2006/main"/>
-          <a:ln xmlns:a="http://schemas.openxmlformats.org/drawingml/2006/main" w="0">
-            <a:noFill/>
-            <a:prstDash val="solid"/>
-          </a:ln>
-        </p:spPr>
-        <p:txBody>
-          <a:bodyPr xmlns:a="http://schemas.openxmlformats.org/drawingml/2006/main"/>
-          <a:lstStyle xmlns:a="http://schemas.openxmlformats.org/drawingml/2006/main"/>
-          <a:p xmlns:a="http://schemas.openxmlformats.org/drawingml/2006/main">
-            <a:pPr algn="l">
-              <a:defRPr sz="1200" b="1">
-                <a:solidFill>
-                  <a:srgbClr val="FF6B7B"/>
-                </a:solidFill>
-              </a:defRPr>
-            </a:pPr>
-            <a:r>
-              <a:rPr sz="1200" b="1">
-                <a:solidFill>
-                  <a:srgbClr val="FF6B7B"/>
-                </a:solidFill>
-              </a:rPr>
-              <a:t>CONTROLLED</a:t>
-            </a:r>
-          </a:p>
-        </p:txBody>
-      </p:sp>
-      <p:sp>
-        <p:nvSpPr>
-          <p:cNvPr id="12" name="">
-            <a:extLst xmlns:a="http://schemas.openxmlformats.org/drawingml/2006/main">
-              <a:ext uri="{FF2B5EF4-FFF2-40B4-BE49-F238E27FC236}">
-                <a16:creationId xmlns:a16="http://schemas.microsoft.com/office/drawing/2014/main" id="{CE15456D-1144-46A5-B7B4-BB08404D3F49}"/>
-              </a:ext>
-            </a:extLst>
-          </p:cNvPr>
-          <p:cNvSpPr>
-            <a:spLocks xmlns:a="http://schemas.openxmlformats.org/drawingml/2006/main" noGrp="1"/>
-          </p:cNvSpPr>
-          <p:nvPr/>
-        </p:nvSpPr>
-        <p:spPr>
-          <a:xfrm xmlns:a="http://schemas.openxmlformats.org/drawingml/2006/main">
-            <a:off x="9239250" y="2286000"/>
-            <a:ext cx="2286000" cy="1714500"/>
-          </a:xfrm>
-          <a:prstGeom xmlns:a="http://schemas.openxmlformats.org/drawingml/2006/main" prst="rect">
-            <a:avLst/>
-          </a:prstGeom>
-          <a:noFill xmlns:a="http://schemas.openxmlformats.org/drawingml/2006/main"/>
-          <a:ln xmlns:a="http://schemas.openxmlformats.org/drawingml/2006/main" w="0">
-            <a:noFill/>
-            <a:prstDash val="solid"/>
-          </a:ln>
-        </p:spPr>
-        <p:txBody>
-          <a:bodyPr xmlns:a="http://schemas.openxmlformats.org/drawingml/2006/main"/>
-          <a:lstStyle xmlns:a="http://schemas.openxmlformats.org/drawingml/2006/main"/>
-          <a:p xmlns:a="http://schemas.openxmlformats.org/drawingml/2006/main">
-            <a:pPr algn="l">
-              <a:defRPr sz="1500" b="0">
-                <a:solidFill>
-                  <a:srgbClr val="F5F7F6"/>
-                </a:solidFill>
-              </a:defRPr>
-            </a:pPr>
-            <a:r>
-              <a:rPr sz="1500" b="0">
-                <a:solidFill>
-                  <a:srgbClr val="F5F7F6"/>
-                </a:solidFill>
-              </a:rPr>
-              <a:t>Example counterparties</a:t>
-            </a:r>
-          </a:p>
-          <a:p xmlns:a="http://schemas.openxmlformats.org/drawingml/2006/main">
-            <a:pPr algn="l">
-              <a:defRPr sz="1500" b="0">
-                <a:solidFill>
-                  <a:srgbClr val="F5F7F6"/>
-                </a:solidFill>
-              </a:defRPr>
-            </a:pPr>
-            <a:r>
-              <a:rPr sz="1500" b="0">
-                <a:solidFill>
-                  <a:srgbClr val="F5F7F6"/>
-                </a:solidFill>
-              </a:rPr>
-              <a:t>Provider offers</a:t>
-            </a:r>
-          </a:p>
-          <a:p xmlns:a="http://schemas.openxmlformats.org/drawingml/2006/main">
-            <a:pPr algn="l">
-              <a:defRPr sz="1500" b="0">
-                <a:solidFill>
-                  <a:srgbClr val="F5F7F6"/>
-                </a:solidFill>
-              </a:defRPr>
-            </a:pPr>
-            <a:r>
-              <a:rPr sz="1500" b="0">
-                <a:solidFill>
-                  <a:srgbClr val="F5F7F6"/>
-                </a:solidFill>
-              </a:rPr>
-              <a:t>LAANC limits</a:t>
-            </a:r>
-          </a:p>
-          <a:p xmlns:a="http://schemas.openxmlformats.org/drawingml/2006/main">
-            <a:pPr algn="l">
-              <a:defRPr sz="1500" b="0">
-                <a:solidFill>
-                  <a:srgbClr val="F5F7F6"/>
-                </a:solidFill>
-              </a:defRPr>
-            </a:pPr>
-            <a:r>
-              <a:rPr sz="1500" b="0">
-                <a:solidFill>
-                  <a:srgbClr val="F5F7F6"/>
-                </a:solidFill>
-              </a:rPr>
-              <a:t>Readiness score</a:t>
-            </a:r>
-          </a:p>
-        </p:txBody>
-      </p:sp>
-      <p:sp>
-        <p:nvSpPr>
-          <p:cNvPr id="13" name="">
-            <a:extLst xmlns:a="http://schemas.openxmlformats.org/drawingml/2006/main">
-              <a:ext uri="{FF2B5EF4-FFF2-40B4-BE49-F238E27FC236}">
-                <a16:creationId xmlns:a16="http://schemas.microsoft.com/office/drawing/2014/main" id="{412E663B-0F07-47B8-AF93-DEF6E172CE25}"/>
-              </a:ext>
-            </a:extLst>
-          </p:cNvPr>
-          <p:cNvSpPr>
-            <a:spLocks xmlns:a="http://schemas.openxmlformats.org/drawingml/2006/main" noGrp="1"/>
-          </p:cNvSpPr>
-          <p:nvPr/>
-        </p:nvSpPr>
-        <p:spPr>
-          <a:xfrm xmlns:a="http://schemas.openxmlformats.org/drawingml/2006/main">
-            <a:off x="666750" y="4810125"/>
-            <a:ext cx="10572750" cy="9525"/>
-          </a:xfrm>
-          <a:prstGeom xmlns:a="http://schemas.openxmlformats.org/drawingml/2006/main" prst="rect">
-            <a:avLst/>
-          </a:prstGeom>
-          <a:solidFill xmlns:a="http://schemas.openxmlformats.org/drawingml/2006/main">
-            <a:srgbClr val="2B3735"/>
-          </a:solidFill>
-          <a:ln xmlns:a="http://schemas.openxmlformats.org/drawingml/2006/main" w="0">
-            <a:solidFill>
-              <a:srgbClr val="2B3735"/>
-            </a:solidFill>
-            <a:prstDash val="solid"/>
-          </a:ln>
-        </p:spPr>
-      </p:sp>
-      <p:sp>
-        <p:nvSpPr>
-          <p:cNvPr id="14" name="">
-            <a:extLst xmlns:a="http://schemas.openxmlformats.org/drawingml/2006/main">
-              <a:ext uri="{FF2B5EF4-FFF2-40B4-BE49-F238E27FC236}">
-                <a16:creationId xmlns:a16="http://schemas.microsoft.com/office/drawing/2014/main" id="{6F9B8838-F93F-4E74-BA43-91B858584AB4}"/>
-              </a:ext>
-            </a:extLst>
-          </p:cNvPr>
-          <p:cNvSpPr>
-            <a:spLocks xmlns:a="http://schemas.openxmlformats.org/drawingml/2006/main" noGrp="1"/>
-          </p:cNvSpPr>
-          <p:nvPr/>
-        </p:nvSpPr>
-        <p:spPr>
-          <a:xfrm xmlns:a="http://schemas.openxmlformats.org/drawingml/2006/main">
-            <a:off x="666750" y="5143500"/>
-            <a:ext cx="1714500" cy="552450"/>
-          </a:xfrm>
-          <a:prstGeom xmlns:a="http://schemas.openxmlformats.org/drawingml/2006/main" prst="rect">
-            <a:avLst/>
-          </a:prstGeom>
-          <a:noFill xmlns:a="http://schemas.openxmlformats.org/drawingml/2006/main"/>
-          <a:ln xmlns:a="http://schemas.openxmlformats.org/drawingml/2006/main" w="0">
-            <a:noFill/>
-            <a:prstDash val="solid"/>
-          </a:ln>
-        </p:spPr>
-        <p:txBody>
-          <a:bodyPr xmlns:a="http://schemas.openxmlformats.org/drawingml/2006/main"/>
-          <a:lstStyle xmlns:a="http://schemas.openxmlformats.org/drawingml/2006/main"/>
-          <a:p xmlns:a="http://schemas.openxmlformats.org/drawingml/2006/main">
-            <a:pPr algn="l">
-              <a:defRPr sz="3150" b="1">
-                <a:solidFill>
-                  <a:srgbClr val="F2ED55"/>
-                </a:solidFill>
-              </a:defRPr>
-            </a:pPr>
-            <a:r>
-              <a:rPr sz="3150" b="1">
-                <a:solidFill>
-                  <a:srgbClr val="F2ED55"/>
-                </a:solidFill>
-              </a:rPr>
-              <a:t>18/18</a:t>
-            </a:r>
-          </a:p>
-        </p:txBody>
-      </p:sp>
-      <p:sp>
-        <p:nvSpPr>
-          <p:cNvPr id="15" name="">
-            <a:extLst xmlns:a="http://schemas.openxmlformats.org/drawingml/2006/main">
-              <a:ext uri="{FF2B5EF4-FFF2-40B4-BE49-F238E27FC236}">
-                <a16:creationId xmlns:a16="http://schemas.microsoft.com/office/drawing/2014/main" id="{52299615-F43B-47BB-86C7-E9A9BAEDD9FB}"/>
-              </a:ext>
-            </a:extLst>
-          </p:cNvPr>
-          <p:cNvSpPr>
-            <a:spLocks xmlns:a="http://schemas.openxmlformats.org/drawingml/2006/main" noGrp="1"/>
-          </p:cNvSpPr>
-          <p:nvPr/>
-        </p:nvSpPr>
-        <p:spPr>
-          <a:xfrm xmlns:a="http://schemas.openxmlformats.org/drawingml/2006/main">
-            <a:off x="2381250" y="5219700"/>
-            <a:ext cx="5715000" cy="400050"/>
-          </a:xfrm>
-          <a:prstGeom xmlns:a="http://schemas.openxmlformats.org/drawingml/2006/main" prst="rect">
-            <a:avLst/>
-          </a:prstGeom>
-          <a:noFill xmlns:a="http://schemas.openxmlformats.org/drawingml/2006/main"/>
-          <a:ln xmlns:a="http://schemas.openxmlformats.org/drawingml/2006/main" w="0">
-            <a:noFill/>
-            <a:prstDash val="solid"/>
-          </a:ln>
-        </p:spPr>
-        <p:txBody>
-          <a:bodyPr xmlns:a="http://schemas.openxmlformats.org/drawingml/2006/main"/>
-          <a:lstStyle xmlns:a="http://schemas.openxmlformats.org/drawingml/2006/main"/>
-          <a:p xmlns:a="http://schemas.openxmlformats.org/drawingml/2006/main">
-            <a:pPr algn="l">
-              <a:defRPr sz="1500" b="1">
-                <a:solidFill>
-                  <a:srgbClr val="F5F7F6"/>
-                </a:solidFill>
-              </a:defRPr>
-            </a:pPr>
-            <a:r>
-              <a:rPr sz="1500" b="1">
-                <a:solidFill>
-                  <a:srgbClr val="F5F7F6"/>
-                </a:solidFill>
-              </a:rPr>
-              <a:t>deployed PreFlight operations return HTTP 200</a:t>
-            </a:r>
-          </a:p>
-        </p:txBody>
-      </p:sp>
-      <p:sp>
-        <p:nvSpPr>
-          <p:cNvPr id="16" name="">
-            <a:extLst xmlns:a="http://schemas.openxmlformats.org/drawingml/2006/main">
-              <a:ext uri="{FF2B5EF4-FFF2-40B4-BE49-F238E27FC236}">
-                <a16:creationId xmlns:a16="http://schemas.microsoft.com/office/drawing/2014/main" id="{1AC5E944-0683-433D-A343-F0794976BB4D}"/>
-              </a:ext>
-            </a:extLst>
-          </p:cNvPr>
-          <p:cNvSpPr>
-            <a:spLocks xmlns:a="http://schemas.openxmlformats.org/drawingml/2006/main" noGrp="1"/>
-          </p:cNvSpPr>
-          <p:nvPr/>
-        </p:nvSpPr>
-        <p:spPr>
-          <a:xfrm xmlns:a="http://schemas.openxmlformats.org/drawingml/2006/main">
-            <a:off x="666750" y="5953125"/>
-            <a:ext cx="9810750" cy="323850"/>
-          </a:xfrm>
-          <a:prstGeom xmlns:a="http://schemas.openxmlformats.org/drawingml/2006/main" prst="rect">
-            <a:avLst/>
-          </a:prstGeom>
-          <a:noFill xmlns:a="http://schemas.openxmlformats.org/drawingml/2006/main"/>
-          <a:ln xmlns:a="http://schemas.openxmlformats.org/drawingml/2006/main" w="0">
-            <a:noFill/>
-            <a:prstDash val="solid"/>
-          </a:ln>
-        </p:spPr>
-        <p:txBody>
-          <a:bodyPr xmlns:a="http://schemas.openxmlformats.org/drawingml/2006/main"/>
-          <a:lstStyle xmlns:a="http://schemas.openxmlformats.org/drawingml/2006/main"/>
-          <a:p xmlns:a="http://schemas.openxmlformats.org/drawingml/2006/main">
-            <a:pPr algn="l">
-              <a:defRPr sz="1275" b="0">
-                <a:solidFill>
-                  <a:srgbClr val="98A19F"/>
-                </a:solidFill>
-              </a:defRPr>
-            </a:pPr>
-            <a:r>
-              <a:rPr sz="1275" b="0">
-                <a:solidFill>
-                  <a:srgbClr val="98A19F"/>
-                </a:solidFill>
-              </a:rPr>
-              <a:t>No production banking, mainnet funds, or unrelated external A2A counterparty is claimed.</a:t>
+                <a16:creationId xmlns:a16="http://schemas.microsoft.com/office/drawing/2014/main" id="{B05DD70F-59BA-43C8-A033-17AA7D1D2EC8}"/>
+              </a:ext>
+            </a:extLst>
+          </p:cNvPr>
+          <p:cNvSpPr>
+            <a:spLocks xmlns:a="http://schemas.openxmlformats.org/drawingml/2006/main" noGrp="1"/>
+          </p:cNvSpPr>
+          <p:nvPr/>
+        </p:nvSpPr>
+        <p:spPr>
+          <a:xfrm xmlns:a="http://schemas.openxmlformats.org/drawingml/2006/main">
+            <a:off x="6191250" y="6238875"/>
+            <a:ext cx="4667250" cy="238125"/>
+          </a:xfrm>
+          <a:prstGeom xmlns:a="http://schemas.openxmlformats.org/drawingml/2006/main" prst="rect">
+            <a:avLst/>
+          </a:prstGeom>
+          <a:noFill xmlns:a="http://schemas.openxmlformats.org/drawingml/2006/main"/>
+          <a:ln xmlns:a="http://schemas.openxmlformats.org/drawingml/2006/main" w="0">
+            <a:noFill/>
+            <a:prstDash val="solid"/>
+          </a:ln>
+        </p:spPr>
+        <p:txBody>
+          <a:bodyPr xmlns:a="http://schemas.openxmlformats.org/drawingml/2006/main"/>
+          <a:lstStyle xmlns:a="http://schemas.openxmlformats.org/drawingml/2006/main"/>
+          <a:p xmlns:a="http://schemas.openxmlformats.org/drawingml/2006/main">
+            <a:pPr algn="l">
+              <a:defRPr sz="1125" b="0">
+                <a:solidFill>
+                  <a:srgbClr val="98A19F"/>
+                </a:solidFill>
+              </a:defRPr>
+            </a:pPr>
+            <a:r>
+              <a:rPr sz="1125" b="0">
+                <a:solidFill>
+                  <a:srgbClr val="98A19F"/>
+                </a:solidFill>
+              </a:rPr>
+              <a:t>Simulated USD ↔ stablecoin on-ramp and off-ramp</a:t>
             </a:r>
           </a:p>
         </p:txBody>
@@ -3328,7 +2950,7 @@
     </p:spTree>
     <p:extLst>
       <p:ext uri="{BB962C8B-B14F-4D97-AF65-F5344CB8AC3E}">
-        <p14:creationId xmlns:p14="http://schemas.microsoft.com/office/powerpoint/2010/main" val="587373101"/>
+        <p14:creationId xmlns:p14="http://schemas.microsoft.com/office/powerpoint/2010/main" val="933844883"/>
       </p:ext>
     </p:extLst>
   </p:cSld>
@@ -3356,10 +2978,10 @@
       </p:grpSpPr>
       <p:sp>
         <p:nvSpPr>
-          <p:cNvPr id="15" name="">
-            <a:extLst xmlns:a="http://schemas.openxmlformats.org/drawingml/2006/main">
-              <a:ext uri="{FF2B5EF4-FFF2-40B4-BE49-F238E27FC236}">
-                <a16:creationId xmlns:a16="http://schemas.microsoft.com/office/drawing/2014/main" id="{66F4E9B2-FF1B-4745-85DD-14B3341D3702}"/>
+          <p:cNvPr id="14" name="">
+            <a:extLst xmlns:a="http://schemas.openxmlformats.org/drawingml/2006/main">
+              <a:ext uri="{FF2B5EF4-FFF2-40B4-BE49-F238E27FC236}">
+                <a16:creationId xmlns:a16="http://schemas.microsoft.com/office/drawing/2014/main" id="{84137FF8-A0F1-49DE-900A-7674D32353CA}"/>
               </a:ext>
             </a:extLst>
           </p:cNvPr>
@@ -3399,7 +3021,7 @@
                   <a:srgbClr val="F2ED55"/>
                 </a:solidFill>
               </a:rPr>
-              <a:t>WHY IT WINS</a:t>
+              <a:t>AUDITABLE OUTCOME</a:t>
             </a:r>
           </a:p>
         </p:txBody>
@@ -3409,7 +3031,7 @@
           <p:cNvPr id="2" name="">
             <a:extLst xmlns:a="http://schemas.openxmlformats.org/drawingml/2006/main">
               <a:ext uri="{FF2B5EF4-FFF2-40B4-BE49-F238E27FC236}">
-                <a16:creationId xmlns:a16="http://schemas.microsoft.com/office/drawing/2014/main" id="{D74CA386-A174-49CE-922A-862D02E7F4EE}"/>
+                <a16:creationId xmlns:a16="http://schemas.microsoft.com/office/drawing/2014/main" id="{99C224A5-61D5-4253-974A-225BEFC6C2BC}"/>
               </a:ext>
             </a:extLst>
           </p:cNvPr>
@@ -3449,7 +3071,7 @@
                   <a:srgbClr val="F5F7F6"/>
                 </a:solidFill>
               </a:rPr>
-              <a:t>One build directly addresses all three tracks.</a:t>
+              <a:t>One receipt proves the entire transaction.</a:t>
             </a:r>
           </a:p>
         </p:txBody>
@@ -3459,7 +3081,7 @@
           <p:cNvPr id="3" name="">
             <a:extLst xmlns:a="http://schemas.openxmlformats.org/drawingml/2006/main">
               <a:ext uri="{FF2B5EF4-FFF2-40B4-BE49-F238E27FC236}">
-                <a16:creationId xmlns:a16="http://schemas.microsoft.com/office/drawing/2014/main" id="{89262BDE-9DBA-419E-8101-1084F03D1F33}"/>
+                <a16:creationId xmlns:a16="http://schemas.microsoft.com/office/drawing/2014/main" id="{F88E3439-919D-415A-8498-48DCC530B16F}"/>
               </a:ext>
             </a:extLst>
           </p:cNvPr>
@@ -3492,7 +3114,7 @@
           <p:cNvPr id="4" name="">
             <a:extLst xmlns:a="http://schemas.openxmlformats.org/drawingml/2006/main">
               <a:ext uri="{FF2B5EF4-FFF2-40B4-BE49-F238E27FC236}">
-                <a16:creationId xmlns:a16="http://schemas.microsoft.com/office/drawing/2014/main" id="{20BE047E-799E-4006-9DAD-9EE79D833E25}"/>
+                <a16:creationId xmlns:a16="http://schemas.microsoft.com/office/drawing/2014/main" id="{5F0C2C6F-E31A-4441-97FD-D36515ACCB1A}"/>
               </a:ext>
             </a:extLst>
           </p:cNvPr>
@@ -3537,23 +3159,200 @@
           </a:p>
         </p:txBody>
       </p:sp>
-      <p:sp>
-        <p:nvSpPr>
-          <p:cNvPr id="5" name="">
-            <a:extLst xmlns:a="http://schemas.openxmlformats.org/drawingml/2006/main">
-              <a:ext uri="{FF2B5EF4-FFF2-40B4-BE49-F238E27FC236}">
-                <a16:creationId xmlns:a16="http://schemas.microsoft.com/office/drawing/2014/main" id="{A2E0A641-1E16-40DE-B004-AA41A8EB79DD}"/>
-              </a:ext>
-            </a:extLst>
-          </p:cNvPr>
-          <p:cNvSpPr>
-            <a:spLocks xmlns:a="http://schemas.openxmlformats.org/drawingml/2006/main" noGrp="1"/>
-          </p:cNvSpPr>
-          <p:nvPr/>
-        </p:nvSpPr>
-        <p:spPr>
-          <a:xfrm xmlns:a="http://schemas.openxmlformats.org/drawingml/2006/main">
-            <a:off x="666750" y="1762125"/>
+      <p:pic>
+        <p:nvPicPr>
+          <p:cNvPr id="18" name=""/>
+          <p:cNvPicPr>
+            <a:picLocks xmlns:a="http://schemas.openxmlformats.org/drawingml/2006/main" noChangeAspect="1"/>
+          </p:cNvPicPr>
+          <p:nvPr/>
+        </p:nvPicPr>
+        <p:blipFill>
+          <a:blip xmlns:r="http://schemas.openxmlformats.org/officeDocument/2006/relationships" xmlns:a="http://schemas.openxmlformats.org/drawingml/2006/main" r:embed="R17769f4ff33a4bb8"/>
+          <a:srcRect xmlns:a="http://schemas.openxmlformats.org/drawingml/2006/main" l="11429" t="0" r="11429" b="0"/>
+          <a:stretch xmlns:a="http://schemas.openxmlformats.org/drawingml/2006/main">
+            <a:fillRect l="0" t="0" r="0" b="0"/>
+          </a:stretch>
+        </p:blipFill>
+        <p:spPr>
+          <a:xfrm xmlns:a="http://schemas.openxmlformats.org/drawingml/2006/main">
+            <a:off x="523875" y="1571625"/>
+            <a:ext cx="6858000" cy="4333875"/>
+          </a:xfrm>
+          <a:prstGeom xmlns:a="http://schemas.openxmlformats.org/drawingml/2006/main" prst="roundRect">
+            <a:avLst>
+              <a:gd name="adj" fmla="val 2637"/>
+            </a:avLst>
+          </a:prstGeom>
+        </p:spPr>
+      </p:pic>
+      <p:sp>
+        <p:nvSpPr>
+          <p:cNvPr id="6" name="">
+            <a:extLst xmlns:a="http://schemas.openxmlformats.org/drawingml/2006/main">
+              <a:ext uri="{FF2B5EF4-FFF2-40B4-BE49-F238E27FC236}">
+                <a16:creationId xmlns:a16="http://schemas.microsoft.com/office/drawing/2014/main" id="{E0AA69EB-3881-45EB-B29E-3BCD4CB48193}"/>
+              </a:ext>
+            </a:extLst>
+          </p:cNvPr>
+          <p:cNvSpPr>
+            <a:spLocks xmlns:a="http://schemas.openxmlformats.org/drawingml/2006/main" noGrp="1"/>
+          </p:cNvSpPr>
+          <p:nvPr/>
+        </p:nvSpPr>
+        <p:spPr>
+          <a:xfrm xmlns:a="http://schemas.openxmlformats.org/drawingml/2006/main">
+            <a:off x="7858125" y="1714500"/>
+            <a:ext cx="1047750" cy="304800"/>
+          </a:xfrm>
+          <a:prstGeom xmlns:a="http://schemas.openxmlformats.org/drawingml/2006/main" prst="rect">
+            <a:avLst/>
+          </a:prstGeom>
+          <a:noFill xmlns:a="http://schemas.openxmlformats.org/drawingml/2006/main"/>
+          <a:ln xmlns:a="http://schemas.openxmlformats.org/drawingml/2006/main" w="0">
+            <a:noFill/>
+            <a:prstDash val="solid"/>
+          </a:ln>
+        </p:spPr>
+        <p:txBody>
+          <a:bodyPr xmlns:a="http://schemas.openxmlformats.org/drawingml/2006/main"/>
+          <a:lstStyle xmlns:a="http://schemas.openxmlformats.org/drawingml/2006/main"/>
+          <a:p xmlns:a="http://schemas.openxmlformats.org/drawingml/2006/main">
+            <a:pPr algn="l">
+              <a:defRPr sz="1350" b="1">
+                <a:solidFill>
+                  <a:srgbClr val="64D4CA"/>
+                </a:solidFill>
+              </a:defRPr>
+            </a:pPr>
+            <a:r>
+              <a:rPr sz="1350" b="1">
+                <a:solidFill>
+                  <a:srgbClr val="64D4CA"/>
+                </a:solidFill>
+              </a:rPr>
+              <a:t>A2A</a:t>
+            </a:r>
+          </a:p>
+        </p:txBody>
+      </p:sp>
+      <p:sp>
+        <p:nvSpPr>
+          <p:cNvPr id="7" name="">
+            <a:extLst xmlns:a="http://schemas.openxmlformats.org/drawingml/2006/main">
+              <a:ext uri="{FF2B5EF4-FFF2-40B4-BE49-F238E27FC236}">
+                <a16:creationId xmlns:a16="http://schemas.microsoft.com/office/drawing/2014/main" id="{B0D350F1-024C-4A33-9663-CBA960D911B4}"/>
+              </a:ext>
+            </a:extLst>
+          </p:cNvPr>
+          <p:cNvSpPr>
+            <a:spLocks xmlns:a="http://schemas.openxmlformats.org/drawingml/2006/main" noGrp="1"/>
+          </p:cNvSpPr>
+          <p:nvPr/>
+        </p:nvSpPr>
+        <p:spPr>
+          <a:xfrm xmlns:a="http://schemas.openxmlformats.org/drawingml/2006/main">
+            <a:off x="7858125" y="2047875"/>
+            <a:ext cx="2857500" cy="304800"/>
+          </a:xfrm>
+          <a:prstGeom xmlns:a="http://schemas.openxmlformats.org/drawingml/2006/main" prst="rect">
+            <a:avLst/>
+          </a:prstGeom>
+          <a:noFill xmlns:a="http://schemas.openxmlformats.org/drawingml/2006/main"/>
+          <a:ln xmlns:a="http://schemas.openxmlformats.org/drawingml/2006/main" w="0">
+            <a:noFill/>
+            <a:prstDash val="solid"/>
+          </a:ln>
+        </p:spPr>
+        <p:txBody>
+          <a:bodyPr xmlns:a="http://schemas.openxmlformats.org/drawingml/2006/main"/>
+          <a:lstStyle xmlns:a="http://schemas.openxmlformats.org/drawingml/2006/main"/>
+          <a:p xmlns:a="http://schemas.openxmlformats.org/drawingml/2006/main">
+            <a:pPr algn="l">
+              <a:defRPr sz="1500" b="1">
+                <a:solidFill>
+                  <a:srgbClr val="F5F7F6"/>
+                </a:solidFill>
+              </a:defRPr>
+            </a:pPr>
+            <a:r>
+              <a:rPr sz="1500" b="1">
+                <a:solidFill>
+                  <a:srgbClr val="F5F7F6"/>
+                </a:solidFill>
+              </a:rPr>
+              <a:t>Negotiated agreement</a:t>
+            </a:r>
+          </a:p>
+        </p:txBody>
+      </p:sp>
+      <p:sp>
+        <p:nvSpPr>
+          <p:cNvPr id="8" name="">
+            <a:extLst xmlns:a="http://schemas.openxmlformats.org/drawingml/2006/main">
+              <a:ext uri="{FF2B5EF4-FFF2-40B4-BE49-F238E27FC236}">
+                <a16:creationId xmlns:a16="http://schemas.microsoft.com/office/drawing/2014/main" id="{0B425F06-9400-47C0-B040-CEB63C0EB815}"/>
+              </a:ext>
+            </a:extLst>
+          </p:cNvPr>
+          <p:cNvSpPr>
+            <a:spLocks xmlns:a="http://schemas.openxmlformats.org/drawingml/2006/main" noGrp="1"/>
+          </p:cNvSpPr>
+          <p:nvPr/>
+        </p:nvSpPr>
+        <p:spPr>
+          <a:xfrm xmlns:a="http://schemas.openxmlformats.org/drawingml/2006/main">
+            <a:off x="7858125" y="2619375"/>
+            <a:ext cx="1047750" cy="304800"/>
+          </a:xfrm>
+          <a:prstGeom xmlns:a="http://schemas.openxmlformats.org/drawingml/2006/main" prst="rect">
+            <a:avLst/>
+          </a:prstGeom>
+          <a:noFill xmlns:a="http://schemas.openxmlformats.org/drawingml/2006/main"/>
+          <a:ln xmlns:a="http://schemas.openxmlformats.org/drawingml/2006/main" w="0">
+            <a:noFill/>
+            <a:prstDash val="solid"/>
+          </a:ln>
+        </p:spPr>
+        <p:txBody>
+          <a:bodyPr xmlns:a="http://schemas.openxmlformats.org/drawingml/2006/main"/>
+          <a:lstStyle xmlns:a="http://schemas.openxmlformats.org/drawingml/2006/main"/>
+          <a:p xmlns:a="http://schemas.openxmlformats.org/drawingml/2006/main">
+            <a:pPr algn="l">
+              <a:defRPr sz="1350" b="1">
+                <a:solidFill>
+                  <a:srgbClr val="F0A23A"/>
+                </a:solidFill>
+              </a:defRPr>
+            </a:pPr>
+            <a:r>
+              <a:rPr sz="1350" b="1">
+                <a:solidFill>
+                  <a:srgbClr val="F0A23A"/>
+                </a:solidFill>
+              </a:rPr>
+              <a:t>AP2</a:t>
+            </a:r>
+          </a:p>
+        </p:txBody>
+      </p:sp>
+      <p:sp>
+        <p:nvSpPr>
+          <p:cNvPr id="9" name="">
+            <a:extLst xmlns:a="http://schemas.openxmlformats.org/drawingml/2006/main">
+              <a:ext uri="{FF2B5EF4-FFF2-40B4-BE49-F238E27FC236}">
+                <a16:creationId xmlns:a16="http://schemas.microsoft.com/office/drawing/2014/main" id="{56101886-C84D-4D0B-B190-3B8EB0F172C4}"/>
+              </a:ext>
+            </a:extLst>
+          </p:cNvPr>
+          <p:cNvSpPr>
+            <a:spLocks xmlns:a="http://schemas.openxmlformats.org/drawingml/2006/main" noGrp="1"/>
+          </p:cNvSpPr>
+          <p:nvPr/>
+        </p:nvSpPr>
+        <p:spPr>
+          <a:xfrm xmlns:a="http://schemas.openxmlformats.org/drawingml/2006/main">
+            <a:off x="7858125" y="2952750"/>
             <a:ext cx="3238500" cy="428625"/>
           </a:xfrm>
           <a:prstGeom xmlns:a="http://schemas.openxmlformats.org/drawingml/2006/main" prst="rect">
@@ -3570,91 +3369,521 @@
           <a:lstStyle xmlns:a="http://schemas.openxmlformats.org/drawingml/2006/main"/>
           <a:p xmlns:a="http://schemas.openxmlformats.org/drawingml/2006/main">
             <a:pPr algn="l">
-              <a:defRPr sz="2100" b="1">
-                <a:solidFill>
-                  <a:srgbClr val="42BDEA"/>
-                </a:solidFill>
-              </a:defRPr>
-            </a:pPr>
-            <a:r>
-              <a:rPr sz="2100" b="1">
-                <a:solidFill>
-                  <a:srgbClr val="42BDEA"/>
-                </a:solidFill>
-              </a:rPr>
-              <a:t>Best use of Rain</a:t>
-            </a:r>
-          </a:p>
-        </p:txBody>
-      </p:sp>
-      <p:sp>
-        <p:nvSpPr>
-          <p:cNvPr id="6" name="">
-            <a:extLst xmlns:a="http://schemas.openxmlformats.org/drawingml/2006/main">
-              <a:ext uri="{FF2B5EF4-FFF2-40B4-BE49-F238E27FC236}">
-                <a16:creationId xmlns:a16="http://schemas.microsoft.com/office/drawing/2014/main" id="{D7637154-27D6-441B-B8B5-8C55F999D157}"/>
-              </a:ext>
-            </a:extLst>
-          </p:cNvPr>
-          <p:cNvSpPr>
-            <a:spLocks xmlns:a="http://schemas.openxmlformats.org/drawingml/2006/main" noGrp="1"/>
-          </p:cNvSpPr>
-          <p:nvPr/>
-        </p:nvSpPr>
-        <p:spPr>
-          <a:xfrm xmlns:a="http://schemas.openxmlformats.org/drawingml/2006/main">
-            <a:off x="666750" y="2333625"/>
-            <a:ext cx="3143250" cy="1095375"/>
-          </a:xfrm>
-          <a:prstGeom xmlns:a="http://schemas.openxmlformats.org/drawingml/2006/main" prst="rect">
-            <a:avLst/>
-          </a:prstGeom>
-          <a:noFill xmlns:a="http://schemas.openxmlformats.org/drawingml/2006/main"/>
-          <a:ln xmlns:a="http://schemas.openxmlformats.org/drawingml/2006/main" w="0">
-            <a:noFill/>
-            <a:prstDash val="solid"/>
-          </a:ln>
-        </p:spPr>
-        <p:txBody>
-          <a:bodyPr xmlns:a="http://schemas.openxmlformats.org/drawingml/2006/main"/>
-          <a:lstStyle xmlns:a="http://schemas.openxmlformats.org/drawingml/2006/main"/>
-          <a:p xmlns:a="http://schemas.openxmlformats.org/drawingml/2006/main">
-            <a:pPr algn="l">
-              <a:defRPr sz="1350" b="0">
-                <a:solidFill>
-                  <a:srgbClr val="98A19F"/>
-                </a:solidFill>
-              </a:defRPr>
-            </a:pPr>
-            <a:r>
-              <a:rPr sz="1350" b="0">
-                <a:solidFill>
-                  <a:srgbClr val="98A19F"/>
-                </a:solidFill>
-              </a:rPr>
-              <a:t>AP2-scoped cards, real policy declines, approved settlement, transaction retrieval, and treasury routes.</a:t>
-            </a:r>
-          </a:p>
-        </p:txBody>
-      </p:sp>
-      <p:sp>
-        <p:nvSpPr>
-          <p:cNvPr id="7" name="">
-            <a:extLst xmlns:a="http://schemas.openxmlformats.org/drawingml/2006/main">
-              <a:ext uri="{FF2B5EF4-FFF2-40B4-BE49-F238E27FC236}">
-                <a16:creationId xmlns:a16="http://schemas.microsoft.com/office/drawing/2014/main" id="{68379C31-156C-4BC7-8BD7-09BAB5FB9FC3}"/>
-              </a:ext>
-            </a:extLst>
-          </p:cNvPr>
-          <p:cNvSpPr>
-            <a:spLocks xmlns:a="http://schemas.openxmlformats.org/drawingml/2006/main" noGrp="1"/>
-          </p:cNvSpPr>
-          <p:nvPr/>
-        </p:nvSpPr>
-        <p:spPr>
-          <a:xfrm xmlns:a="http://schemas.openxmlformats.org/drawingml/2006/main">
-            <a:off x="4048125" y="1714500"/>
-            <a:ext cx="9525" cy="2571750"/>
+              <a:defRPr sz="1500" b="1">
+                <a:solidFill>
+                  <a:srgbClr val="F5F7F6"/>
+                </a:solidFill>
+              </a:defRPr>
+            </a:pPr>
+            <a:r>
+              <a:rPr sz="1500" b="1">
+                <a:solidFill>
+                  <a:srgbClr val="F5F7F6"/>
+                </a:solidFill>
+              </a:rPr>
+              <a:t>Exact sale and procurement authority</a:t>
+            </a:r>
+          </a:p>
+        </p:txBody>
+      </p:sp>
+      <p:sp>
+        <p:nvSpPr>
+          <p:cNvPr id="10" name="">
+            <a:extLst xmlns:a="http://schemas.openxmlformats.org/drawingml/2006/main">
+              <a:ext uri="{FF2B5EF4-FFF2-40B4-BE49-F238E27FC236}">
+                <a16:creationId xmlns:a16="http://schemas.microsoft.com/office/drawing/2014/main" id="{7BB20A0A-96CE-4065-8282-26C173B46338}"/>
+              </a:ext>
+            </a:extLst>
+          </p:cNvPr>
+          <p:cNvSpPr>
+            <a:spLocks xmlns:a="http://schemas.openxmlformats.org/drawingml/2006/main" noGrp="1"/>
+          </p:cNvSpPr>
+          <p:nvPr/>
+        </p:nvSpPr>
+        <p:spPr>
+          <a:xfrm xmlns:a="http://schemas.openxmlformats.org/drawingml/2006/main">
+            <a:off x="7858125" y="3714750"/>
+            <a:ext cx="1905000" cy="304800"/>
+          </a:xfrm>
+          <a:prstGeom xmlns:a="http://schemas.openxmlformats.org/drawingml/2006/main" prst="rect">
+            <a:avLst/>
+          </a:prstGeom>
+          <a:noFill xmlns:a="http://schemas.openxmlformats.org/drawingml/2006/main"/>
+          <a:ln xmlns:a="http://schemas.openxmlformats.org/drawingml/2006/main" w="0">
+            <a:noFill/>
+            <a:prstDash val="solid"/>
+          </a:ln>
+        </p:spPr>
+        <p:txBody>
+          <a:bodyPr xmlns:a="http://schemas.openxmlformats.org/drawingml/2006/main"/>
+          <a:lstStyle xmlns:a="http://schemas.openxmlformats.org/drawingml/2006/main"/>
+          <a:p xmlns:a="http://schemas.openxmlformats.org/drawingml/2006/main">
+            <a:pPr algn="l">
+              <a:defRPr sz="1350" b="1">
+                <a:solidFill>
+                  <a:srgbClr val="9270FF"/>
+                </a:solidFill>
+              </a:defRPr>
+            </a:pPr>
+            <a:r>
+              <a:rPr sz="1350" b="1">
+                <a:solidFill>
+                  <a:srgbClr val="9270FF"/>
+                </a:solidFill>
+              </a:rPr>
+              <a:t>MONAD + RAIN</a:t>
+            </a:r>
+          </a:p>
+        </p:txBody>
+      </p:sp>
+      <p:sp>
+        <p:nvSpPr>
+          <p:cNvPr id="11" name="">
+            <a:extLst xmlns:a="http://schemas.openxmlformats.org/drawingml/2006/main">
+              <a:ext uri="{FF2B5EF4-FFF2-40B4-BE49-F238E27FC236}">
+                <a16:creationId xmlns:a16="http://schemas.microsoft.com/office/drawing/2014/main" id="{50A62F62-F2A7-49B7-83F2-D4FF35702A6B}"/>
+              </a:ext>
+            </a:extLst>
+          </p:cNvPr>
+          <p:cNvSpPr>
+            <a:spLocks xmlns:a="http://schemas.openxmlformats.org/drawingml/2006/main" noGrp="1"/>
+          </p:cNvSpPr>
+          <p:nvPr/>
+        </p:nvSpPr>
+        <p:spPr>
+          <a:xfrm xmlns:a="http://schemas.openxmlformats.org/drawingml/2006/main">
+            <a:off x="7858125" y="4048125"/>
+            <a:ext cx="3333750" cy="714375"/>
+          </a:xfrm>
+          <a:prstGeom xmlns:a="http://schemas.openxmlformats.org/drawingml/2006/main" prst="rect">
+            <a:avLst/>
+          </a:prstGeom>
+          <a:noFill xmlns:a="http://schemas.openxmlformats.org/drawingml/2006/main"/>
+          <a:ln xmlns:a="http://schemas.openxmlformats.org/drawingml/2006/main" w="0">
+            <a:noFill/>
+            <a:prstDash val="solid"/>
+          </a:ln>
+        </p:spPr>
+        <p:txBody>
+          <a:bodyPr xmlns:a="http://schemas.openxmlformats.org/drawingml/2006/main"/>
+          <a:lstStyle xmlns:a="http://schemas.openxmlformats.org/drawingml/2006/main"/>
+          <a:p xmlns:a="http://schemas.openxmlformats.org/drawingml/2006/main">
+            <a:pPr algn="l">
+              <a:defRPr sz="1500" b="1">
+                <a:solidFill>
+                  <a:srgbClr val="F5F7F6"/>
+                </a:solidFill>
+              </a:defRPr>
+            </a:pPr>
+            <a:r>
+              <a:rPr sz="1500" b="1">
+                <a:solidFill>
+                  <a:srgbClr val="F5F7F6"/>
+                </a:solidFill>
+              </a:rPr>
+              <a:t>x402 settlement, card decline, approved settlement, posted transaction</a:t>
+            </a:r>
+          </a:p>
+        </p:txBody>
+      </p:sp>
+      <p:sp>
+        <p:nvSpPr>
+          <p:cNvPr id="12" name="">
+            <a:extLst xmlns:a="http://schemas.openxmlformats.org/drawingml/2006/main">
+              <a:ext uri="{FF2B5EF4-FFF2-40B4-BE49-F238E27FC236}">
+                <a16:creationId xmlns:a16="http://schemas.microsoft.com/office/drawing/2014/main" id="{D53C3D62-51F5-476A-AC15-81718DD4ECAD}"/>
+              </a:ext>
+            </a:extLst>
+          </p:cNvPr>
+          <p:cNvSpPr>
+            <a:spLocks xmlns:a="http://schemas.openxmlformats.org/drawingml/2006/main" noGrp="1"/>
+          </p:cNvSpPr>
+          <p:nvPr/>
+        </p:nvSpPr>
+        <p:spPr>
+          <a:xfrm xmlns:a="http://schemas.openxmlformats.org/drawingml/2006/main">
+            <a:off x="7858125" y="5143500"/>
+            <a:ext cx="1333500" cy="304800"/>
+          </a:xfrm>
+          <a:prstGeom xmlns:a="http://schemas.openxmlformats.org/drawingml/2006/main" prst="rect">
+            <a:avLst/>
+          </a:prstGeom>
+          <a:noFill xmlns:a="http://schemas.openxmlformats.org/drawingml/2006/main"/>
+          <a:ln xmlns:a="http://schemas.openxmlformats.org/drawingml/2006/main" w="0">
+            <a:noFill/>
+            <a:prstDash val="solid"/>
+          </a:ln>
+        </p:spPr>
+        <p:txBody>
+          <a:bodyPr xmlns:a="http://schemas.openxmlformats.org/drawingml/2006/main"/>
+          <a:lstStyle xmlns:a="http://schemas.openxmlformats.org/drawingml/2006/main"/>
+          <a:p xmlns:a="http://schemas.openxmlformats.org/drawingml/2006/main">
+            <a:pPr algn="l">
+              <a:defRPr sz="1350" b="1">
+                <a:solidFill>
+                  <a:srgbClr val="45D29B"/>
+                </a:solidFill>
+              </a:defRPr>
+            </a:pPr>
+            <a:r>
+              <a:rPr sz="1350" b="1">
+                <a:solidFill>
+                  <a:srgbClr val="45D29B"/>
+                </a:solidFill>
+              </a:rPr>
+              <a:t>DELIVERY</a:t>
+            </a:r>
+          </a:p>
+        </p:txBody>
+      </p:sp>
+      <p:sp>
+        <p:nvSpPr>
+          <p:cNvPr id="13" name="">
+            <a:extLst xmlns:a="http://schemas.openxmlformats.org/drawingml/2006/main">
+              <a:ext uri="{FF2B5EF4-FFF2-40B4-BE49-F238E27FC236}">
+                <a16:creationId xmlns:a16="http://schemas.microsoft.com/office/drawing/2014/main" id="{9B30660B-22C4-43E2-9081-532B3863C46C}"/>
+              </a:ext>
+            </a:extLst>
+          </p:cNvPr>
+          <p:cNvSpPr>
+            <a:spLocks xmlns:a="http://schemas.openxmlformats.org/drawingml/2006/main" noGrp="1"/>
+          </p:cNvSpPr>
+          <p:nvPr/>
+        </p:nvSpPr>
+        <p:spPr>
+          <a:xfrm xmlns:a="http://schemas.openxmlformats.org/drawingml/2006/main">
+            <a:off x="7858125" y="5476875"/>
+            <a:ext cx="3333750" cy="476250"/>
+          </a:xfrm>
+          <a:prstGeom xmlns:a="http://schemas.openxmlformats.org/drawingml/2006/main" prst="rect">
+            <a:avLst/>
+          </a:prstGeom>
+          <a:noFill xmlns:a="http://schemas.openxmlformats.org/drawingml/2006/main"/>
+          <a:ln xmlns:a="http://schemas.openxmlformats.org/drawingml/2006/main" w="0">
+            <a:noFill/>
+            <a:prstDash val="solid"/>
+          </a:ln>
+        </p:spPr>
+        <p:txBody>
+          <a:bodyPr xmlns:a="http://schemas.openxmlformats.org/drawingml/2006/main"/>
+          <a:lstStyle xmlns:a="http://schemas.openxmlformats.org/drawingml/2006/main"/>
+          <a:p xmlns:a="http://schemas.openxmlformats.org/drawingml/2006/main">
+            <a:pPr algn="l">
+              <a:defRPr sz="1500" b="1">
+                <a:solidFill>
+                  <a:srgbClr val="F5F7F6"/>
+                </a:solidFill>
+              </a:defRPr>
+            </a:pPr>
+            <a:r>
+              <a:rPr sz="1500" b="1">
+                <a:solidFill>
+                  <a:srgbClr val="F5F7F6"/>
+                </a:solidFill>
+              </a:rPr>
+              <a:t>100 reports · 96% readiness · verified</a:t>
+            </a:r>
+          </a:p>
+        </p:txBody>
+      </p:sp>
+    </p:spTree>
+    <p:extLst>
+      <p:ext uri="{BB962C8B-B14F-4D97-AF65-F5344CB8AC3E}">
+        <p14:creationId xmlns:p14="http://schemas.microsoft.com/office/powerpoint/2010/main" val="442774466"/>
+      </p:ext>
+    </p:extLst>
+  </p:cSld>
+</p:sld>
+</file>
+
+<file path=ppt/slides/slide12.xml><?xml version="1.0" encoding="utf-8"?>
+<p:sld xmlns:p="http://schemas.openxmlformats.org/presentationml/2006/main">
+  <p:cSld>
+    <p:bg>
+      <p:bgPr>
+        <a:solidFill xmlns:a="http://schemas.openxmlformats.org/drawingml/2006/main">
+          <a:srgbClr val="F7F9FA"/>
+        </a:solidFill>
+      </p:bgPr>
+    </p:bg>
+    <p:spTree>
+      <p:nvGrpSpPr>
+        <p:cNvPr id="1" name=""/>
+        <p:cNvGrpSpPr/>
+        <p:nvPr/>
+      </p:nvGrpSpPr>
+      <p:grpSpPr>
+        <a:xfrm xmlns:a="http://schemas.openxmlformats.org/drawingml/2006/main"/>
+      </p:grpSpPr>
+      <p:sp>
+        <p:nvSpPr>
+          <p:cNvPr id="4" name="">
+            <a:extLst xmlns:a="http://schemas.openxmlformats.org/drawingml/2006/main">
+              <a:ext uri="{FF2B5EF4-FFF2-40B4-BE49-F238E27FC236}">
+                <a16:creationId xmlns:a16="http://schemas.microsoft.com/office/drawing/2014/main" id="{B85AE377-7AD0-44AA-8F22-FA3DB41892EC}"/>
+              </a:ext>
+            </a:extLst>
+          </p:cNvPr>
+          <p:cNvSpPr>
+            <a:spLocks xmlns:a="http://schemas.openxmlformats.org/drawingml/2006/main" noGrp="1"/>
+          </p:cNvSpPr>
+          <p:nvPr/>
+        </p:nvSpPr>
+        <p:spPr>
+          <a:xfrm xmlns:a="http://schemas.openxmlformats.org/drawingml/2006/main">
+            <a:off x="381000" y="238125"/>
+            <a:ext cx="2857500" cy="209550"/>
+          </a:xfrm>
+          <a:prstGeom xmlns:a="http://schemas.openxmlformats.org/drawingml/2006/main" prst="rect">
+            <a:avLst/>
+          </a:prstGeom>
+          <a:noFill xmlns:a="http://schemas.openxmlformats.org/drawingml/2006/main"/>
+          <a:ln xmlns:a="http://schemas.openxmlformats.org/drawingml/2006/main" w="0">
+            <a:noFill/>
+            <a:prstDash val="solid"/>
+          </a:ln>
+        </p:spPr>
+        <p:txBody>
+          <a:bodyPr xmlns:a="http://schemas.openxmlformats.org/drawingml/2006/main"/>
+          <a:lstStyle xmlns:a="http://schemas.openxmlformats.org/drawingml/2006/main"/>
+          <a:p xmlns:a="http://schemas.openxmlformats.org/drawingml/2006/main">
+            <a:pPr algn="l">
+              <a:defRPr sz="900" b="1">
+                <a:solidFill>
+                  <a:srgbClr val="0F766E"/>
+                </a:solidFill>
+              </a:defRPr>
+            </a:pPr>
+            <a:r>
+              <a:rPr sz="900" b="1">
+                <a:solidFill>
+                  <a:srgbClr val="0F766E"/>
+                </a:solidFill>
+              </a:rPr>
+              <a:t>COMPLETE SYSTEM</a:t>
+            </a:r>
+          </a:p>
+        </p:txBody>
+      </p:sp>
+      <p:sp>
+        <p:nvSpPr>
+          <p:cNvPr id="2" name="">
+            <a:extLst xmlns:a="http://schemas.openxmlformats.org/drawingml/2006/main">
+              <a:ext uri="{FF2B5EF4-FFF2-40B4-BE49-F238E27FC236}">
+                <a16:creationId xmlns:a16="http://schemas.microsoft.com/office/drawing/2014/main" id="{9292F20A-AF70-418F-83D2-42C5F5AADDF9}"/>
+              </a:ext>
+            </a:extLst>
+          </p:cNvPr>
+          <p:cNvSpPr>
+            <a:spLocks xmlns:a="http://schemas.openxmlformats.org/drawingml/2006/main" noGrp="1"/>
+          </p:cNvSpPr>
+          <p:nvPr/>
+        </p:nvSpPr>
+        <p:spPr>
+          <a:xfrm xmlns:a="http://schemas.openxmlformats.org/drawingml/2006/main">
+            <a:off x="381000" y="495300"/>
+            <a:ext cx="10477500" cy="428625"/>
+          </a:xfrm>
+          <a:prstGeom xmlns:a="http://schemas.openxmlformats.org/drawingml/2006/main" prst="rect">
+            <a:avLst/>
+          </a:prstGeom>
+          <a:noFill xmlns:a="http://schemas.openxmlformats.org/drawingml/2006/main"/>
+          <a:ln xmlns:a="http://schemas.openxmlformats.org/drawingml/2006/main" w="0">
+            <a:noFill/>
+            <a:prstDash val="solid"/>
+          </a:ln>
+        </p:spPr>
+        <p:txBody>
+          <a:bodyPr xmlns:a="http://schemas.openxmlformats.org/drawingml/2006/main"/>
+          <a:lstStyle xmlns:a="http://schemas.openxmlformats.org/drawingml/2006/main"/>
+          <a:p xmlns:a="http://schemas.openxmlformats.org/drawingml/2006/main">
+            <a:pPr algn="l">
+              <a:defRPr sz="2250" b="1">
+                <a:solidFill>
+                  <a:srgbClr val="172033"/>
+                </a:solidFill>
+              </a:defRPr>
+            </a:pPr>
+            <a:r>
+              <a:rPr sz="2250" b="1">
+                <a:solidFill>
+                  <a:srgbClr val="172033"/>
+                </a:solidFill>
+              </a:rPr>
+              <a:t>Existing commerce in. Governed agent transactions out.</a:t>
+            </a:r>
+          </a:p>
+        </p:txBody>
+      </p:sp>
+      <p:pic>
+        <p:nvPicPr>
+          <p:cNvPr id="6" name=""/>
+          <p:cNvPicPr>
+            <a:picLocks xmlns:a="http://schemas.openxmlformats.org/drawingml/2006/main" noChangeAspect="1"/>
+          </p:cNvPicPr>
+          <p:nvPr/>
+        </p:nvPicPr>
+        <p:blipFill>
+          <a:blip xmlns:r="http://schemas.openxmlformats.org/officeDocument/2006/relationships" xmlns:a="http://schemas.openxmlformats.org/drawingml/2006/main" r:embed="R37e16ee7e3774e19"/>
+          <a:stretch xmlns:a="http://schemas.openxmlformats.org/drawingml/2006/main"/>
+        </p:blipFill>
+        <p:spPr>
+          <a:xfrm xmlns:a="http://schemas.openxmlformats.org/drawingml/2006/main">
+            <a:off x="1821089" y="1047750"/>
+            <a:ext cx="8549821" cy="5524500"/>
+          </a:xfrm>
+          <a:prstGeom xmlns:a="http://schemas.openxmlformats.org/drawingml/2006/main" prst="roundRect">
+            <a:avLst/>
+          </a:prstGeom>
+        </p:spPr>
+      </p:pic>
+    </p:spTree>
+    <p:extLst>
+      <p:ext uri="{BB962C8B-B14F-4D97-AF65-F5344CB8AC3E}">
+        <p14:creationId xmlns:p14="http://schemas.microsoft.com/office/powerpoint/2010/main" val="1282883778"/>
+      </p:ext>
+    </p:extLst>
+  </p:cSld>
+</p:sld>
+</file>
+
+<file path=ppt/slides/slide13.xml><?xml version="1.0" encoding="utf-8"?>
+<p:sld xmlns:p="http://schemas.openxmlformats.org/presentationml/2006/main">
+  <p:cSld>
+    <p:bg>
+      <p:bgPr>
+        <a:solidFill xmlns:a="http://schemas.openxmlformats.org/drawingml/2006/main">
+          <a:srgbClr val="0B1111"/>
+        </a:solidFill>
+      </p:bgPr>
+    </p:bg>
+    <p:spTree>
+      <p:nvGrpSpPr>
+        <p:cNvPr id="1" name=""/>
+        <p:cNvGrpSpPr/>
+        <p:nvPr/>
+      </p:nvGrpSpPr>
+      <p:grpSpPr>
+        <a:xfrm xmlns:a="http://schemas.openxmlformats.org/drawingml/2006/main"/>
+      </p:grpSpPr>
+      <p:sp>
+        <p:nvSpPr>
+          <p:cNvPr id="15" name="">
+            <a:extLst xmlns:a="http://schemas.openxmlformats.org/drawingml/2006/main">
+              <a:ext uri="{FF2B5EF4-FFF2-40B4-BE49-F238E27FC236}">
+                <a16:creationId xmlns:a16="http://schemas.microsoft.com/office/drawing/2014/main" id="{02D86213-33F0-4834-BB9E-F98D935747EC}"/>
+              </a:ext>
+            </a:extLst>
+          </p:cNvPr>
+          <p:cNvSpPr>
+            <a:spLocks xmlns:a="http://schemas.openxmlformats.org/drawingml/2006/main" noGrp="1"/>
+          </p:cNvSpPr>
+          <p:nvPr/>
+        </p:nvSpPr>
+        <p:spPr>
+          <a:xfrm xmlns:a="http://schemas.openxmlformats.org/drawingml/2006/main">
+            <a:off x="609600" y="361950"/>
+            <a:ext cx="3429000" cy="228600"/>
+          </a:xfrm>
+          <a:prstGeom xmlns:a="http://schemas.openxmlformats.org/drawingml/2006/main" prst="rect">
+            <a:avLst/>
+          </a:prstGeom>
+          <a:noFill xmlns:a="http://schemas.openxmlformats.org/drawingml/2006/main"/>
+          <a:ln xmlns:a="http://schemas.openxmlformats.org/drawingml/2006/main" w="0">
+            <a:noFill/>
+            <a:prstDash val="solid"/>
+          </a:ln>
+        </p:spPr>
+        <p:txBody>
+          <a:bodyPr xmlns:a="http://schemas.openxmlformats.org/drawingml/2006/main"/>
+          <a:lstStyle xmlns:a="http://schemas.openxmlformats.org/drawingml/2006/main"/>
+          <a:p xmlns:a="http://schemas.openxmlformats.org/drawingml/2006/main">
+            <a:pPr algn="l">
+              <a:defRPr sz="975" b="1">
+                <a:solidFill>
+                  <a:srgbClr val="F2ED55"/>
+                </a:solidFill>
+              </a:defRPr>
+            </a:pPr>
+            <a:r>
+              <a:rPr sz="975" b="1">
+                <a:solidFill>
+                  <a:srgbClr val="F2ED55"/>
+                </a:solidFill>
+              </a:rPr>
+              <a:t>WHY IT WINS</a:t>
+            </a:r>
+          </a:p>
+        </p:txBody>
+      </p:sp>
+      <p:sp>
+        <p:nvSpPr>
+          <p:cNvPr id="2" name="">
+            <a:extLst xmlns:a="http://schemas.openxmlformats.org/drawingml/2006/main">
+              <a:ext uri="{FF2B5EF4-FFF2-40B4-BE49-F238E27FC236}">
+                <a16:creationId xmlns:a16="http://schemas.microsoft.com/office/drawing/2014/main" id="{F7255764-0FA7-4C04-9E37-4C465956452B}"/>
+              </a:ext>
+            </a:extLst>
+          </p:cNvPr>
+          <p:cNvSpPr>
+            <a:spLocks xmlns:a="http://schemas.openxmlformats.org/drawingml/2006/main" noGrp="1"/>
+          </p:cNvSpPr>
+          <p:nvPr/>
+        </p:nvSpPr>
+        <p:spPr>
+          <a:xfrm xmlns:a="http://schemas.openxmlformats.org/drawingml/2006/main">
+            <a:off x="609600" y="666750"/>
+            <a:ext cx="10668000" cy="552450"/>
+          </a:xfrm>
+          <a:prstGeom xmlns:a="http://schemas.openxmlformats.org/drawingml/2006/main" prst="rect">
+            <a:avLst/>
+          </a:prstGeom>
+          <a:noFill xmlns:a="http://schemas.openxmlformats.org/drawingml/2006/main"/>
+          <a:ln xmlns:a="http://schemas.openxmlformats.org/drawingml/2006/main" w="0">
+            <a:noFill/>
+            <a:prstDash val="solid"/>
+          </a:ln>
+        </p:spPr>
+        <p:txBody>
+          <a:bodyPr xmlns:a="http://schemas.openxmlformats.org/drawingml/2006/main"/>
+          <a:lstStyle xmlns:a="http://schemas.openxmlformats.org/drawingml/2006/main"/>
+          <a:p xmlns:a="http://schemas.openxmlformats.org/drawingml/2006/main">
+            <a:pPr algn="l">
+              <a:defRPr sz="2700" b="1">
+                <a:solidFill>
+                  <a:srgbClr val="F5F7F6"/>
+                </a:solidFill>
+              </a:defRPr>
+            </a:pPr>
+            <a:r>
+              <a:rPr sz="2700" b="1">
+                <a:solidFill>
+                  <a:srgbClr val="F5F7F6"/>
+                </a:solidFill>
+              </a:rPr>
+              <a:t>A practical adoption layer for Rain and Monad.</a:t>
+            </a:r>
+          </a:p>
+        </p:txBody>
+      </p:sp>
+      <p:sp>
+        <p:nvSpPr>
+          <p:cNvPr id="3" name="">
+            <a:extLst xmlns:a="http://schemas.openxmlformats.org/drawingml/2006/main">
+              <a:ext uri="{FF2B5EF4-FFF2-40B4-BE49-F238E27FC236}">
+                <a16:creationId xmlns:a16="http://schemas.microsoft.com/office/drawing/2014/main" id="{68576CE1-E1F3-4BE1-B69D-18318E111BD1}"/>
+              </a:ext>
+            </a:extLst>
+          </p:cNvPr>
+          <p:cNvSpPr>
+            <a:spLocks xmlns:a="http://schemas.openxmlformats.org/drawingml/2006/main" noGrp="1"/>
+          </p:cNvSpPr>
+          <p:nvPr/>
+        </p:nvSpPr>
+        <p:spPr>
+          <a:xfrm xmlns:a="http://schemas.openxmlformats.org/drawingml/2006/main">
+            <a:off x="609600" y="1257300"/>
+            <a:ext cx="10972800" cy="9525"/>
           </a:xfrm>
           <a:prstGeom xmlns:a="http://schemas.openxmlformats.org/drawingml/2006/main" prst="rect">
             <a:avLst/>
@@ -3672,22 +3901,72 @@
       </p:sp>
       <p:sp>
         <p:nvSpPr>
-          <p:cNvPr id="8" name="">
-            <a:extLst xmlns:a="http://schemas.openxmlformats.org/drawingml/2006/main">
-              <a:ext uri="{FF2B5EF4-FFF2-40B4-BE49-F238E27FC236}">
-                <a16:creationId xmlns:a16="http://schemas.microsoft.com/office/drawing/2014/main" id="{C8F9FB1E-CD36-44C4-B6C3-01803CECF039}"/>
-              </a:ext>
-            </a:extLst>
-          </p:cNvPr>
-          <p:cNvSpPr>
-            <a:spLocks xmlns:a="http://schemas.openxmlformats.org/drawingml/2006/main" noGrp="1"/>
-          </p:cNvSpPr>
-          <p:nvPr/>
-        </p:nvSpPr>
-        <p:spPr>
-          <a:xfrm xmlns:a="http://schemas.openxmlformats.org/drawingml/2006/main">
-            <a:off x="4429125" y="1762125"/>
-            <a:ext cx="2857500" cy="428625"/>
+          <p:cNvPr id="4" name="">
+            <a:extLst xmlns:a="http://schemas.openxmlformats.org/drawingml/2006/main">
+              <a:ext uri="{FF2B5EF4-FFF2-40B4-BE49-F238E27FC236}">
+                <a16:creationId xmlns:a16="http://schemas.microsoft.com/office/drawing/2014/main" id="{2397F0F4-E552-467D-AA49-423F6467EC1B}"/>
+              </a:ext>
+            </a:extLst>
+          </p:cNvPr>
+          <p:cNvSpPr>
+            <a:spLocks xmlns:a="http://schemas.openxmlformats.org/drawingml/2006/main" noGrp="1"/>
+          </p:cNvSpPr>
+          <p:nvPr/>
+        </p:nvSpPr>
+        <p:spPr>
+          <a:xfrm xmlns:a="http://schemas.openxmlformats.org/drawingml/2006/main">
+            <a:off x="11144250" y="6419850"/>
+            <a:ext cx="438150" cy="190500"/>
+          </a:xfrm>
+          <a:prstGeom xmlns:a="http://schemas.openxmlformats.org/drawingml/2006/main" prst="rect">
+            <a:avLst/>
+          </a:prstGeom>
+          <a:noFill xmlns:a="http://schemas.openxmlformats.org/drawingml/2006/main"/>
+          <a:ln xmlns:a="http://schemas.openxmlformats.org/drawingml/2006/main" w="0">
+            <a:noFill/>
+            <a:prstDash val="solid"/>
+          </a:ln>
+        </p:spPr>
+        <p:txBody>
+          <a:bodyPr xmlns:a="http://schemas.openxmlformats.org/drawingml/2006/main"/>
+          <a:lstStyle xmlns:a="http://schemas.openxmlformats.org/drawingml/2006/main"/>
+          <a:p xmlns:a="http://schemas.openxmlformats.org/drawingml/2006/main">
+            <a:pPr algn="r">
+              <a:defRPr sz="900" b="1">
+                <a:solidFill>
+                  <a:srgbClr val="98A19F"/>
+                </a:solidFill>
+              </a:defRPr>
+            </a:pPr>
+            <a:r>
+              <a:rPr sz="900" b="1">
+                <a:solidFill>
+                  <a:srgbClr val="98A19F"/>
+                </a:solidFill>
+              </a:rPr>
+              <a:t>13</a:t>
+            </a:r>
+          </a:p>
+        </p:txBody>
+      </p:sp>
+      <p:sp>
+        <p:nvSpPr>
+          <p:cNvPr id="5" name="">
+            <a:extLst xmlns:a="http://schemas.openxmlformats.org/drawingml/2006/main">
+              <a:ext uri="{FF2B5EF4-FFF2-40B4-BE49-F238E27FC236}">
+                <a16:creationId xmlns:a16="http://schemas.microsoft.com/office/drawing/2014/main" id="{9533193F-0295-4A0D-9688-676B17927636}"/>
+              </a:ext>
+            </a:extLst>
+          </p:cNvPr>
+          <p:cNvSpPr>
+            <a:spLocks xmlns:a="http://schemas.openxmlformats.org/drawingml/2006/main" noGrp="1"/>
+          </p:cNvSpPr>
+          <p:nvPr/>
+        </p:nvSpPr>
+        <p:spPr>
+          <a:xfrm xmlns:a="http://schemas.openxmlformats.org/drawingml/2006/main">
+            <a:off x="666750" y="1762125"/>
+            <a:ext cx="3238500" cy="428625"/>
           </a:xfrm>
           <a:prstGeom xmlns:a="http://schemas.openxmlformats.org/drawingml/2006/main" prst="rect">
             <a:avLst/>
@@ -3705,39 +3984,39 @@
             <a:pPr algn="l">
               <a:defRPr sz="2100" b="1">
                 <a:solidFill>
-                  <a:srgbClr val="64D4CA"/>
+                  <a:srgbClr val="42BDEA"/>
                 </a:solidFill>
               </a:defRPr>
             </a:pPr>
             <a:r>
               <a:rPr sz="2100" b="1">
                 <a:solidFill>
-                  <a:srgbClr val="64D4CA"/>
-                </a:solidFill>
-              </a:rPr>
-              <a:t>General track</a:t>
-            </a:r>
-          </a:p>
-        </p:txBody>
-      </p:sp>
-      <p:sp>
-        <p:nvSpPr>
-          <p:cNvPr id="9" name="">
-            <a:extLst xmlns:a="http://schemas.openxmlformats.org/drawingml/2006/main">
-              <a:ext uri="{FF2B5EF4-FFF2-40B4-BE49-F238E27FC236}">
-                <a16:creationId xmlns:a16="http://schemas.microsoft.com/office/drawing/2014/main" id="{EAA6BC74-42C2-473C-80F8-1F575FB0B2EF}"/>
-              </a:ext>
-            </a:extLst>
-          </p:cNvPr>
-          <p:cNvSpPr>
-            <a:spLocks xmlns:a="http://schemas.openxmlformats.org/drawingml/2006/main" noGrp="1"/>
-          </p:cNvSpPr>
-          <p:nvPr/>
-        </p:nvSpPr>
-        <p:spPr>
-          <a:xfrm xmlns:a="http://schemas.openxmlformats.org/drawingml/2006/main">
-            <a:off x="4429125" y="2333625"/>
-            <a:ext cx="2857500" cy="1095375"/>
+                  <a:srgbClr val="42BDEA"/>
+                </a:solidFill>
+              </a:rPr>
+              <a:t>Best use of Rain</a:t>
+            </a:r>
+          </a:p>
+        </p:txBody>
+      </p:sp>
+      <p:sp>
+        <p:nvSpPr>
+          <p:cNvPr id="6" name="">
+            <a:extLst xmlns:a="http://schemas.openxmlformats.org/drawingml/2006/main">
+              <a:ext uri="{FF2B5EF4-FFF2-40B4-BE49-F238E27FC236}">
+                <a16:creationId xmlns:a16="http://schemas.microsoft.com/office/drawing/2014/main" id="{E601D75B-0E20-4DAC-938C-06F9FD8AB9A6}"/>
+              </a:ext>
+            </a:extLst>
+          </p:cNvPr>
+          <p:cNvSpPr>
+            <a:spLocks xmlns:a="http://schemas.openxmlformats.org/drawingml/2006/main" noGrp="1"/>
+          </p:cNvSpPr>
+          <p:nvPr/>
+        </p:nvSpPr>
+        <p:spPr>
+          <a:xfrm xmlns:a="http://schemas.openxmlformats.org/drawingml/2006/main">
+            <a:off x="666750" y="2333625"/>
+            <a:ext cx="3143250" cy="1190625"/>
           </a:xfrm>
           <a:prstGeom xmlns:a="http://schemas.openxmlformats.org/drawingml/2006/main" prst="rect">
             <a:avLst/>
@@ -3765,29 +4044,29 @@
                   <a:srgbClr val="98A19F"/>
                 </a:solidFill>
               </a:rPr>
-              <a:t>Agents discover, negotiate, stop for approval, move test or sandbox money, and verify delivery.</a:t>
-            </a:r>
-          </a:p>
-        </p:txBody>
-      </p:sp>
-      <p:sp>
-        <p:nvSpPr>
-          <p:cNvPr id="10" name="">
-            <a:extLst xmlns:a="http://schemas.openxmlformats.org/drawingml/2006/main">
-              <a:ext uri="{FF2B5EF4-FFF2-40B4-BE49-F238E27FC236}">
-                <a16:creationId xmlns:a16="http://schemas.microsoft.com/office/drawing/2014/main" id="{48E01D4A-0A2A-4B85-AF23-4ECA8F9B18ED}"/>
-              </a:ext>
-            </a:extLst>
-          </p:cNvPr>
-          <p:cNvSpPr>
-            <a:spLocks xmlns:a="http://schemas.openxmlformats.org/drawingml/2006/main" noGrp="1"/>
-          </p:cNvSpPr>
-          <p:nvPr/>
-        </p:nvSpPr>
-        <p:spPr>
-          <a:xfrm xmlns:a="http://schemas.openxmlformats.org/drawingml/2006/main">
-            <a:off x="7667625" y="1714500"/>
-            <a:ext cx="9525" cy="2571750"/>
+              <a:t>Scoped cards, policy declines, approved settlement, transaction retrieval, payment accounts, routes, and treasury movement.</a:t>
+            </a:r>
+          </a:p>
+        </p:txBody>
+      </p:sp>
+      <p:sp>
+        <p:nvSpPr>
+          <p:cNvPr id="7" name="">
+            <a:extLst xmlns:a="http://schemas.openxmlformats.org/drawingml/2006/main">
+              <a:ext uri="{FF2B5EF4-FFF2-40B4-BE49-F238E27FC236}">
+                <a16:creationId xmlns:a16="http://schemas.microsoft.com/office/drawing/2014/main" id="{789BE140-D967-4861-8A58-F105C740F96C}"/>
+              </a:ext>
+            </a:extLst>
+          </p:cNvPr>
+          <p:cNvSpPr>
+            <a:spLocks xmlns:a="http://schemas.openxmlformats.org/drawingml/2006/main" noGrp="1"/>
+          </p:cNvSpPr>
+          <p:nvPr/>
+        </p:nvSpPr>
+        <p:spPr>
+          <a:xfrm xmlns:a="http://schemas.openxmlformats.org/drawingml/2006/main">
+            <a:off x="4048125" y="1714500"/>
+            <a:ext cx="9525" cy="2762250"/>
           </a:xfrm>
           <a:prstGeom xmlns:a="http://schemas.openxmlformats.org/drawingml/2006/main" prst="rect">
             <a:avLst/>
@@ -3805,10 +4084,143 @@
       </p:sp>
       <p:sp>
         <p:nvSpPr>
+          <p:cNvPr id="8" name="">
+            <a:extLst xmlns:a="http://schemas.openxmlformats.org/drawingml/2006/main">
+              <a:ext uri="{FF2B5EF4-FFF2-40B4-BE49-F238E27FC236}">
+                <a16:creationId xmlns:a16="http://schemas.microsoft.com/office/drawing/2014/main" id="{F808F37A-F68D-4C7C-811D-5105363339D8}"/>
+              </a:ext>
+            </a:extLst>
+          </p:cNvPr>
+          <p:cNvSpPr>
+            <a:spLocks xmlns:a="http://schemas.openxmlformats.org/drawingml/2006/main" noGrp="1"/>
+          </p:cNvSpPr>
+          <p:nvPr/>
+        </p:nvSpPr>
+        <p:spPr>
+          <a:xfrm xmlns:a="http://schemas.openxmlformats.org/drawingml/2006/main">
+            <a:off x="4429125" y="1762125"/>
+            <a:ext cx="2857500" cy="428625"/>
+          </a:xfrm>
+          <a:prstGeom xmlns:a="http://schemas.openxmlformats.org/drawingml/2006/main" prst="rect">
+            <a:avLst/>
+          </a:prstGeom>
+          <a:noFill xmlns:a="http://schemas.openxmlformats.org/drawingml/2006/main"/>
+          <a:ln xmlns:a="http://schemas.openxmlformats.org/drawingml/2006/main" w="0">
+            <a:noFill/>
+            <a:prstDash val="solid"/>
+          </a:ln>
+        </p:spPr>
+        <p:txBody>
+          <a:bodyPr xmlns:a="http://schemas.openxmlformats.org/drawingml/2006/main"/>
+          <a:lstStyle xmlns:a="http://schemas.openxmlformats.org/drawingml/2006/main"/>
+          <a:p xmlns:a="http://schemas.openxmlformats.org/drawingml/2006/main">
+            <a:pPr algn="l">
+              <a:defRPr sz="2100" b="1">
+                <a:solidFill>
+                  <a:srgbClr val="64D4CA"/>
+                </a:solidFill>
+              </a:defRPr>
+            </a:pPr>
+            <a:r>
+              <a:rPr sz="2100" b="1">
+                <a:solidFill>
+                  <a:srgbClr val="64D4CA"/>
+                </a:solidFill>
+              </a:rPr>
+              <a:t>General track</a:t>
+            </a:r>
+          </a:p>
+        </p:txBody>
+      </p:sp>
+      <p:sp>
+        <p:nvSpPr>
+          <p:cNvPr id="9" name="">
+            <a:extLst xmlns:a="http://schemas.openxmlformats.org/drawingml/2006/main">
+              <a:ext uri="{FF2B5EF4-FFF2-40B4-BE49-F238E27FC236}">
+                <a16:creationId xmlns:a16="http://schemas.microsoft.com/office/drawing/2014/main" id="{73DC636C-B8DB-4FF1-8DFB-C269CA153180}"/>
+              </a:ext>
+            </a:extLst>
+          </p:cNvPr>
+          <p:cNvSpPr>
+            <a:spLocks xmlns:a="http://schemas.openxmlformats.org/drawingml/2006/main" noGrp="1"/>
+          </p:cNvSpPr>
+          <p:nvPr/>
+        </p:nvSpPr>
+        <p:spPr>
+          <a:xfrm xmlns:a="http://schemas.openxmlformats.org/drawingml/2006/main">
+            <a:off x="4429125" y="2333625"/>
+            <a:ext cx="2857500" cy="1190625"/>
+          </a:xfrm>
+          <a:prstGeom xmlns:a="http://schemas.openxmlformats.org/drawingml/2006/main" prst="rect">
+            <a:avLst/>
+          </a:prstGeom>
+          <a:noFill xmlns:a="http://schemas.openxmlformats.org/drawingml/2006/main"/>
+          <a:ln xmlns:a="http://schemas.openxmlformats.org/drawingml/2006/main" w="0">
+            <a:noFill/>
+            <a:prstDash val="solid"/>
+          </a:ln>
+        </p:spPr>
+        <p:txBody>
+          <a:bodyPr xmlns:a="http://schemas.openxmlformats.org/drawingml/2006/main"/>
+          <a:lstStyle xmlns:a="http://schemas.openxmlformats.org/drawingml/2006/main"/>
+          <a:p xmlns:a="http://schemas.openxmlformats.org/drawingml/2006/main">
+            <a:pPr algn="l">
+              <a:defRPr sz="1350" b="0">
+                <a:solidFill>
+                  <a:srgbClr val="98A19F"/>
+                </a:solidFill>
+              </a:defRPr>
+            </a:pPr>
+            <a:r>
+              <a:rPr sz="1350" b="0">
+                <a:solidFill>
+                  <a:srgbClr val="98A19F"/>
+                </a:solidFill>
+              </a:rPr>
+              <a:t>Agents discover, negotiate, stop for approval, move test or sandbox money, and verify delivery in one working flow.</a:t>
+            </a:r>
+          </a:p>
+        </p:txBody>
+      </p:sp>
+      <p:sp>
+        <p:nvSpPr>
+          <p:cNvPr id="10" name="">
+            <a:extLst xmlns:a="http://schemas.openxmlformats.org/drawingml/2006/main">
+              <a:ext uri="{FF2B5EF4-FFF2-40B4-BE49-F238E27FC236}">
+                <a16:creationId xmlns:a16="http://schemas.microsoft.com/office/drawing/2014/main" id="{8A68DDA7-C1F5-47D8-8393-2C06AA88CD14}"/>
+              </a:ext>
+            </a:extLst>
+          </p:cNvPr>
+          <p:cNvSpPr>
+            <a:spLocks xmlns:a="http://schemas.openxmlformats.org/drawingml/2006/main" noGrp="1"/>
+          </p:cNvSpPr>
+          <p:nvPr/>
+        </p:nvSpPr>
+        <p:spPr>
+          <a:xfrm xmlns:a="http://schemas.openxmlformats.org/drawingml/2006/main">
+            <a:off x="7667625" y="1714500"/>
+            <a:ext cx="9525" cy="2762250"/>
+          </a:xfrm>
+          <a:prstGeom xmlns:a="http://schemas.openxmlformats.org/drawingml/2006/main" prst="rect">
+            <a:avLst/>
+          </a:prstGeom>
+          <a:solidFill xmlns:a="http://schemas.openxmlformats.org/drawingml/2006/main">
+            <a:srgbClr val="2B3735"/>
+          </a:solidFill>
+          <a:ln xmlns:a="http://schemas.openxmlformats.org/drawingml/2006/main" w="0">
+            <a:solidFill>
+              <a:srgbClr val="2B3735"/>
+            </a:solidFill>
+            <a:prstDash val="solid"/>
+          </a:ln>
+        </p:spPr>
+      </p:sp>
+      <p:sp>
+        <p:nvSpPr>
           <p:cNvPr id="11" name="">
             <a:extLst xmlns:a="http://schemas.openxmlformats.org/drawingml/2006/main">
               <a:ext uri="{FF2B5EF4-FFF2-40B4-BE49-F238E27FC236}">
-                <a16:creationId xmlns:a16="http://schemas.microsoft.com/office/drawing/2014/main" id="{339E48B8-8F6F-433B-99E5-0E155C403FCD}"/>
+                <a16:creationId xmlns:a16="http://schemas.microsoft.com/office/drawing/2014/main" id="{4DFD2A3B-BBF5-4B96-9AB8-F3C980CF370E}"/>
               </a:ext>
             </a:extLst>
           </p:cNvPr>
@@ -3858,7 +4270,7 @@
           <p:cNvPr id="12" name="">
             <a:extLst xmlns:a="http://schemas.openxmlformats.org/drawingml/2006/main">
               <a:ext uri="{FF2B5EF4-FFF2-40B4-BE49-F238E27FC236}">
-                <a16:creationId xmlns:a16="http://schemas.microsoft.com/office/drawing/2014/main" id="{8F9350F5-9C0F-4C90-84B9-170B54324A81}"/>
+                <a16:creationId xmlns:a16="http://schemas.microsoft.com/office/drawing/2014/main" id="{AC9F4DA6-2CA0-4E05-81BD-34FBFB35308F}"/>
               </a:ext>
             </a:extLst>
           </p:cNvPr>
@@ -3870,7 +4282,7 @@
         <p:spPr>
           <a:xfrm xmlns:a="http://schemas.openxmlformats.org/drawingml/2006/main">
             <a:off x="8048625" y="2333625"/>
-            <a:ext cx="3143250" cy="1095375"/>
+            <a:ext cx="3143250" cy="1190625"/>
           </a:xfrm>
           <a:prstGeom xmlns:a="http://schemas.openxmlformats.org/drawingml/2006/main" prst="rect">
             <a:avLst/>
@@ -3898,7 +4310,7 @@
                   <a:srgbClr val="98A19F"/>
                 </a:solidFill>
               </a:rPr>
-              <a:t>Monad handles machine settlement. Rain handles traditional procurement. One policy layer chooses both.</a:t>
+              <a:t>Monad handles native machine settlement and high-value terms. Rain reaches traditional merchants and treasury routes.</a:t>
             </a:r>
           </a:p>
         </p:txBody>
@@ -3908,7 +4320,7 @@
           <p:cNvPr id="13" name="">
             <a:extLst xmlns:a="http://schemas.openxmlformats.org/drawingml/2006/main">
               <a:ext uri="{FF2B5EF4-FFF2-40B4-BE49-F238E27FC236}">
-                <a16:creationId xmlns:a16="http://schemas.microsoft.com/office/drawing/2014/main" id="{1D82302F-AA58-40D1-8C43-8D12F8DB9A57}"/>
+                <a16:creationId xmlns:a16="http://schemas.microsoft.com/office/drawing/2014/main" id="{DAFFF750-158B-4DD4-9AE0-9E21406BDE61}"/>
               </a:ext>
             </a:extLst>
           </p:cNvPr>
@@ -3948,7 +4360,7 @@
                   <a:srgbClr val="F5F7F6"/>
                 </a:solidFill>
               </a:rPr>
-              <a:t>Raingentic turns a company's existing commerce into governed agent infrastructure.</a:t>
+              <a:t>Connect what the company already has. Become agent-commerce ready in hours.</a:t>
             </a:r>
           </a:p>
         </p:txBody>
@@ -3958,19 +4370,19 @@
           <p:cNvPr id="14" name="">
             <a:extLst xmlns:a="http://schemas.openxmlformats.org/drawingml/2006/main">
               <a:ext uri="{FF2B5EF4-FFF2-40B4-BE49-F238E27FC236}">
-                <a16:creationId xmlns:a16="http://schemas.microsoft.com/office/drawing/2014/main" id="{E05AFE08-13EE-409B-9180-1878A3B55257}"/>
-              </a:ext>
-            </a:extLst>
-          </p:cNvPr>
-          <p:cNvSpPr>
-            <a:spLocks xmlns:a="http://schemas.openxmlformats.org/drawingml/2006/main" noGrp="1"/>
-          </p:cNvSpPr>
-          <p:nvPr/>
-        </p:nvSpPr>
-        <p:spPr>
-          <a:xfrm xmlns:a="http://schemas.openxmlformats.org/drawingml/2006/main">
-            <a:off x="666750" y="6000750"/>
-            <a:ext cx="4000500" cy="266700"/>
+                <a16:creationId xmlns:a16="http://schemas.microsoft.com/office/drawing/2014/main" id="{AB7BAA84-A0DE-43D6-B57F-011B87B1AEA3}"/>
+              </a:ext>
+            </a:extLst>
+          </p:cNvPr>
+          <p:cNvSpPr>
+            <a:spLocks xmlns:a="http://schemas.openxmlformats.org/drawingml/2006/main" noGrp="1"/>
+          </p:cNvSpPr>
+          <p:nvPr/>
+        </p:nvSpPr>
+        <p:spPr>
+          <a:xfrm xmlns:a="http://schemas.openxmlformats.org/drawingml/2006/main">
+            <a:off x="666750" y="5953125"/>
+            <a:ext cx="6191250" cy="304800"/>
           </a:xfrm>
           <a:prstGeom xmlns:a="http://schemas.openxmlformats.org/drawingml/2006/main" prst="rect">
             <a:avLst/>
@@ -3998,7 +4410,7 @@
                   <a:srgbClr val="F2ED55"/>
                 </a:solidFill>
               </a:rPr>
-              <a:t>raingentic.saibolla.com</a:t>
+              <a:t>Agent skill · SDK direction · raingentic.saibolla.com</a:t>
             </a:r>
           </a:p>
         </p:txBody>
@@ -4006,7 +4418,7 @@
     </p:spTree>
     <p:extLst>
       <p:ext uri="{BB962C8B-B14F-4D97-AF65-F5344CB8AC3E}">
-        <p14:creationId xmlns:p14="http://schemas.microsoft.com/office/powerpoint/2010/main" val="1485003224"/>
+        <p14:creationId xmlns:p14="http://schemas.microsoft.com/office/powerpoint/2010/main" val="547627757"/>
       </p:ext>
     </p:extLst>
   </p:cSld>
@@ -4037,7 +4449,7 @@
           <p:cNvPr id="14" name="">
             <a:extLst xmlns:a="http://schemas.openxmlformats.org/drawingml/2006/main">
               <a:ext uri="{FF2B5EF4-FFF2-40B4-BE49-F238E27FC236}">
-                <a16:creationId xmlns:a16="http://schemas.microsoft.com/office/drawing/2014/main" id="{69DCF5A3-0959-4E40-8AED-5ED9ADAD2B29}"/>
+                <a16:creationId xmlns:a16="http://schemas.microsoft.com/office/drawing/2014/main" id="{8C5F5708-A8D6-4EA2-9090-852928DE7AAF}"/>
               </a:ext>
             </a:extLst>
           </p:cNvPr>
@@ -4087,7 +4499,7 @@
           <p:cNvPr id="2" name="">
             <a:extLst xmlns:a="http://schemas.openxmlformats.org/drawingml/2006/main">
               <a:ext uri="{FF2B5EF4-FFF2-40B4-BE49-F238E27FC236}">
-                <a16:creationId xmlns:a16="http://schemas.microsoft.com/office/drawing/2014/main" id="{E595FC5E-FF66-4496-A703-E5998C47D240}"/>
+                <a16:creationId xmlns:a16="http://schemas.microsoft.com/office/drawing/2014/main" id="{A5478E56-D491-4469-8873-74F8EA5BCFC5}"/>
               </a:ext>
             </a:extLst>
           </p:cNvPr>
@@ -4137,7 +4549,7 @@
           <p:cNvPr id="3" name="">
             <a:extLst xmlns:a="http://schemas.openxmlformats.org/drawingml/2006/main">
               <a:ext uri="{FF2B5EF4-FFF2-40B4-BE49-F238E27FC236}">
-                <a16:creationId xmlns:a16="http://schemas.microsoft.com/office/drawing/2014/main" id="{8F2AF0BA-B77B-4C7F-AB6C-0DA011BC3B8F}"/>
+                <a16:creationId xmlns:a16="http://schemas.microsoft.com/office/drawing/2014/main" id="{B1809A9E-7E91-4F4C-BA3D-D07AE06CBD86}"/>
               </a:ext>
             </a:extLst>
           </p:cNvPr>
@@ -4170,7 +4582,7 @@
           <p:cNvPr id="4" name="">
             <a:extLst xmlns:a="http://schemas.openxmlformats.org/drawingml/2006/main">
               <a:ext uri="{FF2B5EF4-FFF2-40B4-BE49-F238E27FC236}">
-                <a16:creationId xmlns:a16="http://schemas.microsoft.com/office/drawing/2014/main" id="{E0E73700-47B9-44FD-8A70-C2EE4314FFAF}"/>
+                <a16:creationId xmlns:a16="http://schemas.microsoft.com/office/drawing/2014/main" id="{BB4195AE-1524-4CB0-BCA2-6A9D895512F4}"/>
               </a:ext>
             </a:extLst>
           </p:cNvPr>
@@ -4220,7 +4632,7 @@
           <p:cNvPr id="5" name="">
             <a:extLst xmlns:a="http://schemas.openxmlformats.org/drawingml/2006/main">
               <a:ext uri="{FF2B5EF4-FFF2-40B4-BE49-F238E27FC236}">
-                <a16:creationId xmlns:a16="http://schemas.microsoft.com/office/drawing/2014/main" id="{82E7502F-03F1-4AE7-B477-BC3FF64F1661}"/>
+                <a16:creationId xmlns:a16="http://schemas.microsoft.com/office/drawing/2014/main" id="{EAED11A5-BAF5-415B-B1BC-C2173BBC486E}"/>
               </a:ext>
             </a:extLst>
           </p:cNvPr>
@@ -4270,7 +4682,7 @@
           <p:cNvPr id="6" name="">
             <a:extLst xmlns:a="http://schemas.openxmlformats.org/drawingml/2006/main">
               <a:ext uri="{FF2B5EF4-FFF2-40B4-BE49-F238E27FC236}">
-                <a16:creationId xmlns:a16="http://schemas.microsoft.com/office/drawing/2014/main" id="{2DEF24A6-3A42-4FB7-8B8F-E472220EFB49}"/>
+                <a16:creationId xmlns:a16="http://schemas.microsoft.com/office/drawing/2014/main" id="{6594272C-1EE4-4BAE-972A-D0F6C16C55E5}"/>
               </a:ext>
             </a:extLst>
           </p:cNvPr>
@@ -4320,7 +4732,7 @@
           <p:cNvPr id="7" name="">
             <a:extLst xmlns:a="http://schemas.openxmlformats.org/drawingml/2006/main">
               <a:ext uri="{FF2B5EF4-FFF2-40B4-BE49-F238E27FC236}">
-                <a16:creationId xmlns:a16="http://schemas.microsoft.com/office/drawing/2014/main" id="{B653F801-E8D4-489E-94C7-ADE1584B94A3}"/>
+                <a16:creationId xmlns:a16="http://schemas.microsoft.com/office/drawing/2014/main" id="{8B4E3E32-C8BE-4334-A2AD-CBA7A9D2FA71}"/>
               </a:ext>
             </a:extLst>
           </p:cNvPr>
@@ -4353,7 +4765,7 @@
           <p:cNvPr id="8" name="">
             <a:extLst xmlns:a="http://schemas.openxmlformats.org/drawingml/2006/main">
               <a:ext uri="{FF2B5EF4-FFF2-40B4-BE49-F238E27FC236}">
-                <a16:creationId xmlns:a16="http://schemas.microsoft.com/office/drawing/2014/main" id="{8D41BE17-9A46-416F-BF2B-7088413E9FC6}"/>
+                <a16:creationId xmlns:a16="http://schemas.microsoft.com/office/drawing/2014/main" id="{7FFBE812-D9B6-4ECF-8AB9-E5BFA9D72BCE}"/>
               </a:ext>
             </a:extLst>
           </p:cNvPr>
@@ -4403,7 +4815,7 @@
           <p:cNvPr id="9" name="">
             <a:extLst xmlns:a="http://schemas.openxmlformats.org/drawingml/2006/main">
               <a:ext uri="{FF2B5EF4-FFF2-40B4-BE49-F238E27FC236}">
-                <a16:creationId xmlns:a16="http://schemas.microsoft.com/office/drawing/2014/main" id="{A1C4BD95-9781-48E9-A3C6-2814EBD26A08}"/>
+                <a16:creationId xmlns:a16="http://schemas.microsoft.com/office/drawing/2014/main" id="{DA4B711B-C80A-42FA-9DF1-D186BAD9963A}"/>
               </a:ext>
             </a:extLst>
           </p:cNvPr>
@@ -4453,7 +4865,7 @@
           <p:cNvPr id="10" name="">
             <a:extLst xmlns:a="http://schemas.openxmlformats.org/drawingml/2006/main">
               <a:ext uri="{FF2B5EF4-FFF2-40B4-BE49-F238E27FC236}">
-                <a16:creationId xmlns:a16="http://schemas.microsoft.com/office/drawing/2014/main" id="{215371AD-3E52-49F6-85BC-0DC45DE99952}"/>
+                <a16:creationId xmlns:a16="http://schemas.microsoft.com/office/drawing/2014/main" id="{7857CE36-B370-47F9-90B9-CF070BAF457F}"/>
               </a:ext>
             </a:extLst>
           </p:cNvPr>
@@ -4486,7 +4898,7 @@
           <p:cNvPr id="11" name="">
             <a:extLst xmlns:a="http://schemas.openxmlformats.org/drawingml/2006/main">
               <a:ext uri="{FF2B5EF4-FFF2-40B4-BE49-F238E27FC236}">
-                <a16:creationId xmlns:a16="http://schemas.microsoft.com/office/drawing/2014/main" id="{906EC4AB-E133-42C2-8341-213D6D0840AF}"/>
+                <a16:creationId xmlns:a16="http://schemas.microsoft.com/office/drawing/2014/main" id="{96D8E68A-D9D8-4B88-BF2C-E7749A27FB08}"/>
               </a:ext>
             </a:extLst>
           </p:cNvPr>
@@ -4536,7 +4948,7 @@
           <p:cNvPr id="12" name="">
             <a:extLst xmlns:a="http://schemas.openxmlformats.org/drawingml/2006/main">
               <a:ext uri="{FF2B5EF4-FFF2-40B4-BE49-F238E27FC236}">
-                <a16:creationId xmlns:a16="http://schemas.microsoft.com/office/drawing/2014/main" id="{C1BB77B5-E733-4874-B688-6E7BB8820E80}"/>
+                <a16:creationId xmlns:a16="http://schemas.microsoft.com/office/drawing/2014/main" id="{06577538-079E-48DE-A5F5-65A15D37AD4A}"/>
               </a:ext>
             </a:extLst>
           </p:cNvPr>
@@ -4586,7 +4998,7 @@
           <p:cNvPr id="13" name="">
             <a:extLst xmlns:a="http://schemas.openxmlformats.org/drawingml/2006/main">
               <a:ext uri="{FF2B5EF4-FFF2-40B4-BE49-F238E27FC236}">
-                <a16:creationId xmlns:a16="http://schemas.microsoft.com/office/drawing/2014/main" id="{F0CAC5FC-8516-4754-8485-A008DC917422}"/>
+                <a16:creationId xmlns:a16="http://schemas.microsoft.com/office/drawing/2014/main" id="{E920BB94-E7E6-47FB-8A0D-01C8E9BFEFDF}"/>
               </a:ext>
             </a:extLst>
           </p:cNvPr>
@@ -4634,7 +5046,7 @@
     </p:spTree>
     <p:extLst>
       <p:ext uri="{BB962C8B-B14F-4D97-AF65-F5344CB8AC3E}">
-        <p14:creationId xmlns:p14="http://schemas.microsoft.com/office/powerpoint/2010/main" val="746266471"/>
+        <p14:creationId xmlns:p14="http://schemas.microsoft.com/office/powerpoint/2010/main" val="854834714"/>
       </p:ext>
     </p:extLst>
   </p:cSld>
@@ -4662,10 +5074,10 @@
       </p:grpSpPr>
       <p:sp>
         <p:nvSpPr>
-          <p:cNvPr id="14" name="">
-            <a:extLst xmlns:a="http://schemas.openxmlformats.org/drawingml/2006/main">
-              <a:ext uri="{FF2B5EF4-FFF2-40B4-BE49-F238E27FC236}">
-                <a16:creationId xmlns:a16="http://schemas.microsoft.com/office/drawing/2014/main" id="{A9C821D7-8715-49EE-BE30-A5764D22FEA6}"/>
+          <p:cNvPr id="20" name="">
+            <a:extLst xmlns:a="http://schemas.openxmlformats.org/drawingml/2006/main">
+              <a:ext uri="{FF2B5EF4-FFF2-40B4-BE49-F238E27FC236}">
+                <a16:creationId xmlns:a16="http://schemas.microsoft.com/office/drawing/2014/main" id="{0318409B-4E96-43B8-B23D-88A918C2C2AD}"/>
               </a:ext>
             </a:extLst>
           </p:cNvPr>
@@ -4715,7 +5127,7 @@
           <p:cNvPr id="2" name="">
             <a:extLst xmlns:a="http://schemas.openxmlformats.org/drawingml/2006/main">
               <a:ext uri="{FF2B5EF4-FFF2-40B4-BE49-F238E27FC236}">
-                <a16:creationId xmlns:a16="http://schemas.microsoft.com/office/drawing/2014/main" id="{378E184E-E071-471C-96FF-8A9D80A40182}"/>
+                <a16:creationId xmlns:a16="http://schemas.microsoft.com/office/drawing/2014/main" id="{5ED669EB-74C1-4343-A9A7-23BCEA25BC31}"/>
               </a:ext>
             </a:extLst>
           </p:cNvPr>
@@ -4755,7 +5167,7 @@
                   <a:srgbClr val="F5F7F6"/>
                 </a:solidFill>
               </a:rPr>
-              <a:t>One control plane governs both sides of commerce.</a:t>
+              <a:t>From an existing API or store to agent commerce in hours.</a:t>
             </a:r>
           </a:p>
         </p:txBody>
@@ -4765,7 +5177,7 @@
           <p:cNvPr id="3" name="">
             <a:extLst xmlns:a="http://schemas.openxmlformats.org/drawingml/2006/main">
               <a:ext uri="{FF2B5EF4-FFF2-40B4-BE49-F238E27FC236}">
-                <a16:creationId xmlns:a16="http://schemas.microsoft.com/office/drawing/2014/main" id="{8DCC5645-17DB-49D5-9648-0495DA90499A}"/>
+                <a16:creationId xmlns:a16="http://schemas.microsoft.com/office/drawing/2014/main" id="{05AF34F7-A7D4-464D-A11D-FBEEAE37C878}"/>
               </a:ext>
             </a:extLst>
           </p:cNvPr>
@@ -4798,7 +5210,7 @@
           <p:cNvPr id="4" name="">
             <a:extLst xmlns:a="http://schemas.openxmlformats.org/drawingml/2006/main">
               <a:ext uri="{FF2B5EF4-FFF2-40B4-BE49-F238E27FC236}">
-                <a16:creationId xmlns:a16="http://schemas.microsoft.com/office/drawing/2014/main" id="{614C3C92-105D-4D07-A70C-7C9BADD6914D}"/>
+                <a16:creationId xmlns:a16="http://schemas.microsoft.com/office/drawing/2014/main" id="{999ECA4D-92C2-41CD-9112-C31EF307F8CD}"/>
               </a:ext>
             </a:extLst>
           </p:cNvPr>
@@ -4848,7 +5260,7 @@
           <p:cNvPr id="5" name="">
             <a:extLst xmlns:a="http://schemas.openxmlformats.org/drawingml/2006/main">
               <a:ext uri="{FF2B5EF4-FFF2-40B4-BE49-F238E27FC236}">
-                <a16:creationId xmlns:a16="http://schemas.microsoft.com/office/drawing/2014/main" id="{2A3D7320-B3B0-403A-BE8C-E24A22779103}"/>
+                <a16:creationId xmlns:a16="http://schemas.microsoft.com/office/drawing/2014/main" id="{A1A65B2C-2DF3-40E6-9AA6-5973AD98B170}"/>
               </a:ext>
             </a:extLst>
           </p:cNvPr>
@@ -4860,548 +5272,788 @@
         <p:spPr>
           <a:xfrm xmlns:a="http://schemas.openxmlformats.org/drawingml/2006/main">
             <a:off x="666750" y="1809750"/>
-            <a:ext cx="1333500" cy="304800"/>
-          </a:xfrm>
-          <a:prstGeom xmlns:a="http://schemas.openxmlformats.org/drawingml/2006/main" prst="rect">
-            <a:avLst/>
-          </a:prstGeom>
-          <a:noFill xmlns:a="http://schemas.openxmlformats.org/drawingml/2006/main"/>
-          <a:ln xmlns:a="http://schemas.openxmlformats.org/drawingml/2006/main" w="0">
-            <a:noFill/>
-            <a:prstDash val="solid"/>
-          </a:ln>
-        </p:spPr>
-        <p:txBody>
-          <a:bodyPr xmlns:a="http://schemas.openxmlformats.org/drawingml/2006/main"/>
-          <a:lstStyle xmlns:a="http://schemas.openxmlformats.org/drawingml/2006/main"/>
-          <a:p xmlns:a="http://schemas.openxmlformats.org/drawingml/2006/main">
-            <a:pPr algn="l">
-              <a:defRPr sz="1200" b="1">
+            <a:ext cx="666750" cy="361950"/>
+          </a:xfrm>
+          <a:prstGeom xmlns:a="http://schemas.openxmlformats.org/drawingml/2006/main" prst="rect">
+            <a:avLst/>
+          </a:prstGeom>
+          <a:noFill xmlns:a="http://schemas.openxmlformats.org/drawingml/2006/main"/>
+          <a:ln xmlns:a="http://schemas.openxmlformats.org/drawingml/2006/main" w="0">
+            <a:noFill/>
+            <a:prstDash val="solid"/>
+          </a:ln>
+        </p:spPr>
+        <p:txBody>
+          <a:bodyPr xmlns:a="http://schemas.openxmlformats.org/drawingml/2006/main"/>
+          <a:lstStyle xmlns:a="http://schemas.openxmlformats.org/drawingml/2006/main"/>
+          <a:p xmlns:a="http://schemas.openxmlformats.org/drawingml/2006/main">
+            <a:pPr algn="l">
+              <a:defRPr sz="1725" b="1">
+                <a:solidFill>
+                  <a:srgbClr val="F2ED55"/>
+                </a:solidFill>
+              </a:defRPr>
+            </a:pPr>
+            <a:r>
+              <a:rPr sz="1725" b="1">
+                <a:solidFill>
+                  <a:srgbClr val="F2ED55"/>
+                </a:solidFill>
+              </a:rPr>
+              <a:t>01</a:t>
+            </a:r>
+          </a:p>
+        </p:txBody>
+      </p:sp>
+      <p:sp>
+        <p:nvSpPr>
+          <p:cNvPr id="6" name="">
+            <a:extLst xmlns:a="http://schemas.openxmlformats.org/drawingml/2006/main">
+              <a:ext uri="{FF2B5EF4-FFF2-40B4-BE49-F238E27FC236}">
+                <a16:creationId xmlns:a16="http://schemas.microsoft.com/office/drawing/2014/main" id="{38B10679-9BF9-4D4E-B5EC-72924EC0FC33}"/>
+              </a:ext>
+            </a:extLst>
+          </p:cNvPr>
+          <p:cNvSpPr>
+            <a:spLocks xmlns:a="http://schemas.openxmlformats.org/drawingml/2006/main" noGrp="1"/>
+          </p:cNvSpPr>
+          <p:nvPr/>
+        </p:nvSpPr>
+        <p:spPr>
+          <a:xfrm xmlns:a="http://schemas.openxmlformats.org/drawingml/2006/main">
+            <a:off x="666750" y="2238375"/>
+            <a:ext cx="2095500" cy="400050"/>
+          </a:xfrm>
+          <a:prstGeom xmlns:a="http://schemas.openxmlformats.org/drawingml/2006/main" prst="rect">
+            <a:avLst/>
+          </a:prstGeom>
+          <a:noFill xmlns:a="http://schemas.openxmlformats.org/drawingml/2006/main"/>
+          <a:ln xmlns:a="http://schemas.openxmlformats.org/drawingml/2006/main" w="0">
+            <a:noFill/>
+            <a:prstDash val="solid"/>
+          </a:ln>
+        </p:spPr>
+        <p:txBody>
+          <a:bodyPr xmlns:a="http://schemas.openxmlformats.org/drawingml/2006/main"/>
+          <a:lstStyle xmlns:a="http://schemas.openxmlformats.org/drawingml/2006/main"/>
+          <a:p xmlns:a="http://schemas.openxmlformats.org/drawingml/2006/main">
+            <a:pPr algn="l">
+              <a:defRPr sz="2100" b="1">
+                <a:solidFill>
+                  <a:srgbClr val="F5F7F6"/>
+                </a:solidFill>
+              </a:defRPr>
+            </a:pPr>
+            <a:r>
+              <a:rPr sz="2100" b="1">
+                <a:solidFill>
+                  <a:srgbClr val="F5F7F6"/>
+                </a:solidFill>
+              </a:rPr>
+              <a:t>Connect</a:t>
+            </a:r>
+          </a:p>
+        </p:txBody>
+      </p:sp>
+      <p:sp>
+        <p:nvSpPr>
+          <p:cNvPr id="7" name="">
+            <a:extLst xmlns:a="http://schemas.openxmlformats.org/drawingml/2006/main">
+              <a:ext uri="{FF2B5EF4-FFF2-40B4-BE49-F238E27FC236}">
+                <a16:creationId xmlns:a16="http://schemas.microsoft.com/office/drawing/2014/main" id="{BDC64362-C655-4826-AD98-E3A6CD23A70E}"/>
+              </a:ext>
+            </a:extLst>
+          </p:cNvPr>
+          <p:cNvSpPr>
+            <a:spLocks xmlns:a="http://schemas.openxmlformats.org/drawingml/2006/main" noGrp="1"/>
+          </p:cNvSpPr>
+          <p:nvPr/>
+        </p:nvSpPr>
+        <p:spPr>
+          <a:xfrm xmlns:a="http://schemas.openxmlformats.org/drawingml/2006/main">
+            <a:off x="666750" y="2781300"/>
+            <a:ext cx="2667000" cy="1143000"/>
+          </a:xfrm>
+          <a:prstGeom xmlns:a="http://schemas.openxmlformats.org/drawingml/2006/main" prst="rect">
+            <a:avLst/>
+          </a:prstGeom>
+          <a:noFill xmlns:a="http://schemas.openxmlformats.org/drawingml/2006/main"/>
+          <a:ln xmlns:a="http://schemas.openxmlformats.org/drawingml/2006/main" w="0">
+            <a:noFill/>
+            <a:prstDash val="solid"/>
+          </a:ln>
+        </p:spPr>
+        <p:txBody>
+          <a:bodyPr xmlns:a="http://schemas.openxmlformats.org/drawingml/2006/main"/>
+          <a:lstStyle xmlns:a="http://schemas.openxmlformats.org/drawingml/2006/main"/>
+          <a:p xmlns:a="http://schemas.openxmlformats.org/drawingml/2006/main">
+            <a:pPr algn="l">
+              <a:defRPr sz="1350" b="0">
+                <a:solidFill>
+                  <a:srgbClr val="98A19F"/>
+                </a:solidFill>
+              </a:defRPr>
+            </a:pPr>
+            <a:r>
+              <a:rPr sz="1350" b="0">
+                <a:solidFill>
+                  <a:srgbClr val="98A19F"/>
+                </a:solidFill>
+              </a:rPr>
+              <a:t>OpenAPI document</a:t>
+            </a:r>
+          </a:p>
+          <a:p xmlns:a="http://schemas.openxmlformats.org/drawingml/2006/main">
+            <a:pPr algn="l">
+              <a:defRPr sz="1350" b="0">
+                <a:solidFill>
+                  <a:srgbClr val="98A19F"/>
+                </a:solidFill>
+              </a:defRPr>
+            </a:pPr>
+            <a:r>
+              <a:rPr sz="1350" b="0">
+                <a:solidFill>
+                  <a:srgbClr val="98A19F"/>
+                </a:solidFill>
+              </a:rPr>
+              <a:t>Online store or catalog</a:t>
+            </a:r>
+          </a:p>
+          <a:p xmlns:a="http://schemas.openxmlformats.org/drawingml/2006/main">
+            <a:pPr algn="l">
+              <a:defRPr sz="1350" b="0">
+                <a:solidFill>
+                  <a:srgbClr val="98A19F"/>
+                </a:solidFill>
+              </a:defRPr>
+            </a:pPr>
+            <a:r>
+              <a:rPr sz="1350" b="0">
+                <a:solidFill>
+                  <a:srgbClr val="98A19F"/>
+                </a:solidFill>
+              </a:rPr>
+              <a:t>Billing or internal API</a:t>
+            </a:r>
+          </a:p>
+        </p:txBody>
+      </p:sp>
+      <p:sp>
+        <p:nvSpPr>
+          <p:cNvPr id="8" name="">
+            <a:extLst xmlns:a="http://schemas.openxmlformats.org/drawingml/2006/main">
+              <a:ext uri="{FF2B5EF4-FFF2-40B4-BE49-F238E27FC236}">
+                <a16:creationId xmlns:a16="http://schemas.microsoft.com/office/drawing/2014/main" id="{5455A5E0-DD99-4639-8438-A8F3A5643027}"/>
+              </a:ext>
+            </a:extLst>
+          </p:cNvPr>
+          <p:cNvSpPr>
+            <a:spLocks xmlns:a="http://schemas.openxmlformats.org/drawingml/2006/main" noGrp="1"/>
+          </p:cNvSpPr>
+          <p:nvPr/>
+        </p:nvSpPr>
+        <p:spPr>
+          <a:xfrm xmlns:a="http://schemas.openxmlformats.org/drawingml/2006/main">
+            <a:off x="3333750" y="3143250"/>
+            <a:ext cx="857250" cy="28575"/>
+          </a:xfrm>
+          <a:prstGeom xmlns:a="http://schemas.openxmlformats.org/drawingml/2006/main" prst="rect">
+            <a:avLst/>
+          </a:prstGeom>
+          <a:solidFill xmlns:a="http://schemas.openxmlformats.org/drawingml/2006/main">
+            <a:srgbClr val="2B3735"/>
+          </a:solidFill>
+          <a:ln xmlns:a="http://schemas.openxmlformats.org/drawingml/2006/main" w="0">
+            <a:solidFill>
+              <a:srgbClr val="2B3735"/>
+            </a:solidFill>
+            <a:prstDash val="solid"/>
+          </a:ln>
+        </p:spPr>
+      </p:sp>
+      <p:sp>
+        <p:nvSpPr>
+          <p:cNvPr id="9" name="">
+            <a:extLst xmlns:a="http://schemas.openxmlformats.org/drawingml/2006/main">
+              <a:ext uri="{FF2B5EF4-FFF2-40B4-BE49-F238E27FC236}">
+                <a16:creationId xmlns:a16="http://schemas.microsoft.com/office/drawing/2014/main" id="{FE819A33-C37D-4264-8751-C3E8416DF6E4}"/>
+              </a:ext>
+            </a:extLst>
+          </p:cNvPr>
+          <p:cNvSpPr>
+            <a:spLocks xmlns:a="http://schemas.openxmlformats.org/drawingml/2006/main" noGrp="1"/>
+          </p:cNvSpPr>
+          <p:nvPr/>
+        </p:nvSpPr>
+        <p:spPr>
+          <a:xfrm xmlns:a="http://schemas.openxmlformats.org/drawingml/2006/main">
+            <a:off x="4333875" y="1809750"/>
+            <a:ext cx="666750" cy="361950"/>
+          </a:xfrm>
+          <a:prstGeom xmlns:a="http://schemas.openxmlformats.org/drawingml/2006/main" prst="rect">
+            <a:avLst/>
+          </a:prstGeom>
+          <a:noFill xmlns:a="http://schemas.openxmlformats.org/drawingml/2006/main"/>
+          <a:ln xmlns:a="http://schemas.openxmlformats.org/drawingml/2006/main" w="0">
+            <a:noFill/>
+            <a:prstDash val="solid"/>
+          </a:ln>
+        </p:spPr>
+        <p:txBody>
+          <a:bodyPr xmlns:a="http://schemas.openxmlformats.org/drawingml/2006/main"/>
+          <a:lstStyle xmlns:a="http://schemas.openxmlformats.org/drawingml/2006/main"/>
+          <a:p xmlns:a="http://schemas.openxmlformats.org/drawingml/2006/main">
+            <a:pPr algn="l">
+              <a:defRPr sz="1725" b="1">
                 <a:solidFill>
                   <a:srgbClr val="64D4CA"/>
                 </a:solidFill>
               </a:defRPr>
             </a:pPr>
             <a:r>
-              <a:rPr sz="1200" b="1">
+              <a:rPr sz="1725" b="1">
                 <a:solidFill>
                   <a:srgbClr val="64D4CA"/>
                 </a:solidFill>
               </a:rPr>
-              <a:t>BUY</a:t>
-            </a:r>
-          </a:p>
-        </p:txBody>
-      </p:sp>
-      <p:sp>
-        <p:nvSpPr>
-          <p:cNvPr id="6" name="">
-            <a:extLst xmlns:a="http://schemas.openxmlformats.org/drawingml/2006/main">
-              <a:ext uri="{FF2B5EF4-FFF2-40B4-BE49-F238E27FC236}">
-                <a16:creationId xmlns:a16="http://schemas.microsoft.com/office/drawing/2014/main" id="{E3387A1B-C557-4A43-A478-43CE6FEA6E8C}"/>
-              </a:ext>
-            </a:extLst>
-          </p:cNvPr>
-          <p:cNvSpPr>
-            <a:spLocks xmlns:a="http://schemas.openxmlformats.org/drawingml/2006/main" noGrp="1"/>
-          </p:cNvSpPr>
-          <p:nvPr/>
-        </p:nvSpPr>
-        <p:spPr>
-          <a:xfrm xmlns:a="http://schemas.openxmlformats.org/drawingml/2006/main">
-            <a:off x="666750" y="2238375"/>
-            <a:ext cx="3238500" cy="381000"/>
-          </a:xfrm>
-          <a:prstGeom xmlns:a="http://schemas.openxmlformats.org/drawingml/2006/main" prst="rect">
-            <a:avLst/>
-          </a:prstGeom>
-          <a:noFill xmlns:a="http://schemas.openxmlformats.org/drawingml/2006/main"/>
-          <a:ln xmlns:a="http://schemas.openxmlformats.org/drawingml/2006/main" w="0">
-            <a:noFill/>
-            <a:prstDash val="solid"/>
-          </a:ln>
-        </p:spPr>
-        <p:txBody>
-          <a:bodyPr xmlns:a="http://schemas.openxmlformats.org/drawingml/2006/main"/>
-          <a:lstStyle xmlns:a="http://schemas.openxmlformats.org/drawingml/2006/main"/>
-          <a:p xmlns:a="http://schemas.openxmlformats.org/drawingml/2006/main">
-            <a:pPr algn="l">
-              <a:defRPr sz="1950" b="1">
+              <a:t>02</a:t>
+            </a:r>
+          </a:p>
+        </p:txBody>
+      </p:sp>
+      <p:sp>
+        <p:nvSpPr>
+          <p:cNvPr id="10" name="">
+            <a:extLst xmlns:a="http://schemas.openxmlformats.org/drawingml/2006/main">
+              <a:ext uri="{FF2B5EF4-FFF2-40B4-BE49-F238E27FC236}">
+                <a16:creationId xmlns:a16="http://schemas.microsoft.com/office/drawing/2014/main" id="{9F1B94C2-1304-4278-84D1-B1C2CDB75C9C}"/>
+              </a:ext>
+            </a:extLst>
+          </p:cNvPr>
+          <p:cNvSpPr>
+            <a:spLocks xmlns:a="http://schemas.openxmlformats.org/drawingml/2006/main" noGrp="1"/>
+          </p:cNvSpPr>
+          <p:nvPr/>
+        </p:nvSpPr>
+        <p:spPr>
+          <a:xfrm xmlns:a="http://schemas.openxmlformats.org/drawingml/2006/main">
+            <a:off x="4333875" y="2238375"/>
+            <a:ext cx="2095500" cy="400050"/>
+          </a:xfrm>
+          <a:prstGeom xmlns:a="http://schemas.openxmlformats.org/drawingml/2006/main" prst="rect">
+            <a:avLst/>
+          </a:prstGeom>
+          <a:noFill xmlns:a="http://schemas.openxmlformats.org/drawingml/2006/main"/>
+          <a:ln xmlns:a="http://schemas.openxmlformats.org/drawingml/2006/main" w="0">
+            <a:noFill/>
+            <a:prstDash val="solid"/>
+          </a:ln>
+        </p:spPr>
+        <p:txBody>
+          <a:bodyPr xmlns:a="http://schemas.openxmlformats.org/drawingml/2006/main"/>
+          <a:lstStyle xmlns:a="http://schemas.openxmlformats.org/drawingml/2006/main"/>
+          <a:p xmlns:a="http://schemas.openxmlformats.org/drawingml/2006/main">
+            <a:pPr algn="l">
+              <a:defRPr sz="2100" b="1">
                 <a:solidFill>
                   <a:srgbClr val="F5F7F6"/>
                 </a:solidFill>
               </a:defRPr>
             </a:pPr>
             <a:r>
-              <a:rPr sz="1950" b="1">
+              <a:rPr sz="2100" b="1">
                 <a:solidFill>
                   <a:srgbClr val="F5F7F6"/>
                 </a:solidFill>
               </a:rPr>
-              <a:t>Describe a need</a:t>
-            </a:r>
-          </a:p>
-        </p:txBody>
-      </p:sp>
-      <p:sp>
-        <p:nvSpPr>
-          <p:cNvPr id="7" name="">
-            <a:extLst xmlns:a="http://schemas.openxmlformats.org/drawingml/2006/main">
-              <a:ext uri="{FF2B5EF4-FFF2-40B4-BE49-F238E27FC236}">
-                <a16:creationId xmlns:a16="http://schemas.microsoft.com/office/drawing/2014/main" id="{E7C206B0-8756-4C90-BCEA-482A62F1A597}"/>
-              </a:ext>
-            </a:extLst>
-          </p:cNvPr>
-          <p:cNvSpPr>
-            <a:spLocks xmlns:a="http://schemas.openxmlformats.org/drawingml/2006/main" noGrp="1"/>
-          </p:cNvSpPr>
-          <p:nvPr/>
-        </p:nvSpPr>
-        <p:spPr>
-          <a:xfrm xmlns:a="http://schemas.openxmlformats.org/drawingml/2006/main">
-            <a:off x="666750" y="2781300"/>
-            <a:ext cx="3143250" cy="2000250"/>
-          </a:xfrm>
-          <a:prstGeom xmlns:a="http://schemas.openxmlformats.org/drawingml/2006/main" prst="rect">
-            <a:avLst/>
-          </a:prstGeom>
-          <a:noFill xmlns:a="http://schemas.openxmlformats.org/drawingml/2006/main"/>
-          <a:ln xmlns:a="http://schemas.openxmlformats.org/drawingml/2006/main" w="0">
-            <a:noFill/>
-            <a:prstDash val="solid"/>
-          </a:ln>
-        </p:spPr>
-        <p:txBody>
-          <a:bodyPr xmlns:a="http://schemas.openxmlformats.org/drawingml/2006/main"/>
-          <a:lstStyle xmlns:a="http://schemas.openxmlformats.org/drawingml/2006/main"/>
-          <a:p xmlns:a="http://schemas.openxmlformats.org/drawingml/2006/main">
-            <a:pPr algn="l">
-              <a:defRPr sz="1425" b="0">
-                <a:solidFill>
-                  <a:srgbClr val="98A19F"/>
-                </a:solidFill>
-              </a:defRPr>
-            </a:pPr>
-            <a:r>
-              <a:rPr sz="1425" b="0">
-                <a:solidFill>
-                  <a:srgbClr val="98A19F"/>
-                </a:solidFill>
-              </a:rPr>
-              <a:t>Discover sellers</a:t>
-            </a:r>
-          </a:p>
-          <a:p xmlns:a="http://schemas.openxmlformats.org/drawingml/2006/main">
-            <a:pPr algn="l">
-              <a:defRPr sz="1425" b="0">
-                <a:solidFill>
-                  <a:srgbClr val="98A19F"/>
-                </a:solidFill>
-              </a:defRPr>
-            </a:pPr>
-            <a:r>
-              <a:rPr sz="1425" b="0">
-                <a:solidFill>
-                  <a:srgbClr val="98A19F"/>
-                </a:solidFill>
-              </a:rPr>
-              <a:t>Negotiate through A2A</a:t>
-            </a:r>
-          </a:p>
-          <a:p xmlns:a="http://schemas.openxmlformats.org/drawingml/2006/main">
-            <a:pPr algn="l">
-              <a:defRPr sz="1425" b="0">
-                <a:solidFill>
-                  <a:srgbClr val="98A19F"/>
-                </a:solidFill>
-              </a:defRPr>
-            </a:pPr>
-            <a:r>
-              <a:rPr sz="1425" b="0">
-                <a:solidFill>
-                  <a:srgbClr val="98A19F"/>
-                </a:solidFill>
-              </a:rPr>
-              <a:t>Check policy</a:t>
-            </a:r>
-          </a:p>
-          <a:p xmlns:a="http://schemas.openxmlformats.org/drawingml/2006/main">
-            <a:pPr algn="l">
-              <a:defRPr sz="1425" b="0">
-                <a:solidFill>
-                  <a:srgbClr val="98A19F"/>
-                </a:solidFill>
-              </a:defRPr>
-            </a:pPr>
-            <a:r>
-              <a:rPr sz="1425" b="0">
-                <a:solidFill>
-                  <a:srgbClr val="98A19F"/>
-                </a:solidFill>
-              </a:rPr>
-              <a:t>Approve and pay</a:t>
-            </a:r>
-          </a:p>
-          <a:p xmlns:a="http://schemas.openxmlformats.org/drawingml/2006/main">
-            <a:pPr algn="l">
-              <a:defRPr sz="1425" b="0">
-                <a:solidFill>
-                  <a:srgbClr val="98A19F"/>
-                </a:solidFill>
-              </a:defRPr>
-            </a:pPr>
-            <a:r>
-              <a:rPr sz="1425" b="0">
-                <a:solidFill>
-                  <a:srgbClr val="98A19F"/>
-                </a:solidFill>
-              </a:rPr>
-              <a:t>Verify delivery</a:t>
-            </a:r>
-          </a:p>
-        </p:txBody>
-      </p:sp>
-      <p:sp>
-        <p:nvSpPr>
-          <p:cNvPr id="8" name="">
-            <a:extLst xmlns:a="http://schemas.openxmlformats.org/drawingml/2006/main">
-              <a:ext uri="{FF2B5EF4-FFF2-40B4-BE49-F238E27FC236}">
-                <a16:creationId xmlns:a16="http://schemas.microsoft.com/office/drawing/2014/main" id="{6F8A0D37-08D0-40A0-B922-AD845D9B9B5E}"/>
-              </a:ext>
-            </a:extLst>
-          </p:cNvPr>
-          <p:cNvSpPr>
-            <a:spLocks xmlns:a="http://schemas.openxmlformats.org/drawingml/2006/main" noGrp="1"/>
-          </p:cNvSpPr>
-          <p:nvPr/>
-        </p:nvSpPr>
-        <p:spPr>
-          <a:xfrm xmlns:a="http://schemas.openxmlformats.org/drawingml/2006/main">
-            <a:off x="4095750" y="1809750"/>
-            <a:ext cx="1333500" cy="304800"/>
-          </a:xfrm>
-          <a:prstGeom xmlns:a="http://schemas.openxmlformats.org/drawingml/2006/main" prst="rect">
-            <a:avLst/>
-          </a:prstGeom>
-          <a:noFill xmlns:a="http://schemas.openxmlformats.org/drawingml/2006/main"/>
-          <a:ln xmlns:a="http://schemas.openxmlformats.org/drawingml/2006/main" w="0">
-            <a:noFill/>
-            <a:prstDash val="solid"/>
-          </a:ln>
-        </p:spPr>
-        <p:txBody>
-          <a:bodyPr xmlns:a="http://schemas.openxmlformats.org/drawingml/2006/main"/>
-          <a:lstStyle xmlns:a="http://schemas.openxmlformats.org/drawingml/2006/main"/>
-          <a:p xmlns:a="http://schemas.openxmlformats.org/drawingml/2006/main">
-            <a:pPr algn="l">
-              <a:defRPr sz="1200" b="1">
-                <a:solidFill>
-                  <a:srgbClr val="F2ED55"/>
-                </a:solidFill>
-              </a:defRPr>
-            </a:pPr>
-            <a:r>
-              <a:rPr sz="1200" b="1">
-                <a:solidFill>
-                  <a:srgbClr val="F2ED55"/>
-                </a:solidFill>
-              </a:rPr>
-              <a:t>SELL</a:t>
-            </a:r>
-          </a:p>
-        </p:txBody>
-      </p:sp>
-      <p:sp>
-        <p:nvSpPr>
-          <p:cNvPr id="9" name="">
-            <a:extLst xmlns:a="http://schemas.openxmlformats.org/drawingml/2006/main">
-              <a:ext uri="{FF2B5EF4-FFF2-40B4-BE49-F238E27FC236}">
-                <a16:creationId xmlns:a16="http://schemas.microsoft.com/office/drawing/2014/main" id="{C6251DDC-2C08-46B6-A937-6972103F5222}"/>
-              </a:ext>
-            </a:extLst>
-          </p:cNvPr>
-          <p:cNvSpPr>
-            <a:spLocks xmlns:a="http://schemas.openxmlformats.org/drawingml/2006/main" noGrp="1"/>
-          </p:cNvSpPr>
-          <p:nvPr/>
-        </p:nvSpPr>
-        <p:spPr>
-          <a:xfrm xmlns:a="http://schemas.openxmlformats.org/drawingml/2006/main">
-            <a:off x="4095750" y="2238375"/>
-            <a:ext cx="3238500" cy="381000"/>
-          </a:xfrm>
-          <a:prstGeom xmlns:a="http://schemas.openxmlformats.org/drawingml/2006/main" prst="rect">
-            <a:avLst/>
-          </a:prstGeom>
-          <a:noFill xmlns:a="http://schemas.openxmlformats.org/drawingml/2006/main"/>
-          <a:ln xmlns:a="http://schemas.openxmlformats.org/drawingml/2006/main" w="0">
-            <a:noFill/>
-            <a:prstDash val="solid"/>
-          </a:ln>
-        </p:spPr>
-        <p:txBody>
-          <a:bodyPr xmlns:a="http://schemas.openxmlformats.org/drawingml/2006/main"/>
-          <a:lstStyle xmlns:a="http://schemas.openxmlformats.org/drawingml/2006/main"/>
-          <a:p xmlns:a="http://schemas.openxmlformats.org/drawingml/2006/main">
-            <a:pPr algn="l">
-              <a:defRPr sz="1950" b="1">
+              <a:t>Configure</a:t>
+            </a:r>
+          </a:p>
+        </p:txBody>
+      </p:sp>
+      <p:sp>
+        <p:nvSpPr>
+          <p:cNvPr id="11" name="">
+            <a:extLst xmlns:a="http://schemas.openxmlformats.org/drawingml/2006/main">
+              <a:ext uri="{FF2B5EF4-FFF2-40B4-BE49-F238E27FC236}">
+                <a16:creationId xmlns:a16="http://schemas.microsoft.com/office/drawing/2014/main" id="{E1E84376-A94D-4FB9-AD84-9B1DFE982953}"/>
+              </a:ext>
+            </a:extLst>
+          </p:cNvPr>
+          <p:cNvSpPr>
+            <a:spLocks xmlns:a="http://schemas.openxmlformats.org/drawingml/2006/main" noGrp="1"/>
+          </p:cNvSpPr>
+          <p:nvPr/>
+        </p:nvSpPr>
+        <p:spPr>
+          <a:xfrm xmlns:a="http://schemas.openxmlformats.org/drawingml/2006/main">
+            <a:off x="4333875" y="2781300"/>
+            <a:ext cx="2857500" cy="1143000"/>
+          </a:xfrm>
+          <a:prstGeom xmlns:a="http://schemas.openxmlformats.org/drawingml/2006/main" prst="rect">
+            <a:avLst/>
+          </a:prstGeom>
+          <a:noFill xmlns:a="http://schemas.openxmlformats.org/drawingml/2006/main"/>
+          <a:ln xmlns:a="http://schemas.openxmlformats.org/drawingml/2006/main" w="0">
+            <a:noFill/>
+            <a:prstDash val="solid"/>
+          </a:ln>
+        </p:spPr>
+        <p:txBody>
+          <a:bodyPr xmlns:a="http://schemas.openxmlformats.org/drawingml/2006/main"/>
+          <a:lstStyle xmlns:a="http://schemas.openxmlformats.org/drawingml/2006/main"/>
+          <a:p xmlns:a="http://schemas.openxmlformats.org/drawingml/2006/main">
+            <a:pPr algn="l">
+              <a:defRPr sz="1350" b="0">
+                <a:solidFill>
+                  <a:srgbClr val="98A19F"/>
+                </a:solidFill>
+              </a:defRPr>
+            </a:pPr>
+            <a:r>
+              <a:rPr sz="1350" b="0">
+                <a:solidFill>
+                  <a:srgbClr val="98A19F"/>
+                </a:solidFill>
+              </a:rPr>
+              <a:t>Products and prices</a:t>
+            </a:r>
+          </a:p>
+          <a:p xmlns:a="http://schemas.openxmlformats.org/drawingml/2006/main">
+            <a:pPr algn="l">
+              <a:defRPr sz="1350" b="0">
+                <a:solidFill>
+                  <a:srgbClr val="98A19F"/>
+                </a:solidFill>
+              </a:defRPr>
+            </a:pPr>
+            <a:r>
+              <a:rPr sz="1350" b="0">
+                <a:solidFill>
+                  <a:srgbClr val="98A19F"/>
+                </a:solidFill>
+              </a:rPr>
+              <a:t>Negotiation boundaries</a:t>
+            </a:r>
+          </a:p>
+          <a:p xmlns:a="http://schemas.openxmlformats.org/drawingml/2006/main">
+            <a:pPr algn="l">
+              <a:defRPr sz="1350" b="0">
+                <a:solidFill>
+                  <a:srgbClr val="98A19F"/>
+                </a:solidFill>
+              </a:defRPr>
+            </a:pPr>
+            <a:r>
+              <a:rPr sz="1350" b="0">
+                <a:solidFill>
+                  <a:srgbClr val="98A19F"/>
+                </a:solidFill>
+              </a:rPr>
+              <a:t>Approvals and payment rails</a:t>
+            </a:r>
+          </a:p>
+        </p:txBody>
+      </p:sp>
+      <p:sp>
+        <p:nvSpPr>
+          <p:cNvPr id="12" name="">
+            <a:extLst xmlns:a="http://schemas.openxmlformats.org/drawingml/2006/main">
+              <a:ext uri="{FF2B5EF4-FFF2-40B4-BE49-F238E27FC236}">
+                <a16:creationId xmlns:a16="http://schemas.microsoft.com/office/drawing/2014/main" id="{0D38AD91-F220-4D62-A107-B6DE52711707}"/>
+              </a:ext>
+            </a:extLst>
+          </p:cNvPr>
+          <p:cNvSpPr>
+            <a:spLocks xmlns:a="http://schemas.openxmlformats.org/drawingml/2006/main" noGrp="1"/>
+          </p:cNvSpPr>
+          <p:nvPr/>
+        </p:nvSpPr>
+        <p:spPr>
+          <a:xfrm xmlns:a="http://schemas.openxmlformats.org/drawingml/2006/main">
+            <a:off x="7048500" y="3143250"/>
+            <a:ext cx="857250" cy="28575"/>
+          </a:xfrm>
+          <a:prstGeom xmlns:a="http://schemas.openxmlformats.org/drawingml/2006/main" prst="rect">
+            <a:avLst/>
+          </a:prstGeom>
+          <a:solidFill xmlns:a="http://schemas.openxmlformats.org/drawingml/2006/main">
+            <a:srgbClr val="2B3735"/>
+          </a:solidFill>
+          <a:ln xmlns:a="http://schemas.openxmlformats.org/drawingml/2006/main" w="0">
+            <a:solidFill>
+              <a:srgbClr val="2B3735"/>
+            </a:solidFill>
+            <a:prstDash val="solid"/>
+          </a:ln>
+        </p:spPr>
+      </p:sp>
+      <p:sp>
+        <p:nvSpPr>
+          <p:cNvPr id="13" name="">
+            <a:extLst xmlns:a="http://schemas.openxmlformats.org/drawingml/2006/main">
+              <a:ext uri="{FF2B5EF4-FFF2-40B4-BE49-F238E27FC236}">
+                <a16:creationId xmlns:a16="http://schemas.microsoft.com/office/drawing/2014/main" id="{205BD3AA-BB4D-4687-A8C7-17E53D5D7124}"/>
+              </a:ext>
+            </a:extLst>
+          </p:cNvPr>
+          <p:cNvSpPr>
+            <a:spLocks xmlns:a="http://schemas.openxmlformats.org/drawingml/2006/main" noGrp="1"/>
+          </p:cNvSpPr>
+          <p:nvPr/>
+        </p:nvSpPr>
+        <p:spPr>
+          <a:xfrm xmlns:a="http://schemas.openxmlformats.org/drawingml/2006/main">
+            <a:off x="8048625" y="1809750"/>
+            <a:ext cx="666750" cy="361950"/>
+          </a:xfrm>
+          <a:prstGeom xmlns:a="http://schemas.openxmlformats.org/drawingml/2006/main" prst="rect">
+            <a:avLst/>
+          </a:prstGeom>
+          <a:noFill xmlns:a="http://schemas.openxmlformats.org/drawingml/2006/main"/>
+          <a:ln xmlns:a="http://schemas.openxmlformats.org/drawingml/2006/main" w="0">
+            <a:noFill/>
+            <a:prstDash val="solid"/>
+          </a:ln>
+        </p:spPr>
+        <p:txBody>
+          <a:bodyPr xmlns:a="http://schemas.openxmlformats.org/drawingml/2006/main"/>
+          <a:lstStyle xmlns:a="http://schemas.openxmlformats.org/drawingml/2006/main"/>
+          <a:p xmlns:a="http://schemas.openxmlformats.org/drawingml/2006/main">
+            <a:pPr algn="l">
+              <a:defRPr sz="1725" b="1">
+                <a:solidFill>
+                  <a:srgbClr val="9270FF"/>
+                </a:solidFill>
+              </a:defRPr>
+            </a:pPr>
+            <a:r>
+              <a:rPr sz="1725" b="1">
+                <a:solidFill>
+                  <a:srgbClr val="9270FF"/>
+                </a:solidFill>
+              </a:rPr>
+              <a:t>03</a:t>
+            </a:r>
+          </a:p>
+        </p:txBody>
+      </p:sp>
+      <p:sp>
+        <p:nvSpPr>
+          <p:cNvPr id="14" name="">
+            <a:extLst xmlns:a="http://schemas.openxmlformats.org/drawingml/2006/main">
+              <a:ext uri="{FF2B5EF4-FFF2-40B4-BE49-F238E27FC236}">
+                <a16:creationId xmlns:a16="http://schemas.microsoft.com/office/drawing/2014/main" id="{CF3A152B-A263-4B74-B8DD-BAD95CD05BA2}"/>
+              </a:ext>
+            </a:extLst>
+          </p:cNvPr>
+          <p:cNvSpPr>
+            <a:spLocks xmlns:a="http://schemas.openxmlformats.org/drawingml/2006/main" noGrp="1"/>
+          </p:cNvSpPr>
+          <p:nvPr/>
+        </p:nvSpPr>
+        <p:spPr>
+          <a:xfrm xmlns:a="http://schemas.openxmlformats.org/drawingml/2006/main">
+            <a:off x="8048625" y="2238375"/>
+            <a:ext cx="2095500" cy="400050"/>
+          </a:xfrm>
+          <a:prstGeom xmlns:a="http://schemas.openxmlformats.org/drawingml/2006/main" prst="rect">
+            <a:avLst/>
+          </a:prstGeom>
+          <a:noFill xmlns:a="http://schemas.openxmlformats.org/drawingml/2006/main"/>
+          <a:ln xmlns:a="http://schemas.openxmlformats.org/drawingml/2006/main" w="0">
+            <a:noFill/>
+            <a:prstDash val="solid"/>
+          </a:ln>
+        </p:spPr>
+        <p:txBody>
+          <a:bodyPr xmlns:a="http://schemas.openxmlformats.org/drawingml/2006/main"/>
+          <a:lstStyle xmlns:a="http://schemas.openxmlformats.org/drawingml/2006/main"/>
+          <a:p xmlns:a="http://schemas.openxmlformats.org/drawingml/2006/main">
+            <a:pPr algn="l">
+              <a:defRPr sz="2100" b="1">
                 <a:solidFill>
                   <a:srgbClr val="F5F7F6"/>
                 </a:solidFill>
               </a:defRPr>
             </a:pPr>
             <a:r>
-              <a:rPr sz="1950" b="1">
+              <a:rPr sz="2100" b="1">
                 <a:solidFill>
                   <a:srgbClr val="F5F7F6"/>
                 </a:solidFill>
               </a:rPr>
-              <a:t>Connect what exists</a:t>
-            </a:r>
-          </a:p>
-        </p:txBody>
-      </p:sp>
-      <p:sp>
-        <p:nvSpPr>
-          <p:cNvPr id="10" name="">
-            <a:extLst xmlns:a="http://schemas.openxmlformats.org/drawingml/2006/main">
-              <a:ext uri="{FF2B5EF4-FFF2-40B4-BE49-F238E27FC236}">
-                <a16:creationId xmlns:a16="http://schemas.microsoft.com/office/drawing/2014/main" id="{7A139596-BEFC-4728-B320-FB206D1818B6}"/>
-              </a:ext>
-            </a:extLst>
-          </p:cNvPr>
-          <p:cNvSpPr>
-            <a:spLocks xmlns:a="http://schemas.openxmlformats.org/drawingml/2006/main" noGrp="1"/>
-          </p:cNvSpPr>
-          <p:nvPr/>
-        </p:nvSpPr>
-        <p:spPr>
-          <a:xfrm xmlns:a="http://schemas.openxmlformats.org/drawingml/2006/main">
-            <a:off x="4095750" y="2781300"/>
-            <a:ext cx="3333750" cy="2000250"/>
-          </a:xfrm>
-          <a:prstGeom xmlns:a="http://schemas.openxmlformats.org/drawingml/2006/main" prst="rect">
-            <a:avLst/>
-          </a:prstGeom>
-          <a:noFill xmlns:a="http://schemas.openxmlformats.org/drawingml/2006/main"/>
-          <a:ln xmlns:a="http://schemas.openxmlformats.org/drawingml/2006/main" w="0">
-            <a:noFill/>
-            <a:prstDash val="solid"/>
-          </a:ln>
-        </p:spPr>
-        <p:txBody>
-          <a:bodyPr xmlns:a="http://schemas.openxmlformats.org/drawingml/2006/main"/>
-          <a:lstStyle xmlns:a="http://schemas.openxmlformats.org/drawingml/2006/main"/>
-          <a:p xmlns:a="http://schemas.openxmlformats.org/drawingml/2006/main">
-            <a:pPr algn="l">
-              <a:defRPr sz="1425" b="0">
-                <a:solidFill>
-                  <a:srgbClr val="98A19F"/>
-                </a:solidFill>
-              </a:defRPr>
-            </a:pPr>
-            <a:r>
-              <a:rPr sz="1425" b="0">
-                <a:solidFill>
-                  <a:srgbClr val="98A19F"/>
-                </a:solidFill>
-              </a:rPr>
-              <a:t>Import APIs or stores</a:t>
-            </a:r>
-          </a:p>
-          <a:p xmlns:a="http://schemas.openxmlformats.org/drawingml/2006/main">
-            <a:pPr algn="l">
-              <a:defRPr sz="1425" b="0">
-                <a:solidFill>
-                  <a:srgbClr val="98A19F"/>
-                </a:solidFill>
-              </a:defRPr>
-            </a:pPr>
-            <a:r>
-              <a:rPr sz="1425" b="0">
-                <a:solidFill>
-                  <a:srgbClr val="98A19F"/>
-                </a:solidFill>
-              </a:rPr>
-              <a:t>Price each product</a:t>
-            </a:r>
-          </a:p>
-          <a:p xmlns:a="http://schemas.openxmlformats.org/drawingml/2006/main">
-            <a:pPr algn="l">
-              <a:defRPr sz="1425" b="0">
-                <a:solidFill>
-                  <a:srgbClr val="98A19F"/>
-                </a:solidFill>
-              </a:defRPr>
-            </a:pPr>
-            <a:r>
-              <a:rPr sz="1425" b="0">
-                <a:solidFill>
-                  <a:srgbClr val="98A19F"/>
-                </a:solidFill>
-              </a:rPr>
-              <a:t>Set negotiation limits</a:t>
-            </a:r>
-          </a:p>
-          <a:p xmlns:a="http://schemas.openxmlformats.org/drawingml/2006/main">
-            <a:pPr algn="l">
-              <a:defRPr sz="1425" b="0">
-                <a:solidFill>
-                  <a:srgbClr val="98A19F"/>
-                </a:solidFill>
-              </a:defRPr>
-            </a:pPr>
-            <a:r>
-              <a:rPr sz="1425" b="0">
-                <a:solidFill>
-                  <a:srgbClr val="98A19F"/>
-                </a:solidFill>
-              </a:rPr>
-              <a:t>Publish for agents</a:t>
-            </a:r>
-          </a:p>
-          <a:p xmlns:a="http://schemas.openxmlformats.org/drawingml/2006/main">
-            <a:pPr algn="l">
-              <a:defRPr sz="1425" b="0">
-                <a:solidFill>
-                  <a:srgbClr val="98A19F"/>
-                </a:solidFill>
-              </a:defRPr>
-            </a:pPr>
-            <a:r>
-              <a:rPr sz="1425" b="0">
-                <a:solidFill>
-                  <a:srgbClr val="98A19F"/>
-                </a:solidFill>
-              </a:rPr>
-              <a:t>Receive the right payment</a:t>
-            </a:r>
-          </a:p>
-        </p:txBody>
-      </p:sp>
-      <p:pic>
-        <p:nvPicPr>
-          <p:cNvPr id="24" name=""/>
-          <p:cNvPicPr>
-            <a:picLocks xmlns:a="http://schemas.openxmlformats.org/drawingml/2006/main" noChangeAspect="1"/>
-          </p:cNvPicPr>
-          <p:nvPr/>
-        </p:nvPicPr>
-        <p:blipFill>
-          <a:blip xmlns:r="http://schemas.openxmlformats.org/officeDocument/2006/relationships" xmlns:a="http://schemas.openxmlformats.org/drawingml/2006/main" r:embed="R420b686413c24b8d"/>
-          <a:srcRect xmlns:a="http://schemas.openxmlformats.org/drawingml/2006/main" l="20885" t="0" r="20885" b="0"/>
-          <a:stretch xmlns:a="http://schemas.openxmlformats.org/drawingml/2006/main">
-            <a:fillRect l="0" t="0" r="0" b="0"/>
-          </a:stretch>
-        </p:blipFill>
-        <p:spPr>
-          <a:xfrm xmlns:a="http://schemas.openxmlformats.org/drawingml/2006/main">
-            <a:off x="7620000" y="1809750"/>
-            <a:ext cx="4095750" cy="3429000"/>
+              <a:t>Publish</a:t>
+            </a:r>
+          </a:p>
+        </p:txBody>
+      </p:sp>
+      <p:sp>
+        <p:nvSpPr>
+          <p:cNvPr id="15" name="">
+            <a:extLst xmlns:a="http://schemas.openxmlformats.org/drawingml/2006/main">
+              <a:ext uri="{FF2B5EF4-FFF2-40B4-BE49-F238E27FC236}">
+                <a16:creationId xmlns:a16="http://schemas.microsoft.com/office/drawing/2014/main" id="{805FA5E4-D9DC-43F4-8DB5-EC0526BF9205}"/>
+              </a:ext>
+            </a:extLst>
+          </p:cNvPr>
+          <p:cNvSpPr>
+            <a:spLocks xmlns:a="http://schemas.openxmlformats.org/drawingml/2006/main" noGrp="1"/>
+          </p:cNvSpPr>
+          <p:nvPr/>
+        </p:nvSpPr>
+        <p:spPr>
+          <a:xfrm xmlns:a="http://schemas.openxmlformats.org/drawingml/2006/main">
+            <a:off x="8048625" y="2781300"/>
+            <a:ext cx="3143250" cy="1143000"/>
+          </a:xfrm>
+          <a:prstGeom xmlns:a="http://schemas.openxmlformats.org/drawingml/2006/main" prst="rect">
+            <a:avLst/>
+          </a:prstGeom>
+          <a:noFill xmlns:a="http://schemas.openxmlformats.org/drawingml/2006/main"/>
+          <a:ln xmlns:a="http://schemas.openxmlformats.org/drawingml/2006/main" w="0">
+            <a:noFill/>
+            <a:prstDash val="solid"/>
+          </a:ln>
+        </p:spPr>
+        <p:txBody>
+          <a:bodyPr xmlns:a="http://schemas.openxmlformats.org/drawingml/2006/main"/>
+          <a:lstStyle xmlns:a="http://schemas.openxmlformats.org/drawingml/2006/main"/>
+          <a:p xmlns:a="http://schemas.openxmlformats.org/drawingml/2006/main">
+            <a:pPr algn="l">
+              <a:defRPr sz="1350" b="0">
+                <a:solidFill>
+                  <a:srgbClr val="98A19F"/>
+                </a:solidFill>
+              </a:defRPr>
+            </a:pPr>
+            <a:r>
+              <a:rPr sz="1350" b="0">
+                <a:solidFill>
+                  <a:srgbClr val="98A19F"/>
+                </a:solidFill>
+              </a:rPr>
+              <a:t>Buyer and seller agents</a:t>
+            </a:r>
+          </a:p>
+          <a:p xmlns:a="http://schemas.openxmlformats.org/drawingml/2006/main">
+            <a:pPr algn="l">
+              <a:defRPr sz="1350" b="0">
+                <a:solidFill>
+                  <a:srgbClr val="98A19F"/>
+                </a:solidFill>
+              </a:defRPr>
+            </a:pPr>
+            <a:r>
+              <a:rPr sz="1350" b="0">
+                <a:solidFill>
+                  <a:srgbClr val="98A19F"/>
+                </a:solidFill>
+              </a:rPr>
+              <a:t>Agent Card and commerce contract</a:t>
+            </a:r>
+          </a:p>
+          <a:p xmlns:a="http://schemas.openxmlformats.org/drawingml/2006/main">
+            <a:pPr algn="l">
+              <a:defRPr sz="1350" b="0">
+                <a:solidFill>
+                  <a:srgbClr val="98A19F"/>
+                </a:solidFill>
+              </a:defRPr>
+            </a:pPr>
+            <a:r>
+              <a:rPr sz="1350" b="0">
+                <a:solidFill>
+                  <a:srgbClr val="98A19F"/>
+                </a:solidFill>
+              </a:rPr>
+              <a:t>Skills and SDK integration</a:t>
+            </a:r>
+          </a:p>
+        </p:txBody>
+      </p:sp>
+      <p:sp>
+        <p:nvSpPr>
+          <p:cNvPr id="16" name="">
+            <a:extLst xmlns:a="http://schemas.openxmlformats.org/drawingml/2006/main">
+              <a:ext uri="{FF2B5EF4-FFF2-40B4-BE49-F238E27FC236}">
+                <a16:creationId xmlns:a16="http://schemas.microsoft.com/office/drawing/2014/main" id="{0BF9EE9F-DE43-42E9-BC8D-395EC2B69616}"/>
+              </a:ext>
+            </a:extLst>
+          </p:cNvPr>
+          <p:cNvSpPr>
+            <a:spLocks xmlns:a="http://schemas.openxmlformats.org/drawingml/2006/main" noGrp="1"/>
+          </p:cNvSpPr>
+          <p:nvPr/>
+        </p:nvSpPr>
+        <p:spPr>
+          <a:xfrm xmlns:a="http://schemas.openxmlformats.org/drawingml/2006/main">
+            <a:off x="666750" y="4524375"/>
+            <a:ext cx="10477500" cy="1190625"/>
           </a:xfrm>
           <a:prstGeom xmlns:a="http://schemas.openxmlformats.org/drawingml/2006/main" prst="roundRect">
             <a:avLst>
-              <a:gd name="adj" fmla="val 3333"/>
+              <a:gd name="adj" fmla="val 9600"/>
             </a:avLst>
           </a:prstGeom>
-        </p:spPr>
-      </p:pic>
-      <p:sp>
-        <p:nvSpPr>
-          <p:cNvPr id="12" name="">
-            <a:extLst xmlns:a="http://schemas.openxmlformats.org/drawingml/2006/main">
-              <a:ext uri="{FF2B5EF4-FFF2-40B4-BE49-F238E27FC236}">
-                <a16:creationId xmlns:a16="http://schemas.microsoft.com/office/drawing/2014/main" id="{5E89E9CA-5FE4-468C-9B07-331567F35EE1}"/>
-              </a:ext>
-            </a:extLst>
-          </p:cNvPr>
-          <p:cNvSpPr>
-            <a:spLocks xmlns:a="http://schemas.openxmlformats.org/drawingml/2006/main" noGrp="1"/>
-          </p:cNvSpPr>
-          <p:nvPr/>
-        </p:nvSpPr>
-        <p:spPr>
-          <a:xfrm xmlns:a="http://schemas.openxmlformats.org/drawingml/2006/main">
-            <a:off x="666750" y="5619750"/>
-            <a:ext cx="9715500" cy="323850"/>
-          </a:xfrm>
-          <a:prstGeom xmlns:a="http://schemas.openxmlformats.org/drawingml/2006/main" prst="rect">
-            <a:avLst/>
-          </a:prstGeom>
-          <a:noFill xmlns:a="http://schemas.openxmlformats.org/drawingml/2006/main"/>
-          <a:ln xmlns:a="http://schemas.openxmlformats.org/drawingml/2006/main" w="0">
-            <a:noFill/>
-            <a:prstDash val="solid"/>
-          </a:ln>
-        </p:spPr>
-        <p:txBody>
-          <a:bodyPr xmlns:a="http://schemas.openxmlformats.org/drawingml/2006/main"/>
-          <a:lstStyle xmlns:a="http://schemas.openxmlformats.org/drawingml/2006/main"/>
-          <a:p xmlns:a="http://schemas.openxmlformats.org/drawingml/2006/main">
-            <a:pPr algn="l">
-              <a:defRPr sz="1425" b="1">
+          <a:solidFill xmlns:a="http://schemas.openxmlformats.org/drawingml/2006/main">
+            <a:srgbClr val="16201F"/>
+          </a:solidFill>
+          <a:ln xmlns:a="http://schemas.openxmlformats.org/drawingml/2006/main" w="9525">
+            <a:solidFill>
+              <a:srgbClr val="2B3735"/>
+            </a:solidFill>
+            <a:prstDash val="solid"/>
+          </a:ln>
+        </p:spPr>
+      </p:sp>
+      <p:sp>
+        <p:nvSpPr>
+          <p:cNvPr id="17" name="">
+            <a:extLst xmlns:a="http://schemas.openxmlformats.org/drawingml/2006/main">
+              <a:ext uri="{FF2B5EF4-FFF2-40B4-BE49-F238E27FC236}">
+                <a16:creationId xmlns:a16="http://schemas.microsoft.com/office/drawing/2014/main" id="{F857160E-2259-44C3-ADA4-B29C195B9BCB}"/>
+              </a:ext>
+            </a:extLst>
+          </p:cNvPr>
+          <p:cNvSpPr>
+            <a:spLocks xmlns:a="http://schemas.openxmlformats.org/drawingml/2006/main" noGrp="1"/>
+          </p:cNvSpPr>
+          <p:nvPr/>
+        </p:nvSpPr>
+        <p:spPr>
+          <a:xfrm xmlns:a="http://schemas.openxmlformats.org/drawingml/2006/main">
+            <a:off x="952500" y="4810125"/>
+            <a:ext cx="2667000" cy="304800"/>
+          </a:xfrm>
+          <a:prstGeom xmlns:a="http://schemas.openxmlformats.org/drawingml/2006/main" prst="rect">
+            <a:avLst/>
+          </a:prstGeom>
+          <a:noFill xmlns:a="http://schemas.openxmlformats.org/drawingml/2006/main"/>
+          <a:ln xmlns:a="http://schemas.openxmlformats.org/drawingml/2006/main" w="0">
+            <a:noFill/>
+            <a:prstDash val="solid"/>
+          </a:ln>
+        </p:spPr>
+        <p:txBody>
+          <a:bodyPr xmlns:a="http://schemas.openxmlformats.org/drawingml/2006/main"/>
+          <a:lstStyle xmlns:a="http://schemas.openxmlformats.org/drawingml/2006/main"/>
+          <a:p xmlns:a="http://schemas.openxmlformats.org/drawingml/2006/main">
+            <a:pPr algn="l">
+              <a:defRPr sz="1350" b="1">
+                <a:solidFill>
+                  <a:srgbClr val="F2ED55"/>
+                </a:solidFill>
+              </a:defRPr>
+            </a:pPr>
+            <a:r>
+              <a:rPr sz="1350" b="1">
+                <a:solidFill>
+                  <a:srgbClr val="F2ED55"/>
+                </a:solidFill>
+              </a:rPr>
+              <a:t>Included agent skill</a:t>
+            </a:r>
+          </a:p>
+        </p:txBody>
+      </p:sp>
+      <p:sp>
+        <p:nvSpPr>
+          <p:cNvPr id="18" name="">
+            <a:extLst xmlns:a="http://schemas.openxmlformats.org/drawingml/2006/main">
+              <a:ext uri="{FF2B5EF4-FFF2-40B4-BE49-F238E27FC236}">
+                <a16:creationId xmlns:a16="http://schemas.microsoft.com/office/drawing/2014/main" id="{4DBE370C-6ABA-4E48-BACB-F1812D69D1D4}"/>
+              </a:ext>
+            </a:extLst>
+          </p:cNvPr>
+          <p:cNvSpPr>
+            <a:spLocks xmlns:a="http://schemas.openxmlformats.org/drawingml/2006/main" noGrp="1"/>
+          </p:cNvSpPr>
+          <p:nvPr/>
+        </p:nvSpPr>
+        <p:spPr>
+          <a:xfrm xmlns:a="http://schemas.openxmlformats.org/drawingml/2006/main">
+            <a:off x="952500" y="5191125"/>
+            <a:ext cx="9715500" cy="476250"/>
+          </a:xfrm>
+          <a:prstGeom xmlns:a="http://schemas.openxmlformats.org/drawingml/2006/main" prst="rect">
+            <a:avLst/>
+          </a:prstGeom>
+          <a:noFill xmlns:a="http://schemas.openxmlformats.org/drawingml/2006/main"/>
+          <a:ln xmlns:a="http://schemas.openxmlformats.org/drawingml/2006/main" w="0">
+            <a:noFill/>
+            <a:prstDash val="solid"/>
+          </a:ln>
+        </p:spPr>
+        <p:txBody>
+          <a:bodyPr xmlns:a="http://schemas.openxmlformats.org/drawingml/2006/main"/>
+          <a:lstStyle xmlns:a="http://schemas.openxmlformats.org/drawingml/2006/main"/>
+          <a:p xmlns:a="http://schemas.openxmlformats.org/drawingml/2006/main">
+            <a:pPr algn="l">
+              <a:defRPr sz="1500" b="1">
                 <a:solidFill>
                   <a:srgbClr val="F5F7F6"/>
                 </a:solidFill>
               </a:defRPr>
             </a:pPr>
             <a:r>
-              <a:rPr sz="1425" b="1">
+              <a:rPr sz="1500" b="1">
                 <a:solidFill>
                   <a:srgbClr val="F5F7F6"/>
                 </a:solidFill>
               </a:rPr>
-              <a:t>Raingentic does not replace checkout, inventory, billing, or fulfillment.</a:t>
-            </a:r>
-          </a:p>
-        </p:txBody>
-      </p:sp>
-      <p:sp>
-        <p:nvSpPr>
-          <p:cNvPr id="13" name="">
-            <a:extLst xmlns:a="http://schemas.openxmlformats.org/drawingml/2006/main">
-              <a:ext uri="{FF2B5EF4-FFF2-40B4-BE49-F238E27FC236}">
-                <a16:creationId xmlns:a16="http://schemas.microsoft.com/office/drawing/2014/main" id="{D6A63061-E8F5-46CA-93F8-4520C0CE328F}"/>
-              </a:ext>
-            </a:extLst>
-          </p:cNvPr>
-          <p:cNvSpPr>
-            <a:spLocks xmlns:a="http://schemas.openxmlformats.org/drawingml/2006/main" noGrp="1"/>
-          </p:cNvSpPr>
-          <p:nvPr/>
-        </p:nvSpPr>
-        <p:spPr>
-          <a:xfrm xmlns:a="http://schemas.openxmlformats.org/drawingml/2006/main">
-            <a:off x="666750" y="6000750"/>
-            <a:ext cx="9715500" cy="323850"/>
-          </a:xfrm>
-          <a:prstGeom xmlns:a="http://schemas.openxmlformats.org/drawingml/2006/main" prst="rect">
-            <a:avLst/>
-          </a:prstGeom>
-          <a:noFill xmlns:a="http://schemas.openxmlformats.org/drawingml/2006/main"/>
-          <a:ln xmlns:a="http://schemas.openxmlformats.org/drawingml/2006/main" w="0">
-            <a:noFill/>
-            <a:prstDash val="solid"/>
-          </a:ln>
-        </p:spPr>
-        <p:txBody>
-          <a:bodyPr xmlns:a="http://schemas.openxmlformats.org/drawingml/2006/main"/>
-          <a:lstStyle xmlns:a="http://schemas.openxmlformats.org/drawingml/2006/main"/>
-          <a:p xmlns:a="http://schemas.openxmlformats.org/drawingml/2006/main">
-            <a:pPr algn="l">
-              <a:defRPr sz="1425" b="1">
-                <a:solidFill>
-                  <a:srgbClr val="F2ED55"/>
-                </a:solidFill>
-              </a:defRPr>
-            </a:pPr>
-            <a:r>
-              <a:rPr sz="1425" b="1">
-                <a:solidFill>
-                  <a:srgbClr val="F2ED55"/>
-                </a:solidFill>
-              </a:rPr>
-              <a:t>It makes them usable by agents.</a:t>
+              <a:t>Point Claude, Codex, or another coding agent at the skill. It inspects the business, asks for the required Rain and Monad credentials, and prepares the integration.</a:t>
+            </a:r>
+          </a:p>
+        </p:txBody>
+      </p:sp>
+      <p:sp>
+        <p:nvSpPr>
+          <p:cNvPr id="19" name="">
+            <a:extLst xmlns:a="http://schemas.openxmlformats.org/drawingml/2006/main">
+              <a:ext uri="{FF2B5EF4-FFF2-40B4-BE49-F238E27FC236}">
+                <a16:creationId xmlns:a16="http://schemas.microsoft.com/office/drawing/2014/main" id="{5084AF4B-9136-4096-805B-FC770C942D58}"/>
+              </a:ext>
+            </a:extLst>
+          </p:cNvPr>
+          <p:cNvSpPr>
+            <a:spLocks xmlns:a="http://schemas.openxmlformats.org/drawingml/2006/main" noGrp="1"/>
+          </p:cNvSpPr>
+          <p:nvPr/>
+        </p:nvSpPr>
+        <p:spPr>
+          <a:xfrm xmlns:a="http://schemas.openxmlformats.org/drawingml/2006/main">
+            <a:off x="666750" y="6048375"/>
+            <a:ext cx="10191750" cy="304800"/>
+          </a:xfrm>
+          <a:prstGeom xmlns:a="http://schemas.openxmlformats.org/drawingml/2006/main" prst="rect">
+            <a:avLst/>
+          </a:prstGeom>
+          <a:noFill xmlns:a="http://schemas.openxmlformats.org/drawingml/2006/main"/>
+          <a:ln xmlns:a="http://schemas.openxmlformats.org/drawingml/2006/main" w="0">
+            <a:noFill/>
+            <a:prstDash val="solid"/>
+          </a:ln>
+        </p:spPr>
+        <p:txBody>
+          <a:bodyPr xmlns:a="http://schemas.openxmlformats.org/drawingml/2006/main"/>
+          <a:lstStyle xmlns:a="http://schemas.openxmlformats.org/drawingml/2006/main"/>
+          <a:p xmlns:a="http://schemas.openxmlformats.org/drawingml/2006/main">
+            <a:pPr algn="l">
+              <a:defRPr sz="1350" b="0">
+                <a:solidFill>
+                  <a:srgbClr val="98A19F"/>
+                </a:solidFill>
+              </a:defRPr>
+            </a:pPr>
+            <a:r>
+              <a:rPr sz="1350" b="0">
+                <a:solidFill>
+                  <a:srgbClr val="98A19F"/>
+                </a:solidFill>
+              </a:rPr>
+              <a:t>Keep the API, store, inventory, checkout, and fulfillment systems you already use.</a:t>
             </a:r>
           </a:p>
         </p:txBody>
@@ -5409,7 +6061,7 @@
     </p:spTree>
     <p:extLst>
       <p:ext uri="{BB962C8B-B14F-4D97-AF65-F5344CB8AC3E}">
-        <p14:creationId xmlns:p14="http://schemas.microsoft.com/office/powerpoint/2010/main" val="1629907558"/>
+        <p14:creationId xmlns:p14="http://schemas.microsoft.com/office/powerpoint/2010/main" val="2032446871"/>
       </p:ext>
     </p:extLst>
   </p:cSld>
@@ -5422,7 +6074,7 @@
     <p:bg>
       <p:bgPr>
         <a:solidFill xmlns:a="http://schemas.openxmlformats.org/drawingml/2006/main">
-          <a:srgbClr val="F7F9FA"/>
+          <a:srgbClr val="0B1111"/>
         </a:solidFill>
       </p:bgPr>
     </p:bg>
@@ -5437,130 +6089,586 @@
       </p:grpSpPr>
       <p:sp>
         <p:nvSpPr>
+          <p:cNvPr id="12" name="">
+            <a:extLst xmlns:a="http://schemas.openxmlformats.org/drawingml/2006/main">
+              <a:ext uri="{FF2B5EF4-FFF2-40B4-BE49-F238E27FC236}">
+                <a16:creationId xmlns:a16="http://schemas.microsoft.com/office/drawing/2014/main" id="{148C1547-F053-4D71-8484-4DDD151CB8F9}"/>
+              </a:ext>
+            </a:extLst>
+          </p:cNvPr>
+          <p:cNvSpPr>
+            <a:spLocks xmlns:a="http://schemas.openxmlformats.org/drawingml/2006/main" noGrp="1"/>
+          </p:cNvSpPr>
+          <p:nvPr/>
+        </p:nvSpPr>
+        <p:spPr>
+          <a:xfrm xmlns:a="http://schemas.openxmlformats.org/drawingml/2006/main">
+            <a:off x="609600" y="361950"/>
+            <a:ext cx="3429000" cy="228600"/>
+          </a:xfrm>
+          <a:prstGeom xmlns:a="http://schemas.openxmlformats.org/drawingml/2006/main" prst="rect">
+            <a:avLst/>
+          </a:prstGeom>
+          <a:noFill xmlns:a="http://schemas.openxmlformats.org/drawingml/2006/main"/>
+          <a:ln xmlns:a="http://schemas.openxmlformats.org/drawingml/2006/main" w="0">
+            <a:noFill/>
+            <a:prstDash val="solid"/>
+          </a:ln>
+        </p:spPr>
+        <p:txBody>
+          <a:bodyPr xmlns:a="http://schemas.openxmlformats.org/drawingml/2006/main"/>
+          <a:lstStyle xmlns:a="http://schemas.openxmlformats.org/drawingml/2006/main"/>
+          <a:p xmlns:a="http://schemas.openxmlformats.org/drawingml/2006/main">
+            <a:pPr algn="l">
+              <a:defRPr sz="975" b="1">
+                <a:solidFill>
+                  <a:srgbClr val="F2ED55"/>
+                </a:solidFill>
+              </a:defRPr>
+            </a:pPr>
+            <a:r>
+              <a:rPr sz="975" b="1">
+                <a:solidFill>
+                  <a:srgbClr val="F2ED55"/>
+                </a:solidFill>
+              </a:rPr>
+              <a:t>TWO-SIDED COMMERCE</a:t>
+            </a:r>
+          </a:p>
+        </p:txBody>
+      </p:sp>
+      <p:sp>
+        <p:nvSpPr>
+          <p:cNvPr id="2" name="">
+            <a:extLst xmlns:a="http://schemas.openxmlformats.org/drawingml/2006/main">
+              <a:ext uri="{FF2B5EF4-FFF2-40B4-BE49-F238E27FC236}">
+                <a16:creationId xmlns:a16="http://schemas.microsoft.com/office/drawing/2014/main" id="{6CA2D39A-527E-44FD-9BAE-6D73797A762D}"/>
+              </a:ext>
+            </a:extLst>
+          </p:cNvPr>
+          <p:cNvSpPr>
+            <a:spLocks xmlns:a="http://schemas.openxmlformats.org/drawingml/2006/main" noGrp="1"/>
+          </p:cNvSpPr>
+          <p:nvPr/>
+        </p:nvSpPr>
+        <p:spPr>
+          <a:xfrm xmlns:a="http://schemas.openxmlformats.org/drawingml/2006/main">
+            <a:off x="609600" y="666750"/>
+            <a:ext cx="10668000" cy="552450"/>
+          </a:xfrm>
+          <a:prstGeom xmlns:a="http://schemas.openxmlformats.org/drawingml/2006/main" prst="rect">
+            <a:avLst/>
+          </a:prstGeom>
+          <a:noFill xmlns:a="http://schemas.openxmlformats.org/drawingml/2006/main"/>
+          <a:ln xmlns:a="http://schemas.openxmlformats.org/drawingml/2006/main" w="0">
+            <a:noFill/>
+            <a:prstDash val="solid"/>
+          </a:ln>
+        </p:spPr>
+        <p:txBody>
+          <a:bodyPr xmlns:a="http://schemas.openxmlformats.org/drawingml/2006/main"/>
+          <a:lstStyle xmlns:a="http://schemas.openxmlformats.org/drawingml/2006/main"/>
+          <a:p xmlns:a="http://schemas.openxmlformats.org/drawingml/2006/main">
+            <a:pPr algn="l">
+              <a:defRPr sz="2700" b="1">
+                <a:solidFill>
+                  <a:srgbClr val="F5F7F6"/>
+                </a:solidFill>
+              </a:defRPr>
+            </a:pPr>
+            <a:r>
+              <a:rPr sz="2700" b="1">
+                <a:solidFill>
+                  <a:srgbClr val="F5F7F6"/>
+                </a:solidFill>
+              </a:rPr>
+              <a:t>One company configuration powers buying and selling.</a:t>
+            </a:r>
+          </a:p>
+        </p:txBody>
+      </p:sp>
+      <p:sp>
+        <p:nvSpPr>
+          <p:cNvPr id="3" name="">
+            <a:extLst xmlns:a="http://schemas.openxmlformats.org/drawingml/2006/main">
+              <a:ext uri="{FF2B5EF4-FFF2-40B4-BE49-F238E27FC236}">
+                <a16:creationId xmlns:a16="http://schemas.microsoft.com/office/drawing/2014/main" id="{9CE020AD-204E-4067-AF83-BBB647449951}"/>
+              </a:ext>
+            </a:extLst>
+          </p:cNvPr>
+          <p:cNvSpPr>
+            <a:spLocks xmlns:a="http://schemas.openxmlformats.org/drawingml/2006/main" noGrp="1"/>
+          </p:cNvSpPr>
+          <p:nvPr/>
+        </p:nvSpPr>
+        <p:spPr>
+          <a:xfrm xmlns:a="http://schemas.openxmlformats.org/drawingml/2006/main">
+            <a:off x="609600" y="1257300"/>
+            <a:ext cx="10972800" cy="9525"/>
+          </a:xfrm>
+          <a:prstGeom xmlns:a="http://schemas.openxmlformats.org/drawingml/2006/main" prst="rect">
+            <a:avLst/>
+          </a:prstGeom>
+          <a:solidFill xmlns:a="http://schemas.openxmlformats.org/drawingml/2006/main">
+            <a:srgbClr val="2B3735"/>
+          </a:solidFill>
+          <a:ln xmlns:a="http://schemas.openxmlformats.org/drawingml/2006/main" w="0">
+            <a:solidFill>
+              <a:srgbClr val="2B3735"/>
+            </a:solidFill>
+            <a:prstDash val="solid"/>
+          </a:ln>
+        </p:spPr>
+      </p:sp>
+      <p:sp>
+        <p:nvSpPr>
           <p:cNvPr id="4" name="">
             <a:extLst xmlns:a="http://schemas.openxmlformats.org/drawingml/2006/main">
               <a:ext uri="{FF2B5EF4-FFF2-40B4-BE49-F238E27FC236}">
-                <a16:creationId xmlns:a16="http://schemas.microsoft.com/office/drawing/2014/main" id="{54F8B053-B31A-4214-871C-94748A6FF409}"/>
-              </a:ext>
-            </a:extLst>
-          </p:cNvPr>
-          <p:cNvSpPr>
-            <a:spLocks xmlns:a="http://schemas.openxmlformats.org/drawingml/2006/main" noGrp="1"/>
-          </p:cNvSpPr>
-          <p:nvPr/>
-        </p:nvSpPr>
-        <p:spPr>
-          <a:xfrm xmlns:a="http://schemas.openxmlformats.org/drawingml/2006/main">
-            <a:off x="381000" y="238125"/>
-            <a:ext cx="2476500" cy="209550"/>
-          </a:xfrm>
-          <a:prstGeom xmlns:a="http://schemas.openxmlformats.org/drawingml/2006/main" prst="rect">
-            <a:avLst/>
-          </a:prstGeom>
-          <a:noFill xmlns:a="http://schemas.openxmlformats.org/drawingml/2006/main"/>
-          <a:ln xmlns:a="http://schemas.openxmlformats.org/drawingml/2006/main" w="0">
-            <a:noFill/>
-            <a:prstDash val="solid"/>
-          </a:ln>
-        </p:spPr>
-        <p:txBody>
-          <a:bodyPr xmlns:a="http://schemas.openxmlformats.org/drawingml/2006/main"/>
-          <a:lstStyle xmlns:a="http://schemas.openxmlformats.org/drawingml/2006/main"/>
-          <a:p xmlns:a="http://schemas.openxmlformats.org/drawingml/2006/main">
-            <a:pPr algn="l">
+                <a16:creationId xmlns:a16="http://schemas.microsoft.com/office/drawing/2014/main" id="{13495CEC-19AB-4226-8530-D1D315FF5C96}"/>
+              </a:ext>
+            </a:extLst>
+          </p:cNvPr>
+          <p:cNvSpPr>
+            <a:spLocks xmlns:a="http://schemas.openxmlformats.org/drawingml/2006/main" noGrp="1"/>
+          </p:cNvSpPr>
+          <p:nvPr/>
+        </p:nvSpPr>
+        <p:spPr>
+          <a:xfrm xmlns:a="http://schemas.openxmlformats.org/drawingml/2006/main">
+            <a:off x="11144250" y="6419850"/>
+            <a:ext cx="438150" cy="190500"/>
+          </a:xfrm>
+          <a:prstGeom xmlns:a="http://schemas.openxmlformats.org/drawingml/2006/main" prst="rect">
+            <a:avLst/>
+          </a:prstGeom>
+          <a:noFill xmlns:a="http://schemas.openxmlformats.org/drawingml/2006/main"/>
+          <a:ln xmlns:a="http://schemas.openxmlformats.org/drawingml/2006/main" w="0">
+            <a:noFill/>
+            <a:prstDash val="solid"/>
+          </a:ln>
+        </p:spPr>
+        <p:txBody>
+          <a:bodyPr xmlns:a="http://schemas.openxmlformats.org/drawingml/2006/main"/>
+          <a:lstStyle xmlns:a="http://schemas.openxmlformats.org/drawingml/2006/main"/>
+          <a:p xmlns:a="http://schemas.openxmlformats.org/drawingml/2006/main">
+            <a:pPr algn="r">
               <a:defRPr sz="900" b="1">
                 <a:solidFill>
-                  <a:srgbClr val="0F766E"/>
+                  <a:srgbClr val="98A19F"/>
                 </a:solidFill>
               </a:defRPr>
             </a:pPr>
             <a:r>
               <a:rPr sz="900" b="1">
                 <a:solidFill>
-                  <a:srgbClr val="0F766E"/>
-                </a:solidFill>
-              </a:rPr>
-              <a:t>HOW IT WORKS</a:t>
-            </a:r>
-          </a:p>
-        </p:txBody>
-      </p:sp>
-      <p:sp>
-        <p:nvSpPr>
-          <p:cNvPr id="2" name="">
-            <a:extLst xmlns:a="http://schemas.openxmlformats.org/drawingml/2006/main">
-              <a:ext uri="{FF2B5EF4-FFF2-40B4-BE49-F238E27FC236}">
-                <a16:creationId xmlns:a16="http://schemas.microsoft.com/office/drawing/2014/main" id="{119AA234-733B-46EE-88F0-3E561B9F19C2}"/>
-              </a:ext>
-            </a:extLst>
-          </p:cNvPr>
-          <p:cNvSpPr>
-            <a:spLocks xmlns:a="http://schemas.openxmlformats.org/drawingml/2006/main" noGrp="1"/>
-          </p:cNvSpPr>
-          <p:nvPr/>
-        </p:nvSpPr>
-        <p:spPr>
-          <a:xfrm xmlns:a="http://schemas.openxmlformats.org/drawingml/2006/main">
-            <a:off x="381000" y="495300"/>
-            <a:ext cx="9334500" cy="428625"/>
-          </a:xfrm>
-          <a:prstGeom xmlns:a="http://schemas.openxmlformats.org/drawingml/2006/main" prst="rect">
-            <a:avLst/>
-          </a:prstGeom>
-          <a:noFill xmlns:a="http://schemas.openxmlformats.org/drawingml/2006/main"/>
-          <a:ln xmlns:a="http://schemas.openxmlformats.org/drawingml/2006/main" w="0">
-            <a:noFill/>
-            <a:prstDash val="solid"/>
-          </a:ln>
-        </p:spPr>
-        <p:txBody>
-          <a:bodyPr xmlns:a="http://schemas.openxmlformats.org/drawingml/2006/main"/>
-          <a:lstStyle xmlns:a="http://schemas.openxmlformats.org/drawingml/2006/main"/>
-          <a:p xmlns:a="http://schemas.openxmlformats.org/drawingml/2006/main">
-            <a:pPr algn="l">
-              <a:defRPr sz="2250" b="1">
-                <a:solidFill>
-                  <a:srgbClr val="172033"/>
-                </a:solidFill>
-              </a:defRPr>
-            </a:pPr>
-            <a:r>
-              <a:rPr sz="2250" b="1">
-                <a:solidFill>
-                  <a:srgbClr val="172033"/>
-                </a:solidFill>
-              </a:rPr>
-              <a:t>AI proposes. Deterministic code authorizes.</a:t>
+                  <a:srgbClr val="98A19F"/>
+                </a:solidFill>
+              </a:rPr>
+              <a:t>04</a:t>
             </a:r>
           </a:p>
         </p:txBody>
       </p:sp>
       <p:pic>
         <p:nvPicPr>
-          <p:cNvPr id="6" name=""/>
+          <p:cNvPr id="16" name=""/>
           <p:cNvPicPr>
             <a:picLocks xmlns:a="http://schemas.openxmlformats.org/drawingml/2006/main" noChangeAspect="1"/>
           </p:cNvPicPr>
           <p:nvPr/>
         </p:nvPicPr>
         <p:blipFill>
-          <a:blip xmlns:r="http://schemas.openxmlformats.org/officeDocument/2006/relationships" xmlns:a="http://schemas.openxmlformats.org/drawingml/2006/main" r:embed="R5e383d1ec0a94f8e"/>
-          <a:stretch xmlns:a="http://schemas.openxmlformats.org/drawingml/2006/main"/>
+          <a:blip xmlns:r="http://schemas.openxmlformats.org/officeDocument/2006/relationships" xmlns:a="http://schemas.openxmlformats.org/drawingml/2006/main" r:embed="Rb7068acef88a4825"/>
+          <a:srcRect xmlns:a="http://schemas.openxmlformats.org/drawingml/2006/main" l="17500" t="0" r="17500" b="0"/>
+          <a:stretch xmlns:a="http://schemas.openxmlformats.org/drawingml/2006/main">
+            <a:fillRect l="0" t="0" r="0" b="0"/>
+          </a:stretch>
         </p:blipFill>
         <p:spPr>
           <a:xfrm xmlns:a="http://schemas.openxmlformats.org/drawingml/2006/main">
-            <a:off x="1821089" y="1047750"/>
-            <a:ext cx="8549821" cy="5524500"/>
+            <a:off x="6381750" y="1571625"/>
+            <a:ext cx="5143500" cy="3857625"/>
           </a:xfrm>
           <a:prstGeom xmlns:a="http://schemas.openxmlformats.org/drawingml/2006/main" prst="roundRect">
-            <a:avLst/>
+            <a:avLst>
+              <a:gd name="adj" fmla="val 2963"/>
+            </a:avLst>
           </a:prstGeom>
         </p:spPr>
       </p:pic>
+      <p:sp>
+        <p:nvSpPr>
+          <p:cNvPr id="6" name="">
+            <a:extLst xmlns:a="http://schemas.openxmlformats.org/drawingml/2006/main">
+              <a:ext uri="{FF2B5EF4-FFF2-40B4-BE49-F238E27FC236}">
+                <a16:creationId xmlns:a16="http://schemas.microsoft.com/office/drawing/2014/main" id="{69979A76-FB66-40F2-AEBC-9E8A1242EC9E}"/>
+              </a:ext>
+            </a:extLst>
+          </p:cNvPr>
+          <p:cNvSpPr>
+            <a:spLocks xmlns:a="http://schemas.openxmlformats.org/drawingml/2006/main" noGrp="1"/>
+          </p:cNvSpPr>
+          <p:nvPr/>
+        </p:nvSpPr>
+        <p:spPr>
+          <a:xfrm xmlns:a="http://schemas.openxmlformats.org/drawingml/2006/main">
+            <a:off x="666750" y="1714500"/>
+            <a:ext cx="1143000" cy="285750"/>
+          </a:xfrm>
+          <a:prstGeom xmlns:a="http://schemas.openxmlformats.org/drawingml/2006/main" prst="rect">
+            <a:avLst/>
+          </a:prstGeom>
+          <a:noFill xmlns:a="http://schemas.openxmlformats.org/drawingml/2006/main"/>
+          <a:ln xmlns:a="http://schemas.openxmlformats.org/drawingml/2006/main" w="0">
+            <a:noFill/>
+            <a:prstDash val="solid"/>
+          </a:ln>
+        </p:spPr>
+        <p:txBody>
+          <a:bodyPr xmlns:a="http://schemas.openxmlformats.org/drawingml/2006/main"/>
+          <a:lstStyle xmlns:a="http://schemas.openxmlformats.org/drawingml/2006/main"/>
+          <a:p xmlns:a="http://schemas.openxmlformats.org/drawingml/2006/main">
+            <a:pPr algn="l">
+              <a:defRPr sz="1200" b="1">
+                <a:solidFill>
+                  <a:srgbClr val="64D4CA"/>
+                </a:solidFill>
+              </a:defRPr>
+            </a:pPr>
+            <a:r>
+              <a:rPr sz="1200" b="1">
+                <a:solidFill>
+                  <a:srgbClr val="64D4CA"/>
+                </a:solidFill>
+              </a:rPr>
+              <a:t>BUY</a:t>
+            </a:r>
+          </a:p>
+        </p:txBody>
+      </p:sp>
+      <p:sp>
+        <p:nvSpPr>
+          <p:cNvPr id="7" name="">
+            <a:extLst xmlns:a="http://schemas.openxmlformats.org/drawingml/2006/main">
+              <a:ext uri="{FF2B5EF4-FFF2-40B4-BE49-F238E27FC236}">
+                <a16:creationId xmlns:a16="http://schemas.microsoft.com/office/drawing/2014/main" id="{1C145057-0845-4CE0-9A1A-3A06FE08B035}"/>
+              </a:ext>
+            </a:extLst>
+          </p:cNvPr>
+          <p:cNvSpPr>
+            <a:spLocks xmlns:a="http://schemas.openxmlformats.org/drawingml/2006/main" noGrp="1"/>
+          </p:cNvSpPr>
+          <p:nvPr/>
+        </p:nvSpPr>
+        <p:spPr>
+          <a:xfrm xmlns:a="http://schemas.openxmlformats.org/drawingml/2006/main">
+            <a:off x="666750" y="2143125"/>
+            <a:ext cx="4000500" cy="400050"/>
+          </a:xfrm>
+          <a:prstGeom xmlns:a="http://schemas.openxmlformats.org/drawingml/2006/main" prst="rect">
+            <a:avLst/>
+          </a:prstGeom>
+          <a:noFill xmlns:a="http://schemas.openxmlformats.org/drawingml/2006/main"/>
+          <a:ln xmlns:a="http://schemas.openxmlformats.org/drawingml/2006/main" w="0">
+            <a:noFill/>
+            <a:prstDash val="solid"/>
+          </a:ln>
+        </p:spPr>
+        <p:txBody>
+          <a:bodyPr xmlns:a="http://schemas.openxmlformats.org/drawingml/2006/main"/>
+          <a:lstStyle xmlns:a="http://schemas.openxmlformats.org/drawingml/2006/main"/>
+          <a:p xmlns:a="http://schemas.openxmlformats.org/drawingml/2006/main">
+            <a:pPr algn="l">
+              <a:defRPr sz="2025" b="1">
+                <a:solidFill>
+                  <a:srgbClr val="F5F7F6"/>
+                </a:solidFill>
+              </a:defRPr>
+            </a:pPr>
+            <a:r>
+              <a:rPr sz="2025" b="1">
+                <a:solidFill>
+                  <a:srgbClr val="F5F7F6"/>
+                </a:solidFill>
+              </a:rPr>
+              <a:t>Give the agent a mandate</a:t>
+            </a:r>
+          </a:p>
+        </p:txBody>
+      </p:sp>
+      <p:sp>
+        <p:nvSpPr>
+          <p:cNvPr id="8" name="">
+            <a:extLst xmlns:a="http://schemas.openxmlformats.org/drawingml/2006/main">
+              <a:ext uri="{FF2B5EF4-FFF2-40B4-BE49-F238E27FC236}">
+                <a16:creationId xmlns:a16="http://schemas.microsoft.com/office/drawing/2014/main" id="{B04E87FD-6E3D-4AFD-AE67-1C8FC0879DBA}"/>
+              </a:ext>
+            </a:extLst>
+          </p:cNvPr>
+          <p:cNvSpPr>
+            <a:spLocks xmlns:a="http://schemas.openxmlformats.org/drawingml/2006/main" noGrp="1"/>
+          </p:cNvSpPr>
+          <p:nvPr/>
+        </p:nvSpPr>
+        <p:spPr>
+          <a:xfrm xmlns:a="http://schemas.openxmlformats.org/drawingml/2006/main">
+            <a:off x="666750" y="2714625"/>
+            <a:ext cx="3714750" cy="1714500"/>
+          </a:xfrm>
+          <a:prstGeom xmlns:a="http://schemas.openxmlformats.org/drawingml/2006/main" prst="rect">
+            <a:avLst/>
+          </a:prstGeom>
+          <a:noFill xmlns:a="http://schemas.openxmlformats.org/drawingml/2006/main"/>
+          <a:ln xmlns:a="http://schemas.openxmlformats.org/drawingml/2006/main" w="0">
+            <a:noFill/>
+            <a:prstDash val="solid"/>
+          </a:ln>
+        </p:spPr>
+        <p:txBody>
+          <a:bodyPr xmlns:a="http://schemas.openxmlformats.org/drawingml/2006/main"/>
+          <a:lstStyle xmlns:a="http://schemas.openxmlformats.org/drawingml/2006/main"/>
+          <a:p xmlns:a="http://schemas.openxmlformats.org/drawingml/2006/main">
+            <a:pPr algn="l">
+              <a:defRPr sz="1425" b="0">
+                <a:solidFill>
+                  <a:srgbClr val="98A19F"/>
+                </a:solidFill>
+              </a:defRPr>
+            </a:pPr>
+            <a:r>
+              <a:rPr sz="1425" b="0">
+                <a:solidFill>
+                  <a:srgbClr val="98A19F"/>
+                </a:solidFill>
+              </a:rPr>
+              <a:t>Describe the outcome</a:t>
+            </a:r>
+          </a:p>
+          <a:p xmlns:a="http://schemas.openxmlformats.org/drawingml/2006/main">
+            <a:pPr algn="l">
+              <a:defRPr sz="1425" b="0">
+                <a:solidFill>
+                  <a:srgbClr val="98A19F"/>
+                </a:solidFill>
+              </a:defRPr>
+            </a:pPr>
+            <a:r>
+              <a:rPr sz="1425" b="0">
+                <a:solidFill>
+                  <a:srgbClr val="98A19F"/>
+                </a:solidFill>
+              </a:rPr>
+              <a:t>Discover and compare sellers</a:t>
+            </a:r>
+          </a:p>
+          <a:p xmlns:a="http://schemas.openxmlformats.org/drawingml/2006/main">
+            <a:pPr algn="l">
+              <a:defRPr sz="1425" b="0">
+                <a:solidFill>
+                  <a:srgbClr val="98A19F"/>
+                </a:solidFill>
+              </a:defRPr>
+            </a:pPr>
+            <a:r>
+              <a:rPr sz="1425" b="0">
+                <a:solidFill>
+                  <a:srgbClr val="98A19F"/>
+                </a:solidFill>
+              </a:rPr>
+              <a:t>Negotiate through A2A</a:t>
+            </a:r>
+          </a:p>
+          <a:p xmlns:a="http://schemas.openxmlformats.org/drawingml/2006/main">
+            <a:pPr algn="l">
+              <a:defRPr sz="1425" b="0">
+                <a:solidFill>
+                  <a:srgbClr val="98A19F"/>
+                </a:solidFill>
+              </a:defRPr>
+            </a:pPr>
+            <a:r>
+              <a:rPr sz="1425" b="0">
+                <a:solidFill>
+                  <a:srgbClr val="98A19F"/>
+                </a:solidFill>
+              </a:rPr>
+              <a:t>Enforce company policy</a:t>
+            </a:r>
+          </a:p>
+          <a:p xmlns:a="http://schemas.openxmlformats.org/drawingml/2006/main">
+            <a:pPr algn="l">
+              <a:defRPr sz="1425" b="0">
+                <a:solidFill>
+                  <a:srgbClr val="98A19F"/>
+                </a:solidFill>
+              </a:defRPr>
+            </a:pPr>
+            <a:r>
+              <a:rPr sz="1425" b="0">
+                <a:solidFill>
+                  <a:srgbClr val="98A19F"/>
+                </a:solidFill>
+              </a:rPr>
+              <a:t>Approve, pay, and verify</a:t>
+            </a:r>
+          </a:p>
+        </p:txBody>
+      </p:sp>
+      <p:sp>
+        <p:nvSpPr>
+          <p:cNvPr id="9" name="">
+            <a:extLst xmlns:a="http://schemas.openxmlformats.org/drawingml/2006/main">
+              <a:ext uri="{FF2B5EF4-FFF2-40B4-BE49-F238E27FC236}">
+                <a16:creationId xmlns:a16="http://schemas.microsoft.com/office/drawing/2014/main" id="{332A1EF3-2E56-435D-A298-844DEDBCFBE4}"/>
+              </a:ext>
+            </a:extLst>
+          </p:cNvPr>
+          <p:cNvSpPr>
+            <a:spLocks xmlns:a="http://schemas.openxmlformats.org/drawingml/2006/main" noGrp="1"/>
+          </p:cNvSpPr>
+          <p:nvPr/>
+        </p:nvSpPr>
+        <p:spPr>
+          <a:xfrm xmlns:a="http://schemas.openxmlformats.org/drawingml/2006/main">
+            <a:off x="666750" y="4619625"/>
+            <a:ext cx="1143000" cy="285750"/>
+          </a:xfrm>
+          <a:prstGeom xmlns:a="http://schemas.openxmlformats.org/drawingml/2006/main" prst="rect">
+            <a:avLst/>
+          </a:prstGeom>
+          <a:noFill xmlns:a="http://schemas.openxmlformats.org/drawingml/2006/main"/>
+          <a:ln xmlns:a="http://schemas.openxmlformats.org/drawingml/2006/main" w="0">
+            <a:noFill/>
+            <a:prstDash val="solid"/>
+          </a:ln>
+        </p:spPr>
+        <p:txBody>
+          <a:bodyPr xmlns:a="http://schemas.openxmlformats.org/drawingml/2006/main"/>
+          <a:lstStyle xmlns:a="http://schemas.openxmlformats.org/drawingml/2006/main"/>
+          <a:p xmlns:a="http://schemas.openxmlformats.org/drawingml/2006/main">
+            <a:pPr algn="l">
+              <a:defRPr sz="1200" b="1">
+                <a:solidFill>
+                  <a:srgbClr val="F2ED55"/>
+                </a:solidFill>
+              </a:defRPr>
+            </a:pPr>
+            <a:r>
+              <a:rPr sz="1200" b="1">
+                <a:solidFill>
+                  <a:srgbClr val="F2ED55"/>
+                </a:solidFill>
+              </a:rPr>
+              <a:t>SELL</a:t>
+            </a:r>
+          </a:p>
+        </p:txBody>
+      </p:sp>
+      <p:sp>
+        <p:nvSpPr>
+          <p:cNvPr id="10" name="">
+            <a:extLst xmlns:a="http://schemas.openxmlformats.org/drawingml/2006/main">
+              <a:ext uri="{FF2B5EF4-FFF2-40B4-BE49-F238E27FC236}">
+                <a16:creationId xmlns:a16="http://schemas.microsoft.com/office/drawing/2014/main" id="{BA1877DF-3219-4094-8F8A-2E782D9A2504}"/>
+              </a:ext>
+            </a:extLst>
+          </p:cNvPr>
+          <p:cNvSpPr>
+            <a:spLocks xmlns:a="http://schemas.openxmlformats.org/drawingml/2006/main" noGrp="1"/>
+          </p:cNvSpPr>
+          <p:nvPr/>
+        </p:nvSpPr>
+        <p:spPr>
+          <a:xfrm xmlns:a="http://schemas.openxmlformats.org/drawingml/2006/main">
+            <a:off x="666750" y="5000625"/>
+            <a:ext cx="4762500" cy="400050"/>
+          </a:xfrm>
+          <a:prstGeom xmlns:a="http://schemas.openxmlformats.org/drawingml/2006/main" prst="rect">
+            <a:avLst/>
+          </a:prstGeom>
+          <a:noFill xmlns:a="http://schemas.openxmlformats.org/drawingml/2006/main"/>
+          <a:ln xmlns:a="http://schemas.openxmlformats.org/drawingml/2006/main" w="0">
+            <a:noFill/>
+            <a:prstDash val="solid"/>
+          </a:ln>
+        </p:spPr>
+        <p:txBody>
+          <a:bodyPr xmlns:a="http://schemas.openxmlformats.org/drawingml/2006/main"/>
+          <a:lstStyle xmlns:a="http://schemas.openxmlformats.org/drawingml/2006/main"/>
+          <a:p xmlns:a="http://schemas.openxmlformats.org/drawingml/2006/main">
+            <a:pPr algn="l">
+              <a:defRPr sz="1875" b="1">
+                <a:solidFill>
+                  <a:srgbClr val="F5F7F6"/>
+                </a:solidFill>
+              </a:defRPr>
+            </a:pPr>
+            <a:r>
+              <a:rPr sz="1875" b="1">
+                <a:solidFill>
+                  <a:srgbClr val="F5F7F6"/>
+                </a:solidFill>
+              </a:rPr>
+              <a:t>Publish what the business already sells</a:t>
+            </a:r>
+          </a:p>
+        </p:txBody>
+      </p:sp>
+      <p:sp>
+        <p:nvSpPr>
+          <p:cNvPr id="11" name="">
+            <a:extLst xmlns:a="http://schemas.openxmlformats.org/drawingml/2006/main">
+              <a:ext uri="{FF2B5EF4-FFF2-40B4-BE49-F238E27FC236}">
+                <a16:creationId xmlns:a16="http://schemas.microsoft.com/office/drawing/2014/main" id="{6D895B92-B40E-43ED-BB9B-DF91C7A5A5E8}"/>
+              </a:ext>
+            </a:extLst>
+          </p:cNvPr>
+          <p:cNvSpPr>
+            <a:spLocks xmlns:a="http://schemas.openxmlformats.org/drawingml/2006/main" noGrp="1"/>
+          </p:cNvSpPr>
+          <p:nvPr/>
+        </p:nvSpPr>
+        <p:spPr>
+          <a:xfrm xmlns:a="http://schemas.openxmlformats.org/drawingml/2006/main">
+            <a:off x="666750" y="5476875"/>
+            <a:ext cx="4953000" cy="714375"/>
+          </a:xfrm>
+          <a:prstGeom xmlns:a="http://schemas.openxmlformats.org/drawingml/2006/main" prst="rect">
+            <a:avLst/>
+          </a:prstGeom>
+          <a:noFill xmlns:a="http://schemas.openxmlformats.org/drawingml/2006/main"/>
+          <a:ln xmlns:a="http://schemas.openxmlformats.org/drawingml/2006/main" w="0">
+            <a:noFill/>
+            <a:prstDash val="solid"/>
+          </a:ln>
+        </p:spPr>
+        <p:txBody>
+          <a:bodyPr xmlns:a="http://schemas.openxmlformats.org/drawingml/2006/main"/>
+          <a:lstStyle xmlns:a="http://schemas.openxmlformats.org/drawingml/2006/main"/>
+          <a:p xmlns:a="http://schemas.openxmlformats.org/drawingml/2006/main">
+            <a:pPr algn="l">
+              <a:defRPr sz="1350" b="0">
+                <a:solidFill>
+                  <a:srgbClr val="98A19F"/>
+                </a:solidFill>
+              </a:defRPr>
+            </a:pPr>
+            <a:r>
+              <a:rPr sz="1350" b="0">
+                <a:solidFill>
+                  <a:srgbClr val="98A19F"/>
+                </a:solidFill>
+              </a:rPr>
+              <a:t>APIs, software, services, subscriptions, or physical products use the same pricing, negotiation, authorization, and receipt layer.</a:t>
+            </a:r>
+          </a:p>
+        </p:txBody>
+      </p:sp>
     </p:spTree>
     <p:extLst>
       <p:ext uri="{BB962C8B-B14F-4D97-AF65-F5344CB8AC3E}">
-        <p14:creationId xmlns:p14="http://schemas.microsoft.com/office/powerpoint/2010/main" val="1986374261"/>
+        <p14:creationId xmlns:p14="http://schemas.microsoft.com/office/powerpoint/2010/main" val="992333537"/>
       </p:ext>
     </p:extLst>
   </p:cSld>
@@ -5591,7 +6699,7 @@
           <p:cNvPr id="10" name="">
             <a:extLst xmlns:a="http://schemas.openxmlformats.org/drawingml/2006/main">
               <a:ext uri="{FF2B5EF4-FFF2-40B4-BE49-F238E27FC236}">
-                <a16:creationId xmlns:a16="http://schemas.microsoft.com/office/drawing/2014/main" id="{AE62991A-2BF3-40F0-8D93-7421B25028DB}"/>
+                <a16:creationId xmlns:a16="http://schemas.microsoft.com/office/drawing/2014/main" id="{E15CAEAD-563C-4EDA-9112-ABF617A61929}"/>
               </a:ext>
             </a:extLst>
           </p:cNvPr>
@@ -5641,7 +6749,7 @@
           <p:cNvPr id="2" name="">
             <a:extLst xmlns:a="http://schemas.openxmlformats.org/drawingml/2006/main">
               <a:ext uri="{FF2B5EF4-FFF2-40B4-BE49-F238E27FC236}">
-                <a16:creationId xmlns:a16="http://schemas.microsoft.com/office/drawing/2014/main" id="{1C35BC56-5223-4E0B-A9F4-55D4463F7E16}"/>
+                <a16:creationId xmlns:a16="http://schemas.microsoft.com/office/drawing/2014/main" id="{0A6E29C7-937E-41C3-88CB-85EB14238D68}"/>
               </a:ext>
             </a:extLst>
           </p:cNvPr>
@@ -5691,7 +6799,7 @@
           <p:cNvPr id="3" name="">
             <a:extLst xmlns:a="http://schemas.openxmlformats.org/drawingml/2006/main">
               <a:ext uri="{FF2B5EF4-FFF2-40B4-BE49-F238E27FC236}">
-                <a16:creationId xmlns:a16="http://schemas.microsoft.com/office/drawing/2014/main" id="{31C846A3-C308-4213-B3A1-B3DD94C3C895}"/>
+                <a16:creationId xmlns:a16="http://schemas.microsoft.com/office/drawing/2014/main" id="{20551FD2-74CC-4509-967F-67B2B77CD797}"/>
               </a:ext>
             </a:extLst>
           </p:cNvPr>
@@ -5724,7 +6832,7 @@
           <p:cNvPr id="4" name="">
             <a:extLst xmlns:a="http://schemas.openxmlformats.org/drawingml/2006/main">
               <a:ext uri="{FF2B5EF4-FFF2-40B4-BE49-F238E27FC236}">
-                <a16:creationId xmlns:a16="http://schemas.microsoft.com/office/drawing/2014/main" id="{D815C496-4EED-4007-842A-CCD32E4493BA}"/>
+                <a16:creationId xmlns:a16="http://schemas.microsoft.com/office/drawing/2014/main" id="{C56D37CC-5F17-4482-B33B-6CA87BA8A62F}"/>
               </a:ext>
             </a:extLst>
           </p:cNvPr>
@@ -5778,7 +6886,7 @@
           <p:nvPr/>
         </p:nvPicPr>
         <p:blipFill>
-          <a:blip xmlns:r="http://schemas.openxmlformats.org/officeDocument/2006/relationships" xmlns:a="http://schemas.openxmlformats.org/drawingml/2006/main" r:embed="R445b2f609c354f14"/>
+          <a:blip xmlns:r="http://schemas.openxmlformats.org/officeDocument/2006/relationships" xmlns:a="http://schemas.openxmlformats.org/drawingml/2006/main" r:embed="Rae4dd38d9f61408a"/>
           <a:srcRect xmlns:a="http://schemas.openxmlformats.org/drawingml/2006/main" l="8833" t="0" r="8833" b="0"/>
           <a:stretch xmlns:a="http://schemas.openxmlformats.org/drawingml/2006/main">
             <a:fillRect l="0" t="0" r="0" b="0"/>
@@ -5801,7 +6909,7 @@
           <p:cNvPr id="6" name="">
             <a:extLst xmlns:a="http://schemas.openxmlformats.org/drawingml/2006/main">
               <a:ext uri="{FF2B5EF4-FFF2-40B4-BE49-F238E27FC236}">
-                <a16:creationId xmlns:a16="http://schemas.microsoft.com/office/drawing/2014/main" id="{1863BB8A-1CEA-4436-9BEA-587FD9EB9F27}"/>
+                <a16:creationId xmlns:a16="http://schemas.microsoft.com/office/drawing/2014/main" id="{3104E6AD-B64B-4867-A3D5-64B051A95558}"/>
               </a:ext>
             </a:extLst>
           </p:cNvPr>
@@ -5851,7 +6959,7 @@
           <p:cNvPr id="7" name="">
             <a:extLst xmlns:a="http://schemas.openxmlformats.org/drawingml/2006/main">
               <a:ext uri="{FF2B5EF4-FFF2-40B4-BE49-F238E27FC236}">
-                <a16:creationId xmlns:a16="http://schemas.microsoft.com/office/drawing/2014/main" id="{0F438296-E7C6-4A65-9AA6-815313A79F38}"/>
+                <a16:creationId xmlns:a16="http://schemas.microsoft.com/office/drawing/2014/main" id="{2C9D3FB0-57FA-42FC-997E-E9E1D89ADE5C}"/>
               </a:ext>
             </a:extLst>
           </p:cNvPr>
@@ -5901,7 +7009,7 @@
           <p:cNvPr id="8" name="">
             <a:extLst xmlns:a="http://schemas.openxmlformats.org/drawingml/2006/main">
               <a:ext uri="{FF2B5EF4-FFF2-40B4-BE49-F238E27FC236}">
-                <a16:creationId xmlns:a16="http://schemas.microsoft.com/office/drawing/2014/main" id="{91FE5EF9-DA60-49D9-8D13-1FDD3C1B045B}"/>
+                <a16:creationId xmlns:a16="http://schemas.microsoft.com/office/drawing/2014/main" id="{744F8973-4630-41CB-A954-F51FE6563C5E}"/>
               </a:ext>
             </a:extLst>
           </p:cNvPr>
@@ -5985,7 +7093,7 @@
           <p:cNvPr id="9" name="">
             <a:extLst xmlns:a="http://schemas.openxmlformats.org/drawingml/2006/main">
               <a:ext uri="{FF2B5EF4-FFF2-40B4-BE49-F238E27FC236}">
-                <a16:creationId xmlns:a16="http://schemas.microsoft.com/office/drawing/2014/main" id="{3526DD34-E348-407E-99AA-C4004251D696}"/>
+                <a16:creationId xmlns:a16="http://schemas.microsoft.com/office/drawing/2014/main" id="{6B098A4F-2D48-4A9A-A796-B315FE93C0C2}"/>
               </a:ext>
             </a:extLst>
           </p:cNvPr>
@@ -6033,7 +7141,7 @@
     </p:spTree>
     <p:extLst>
       <p:ext uri="{BB962C8B-B14F-4D97-AF65-F5344CB8AC3E}">
-        <p14:creationId xmlns:p14="http://schemas.microsoft.com/office/powerpoint/2010/main" val="2055694554"/>
+        <p14:creationId xmlns:p14="http://schemas.microsoft.com/office/powerpoint/2010/main" val="572042175"/>
       </p:ext>
     </p:extLst>
   </p:cSld>
@@ -6061,10 +7169,10 @@
       </p:grpSpPr>
       <p:sp>
         <p:nvSpPr>
-          <p:cNvPr id="12" name="">
-            <a:extLst xmlns:a="http://schemas.openxmlformats.org/drawingml/2006/main">
-              <a:ext uri="{FF2B5EF4-FFF2-40B4-BE49-F238E27FC236}">
-                <a16:creationId xmlns:a16="http://schemas.microsoft.com/office/drawing/2014/main" id="{53869436-AF29-4CA7-B854-9BC2D16289F9}"/>
+          <p:cNvPr id="11" name="">
+            <a:extLst xmlns:a="http://schemas.openxmlformats.org/drawingml/2006/main">
+              <a:ext uri="{FF2B5EF4-FFF2-40B4-BE49-F238E27FC236}">
+                <a16:creationId xmlns:a16="http://schemas.microsoft.com/office/drawing/2014/main" id="{8E982A68-19BD-48C1-9018-A939FB820831}"/>
               </a:ext>
             </a:extLst>
           </p:cNvPr>
@@ -6104,7 +7212,7 @@
                   <a:srgbClr val="F2ED55"/>
                 </a:solidFill>
               </a:rPr>
-              <a:t>GOVERNED BUYING</a:t>
+              <a:t>BUYER AGENT</a:t>
             </a:r>
           </a:p>
         </p:txBody>
@@ -6114,7 +7222,7 @@
           <p:cNvPr id="2" name="">
             <a:extLst xmlns:a="http://schemas.openxmlformats.org/drawingml/2006/main">
               <a:ext uri="{FF2B5EF4-FFF2-40B4-BE49-F238E27FC236}">
-                <a16:creationId xmlns:a16="http://schemas.microsoft.com/office/drawing/2014/main" id="{326761E4-2994-4B8A-8A7E-1CB5D4A88118}"/>
+                <a16:creationId xmlns:a16="http://schemas.microsoft.com/office/drawing/2014/main" id="{A4D59B51-443E-4299-8168-CD44471CF642}"/>
               </a:ext>
             </a:extLst>
           </p:cNvPr>
@@ -6154,7 +7262,7 @@
                   <a:srgbClr val="F5F7F6"/>
                 </a:solidFill>
               </a:rPr>
-              <a:t>The agent stops exactly where company authority ends.</a:t>
+              <a:t>The buyer agent turns plain English into a controlled mandate.</a:t>
             </a:r>
           </a:p>
         </p:txBody>
@@ -6164,7 +7272,7 @@
           <p:cNvPr id="3" name="">
             <a:extLst xmlns:a="http://schemas.openxmlformats.org/drawingml/2006/main">
               <a:ext uri="{FF2B5EF4-FFF2-40B4-BE49-F238E27FC236}">
-                <a16:creationId xmlns:a16="http://schemas.microsoft.com/office/drawing/2014/main" id="{2E81FE4F-26B2-4B6E-A5CA-2945D58AC208}"/>
+                <a16:creationId xmlns:a16="http://schemas.microsoft.com/office/drawing/2014/main" id="{C5F91065-28B7-4835-84B2-46FC706AA4E6}"/>
               </a:ext>
             </a:extLst>
           </p:cNvPr>
@@ -6197,7 +7305,7 @@
           <p:cNvPr id="4" name="">
             <a:extLst xmlns:a="http://schemas.openxmlformats.org/drawingml/2006/main">
               <a:ext uri="{FF2B5EF4-FFF2-40B4-BE49-F238E27FC236}">
-                <a16:creationId xmlns:a16="http://schemas.microsoft.com/office/drawing/2014/main" id="{78AC2CF9-3BB8-4EAC-9806-DDB23483CBA7}"/>
+                <a16:creationId xmlns:a16="http://schemas.microsoft.com/office/drawing/2014/main" id="{3E640D5C-365F-43A5-941C-95871E85B5C5}"/>
               </a:ext>
             </a:extLst>
           </p:cNvPr>
@@ -6244,27 +7352,27 @@
       </p:sp>
       <p:pic>
         <p:nvPicPr>
-          <p:cNvPr id="16" name=""/>
+          <p:cNvPr id="15" name=""/>
           <p:cNvPicPr>
             <a:picLocks xmlns:a="http://schemas.openxmlformats.org/drawingml/2006/main" noChangeAspect="1"/>
           </p:cNvPicPr>
           <p:nvPr/>
         </p:nvPicPr>
         <p:blipFill>
-          <a:blip xmlns:r="http://schemas.openxmlformats.org/officeDocument/2006/relationships" xmlns:a="http://schemas.openxmlformats.org/drawingml/2006/main" r:embed="R47100db240d0444d"/>
-          <a:srcRect xmlns:a="http://schemas.openxmlformats.org/drawingml/2006/main" l="9375" t="0" r="9375" b="0"/>
+          <a:blip xmlns:r="http://schemas.openxmlformats.org/officeDocument/2006/relationships" xmlns:a="http://schemas.openxmlformats.org/drawingml/2006/main" r:embed="R08fcf98bb10c4b54"/>
+          <a:srcRect xmlns:a="http://schemas.openxmlformats.org/drawingml/2006/main" l="13036" t="0" r="13036" b="0"/>
           <a:stretch xmlns:a="http://schemas.openxmlformats.org/drawingml/2006/main">
             <a:fillRect l="0" t="0" r="0" b="0"/>
           </a:stretch>
         </p:blipFill>
         <p:spPr>
           <a:xfrm xmlns:a="http://schemas.openxmlformats.org/drawingml/2006/main">
-            <a:off x="523875" y="1600200"/>
-            <a:ext cx="7143750" cy="4286250"/>
+            <a:off x="523875" y="1571625"/>
+            <a:ext cx="6572250" cy="4333875"/>
           </a:xfrm>
           <a:prstGeom xmlns:a="http://schemas.openxmlformats.org/drawingml/2006/main" prst="roundRect">
             <a:avLst>
-              <a:gd name="adj" fmla="val 2667"/>
+              <a:gd name="adj" fmla="val 2637"/>
             </a:avLst>
           </a:prstGeom>
         </p:spPr>
@@ -6274,97 +7382,97 @@
           <p:cNvPr id="6" name="">
             <a:extLst xmlns:a="http://schemas.openxmlformats.org/drawingml/2006/main">
               <a:ext uri="{FF2B5EF4-FFF2-40B4-BE49-F238E27FC236}">
-                <a16:creationId xmlns:a16="http://schemas.microsoft.com/office/drawing/2014/main" id="{8DDA05D5-E272-42F4-B331-91DC6A8352D1}"/>
-              </a:ext>
-            </a:extLst>
-          </p:cNvPr>
-          <p:cNvSpPr>
-            <a:spLocks xmlns:a="http://schemas.openxmlformats.org/drawingml/2006/main" noGrp="1"/>
-          </p:cNvSpPr>
-          <p:nvPr/>
-        </p:nvSpPr>
-        <p:spPr>
-          <a:xfrm xmlns:a="http://schemas.openxmlformats.org/drawingml/2006/main">
-            <a:off x="8096250" y="1809750"/>
-            <a:ext cx="2857500" cy="742950"/>
-          </a:xfrm>
-          <a:prstGeom xmlns:a="http://schemas.openxmlformats.org/drawingml/2006/main" prst="rect">
-            <a:avLst/>
-          </a:prstGeom>
-          <a:noFill xmlns:a="http://schemas.openxmlformats.org/drawingml/2006/main"/>
-          <a:ln xmlns:a="http://schemas.openxmlformats.org/drawingml/2006/main" w="0">
-            <a:noFill/>
-            <a:prstDash val="solid"/>
-          </a:ln>
-        </p:spPr>
-        <p:txBody>
-          <a:bodyPr xmlns:a="http://schemas.openxmlformats.org/drawingml/2006/main"/>
-          <a:lstStyle xmlns:a="http://schemas.openxmlformats.org/drawingml/2006/main"/>
-          <a:p xmlns:a="http://schemas.openxmlformats.org/drawingml/2006/main">
-            <a:pPr algn="l">
-              <a:defRPr sz="3900" b="1">
+                <a16:creationId xmlns:a16="http://schemas.microsoft.com/office/drawing/2014/main" id="{C5578010-A687-4562-8032-C09FA5A26242}"/>
+              </a:ext>
+            </a:extLst>
+          </p:cNvPr>
+          <p:cNvSpPr>
+            <a:spLocks xmlns:a="http://schemas.openxmlformats.org/drawingml/2006/main" noGrp="1"/>
+          </p:cNvSpPr>
+          <p:nvPr/>
+        </p:nvSpPr>
+        <p:spPr>
+          <a:xfrm xmlns:a="http://schemas.openxmlformats.org/drawingml/2006/main">
+            <a:off x="7524750" y="1714500"/>
+            <a:ext cx="2667000" cy="333375"/>
+          </a:xfrm>
+          <a:prstGeom xmlns:a="http://schemas.openxmlformats.org/drawingml/2006/main" prst="rect">
+            <a:avLst/>
+          </a:prstGeom>
+          <a:noFill xmlns:a="http://schemas.openxmlformats.org/drawingml/2006/main"/>
+          <a:ln xmlns:a="http://schemas.openxmlformats.org/drawingml/2006/main" w="0">
+            <a:noFill/>
+            <a:prstDash val="solid"/>
+          </a:ln>
+        </p:spPr>
+        <p:txBody>
+          <a:bodyPr xmlns:a="http://schemas.openxmlformats.org/drawingml/2006/main"/>
+          <a:lstStyle xmlns:a="http://schemas.openxmlformats.org/drawingml/2006/main"/>
+          <a:p xmlns:a="http://schemas.openxmlformats.org/drawingml/2006/main">
+            <a:pPr algn="l">
+              <a:defRPr sz="1350" b="1">
+                <a:solidFill>
+                  <a:srgbClr val="64D4CA"/>
+                </a:solidFill>
+              </a:defRPr>
+            </a:pPr>
+            <a:r>
+              <a:rPr sz="1350" b="1">
+                <a:solidFill>
+                  <a:srgbClr val="64D4CA"/>
+                </a:solidFill>
+              </a:rPr>
+              <a:t>Request</a:t>
+            </a:r>
+          </a:p>
+        </p:txBody>
+      </p:sp>
+      <p:sp>
+        <p:nvSpPr>
+          <p:cNvPr id="7" name="">
+            <a:extLst xmlns:a="http://schemas.openxmlformats.org/drawingml/2006/main">
+              <a:ext uri="{FF2B5EF4-FFF2-40B4-BE49-F238E27FC236}">
+                <a16:creationId xmlns:a16="http://schemas.microsoft.com/office/drawing/2014/main" id="{5FC47884-C06C-407E-9BAC-C40B1D3E2151}"/>
+              </a:ext>
+            </a:extLst>
+          </p:cNvPr>
+          <p:cNvSpPr>
+            <a:spLocks xmlns:a="http://schemas.openxmlformats.org/drawingml/2006/main" noGrp="1"/>
+          </p:cNvSpPr>
+          <p:nvPr/>
+        </p:nvSpPr>
+        <p:spPr>
+          <a:xfrm xmlns:a="http://schemas.openxmlformats.org/drawingml/2006/main">
+            <a:off x="7524750" y="2143125"/>
+            <a:ext cx="3619500" cy="714375"/>
+          </a:xfrm>
+          <a:prstGeom xmlns:a="http://schemas.openxmlformats.org/drawingml/2006/main" prst="rect">
+            <a:avLst/>
+          </a:prstGeom>
+          <a:noFill xmlns:a="http://schemas.openxmlformats.org/drawingml/2006/main"/>
+          <a:ln xmlns:a="http://schemas.openxmlformats.org/drawingml/2006/main" w="0">
+            <a:noFill/>
+            <a:prstDash val="solid"/>
+          </a:ln>
+        </p:spPr>
+        <p:txBody>
+          <a:bodyPr xmlns:a="http://schemas.openxmlformats.org/drawingml/2006/main"/>
+          <a:lstStyle xmlns:a="http://schemas.openxmlformats.org/drawingml/2006/main"/>
+          <a:p xmlns:a="http://schemas.openxmlformats.org/drawingml/2006/main">
+            <a:pPr algn="l">
+              <a:defRPr sz="1875" b="1">
                 <a:solidFill>
                   <a:srgbClr val="F5F7F6"/>
                 </a:solidFill>
               </a:defRPr>
             </a:pPr>
             <a:r>
-              <a:rPr sz="3900" b="1">
+              <a:rPr sz="1875" b="1">
                 <a:solidFill>
                   <a:srgbClr val="F5F7F6"/>
                 </a:solidFill>
               </a:rPr>
-              <a:t>$1,450</a:t>
-            </a:r>
-          </a:p>
-        </p:txBody>
-      </p:sp>
-      <p:sp>
-        <p:nvSpPr>
-          <p:cNvPr id="7" name="">
-            <a:extLst xmlns:a="http://schemas.openxmlformats.org/drawingml/2006/main">
-              <a:ext uri="{FF2B5EF4-FFF2-40B4-BE49-F238E27FC236}">
-                <a16:creationId xmlns:a16="http://schemas.microsoft.com/office/drawing/2014/main" id="{50D03FD2-9509-4FD5-9BA8-FABC25F8DE45}"/>
-              </a:ext>
-            </a:extLst>
-          </p:cNvPr>
-          <p:cNvSpPr>
-            <a:spLocks xmlns:a="http://schemas.openxmlformats.org/drawingml/2006/main" noGrp="1"/>
-          </p:cNvSpPr>
-          <p:nvPr/>
-        </p:nvSpPr>
-        <p:spPr>
-          <a:xfrm xmlns:a="http://schemas.openxmlformats.org/drawingml/2006/main">
-            <a:off x="8096250" y="2571750"/>
-            <a:ext cx="2857500" cy="342900"/>
-          </a:xfrm>
-          <a:prstGeom xmlns:a="http://schemas.openxmlformats.org/drawingml/2006/main" prst="rect">
-            <a:avLst/>
-          </a:prstGeom>
-          <a:noFill xmlns:a="http://schemas.openxmlformats.org/drawingml/2006/main"/>
-          <a:ln xmlns:a="http://schemas.openxmlformats.org/drawingml/2006/main" w="0">
-            <a:noFill/>
-            <a:prstDash val="solid"/>
-          </a:ln>
-        </p:spPr>
-        <p:txBody>
-          <a:bodyPr xmlns:a="http://schemas.openxmlformats.org/drawingml/2006/main"/>
-          <a:lstStyle xmlns:a="http://schemas.openxmlformats.org/drawingml/2006/main"/>
-          <a:p xmlns:a="http://schemas.openxmlformats.org/drawingml/2006/main">
-            <a:pPr algn="l">
-              <a:defRPr sz="1650" b="0">
-                <a:solidFill>
-                  <a:srgbClr val="98A19F"/>
-                </a:solidFill>
-              </a:defRPr>
-            </a:pPr>
-            <a:r>
-              <a:rPr sz="1650" b="0">
-                <a:solidFill>
-                  <a:srgbClr val="98A19F"/>
-                </a:solidFill>
-              </a:rPr>
-              <a:t>negotiated order</a:t>
+              <a:t>Buy 100 mission-readiness reports. Stay below $1,500.</a:t>
             </a:r>
           </a:p>
         </p:txBody>
@@ -6374,80 +7482,165 @@
           <p:cNvPr id="8" name="">
             <a:extLst xmlns:a="http://schemas.openxmlformats.org/drawingml/2006/main">
               <a:ext uri="{FF2B5EF4-FFF2-40B4-BE49-F238E27FC236}">
-                <a16:creationId xmlns:a16="http://schemas.microsoft.com/office/drawing/2014/main" id="{7B75E270-C078-4D50-8B0A-FABB7F3DEA2E}"/>
-              </a:ext>
-            </a:extLst>
-          </p:cNvPr>
-          <p:cNvSpPr>
-            <a:spLocks xmlns:a="http://schemas.openxmlformats.org/drawingml/2006/main" noGrp="1"/>
-          </p:cNvSpPr>
-          <p:nvPr/>
-        </p:nvSpPr>
-        <p:spPr>
-          <a:xfrm xmlns:a="http://schemas.openxmlformats.org/drawingml/2006/main">
-            <a:off x="8096250" y="3190875"/>
-            <a:ext cx="2857500" cy="9525"/>
-          </a:xfrm>
-          <a:prstGeom xmlns:a="http://schemas.openxmlformats.org/drawingml/2006/main" prst="rect">
-            <a:avLst/>
-          </a:prstGeom>
-          <a:solidFill xmlns:a="http://schemas.openxmlformats.org/drawingml/2006/main">
-            <a:srgbClr val="2B3735"/>
-          </a:solidFill>
-          <a:ln xmlns:a="http://schemas.openxmlformats.org/drawingml/2006/main" w="0">
-            <a:solidFill>
-              <a:srgbClr val="2B3735"/>
-            </a:solidFill>
-            <a:prstDash val="solid"/>
-          </a:ln>
-        </p:spPr>
+                <a16:creationId xmlns:a16="http://schemas.microsoft.com/office/drawing/2014/main" id="{2D80D100-B098-483C-8DE7-42B184438C50}"/>
+              </a:ext>
+            </a:extLst>
+          </p:cNvPr>
+          <p:cNvSpPr>
+            <a:spLocks xmlns:a="http://schemas.openxmlformats.org/drawingml/2006/main" noGrp="1"/>
+          </p:cNvSpPr>
+          <p:nvPr/>
+        </p:nvSpPr>
+        <p:spPr>
+          <a:xfrm xmlns:a="http://schemas.openxmlformats.org/drawingml/2006/main">
+            <a:off x="7524750" y="3190875"/>
+            <a:ext cx="2857500" cy="333375"/>
+          </a:xfrm>
+          <a:prstGeom xmlns:a="http://schemas.openxmlformats.org/drawingml/2006/main" prst="rect">
+            <a:avLst/>
+          </a:prstGeom>
+          <a:noFill xmlns:a="http://schemas.openxmlformats.org/drawingml/2006/main"/>
+          <a:ln xmlns:a="http://schemas.openxmlformats.org/drawingml/2006/main" w="0">
+            <a:noFill/>
+            <a:prstDash val="solid"/>
+          </a:ln>
+        </p:spPr>
+        <p:txBody>
+          <a:bodyPr xmlns:a="http://schemas.openxmlformats.org/drawingml/2006/main"/>
+          <a:lstStyle xmlns:a="http://schemas.openxmlformats.org/drawingml/2006/main"/>
+          <a:p xmlns:a="http://schemas.openxmlformats.org/drawingml/2006/main">
+            <a:pPr algn="l">
+              <a:defRPr sz="1350" b="1">
+                <a:solidFill>
+                  <a:srgbClr val="F2ED55"/>
+                </a:solidFill>
+              </a:defRPr>
+            </a:pPr>
+            <a:r>
+              <a:rPr sz="1350" b="1">
+                <a:solidFill>
+                  <a:srgbClr val="F2ED55"/>
+                </a:solidFill>
+              </a:rPr>
+              <a:t>Structured authority</a:t>
+            </a:r>
+          </a:p>
+        </p:txBody>
       </p:sp>
       <p:sp>
         <p:nvSpPr>
           <p:cNvPr id="9" name="">
             <a:extLst xmlns:a="http://schemas.openxmlformats.org/drawingml/2006/main">
               <a:ext uri="{FF2B5EF4-FFF2-40B4-BE49-F238E27FC236}">
-                <a16:creationId xmlns:a16="http://schemas.microsoft.com/office/drawing/2014/main" id="{9E57F785-2469-4B15-A5A4-ADB050F5D211}"/>
-              </a:ext>
-            </a:extLst>
-          </p:cNvPr>
-          <p:cNvSpPr>
-            <a:spLocks xmlns:a="http://schemas.openxmlformats.org/drawingml/2006/main" noGrp="1"/>
-          </p:cNvSpPr>
-          <p:nvPr/>
-        </p:nvSpPr>
-        <p:spPr>
-          <a:xfrm xmlns:a="http://schemas.openxmlformats.org/drawingml/2006/main">
-            <a:off x="8096250" y="3524250"/>
-            <a:ext cx="2095500" cy="552450"/>
-          </a:xfrm>
-          <a:prstGeom xmlns:a="http://schemas.openxmlformats.org/drawingml/2006/main" prst="rect">
-            <a:avLst/>
-          </a:prstGeom>
-          <a:noFill xmlns:a="http://schemas.openxmlformats.org/drawingml/2006/main"/>
-          <a:ln xmlns:a="http://schemas.openxmlformats.org/drawingml/2006/main" w="0">
-            <a:noFill/>
-            <a:prstDash val="solid"/>
-          </a:ln>
-        </p:spPr>
-        <p:txBody>
-          <a:bodyPr xmlns:a="http://schemas.openxmlformats.org/drawingml/2006/main"/>
-          <a:lstStyle xmlns:a="http://schemas.openxmlformats.org/drawingml/2006/main"/>
-          <a:p xmlns:a="http://schemas.openxmlformats.org/drawingml/2006/main">
-            <a:pPr algn="l">
-              <a:defRPr sz="2850" b="1">
-                <a:solidFill>
-                  <a:srgbClr val="F2ED55"/>
-                </a:solidFill>
-              </a:defRPr>
-            </a:pPr>
-            <a:r>
-              <a:rPr sz="2850" b="1">
-                <a:solidFill>
-                  <a:srgbClr val="F2ED55"/>
-                </a:solidFill>
-              </a:rPr>
-              <a:t>$500</a:t>
+                <a16:creationId xmlns:a16="http://schemas.microsoft.com/office/drawing/2014/main" id="{D24B9BB7-0F1D-4E99-A0AD-326A5CAACDF5}"/>
+              </a:ext>
+            </a:extLst>
+          </p:cNvPr>
+          <p:cNvSpPr>
+            <a:spLocks xmlns:a="http://schemas.openxmlformats.org/drawingml/2006/main" noGrp="1"/>
+          </p:cNvSpPr>
+          <p:nvPr/>
+        </p:nvSpPr>
+        <p:spPr>
+          <a:xfrm xmlns:a="http://schemas.openxmlformats.org/drawingml/2006/main">
+            <a:off x="7524750" y="3638550"/>
+            <a:ext cx="3333750" cy="1619250"/>
+          </a:xfrm>
+          <a:prstGeom xmlns:a="http://schemas.openxmlformats.org/drawingml/2006/main" prst="rect">
+            <a:avLst/>
+          </a:prstGeom>
+          <a:noFill xmlns:a="http://schemas.openxmlformats.org/drawingml/2006/main"/>
+          <a:ln xmlns:a="http://schemas.openxmlformats.org/drawingml/2006/main" w="0">
+            <a:noFill/>
+            <a:prstDash val="solid"/>
+          </a:ln>
+        </p:spPr>
+        <p:txBody>
+          <a:bodyPr xmlns:a="http://schemas.openxmlformats.org/drawingml/2006/main"/>
+          <a:lstStyle xmlns:a="http://schemas.openxmlformats.org/drawingml/2006/main"/>
+          <a:p xmlns:a="http://schemas.openxmlformats.org/drawingml/2006/main">
+            <a:pPr algn="l">
+              <a:defRPr sz="1425" b="0">
+                <a:solidFill>
+                  <a:srgbClr val="98A19F"/>
+                </a:solidFill>
+              </a:defRPr>
+            </a:pPr>
+            <a:r>
+              <a:rPr sz="1425" b="0">
+                <a:solidFill>
+                  <a:srgbClr val="98A19F"/>
+                </a:solidFill>
+              </a:rPr>
+              <a:t>Budget</a:t>
+            </a:r>
+          </a:p>
+          <a:p xmlns:a="http://schemas.openxmlformats.org/drawingml/2006/main">
+            <a:pPr algn="l">
+              <a:defRPr sz="1425" b="0">
+                <a:solidFill>
+                  <a:srgbClr val="98A19F"/>
+                </a:solidFill>
+              </a:defRPr>
+            </a:pPr>
+            <a:r>
+              <a:rPr sz="1425" b="0">
+                <a:solidFill>
+                  <a:srgbClr val="98A19F"/>
+                </a:solidFill>
+              </a:rPr>
+              <a:t>Maximum unit price</a:t>
+            </a:r>
+          </a:p>
+          <a:p xmlns:a="http://schemas.openxmlformats.org/drawingml/2006/main">
+            <a:pPr algn="l">
+              <a:defRPr sz="1425" b="0">
+                <a:solidFill>
+                  <a:srgbClr val="98A19F"/>
+                </a:solidFill>
+              </a:defRPr>
+            </a:pPr>
+            <a:r>
+              <a:rPr sz="1425" b="0">
+                <a:solidFill>
+                  <a:srgbClr val="98A19F"/>
+                </a:solidFill>
+              </a:rPr>
+              <a:t>Required quantity and quality</a:t>
+            </a:r>
+          </a:p>
+          <a:p xmlns:a="http://schemas.openxmlformats.org/drawingml/2006/main">
+            <a:pPr algn="l">
+              <a:defRPr sz="1425" b="0">
+                <a:solidFill>
+                  <a:srgbClr val="98A19F"/>
+                </a:solidFill>
+              </a:defRPr>
+            </a:pPr>
+            <a:r>
+              <a:rPr sz="1425" b="0">
+                <a:solidFill>
+                  <a:srgbClr val="98A19F"/>
+                </a:solidFill>
+              </a:rPr>
+              <a:t>Approved sellers</a:t>
+            </a:r>
+          </a:p>
+          <a:p xmlns:a="http://schemas.openxmlformats.org/drawingml/2006/main">
+            <a:pPr algn="l">
+              <a:defRPr sz="1425" b="0">
+                <a:solidFill>
+                  <a:srgbClr val="98A19F"/>
+                </a:solidFill>
+              </a:defRPr>
+            </a:pPr>
+            <a:r>
+              <a:rPr sz="1425" b="0">
+                <a:solidFill>
+                  <a:srgbClr val="98A19F"/>
+                </a:solidFill>
+              </a:rPr>
+              <a:t>Human-approval threshold</a:t>
             </a:r>
           </a:p>
         </p:txBody>
@@ -6457,97 +7650,47 @@
           <p:cNvPr id="10" name="">
             <a:extLst xmlns:a="http://schemas.openxmlformats.org/drawingml/2006/main">
               <a:ext uri="{FF2B5EF4-FFF2-40B4-BE49-F238E27FC236}">
-                <a16:creationId xmlns:a16="http://schemas.microsoft.com/office/drawing/2014/main" id="{79417439-4FF0-4904-B3F9-CEBC1024903D}"/>
-              </a:ext>
-            </a:extLst>
-          </p:cNvPr>
-          <p:cNvSpPr>
-            <a:spLocks xmlns:a="http://schemas.openxmlformats.org/drawingml/2006/main" noGrp="1"/>
-          </p:cNvSpPr>
-          <p:nvPr/>
-        </p:nvSpPr>
-        <p:spPr>
-          <a:xfrm xmlns:a="http://schemas.openxmlformats.org/drawingml/2006/main">
-            <a:off x="8096250" y="4095750"/>
-            <a:ext cx="2857500" cy="400050"/>
-          </a:xfrm>
-          <a:prstGeom xmlns:a="http://schemas.openxmlformats.org/drawingml/2006/main" prst="rect">
-            <a:avLst/>
-          </a:prstGeom>
-          <a:noFill xmlns:a="http://schemas.openxmlformats.org/drawingml/2006/main"/>
-          <a:ln xmlns:a="http://schemas.openxmlformats.org/drawingml/2006/main" w="0">
-            <a:noFill/>
-            <a:prstDash val="solid"/>
-          </a:ln>
-        </p:spPr>
-        <p:txBody>
-          <a:bodyPr xmlns:a="http://schemas.openxmlformats.org/drawingml/2006/main"/>
-          <a:lstStyle xmlns:a="http://schemas.openxmlformats.org/drawingml/2006/main"/>
-          <a:p xmlns:a="http://schemas.openxmlformats.org/drawingml/2006/main">
-            <a:pPr algn="l">
-              <a:defRPr sz="1425" b="1">
+                <a16:creationId xmlns:a16="http://schemas.microsoft.com/office/drawing/2014/main" id="{C176FF0D-0C4F-4938-B207-BE9BF2CD89B9}"/>
+              </a:ext>
+            </a:extLst>
+          </p:cNvPr>
+          <p:cNvSpPr>
+            <a:spLocks xmlns:a="http://schemas.openxmlformats.org/drawingml/2006/main" noGrp="1"/>
+          </p:cNvSpPr>
+          <p:nvPr/>
+        </p:nvSpPr>
+        <p:spPr>
+          <a:xfrm xmlns:a="http://schemas.openxmlformats.org/drawingml/2006/main">
+            <a:off x="7524750" y="5572125"/>
+            <a:ext cx="3619500" cy="571500"/>
+          </a:xfrm>
+          <a:prstGeom xmlns:a="http://schemas.openxmlformats.org/drawingml/2006/main" prst="rect">
+            <a:avLst/>
+          </a:prstGeom>
+          <a:noFill xmlns:a="http://schemas.openxmlformats.org/drawingml/2006/main"/>
+          <a:ln xmlns:a="http://schemas.openxmlformats.org/drawingml/2006/main" w="0">
+            <a:noFill/>
+            <a:prstDash val="solid"/>
+          </a:ln>
+        </p:spPr>
+        <p:txBody>
+          <a:bodyPr xmlns:a="http://schemas.openxmlformats.org/drawingml/2006/main"/>
+          <a:lstStyle xmlns:a="http://schemas.openxmlformats.org/drawingml/2006/main"/>
+          <a:p xmlns:a="http://schemas.openxmlformats.org/drawingml/2006/main">
+            <a:pPr algn="l">
+              <a:defRPr sz="1350" b="1">
                 <a:solidFill>
                   <a:srgbClr val="F5F7F6"/>
                 </a:solidFill>
               </a:defRPr>
             </a:pPr>
             <a:r>
-              <a:rPr sz="1425" b="1">
+              <a:rPr sz="1350" b="1">
                 <a:solidFill>
                   <a:srgbClr val="F5F7F6"/>
                 </a:solidFill>
               </a:rPr>
-              <a:t>automatic authority limit</a:t>
-            </a:r>
-          </a:p>
-        </p:txBody>
-      </p:sp>
-      <p:sp>
-        <p:nvSpPr>
-          <p:cNvPr id="11" name="">
-            <a:extLst xmlns:a="http://schemas.openxmlformats.org/drawingml/2006/main">
-              <a:ext uri="{FF2B5EF4-FFF2-40B4-BE49-F238E27FC236}">
-                <a16:creationId xmlns:a16="http://schemas.microsoft.com/office/drawing/2014/main" id="{F0BA26AF-6A46-406B-8D02-A378BFE7048C}"/>
-              </a:ext>
-            </a:extLst>
-          </p:cNvPr>
-          <p:cNvSpPr>
-            <a:spLocks xmlns:a="http://schemas.openxmlformats.org/drawingml/2006/main" noGrp="1"/>
-          </p:cNvSpPr>
-          <p:nvPr/>
-        </p:nvSpPr>
-        <p:spPr>
-          <a:xfrm xmlns:a="http://schemas.openxmlformats.org/drawingml/2006/main">
-            <a:off x="8096250" y="4905375"/>
-            <a:ext cx="3048000" cy="952500"/>
-          </a:xfrm>
-          <a:prstGeom xmlns:a="http://schemas.openxmlformats.org/drawingml/2006/main" prst="rect">
-            <a:avLst/>
-          </a:prstGeom>
-          <a:noFill xmlns:a="http://schemas.openxmlformats.org/drawingml/2006/main"/>
-          <a:ln xmlns:a="http://schemas.openxmlformats.org/drawingml/2006/main" w="0">
-            <a:noFill/>
-            <a:prstDash val="solid"/>
-          </a:ln>
-        </p:spPr>
-        <p:txBody>
-          <a:bodyPr xmlns:a="http://schemas.openxmlformats.org/drawingml/2006/main"/>
-          <a:lstStyle xmlns:a="http://schemas.openxmlformats.org/drawingml/2006/main"/>
-          <a:p xmlns:a="http://schemas.openxmlformats.org/drawingml/2006/main">
-            <a:pPr algn="l">
-              <a:defRPr sz="1350" b="0">
-                <a:solidFill>
-                  <a:srgbClr val="98A19F"/>
-                </a:solidFill>
-              </a:defRPr>
-            </a:pPr>
-            <a:r>
-              <a:rPr sz="1350" b="0">
-                <a:solidFill>
-                  <a:srgbClr val="98A19F"/>
-                </a:solidFill>
-              </a:rPr>
-              <a:t>No payment continues until a human approves the exact seller, product, and amount.</a:t>
+              <a:t>OpenAI helps prepare the plan. Deterministic code decides whether it may execute.</a:t>
             </a:r>
           </a:p>
         </p:txBody>
@@ -6555,7 +7698,7 @@
     </p:spTree>
     <p:extLst>
       <p:ext uri="{BB962C8B-B14F-4D97-AF65-F5344CB8AC3E}">
-        <p14:creationId xmlns:p14="http://schemas.microsoft.com/office/powerpoint/2010/main" val="2072691693"/>
+        <p14:creationId xmlns:p14="http://schemas.microsoft.com/office/powerpoint/2010/main" val="318488599"/>
       </p:ext>
     </p:extLst>
   </p:cSld>
@@ -6583,10 +7726,10 @@
       </p:grpSpPr>
       <p:sp>
         <p:nvSpPr>
-          <p:cNvPr id="21" name="">
-            <a:extLst xmlns:a="http://schemas.openxmlformats.org/drawingml/2006/main">
-              <a:ext uri="{FF2B5EF4-FFF2-40B4-BE49-F238E27FC236}">
-                <a16:creationId xmlns:a16="http://schemas.microsoft.com/office/drawing/2014/main" id="{4102FA0C-AB49-4111-AD7F-3A8DFD5F1D02}"/>
+          <p:cNvPr id="18" name="">
+            <a:extLst xmlns:a="http://schemas.openxmlformats.org/drawingml/2006/main">
+              <a:ext uri="{FF2B5EF4-FFF2-40B4-BE49-F238E27FC236}">
+                <a16:creationId xmlns:a16="http://schemas.microsoft.com/office/drawing/2014/main" id="{8BE3D475-4CD6-46CB-9CBF-F69B7F8EED7B}"/>
               </a:ext>
             </a:extLst>
           </p:cNvPr>
@@ -6626,7 +7769,7 @@
                   <a:srgbClr val="F2ED55"/>
                 </a:solidFill>
               </a:rPr>
-              <a:t>A2A + AP2</a:t>
+              <a:t>AGENT-TO-AGENT</a:t>
             </a:r>
           </a:p>
         </p:txBody>
@@ -6636,7 +7779,7 @@
           <p:cNvPr id="2" name="">
             <a:extLst xmlns:a="http://schemas.openxmlformats.org/drawingml/2006/main">
               <a:ext uri="{FF2B5EF4-FFF2-40B4-BE49-F238E27FC236}">
-                <a16:creationId xmlns:a16="http://schemas.microsoft.com/office/drawing/2014/main" id="{D6E2C31C-6836-452F-9738-F68F5887CB80}"/>
+                <a16:creationId xmlns:a16="http://schemas.microsoft.com/office/drawing/2014/main" id="{662A7F5F-4CBE-4F19-A3E8-B05379755A9E}"/>
               </a:ext>
             </a:extLst>
           </p:cNvPr>
@@ -6676,7 +7819,7 @@
                   <a:srgbClr val="F5F7F6"/>
                 </a:solidFill>
               </a:rPr>
-              <a:t>Negotiation and payment authority are different protocols.</a:t>
+              <a:t>A2A lets independent agents discover and negotiate.</a:t>
             </a:r>
           </a:p>
         </p:txBody>
@@ -6686,7 +7829,7 @@
           <p:cNvPr id="3" name="">
             <a:extLst xmlns:a="http://schemas.openxmlformats.org/drawingml/2006/main">
               <a:ext uri="{FF2B5EF4-FFF2-40B4-BE49-F238E27FC236}">
-                <a16:creationId xmlns:a16="http://schemas.microsoft.com/office/drawing/2014/main" id="{A68F27C5-AAB3-4B0D-8CDD-AEF64F02BE76}"/>
+                <a16:creationId xmlns:a16="http://schemas.microsoft.com/office/drawing/2014/main" id="{2E3D1ADC-BF0F-4477-9FF1-E7E6D1227410}"/>
               </a:ext>
             </a:extLst>
           </p:cNvPr>
@@ -6719,7 +7862,7 @@
           <p:cNvPr id="4" name="">
             <a:extLst xmlns:a="http://schemas.openxmlformats.org/drawingml/2006/main">
               <a:ext uri="{FF2B5EF4-FFF2-40B4-BE49-F238E27FC236}">
-                <a16:creationId xmlns:a16="http://schemas.microsoft.com/office/drawing/2014/main" id="{1A7CADB3-693E-42DD-9D3D-E742C0B7A8A8}"/>
+                <a16:creationId xmlns:a16="http://schemas.microsoft.com/office/drawing/2014/main" id="{D0E072B5-D328-47D9-A64C-F1D439753ED0}"/>
               </a:ext>
             </a:extLst>
           </p:cNvPr>
@@ -6769,19 +7912,391 @@
           <p:cNvPr id="5" name="">
             <a:extLst xmlns:a="http://schemas.openxmlformats.org/drawingml/2006/main">
               <a:ext uri="{FF2B5EF4-FFF2-40B4-BE49-F238E27FC236}">
-                <a16:creationId xmlns:a16="http://schemas.microsoft.com/office/drawing/2014/main" id="{FCBCFA0B-8405-4B9B-8B16-C8AA749C705E}"/>
-              </a:ext>
-            </a:extLst>
-          </p:cNvPr>
-          <p:cNvSpPr>
-            <a:spLocks xmlns:a="http://schemas.openxmlformats.org/drawingml/2006/main" noGrp="1"/>
-          </p:cNvSpPr>
-          <p:nvPr/>
-        </p:nvSpPr>
-        <p:spPr>
-          <a:xfrm xmlns:a="http://schemas.openxmlformats.org/drawingml/2006/main">
-            <a:off x="2476500" y="3381375"/>
-            <a:ext cx="1619250" cy="28575"/>
+                <a16:creationId xmlns:a16="http://schemas.microsoft.com/office/drawing/2014/main" id="{BA988EAF-3998-47DE-A13B-C2AF45FCED71}"/>
+              </a:ext>
+            </a:extLst>
+          </p:cNvPr>
+          <p:cNvSpPr>
+            <a:spLocks xmlns:a="http://schemas.openxmlformats.org/drawingml/2006/main" noGrp="1"/>
+          </p:cNvSpPr>
+          <p:nvPr/>
+        </p:nvSpPr>
+        <p:spPr>
+          <a:xfrm xmlns:a="http://schemas.openxmlformats.org/drawingml/2006/main">
+            <a:off x="666750" y="1809750"/>
+            <a:ext cx="2857500" cy="2857500"/>
+          </a:xfrm>
+          <a:prstGeom xmlns:a="http://schemas.openxmlformats.org/drawingml/2006/main" prst="roundRect">
+            <a:avLst>
+              <a:gd name="adj" fmla="val 4000"/>
+            </a:avLst>
+          </a:prstGeom>
+          <a:solidFill xmlns:a="http://schemas.openxmlformats.org/drawingml/2006/main">
+            <a:srgbClr val="16201F"/>
+          </a:solidFill>
+          <a:ln xmlns:a="http://schemas.openxmlformats.org/drawingml/2006/main" w="9525">
+            <a:solidFill>
+              <a:srgbClr val="64D4CA"/>
+            </a:solidFill>
+            <a:prstDash val="solid"/>
+          </a:ln>
+        </p:spPr>
+      </p:sp>
+      <p:sp>
+        <p:nvSpPr>
+          <p:cNvPr id="6" name="">
+            <a:extLst xmlns:a="http://schemas.openxmlformats.org/drawingml/2006/main">
+              <a:ext uri="{FF2B5EF4-FFF2-40B4-BE49-F238E27FC236}">
+                <a16:creationId xmlns:a16="http://schemas.microsoft.com/office/drawing/2014/main" id="{74C1B746-2B28-42FC-9DE7-3954D33CE382}"/>
+              </a:ext>
+            </a:extLst>
+          </p:cNvPr>
+          <p:cNvSpPr>
+            <a:spLocks xmlns:a="http://schemas.openxmlformats.org/drawingml/2006/main" noGrp="1"/>
+          </p:cNvSpPr>
+          <p:nvPr/>
+        </p:nvSpPr>
+        <p:spPr>
+          <a:xfrm xmlns:a="http://schemas.openxmlformats.org/drawingml/2006/main">
+            <a:off x="952500" y="2143125"/>
+            <a:ext cx="2286000" cy="361950"/>
+          </a:xfrm>
+          <a:prstGeom xmlns:a="http://schemas.openxmlformats.org/drawingml/2006/main" prst="rect">
+            <a:avLst/>
+          </a:prstGeom>
+          <a:noFill xmlns:a="http://schemas.openxmlformats.org/drawingml/2006/main"/>
+          <a:ln xmlns:a="http://schemas.openxmlformats.org/drawingml/2006/main" w="0">
+            <a:noFill/>
+            <a:prstDash val="solid"/>
+          </a:ln>
+        </p:spPr>
+        <p:txBody>
+          <a:bodyPr xmlns:a="http://schemas.openxmlformats.org/drawingml/2006/main"/>
+          <a:lstStyle xmlns:a="http://schemas.openxmlformats.org/drawingml/2006/main"/>
+          <a:p xmlns:a="http://schemas.openxmlformats.org/drawingml/2006/main">
+            <a:pPr algn="l">
+              <a:defRPr sz="2025" b="1">
+                <a:solidFill>
+                  <a:srgbClr val="64D4CA"/>
+                </a:solidFill>
+              </a:defRPr>
+            </a:pPr>
+            <a:r>
+              <a:rPr sz="2025" b="1">
+                <a:solidFill>
+                  <a:srgbClr val="64D4CA"/>
+                </a:solidFill>
+              </a:rPr>
+              <a:t>Buyer agent</a:t>
+            </a:r>
+          </a:p>
+        </p:txBody>
+      </p:sp>
+      <p:sp>
+        <p:nvSpPr>
+          <p:cNvPr id="7" name="">
+            <a:extLst xmlns:a="http://schemas.openxmlformats.org/drawingml/2006/main">
+              <a:ext uri="{FF2B5EF4-FFF2-40B4-BE49-F238E27FC236}">
+                <a16:creationId xmlns:a16="http://schemas.microsoft.com/office/drawing/2014/main" id="{0F456665-892D-4A97-B948-F50CE356860E}"/>
+              </a:ext>
+            </a:extLst>
+          </p:cNvPr>
+          <p:cNvSpPr>
+            <a:spLocks xmlns:a="http://schemas.openxmlformats.org/drawingml/2006/main" noGrp="1"/>
+          </p:cNvSpPr>
+          <p:nvPr/>
+        </p:nvSpPr>
+        <p:spPr>
+          <a:xfrm xmlns:a="http://schemas.openxmlformats.org/drawingml/2006/main">
+            <a:off x="952500" y="2762250"/>
+            <a:ext cx="2190750" cy="1428750"/>
+          </a:xfrm>
+          <a:prstGeom xmlns:a="http://schemas.openxmlformats.org/drawingml/2006/main" prst="rect">
+            <a:avLst/>
+          </a:prstGeom>
+          <a:noFill xmlns:a="http://schemas.openxmlformats.org/drawingml/2006/main"/>
+          <a:ln xmlns:a="http://schemas.openxmlformats.org/drawingml/2006/main" w="0">
+            <a:noFill/>
+            <a:prstDash val="solid"/>
+          </a:ln>
+        </p:spPr>
+        <p:txBody>
+          <a:bodyPr xmlns:a="http://schemas.openxmlformats.org/drawingml/2006/main"/>
+          <a:lstStyle xmlns:a="http://schemas.openxmlformats.org/drawingml/2006/main"/>
+          <a:p xmlns:a="http://schemas.openxmlformats.org/drawingml/2006/main">
+            <a:pPr algn="l">
+              <a:defRPr sz="1425" b="0">
+                <a:solidFill>
+                  <a:srgbClr val="98A19F"/>
+                </a:solidFill>
+              </a:defRPr>
+            </a:pPr>
+            <a:r>
+              <a:rPr sz="1425" b="0">
+                <a:solidFill>
+                  <a:srgbClr val="98A19F"/>
+                </a:solidFill>
+              </a:rPr>
+              <a:t>Mandate</a:t>
+            </a:r>
+          </a:p>
+          <a:p xmlns:a="http://schemas.openxmlformats.org/drawingml/2006/main">
+            <a:pPr algn="l">
+              <a:defRPr sz="1425" b="0">
+                <a:solidFill>
+                  <a:srgbClr val="98A19F"/>
+                </a:solidFill>
+              </a:defRPr>
+            </a:pPr>
+            <a:r>
+              <a:rPr sz="1425" b="0">
+                <a:solidFill>
+                  <a:srgbClr val="98A19F"/>
+                </a:solidFill>
+              </a:rPr>
+              <a:t>Budget and quantity</a:t>
+            </a:r>
+          </a:p>
+          <a:p xmlns:a="http://schemas.openxmlformats.org/drawingml/2006/main">
+            <a:pPr algn="l">
+              <a:defRPr sz="1425" b="0">
+                <a:solidFill>
+                  <a:srgbClr val="98A19F"/>
+                </a:solidFill>
+              </a:defRPr>
+            </a:pPr>
+            <a:r>
+              <a:rPr sz="1425" b="0">
+                <a:solidFill>
+                  <a:srgbClr val="98A19F"/>
+                </a:solidFill>
+              </a:rPr>
+              <a:t>Quality requirements</a:t>
+            </a:r>
+          </a:p>
+          <a:p xmlns:a="http://schemas.openxmlformats.org/drawingml/2006/main">
+            <a:pPr algn="l">
+              <a:defRPr sz="1425" b="0">
+                <a:solidFill>
+                  <a:srgbClr val="98A19F"/>
+                </a:solidFill>
+              </a:defRPr>
+            </a:pPr>
+            <a:r>
+              <a:rPr sz="1425" b="0">
+                <a:solidFill>
+                  <a:srgbClr val="98A19F"/>
+                </a:solidFill>
+              </a:rPr>
+              <a:t>Approved payment methods</a:t>
+            </a:r>
+          </a:p>
+        </p:txBody>
+      </p:sp>
+      <p:sp>
+        <p:nvSpPr>
+          <p:cNvPr id="8" name="">
+            <a:extLst xmlns:a="http://schemas.openxmlformats.org/drawingml/2006/main">
+              <a:ext uri="{FF2B5EF4-FFF2-40B4-BE49-F238E27FC236}">
+                <a16:creationId xmlns:a16="http://schemas.microsoft.com/office/drawing/2014/main" id="{D6B8047C-95E1-4B13-AFF2-25B7B699A3ED}"/>
+              </a:ext>
+            </a:extLst>
+          </p:cNvPr>
+          <p:cNvSpPr>
+            <a:spLocks xmlns:a="http://schemas.openxmlformats.org/drawingml/2006/main" noGrp="1"/>
+          </p:cNvSpPr>
+          <p:nvPr/>
+        </p:nvSpPr>
+        <p:spPr>
+          <a:xfrm xmlns:a="http://schemas.openxmlformats.org/drawingml/2006/main">
+            <a:off x="8667750" y="1809750"/>
+            <a:ext cx="2857500" cy="2857500"/>
+          </a:xfrm>
+          <a:prstGeom xmlns:a="http://schemas.openxmlformats.org/drawingml/2006/main" prst="roundRect">
+            <a:avLst>
+              <a:gd name="adj" fmla="val 4000"/>
+            </a:avLst>
+          </a:prstGeom>
+          <a:solidFill xmlns:a="http://schemas.openxmlformats.org/drawingml/2006/main">
+            <a:srgbClr val="16201F"/>
+          </a:solidFill>
+          <a:ln xmlns:a="http://schemas.openxmlformats.org/drawingml/2006/main" w="9525">
+            <a:solidFill>
+              <a:srgbClr val="9270FF"/>
+            </a:solidFill>
+            <a:prstDash val="solid"/>
+          </a:ln>
+        </p:spPr>
+      </p:sp>
+      <p:sp>
+        <p:nvSpPr>
+          <p:cNvPr id="9" name="">
+            <a:extLst xmlns:a="http://schemas.openxmlformats.org/drawingml/2006/main">
+              <a:ext uri="{FF2B5EF4-FFF2-40B4-BE49-F238E27FC236}">
+                <a16:creationId xmlns:a16="http://schemas.microsoft.com/office/drawing/2014/main" id="{FF7AD211-5371-4B45-A0C5-6D0D8B6E49E8}"/>
+              </a:ext>
+            </a:extLst>
+          </p:cNvPr>
+          <p:cNvSpPr>
+            <a:spLocks xmlns:a="http://schemas.openxmlformats.org/drawingml/2006/main" noGrp="1"/>
+          </p:cNvSpPr>
+          <p:nvPr/>
+        </p:nvSpPr>
+        <p:spPr>
+          <a:xfrm xmlns:a="http://schemas.openxmlformats.org/drawingml/2006/main">
+            <a:off x="8953500" y="2143125"/>
+            <a:ext cx="2286000" cy="361950"/>
+          </a:xfrm>
+          <a:prstGeom xmlns:a="http://schemas.openxmlformats.org/drawingml/2006/main" prst="rect">
+            <a:avLst/>
+          </a:prstGeom>
+          <a:noFill xmlns:a="http://schemas.openxmlformats.org/drawingml/2006/main"/>
+          <a:ln xmlns:a="http://schemas.openxmlformats.org/drawingml/2006/main" w="0">
+            <a:noFill/>
+            <a:prstDash val="solid"/>
+          </a:ln>
+        </p:spPr>
+        <p:txBody>
+          <a:bodyPr xmlns:a="http://schemas.openxmlformats.org/drawingml/2006/main"/>
+          <a:lstStyle xmlns:a="http://schemas.openxmlformats.org/drawingml/2006/main"/>
+          <a:p xmlns:a="http://schemas.openxmlformats.org/drawingml/2006/main">
+            <a:pPr algn="l">
+              <a:defRPr sz="2025" b="1">
+                <a:solidFill>
+                  <a:srgbClr val="9270FF"/>
+                </a:solidFill>
+              </a:defRPr>
+            </a:pPr>
+            <a:r>
+              <a:rPr sz="2025" b="1">
+                <a:solidFill>
+                  <a:srgbClr val="9270FF"/>
+                </a:solidFill>
+              </a:rPr>
+              <a:t>Seller agent</a:t>
+            </a:r>
+          </a:p>
+        </p:txBody>
+      </p:sp>
+      <p:sp>
+        <p:nvSpPr>
+          <p:cNvPr id="10" name="">
+            <a:extLst xmlns:a="http://schemas.openxmlformats.org/drawingml/2006/main">
+              <a:ext uri="{FF2B5EF4-FFF2-40B4-BE49-F238E27FC236}">
+                <a16:creationId xmlns:a16="http://schemas.microsoft.com/office/drawing/2014/main" id="{A13685B5-D6FD-47CE-89C2-24BE274D670B}"/>
+              </a:ext>
+            </a:extLst>
+          </p:cNvPr>
+          <p:cNvSpPr>
+            <a:spLocks xmlns:a="http://schemas.openxmlformats.org/drawingml/2006/main" noGrp="1"/>
+          </p:cNvSpPr>
+          <p:nvPr/>
+        </p:nvSpPr>
+        <p:spPr>
+          <a:xfrm xmlns:a="http://schemas.openxmlformats.org/drawingml/2006/main">
+            <a:off x="8953500" y="2762250"/>
+            <a:ext cx="2190750" cy="1428750"/>
+          </a:xfrm>
+          <a:prstGeom xmlns:a="http://schemas.openxmlformats.org/drawingml/2006/main" prst="rect">
+            <a:avLst/>
+          </a:prstGeom>
+          <a:noFill xmlns:a="http://schemas.openxmlformats.org/drawingml/2006/main"/>
+          <a:ln xmlns:a="http://schemas.openxmlformats.org/drawingml/2006/main" w="0">
+            <a:noFill/>
+            <a:prstDash val="solid"/>
+          </a:ln>
+        </p:spPr>
+        <p:txBody>
+          <a:bodyPr xmlns:a="http://schemas.openxmlformats.org/drawingml/2006/main"/>
+          <a:lstStyle xmlns:a="http://schemas.openxmlformats.org/drawingml/2006/main"/>
+          <a:p xmlns:a="http://schemas.openxmlformats.org/drawingml/2006/main">
+            <a:pPr algn="l">
+              <a:defRPr sz="1425" b="0">
+                <a:solidFill>
+                  <a:srgbClr val="98A19F"/>
+                </a:solidFill>
+              </a:defRPr>
+            </a:pPr>
+            <a:r>
+              <a:rPr sz="1425" b="0">
+                <a:solidFill>
+                  <a:srgbClr val="98A19F"/>
+                </a:solidFill>
+              </a:rPr>
+              <a:t>Official Agent Card</a:t>
+            </a:r>
+          </a:p>
+          <a:p xmlns:a="http://schemas.openxmlformats.org/drawingml/2006/main">
+            <a:pPr algn="l">
+              <a:defRPr sz="1425" b="0">
+                <a:solidFill>
+                  <a:srgbClr val="98A19F"/>
+                </a:solidFill>
+              </a:defRPr>
+            </a:pPr>
+            <a:r>
+              <a:rPr sz="1425" b="0">
+                <a:solidFill>
+                  <a:srgbClr val="98A19F"/>
+                </a:solidFill>
+              </a:rPr>
+              <a:t>Product capabilities</a:t>
+            </a:r>
+          </a:p>
+          <a:p xmlns:a="http://schemas.openxmlformats.org/drawingml/2006/main">
+            <a:pPr algn="l">
+              <a:defRPr sz="1425" b="0">
+                <a:solidFill>
+                  <a:srgbClr val="98A19F"/>
+                </a:solidFill>
+              </a:defRPr>
+            </a:pPr>
+            <a:r>
+              <a:rPr sz="1425" b="0">
+                <a:solidFill>
+                  <a:srgbClr val="98A19F"/>
+                </a:solidFill>
+              </a:rPr>
+              <a:t>Price and discount rules</a:t>
+            </a:r>
+          </a:p>
+          <a:p xmlns:a="http://schemas.openxmlformats.org/drawingml/2006/main">
+            <a:pPr algn="l">
+              <a:defRPr sz="1425" b="0">
+                <a:solidFill>
+                  <a:srgbClr val="98A19F"/>
+                </a:solidFill>
+              </a:defRPr>
+            </a:pPr>
+            <a:r>
+              <a:rPr sz="1425" b="0">
+                <a:solidFill>
+                  <a:srgbClr val="98A19F"/>
+                </a:solidFill>
+              </a:rPr>
+              <a:t>Delivery terms</a:t>
+            </a:r>
+          </a:p>
+        </p:txBody>
+      </p:sp>
+      <p:sp>
+        <p:nvSpPr>
+          <p:cNvPr id="11" name="">
+            <a:extLst xmlns:a="http://schemas.openxmlformats.org/drawingml/2006/main">
+              <a:ext uri="{FF2B5EF4-FFF2-40B4-BE49-F238E27FC236}">
+                <a16:creationId xmlns:a16="http://schemas.microsoft.com/office/drawing/2014/main" id="{171DE178-9535-4EF3-96B6-C623F21E5CF2}"/>
+              </a:ext>
+            </a:extLst>
+          </p:cNvPr>
+          <p:cNvSpPr>
+            <a:spLocks xmlns:a="http://schemas.openxmlformats.org/drawingml/2006/main" noGrp="1"/>
+          </p:cNvSpPr>
+          <p:nvPr/>
+        </p:nvSpPr>
+        <p:spPr>
+          <a:xfrm xmlns:a="http://schemas.openxmlformats.org/drawingml/2006/main">
+            <a:off x="3524250" y="3143250"/>
+            <a:ext cx="5143500" cy="28575"/>
           </a:xfrm>
           <a:prstGeom xmlns:a="http://schemas.openxmlformats.org/drawingml/2006/main" prst="rect">
             <a:avLst/>
@@ -6799,852 +8314,300 @@
       </p:sp>
       <p:sp>
         <p:nvSpPr>
-          <p:cNvPr id="6" name="">
-            <a:extLst xmlns:a="http://schemas.openxmlformats.org/drawingml/2006/main">
-              <a:ext uri="{FF2B5EF4-FFF2-40B4-BE49-F238E27FC236}">
-                <a16:creationId xmlns:a16="http://schemas.microsoft.com/office/drawing/2014/main" id="{1B940DF0-E0E9-44FC-8AED-8EBCC955ECF2}"/>
-              </a:ext>
-            </a:extLst>
-          </p:cNvPr>
-          <p:cNvSpPr>
-            <a:spLocks xmlns:a="http://schemas.openxmlformats.org/drawingml/2006/main" noGrp="1"/>
-          </p:cNvSpPr>
-          <p:nvPr/>
-        </p:nvSpPr>
-        <p:spPr>
-          <a:xfrm xmlns:a="http://schemas.openxmlformats.org/drawingml/2006/main">
-            <a:off x="5953125" y="3381375"/>
-            <a:ext cx="1619250" cy="28575"/>
-          </a:xfrm>
-          <a:prstGeom xmlns:a="http://schemas.openxmlformats.org/drawingml/2006/main" prst="rect">
-            <a:avLst/>
-          </a:prstGeom>
-          <a:solidFill xmlns:a="http://schemas.openxmlformats.org/drawingml/2006/main">
-            <a:srgbClr val="2B3735"/>
-          </a:solidFill>
-          <a:ln xmlns:a="http://schemas.openxmlformats.org/drawingml/2006/main" w="0">
-            <a:solidFill>
-              <a:srgbClr val="2B3735"/>
-            </a:solidFill>
-            <a:prstDash val="solid"/>
-          </a:ln>
-        </p:spPr>
-      </p:sp>
-      <p:sp>
-        <p:nvSpPr>
-          <p:cNvPr id="7" name="">
-            <a:extLst xmlns:a="http://schemas.openxmlformats.org/drawingml/2006/main">
-              <a:ext uri="{FF2B5EF4-FFF2-40B4-BE49-F238E27FC236}">
-                <a16:creationId xmlns:a16="http://schemas.microsoft.com/office/drawing/2014/main" id="{7765ABF3-FCC0-4784-9157-C3F9942FB3A0}"/>
-              </a:ext>
-            </a:extLst>
-          </p:cNvPr>
-          <p:cNvSpPr>
-            <a:spLocks xmlns:a="http://schemas.openxmlformats.org/drawingml/2006/main" noGrp="1"/>
-          </p:cNvSpPr>
-          <p:nvPr/>
-        </p:nvSpPr>
-        <p:spPr>
-          <a:xfrm xmlns:a="http://schemas.openxmlformats.org/drawingml/2006/main">
-            <a:off x="9429750" y="3381375"/>
-            <a:ext cx="1428750" cy="28575"/>
-          </a:xfrm>
-          <a:prstGeom xmlns:a="http://schemas.openxmlformats.org/drawingml/2006/main" prst="rect">
-            <a:avLst/>
-          </a:prstGeom>
-          <a:solidFill xmlns:a="http://schemas.openxmlformats.org/drawingml/2006/main">
-            <a:srgbClr val="2B3735"/>
-          </a:solidFill>
-          <a:ln xmlns:a="http://schemas.openxmlformats.org/drawingml/2006/main" w="0">
-            <a:solidFill>
-              <a:srgbClr val="2B3735"/>
-            </a:solidFill>
-            <a:prstDash val="solid"/>
-          </a:ln>
-        </p:spPr>
-      </p:sp>
-      <p:sp>
-        <p:nvSpPr>
-          <p:cNvPr id="8" name="">
-            <a:extLst xmlns:a="http://schemas.openxmlformats.org/drawingml/2006/main">
-              <a:ext uri="{FF2B5EF4-FFF2-40B4-BE49-F238E27FC236}">
-                <a16:creationId xmlns:a16="http://schemas.microsoft.com/office/drawing/2014/main" id="{22ACFC3F-3230-475B-9CBD-DCF05B322335}"/>
-              </a:ext>
-            </a:extLst>
-          </p:cNvPr>
-          <p:cNvSpPr>
-            <a:spLocks xmlns:a="http://schemas.openxmlformats.org/drawingml/2006/main" noGrp="1"/>
-          </p:cNvSpPr>
-          <p:nvPr/>
-        </p:nvSpPr>
-        <p:spPr>
-          <a:xfrm xmlns:a="http://schemas.openxmlformats.org/drawingml/2006/main">
-            <a:off x="704850" y="2000250"/>
-            <a:ext cx="762000" cy="457200"/>
-          </a:xfrm>
-          <a:prstGeom xmlns:a="http://schemas.openxmlformats.org/drawingml/2006/main" prst="rect">
-            <a:avLst/>
-          </a:prstGeom>
-          <a:noFill xmlns:a="http://schemas.openxmlformats.org/drawingml/2006/main"/>
-          <a:ln xmlns:a="http://schemas.openxmlformats.org/drawingml/2006/main" w="0">
-            <a:noFill/>
-            <a:prstDash val="solid"/>
-          </a:ln>
-        </p:spPr>
-        <p:txBody>
-          <a:bodyPr xmlns:a="http://schemas.openxmlformats.org/drawingml/2006/main"/>
-          <a:lstStyle xmlns:a="http://schemas.openxmlformats.org/drawingml/2006/main"/>
-          <a:p xmlns:a="http://schemas.openxmlformats.org/drawingml/2006/main">
-            <a:pPr algn="l">
-              <a:defRPr sz="2100" b="1">
-                <a:solidFill>
-                  <a:srgbClr val="64D4CA"/>
-                </a:solidFill>
-              </a:defRPr>
-            </a:pPr>
-            <a:r>
-              <a:rPr sz="2100" b="1">
-                <a:solidFill>
-                  <a:srgbClr val="64D4CA"/>
-                </a:solidFill>
-              </a:rPr>
-              <a:t>01</a:t>
-            </a:r>
-          </a:p>
-        </p:txBody>
-      </p:sp>
-      <p:sp>
-        <p:nvSpPr>
-          <p:cNvPr id="9" name="">
-            <a:extLst xmlns:a="http://schemas.openxmlformats.org/drawingml/2006/main">
-              <a:ext uri="{FF2B5EF4-FFF2-40B4-BE49-F238E27FC236}">
-                <a16:creationId xmlns:a16="http://schemas.microsoft.com/office/drawing/2014/main" id="{7137C64A-3921-457E-A9A1-A42154086D33}"/>
-              </a:ext>
-            </a:extLst>
-          </p:cNvPr>
-          <p:cNvSpPr>
-            <a:spLocks xmlns:a="http://schemas.openxmlformats.org/drawingml/2006/main" noGrp="1"/>
-          </p:cNvSpPr>
-          <p:nvPr/>
-        </p:nvSpPr>
-        <p:spPr>
-          <a:xfrm xmlns:a="http://schemas.openxmlformats.org/drawingml/2006/main">
-            <a:off x="704850" y="2619375"/>
-            <a:ext cx="2286000" cy="904875"/>
-          </a:xfrm>
-          <a:prstGeom xmlns:a="http://schemas.openxmlformats.org/drawingml/2006/main" prst="rect">
-            <a:avLst/>
-          </a:prstGeom>
-          <a:noFill xmlns:a="http://schemas.openxmlformats.org/drawingml/2006/main"/>
-          <a:ln xmlns:a="http://schemas.openxmlformats.org/drawingml/2006/main" w="0">
-            <a:noFill/>
-            <a:prstDash val="solid"/>
-          </a:ln>
-        </p:spPr>
-        <p:txBody>
-          <a:bodyPr xmlns:a="http://schemas.openxmlformats.org/drawingml/2006/main"/>
-          <a:lstStyle xmlns:a="http://schemas.openxmlformats.org/drawingml/2006/main"/>
-          <a:p xmlns:a="http://schemas.openxmlformats.org/drawingml/2006/main">
-            <a:pPr algn="l">
-              <a:defRPr sz="2100" b="1">
+          <p:cNvPr id="12" name="">
+            <a:extLst xmlns:a="http://schemas.openxmlformats.org/drawingml/2006/main">
+              <a:ext uri="{FF2B5EF4-FFF2-40B4-BE49-F238E27FC236}">
+                <a16:creationId xmlns:a16="http://schemas.microsoft.com/office/drawing/2014/main" id="{525655E2-04BC-4372-82C9-E7647460CC4F}"/>
+              </a:ext>
+            </a:extLst>
+          </p:cNvPr>
+          <p:cNvSpPr>
+            <a:spLocks xmlns:a="http://schemas.openxmlformats.org/drawingml/2006/main" noGrp="1"/>
+          </p:cNvSpPr>
+          <p:nvPr/>
+        </p:nvSpPr>
+        <p:spPr>
+          <a:xfrm xmlns:a="http://schemas.openxmlformats.org/drawingml/2006/main">
+            <a:off x="4095750" y="2476500"/>
+            <a:ext cx="1238250" cy="238125"/>
+          </a:xfrm>
+          <a:prstGeom xmlns:a="http://schemas.openxmlformats.org/drawingml/2006/main" prst="rect">
+            <a:avLst/>
+          </a:prstGeom>
+          <a:noFill xmlns:a="http://schemas.openxmlformats.org/drawingml/2006/main"/>
+          <a:ln xmlns:a="http://schemas.openxmlformats.org/drawingml/2006/main" w="0">
+            <a:noFill/>
+            <a:prstDash val="solid"/>
+          </a:ln>
+        </p:spPr>
+        <p:txBody>
+          <a:bodyPr xmlns:a="http://schemas.openxmlformats.org/drawingml/2006/main"/>
+          <a:lstStyle xmlns:a="http://schemas.openxmlformats.org/drawingml/2006/main"/>
+          <a:p xmlns:a="http://schemas.openxmlformats.org/drawingml/2006/main">
+            <a:pPr algn="l">
+              <a:defRPr sz="1050" b="1">
+                <a:solidFill>
+                  <a:srgbClr val="F2ED55"/>
+                </a:solidFill>
+              </a:defRPr>
+            </a:pPr>
+            <a:r>
+              <a:rPr sz="1050" b="1">
+                <a:solidFill>
+                  <a:srgbClr val="F2ED55"/>
+                </a:solidFill>
+              </a:rPr>
+              <a:t>DISCOVER</a:t>
+            </a:r>
+          </a:p>
+        </p:txBody>
+      </p:sp>
+      <p:sp>
+        <p:nvSpPr>
+          <p:cNvPr id="13" name="">
+            <a:extLst xmlns:a="http://schemas.openxmlformats.org/drawingml/2006/main">
+              <a:ext uri="{FF2B5EF4-FFF2-40B4-BE49-F238E27FC236}">
+                <a16:creationId xmlns:a16="http://schemas.microsoft.com/office/drawing/2014/main" id="{EC1F30A7-3AD8-40FF-A114-57DDC9D64278}"/>
+              </a:ext>
+            </a:extLst>
+          </p:cNvPr>
+          <p:cNvSpPr>
+            <a:spLocks xmlns:a="http://schemas.openxmlformats.org/drawingml/2006/main" noGrp="1"/>
+          </p:cNvSpPr>
+          <p:nvPr/>
+        </p:nvSpPr>
+        <p:spPr>
+          <a:xfrm xmlns:a="http://schemas.openxmlformats.org/drawingml/2006/main">
+            <a:off x="5476875" y="2476500"/>
+            <a:ext cx="1143000" cy="238125"/>
+          </a:xfrm>
+          <a:prstGeom xmlns:a="http://schemas.openxmlformats.org/drawingml/2006/main" prst="rect">
+            <a:avLst/>
+          </a:prstGeom>
+          <a:noFill xmlns:a="http://schemas.openxmlformats.org/drawingml/2006/main"/>
+          <a:ln xmlns:a="http://schemas.openxmlformats.org/drawingml/2006/main" w="0">
+            <a:noFill/>
+            <a:prstDash val="solid"/>
+          </a:ln>
+        </p:spPr>
+        <p:txBody>
+          <a:bodyPr xmlns:a="http://schemas.openxmlformats.org/drawingml/2006/main"/>
+          <a:lstStyle xmlns:a="http://schemas.openxmlformats.org/drawingml/2006/main"/>
+          <a:p xmlns:a="http://schemas.openxmlformats.org/drawingml/2006/main">
+            <a:pPr algn="l">
+              <a:defRPr sz="1050" b="1">
+                <a:solidFill>
+                  <a:srgbClr val="F2ED55"/>
+                </a:solidFill>
+              </a:defRPr>
+            </a:pPr>
+            <a:r>
+              <a:rPr sz="1050" b="1">
+                <a:solidFill>
+                  <a:srgbClr val="F2ED55"/>
+                </a:solidFill>
+              </a:rPr>
+              <a:t>REQUEST</a:t>
+            </a:r>
+          </a:p>
+        </p:txBody>
+      </p:sp>
+      <p:sp>
+        <p:nvSpPr>
+          <p:cNvPr id="14" name="">
+            <a:extLst xmlns:a="http://schemas.openxmlformats.org/drawingml/2006/main">
+              <a:ext uri="{FF2B5EF4-FFF2-40B4-BE49-F238E27FC236}">
+                <a16:creationId xmlns:a16="http://schemas.microsoft.com/office/drawing/2014/main" id="{024A9F7D-E61F-4432-BD55-8F2171DE180A}"/>
+              </a:ext>
+            </a:extLst>
+          </p:cNvPr>
+          <p:cNvSpPr>
+            <a:spLocks xmlns:a="http://schemas.openxmlformats.org/drawingml/2006/main" noGrp="1"/>
+          </p:cNvSpPr>
+          <p:nvPr/>
+        </p:nvSpPr>
+        <p:spPr>
+          <a:xfrm xmlns:a="http://schemas.openxmlformats.org/drawingml/2006/main">
+            <a:off x="6715125" y="2476500"/>
+            <a:ext cx="1143000" cy="238125"/>
+          </a:xfrm>
+          <a:prstGeom xmlns:a="http://schemas.openxmlformats.org/drawingml/2006/main" prst="rect">
+            <a:avLst/>
+          </a:prstGeom>
+          <a:noFill xmlns:a="http://schemas.openxmlformats.org/drawingml/2006/main"/>
+          <a:ln xmlns:a="http://schemas.openxmlformats.org/drawingml/2006/main" w="0">
+            <a:noFill/>
+            <a:prstDash val="solid"/>
+          </a:ln>
+        </p:spPr>
+        <p:txBody>
+          <a:bodyPr xmlns:a="http://schemas.openxmlformats.org/drawingml/2006/main"/>
+          <a:lstStyle xmlns:a="http://schemas.openxmlformats.org/drawingml/2006/main"/>
+          <a:p xmlns:a="http://schemas.openxmlformats.org/drawingml/2006/main">
+            <a:pPr algn="l">
+              <a:defRPr sz="1050" b="1">
+                <a:solidFill>
+                  <a:srgbClr val="F2ED55"/>
+                </a:solidFill>
+              </a:defRPr>
+            </a:pPr>
+            <a:r>
+              <a:rPr sz="1050" b="1">
+                <a:solidFill>
+                  <a:srgbClr val="F2ED55"/>
+                </a:solidFill>
+              </a:rPr>
+              <a:t>COUNTER</a:t>
+            </a:r>
+          </a:p>
+        </p:txBody>
+      </p:sp>
+      <p:sp>
+        <p:nvSpPr>
+          <p:cNvPr id="15" name="">
+            <a:extLst xmlns:a="http://schemas.openxmlformats.org/drawingml/2006/main">
+              <a:ext uri="{FF2B5EF4-FFF2-40B4-BE49-F238E27FC236}">
+                <a16:creationId xmlns:a16="http://schemas.microsoft.com/office/drawing/2014/main" id="{C03942FF-0434-469D-9E72-39B9C017E022}"/>
+              </a:ext>
+            </a:extLst>
+          </p:cNvPr>
+          <p:cNvSpPr>
+            <a:spLocks xmlns:a="http://schemas.openxmlformats.org/drawingml/2006/main" noGrp="1"/>
+          </p:cNvSpPr>
+          <p:nvPr/>
+        </p:nvSpPr>
+        <p:spPr>
+          <a:xfrm xmlns:a="http://schemas.openxmlformats.org/drawingml/2006/main">
+            <a:off x="7858125" y="2476500"/>
+            <a:ext cx="857250" cy="238125"/>
+          </a:xfrm>
+          <a:prstGeom xmlns:a="http://schemas.openxmlformats.org/drawingml/2006/main" prst="rect">
+            <a:avLst/>
+          </a:prstGeom>
+          <a:noFill xmlns:a="http://schemas.openxmlformats.org/drawingml/2006/main"/>
+          <a:ln xmlns:a="http://schemas.openxmlformats.org/drawingml/2006/main" w="0">
+            <a:noFill/>
+            <a:prstDash val="solid"/>
+          </a:ln>
+        </p:spPr>
+        <p:txBody>
+          <a:bodyPr xmlns:a="http://schemas.openxmlformats.org/drawingml/2006/main"/>
+          <a:lstStyle xmlns:a="http://schemas.openxmlformats.org/drawingml/2006/main"/>
+          <a:p xmlns:a="http://schemas.openxmlformats.org/drawingml/2006/main">
+            <a:pPr algn="l">
+              <a:defRPr sz="1050" b="1">
+                <a:solidFill>
+                  <a:srgbClr val="F2ED55"/>
+                </a:solidFill>
+              </a:defRPr>
+            </a:pPr>
+            <a:r>
+              <a:rPr sz="1050" b="1">
+                <a:solidFill>
+                  <a:srgbClr val="F2ED55"/>
+                </a:solidFill>
+              </a:rPr>
+              <a:t>AGREE</a:t>
+            </a:r>
+          </a:p>
+        </p:txBody>
+      </p:sp>
+      <p:sp>
+        <p:nvSpPr>
+          <p:cNvPr id="16" name="">
+            <a:extLst xmlns:a="http://schemas.openxmlformats.org/drawingml/2006/main">
+              <a:ext uri="{FF2B5EF4-FFF2-40B4-BE49-F238E27FC236}">
+                <a16:creationId xmlns:a16="http://schemas.microsoft.com/office/drawing/2014/main" id="{9361C415-FA17-4443-98C9-4A984E48F1B6}"/>
+              </a:ext>
+            </a:extLst>
+          </p:cNvPr>
+          <p:cNvSpPr>
+            <a:spLocks xmlns:a="http://schemas.openxmlformats.org/drawingml/2006/main" noGrp="1"/>
+          </p:cNvSpPr>
+          <p:nvPr/>
+        </p:nvSpPr>
+        <p:spPr>
+          <a:xfrm xmlns:a="http://schemas.openxmlformats.org/drawingml/2006/main">
+            <a:off x="3810000" y="3524250"/>
+            <a:ext cx="4572000" cy="523875"/>
+          </a:xfrm>
+          <a:prstGeom xmlns:a="http://schemas.openxmlformats.org/drawingml/2006/main" prst="rect">
+            <a:avLst/>
+          </a:prstGeom>
+          <a:noFill xmlns:a="http://schemas.openxmlformats.org/drawingml/2006/main"/>
+          <a:ln xmlns:a="http://schemas.openxmlformats.org/drawingml/2006/main" w="0">
+            <a:noFill/>
+            <a:prstDash val="solid"/>
+          </a:ln>
+        </p:spPr>
+        <p:txBody>
+          <a:bodyPr xmlns:a="http://schemas.openxmlformats.org/drawingml/2006/main"/>
+          <a:lstStyle xmlns:a="http://schemas.openxmlformats.org/drawingml/2006/main"/>
+          <a:p xmlns:a="http://schemas.openxmlformats.org/drawingml/2006/main">
+            <a:pPr algn="ctr">
+              <a:defRPr sz="1500" b="1">
                 <a:solidFill>
                   <a:srgbClr val="F5F7F6"/>
                 </a:solidFill>
               </a:defRPr>
             </a:pPr>
             <a:r>
-              <a:rPr sz="2100" b="1">
+              <a:rPr sz="1500" b="1">
                 <a:solidFill>
                   <a:srgbClr val="F5F7F6"/>
                 </a:solidFill>
               </a:rPr>
-              <a:t>A2A discovers</a:t>
-            </a:r>
-          </a:p>
-          <a:p xmlns:a="http://schemas.openxmlformats.org/drawingml/2006/main">
-            <a:pPr algn="l">
-              <a:defRPr sz="2100" b="1">
-                <a:solidFill>
-                  <a:srgbClr val="F5F7F6"/>
-                </a:solidFill>
-              </a:defRPr>
-            </a:pPr>
-            <a:r>
-              <a:rPr sz="2100" b="1">
-                <a:solidFill>
-                  <a:srgbClr val="F5F7F6"/>
-                </a:solidFill>
-              </a:rPr>
-              <a:t>and negotiates</a:t>
-            </a:r>
-          </a:p>
-        </p:txBody>
-      </p:sp>
-      <p:sp>
-        <p:nvSpPr>
-          <p:cNvPr id="10" name="">
-            <a:extLst xmlns:a="http://schemas.openxmlformats.org/drawingml/2006/main">
-              <a:ext uri="{FF2B5EF4-FFF2-40B4-BE49-F238E27FC236}">
-                <a16:creationId xmlns:a16="http://schemas.microsoft.com/office/drawing/2014/main" id="{70372DE7-B1B4-4CFD-B507-F6807602542D}"/>
-              </a:ext>
-            </a:extLst>
-          </p:cNvPr>
-          <p:cNvSpPr>
-            <a:spLocks xmlns:a="http://schemas.openxmlformats.org/drawingml/2006/main" noGrp="1"/>
-          </p:cNvSpPr>
-          <p:nvPr/>
-        </p:nvSpPr>
-        <p:spPr>
-          <a:xfrm xmlns:a="http://schemas.openxmlformats.org/drawingml/2006/main">
-            <a:off x="704850" y="3857625"/>
-            <a:ext cx="2381250" cy="1000125"/>
-          </a:xfrm>
-          <a:prstGeom xmlns:a="http://schemas.openxmlformats.org/drawingml/2006/main" prst="rect">
-            <a:avLst/>
-          </a:prstGeom>
-          <a:noFill xmlns:a="http://schemas.openxmlformats.org/drawingml/2006/main"/>
-          <a:ln xmlns:a="http://schemas.openxmlformats.org/drawingml/2006/main" w="0">
-            <a:noFill/>
-            <a:prstDash val="solid"/>
-          </a:ln>
-        </p:spPr>
-        <p:txBody>
-          <a:bodyPr xmlns:a="http://schemas.openxmlformats.org/drawingml/2006/main"/>
-          <a:lstStyle xmlns:a="http://schemas.openxmlformats.org/drawingml/2006/main"/>
-          <a:p xmlns:a="http://schemas.openxmlformats.org/drawingml/2006/main">
-            <a:pPr algn="l">
-              <a:defRPr sz="1350" b="0">
-                <a:solidFill>
-                  <a:srgbClr val="98A19F"/>
-                </a:solidFill>
-              </a:defRPr>
-            </a:pPr>
-            <a:r>
-              <a:rPr sz="1350" b="0">
-                <a:solidFill>
-                  <a:srgbClr val="98A19F"/>
-                </a:solidFill>
-              </a:rPr>
-              <a:t>Official Agent Card</a:t>
-            </a:r>
-          </a:p>
-          <a:p xmlns:a="http://schemas.openxmlformats.org/drawingml/2006/main">
-            <a:pPr algn="l">
-              <a:defRPr sz="1350" b="0">
-                <a:solidFill>
-                  <a:srgbClr val="98A19F"/>
-                </a:solidFill>
-              </a:defRPr>
-            </a:pPr>
-            <a:r>
-              <a:rPr sz="1350" b="0">
-                <a:solidFill>
-                  <a:srgbClr val="98A19F"/>
-                </a:solidFill>
-              </a:rPr>
-              <a:t>JSON-RPC + streaming</a:t>
-            </a:r>
-          </a:p>
-          <a:p xmlns:a="http://schemas.openxmlformats.org/drawingml/2006/main">
-            <a:pPr algn="l">
-              <a:defRPr sz="1350" b="0">
-                <a:solidFill>
-                  <a:srgbClr val="98A19F"/>
-                </a:solidFill>
-              </a:defRPr>
-            </a:pPr>
-            <a:r>
-              <a:rPr sz="1350" b="0">
-                <a:solidFill>
-                  <a:srgbClr val="98A19F"/>
-                </a:solidFill>
-              </a:rPr>
-              <a:t>Structured agreement</a:t>
-            </a:r>
-          </a:p>
-        </p:txBody>
-      </p:sp>
-      <p:sp>
-        <p:nvSpPr>
-          <p:cNvPr id="11" name="">
-            <a:extLst xmlns:a="http://schemas.openxmlformats.org/drawingml/2006/main">
-              <a:ext uri="{FF2B5EF4-FFF2-40B4-BE49-F238E27FC236}">
-                <a16:creationId xmlns:a16="http://schemas.microsoft.com/office/drawing/2014/main" id="{6F5C7B3A-ED96-453F-B2B2-8219963E4F3D}"/>
-              </a:ext>
-            </a:extLst>
-          </p:cNvPr>
-          <p:cNvSpPr>
-            <a:spLocks xmlns:a="http://schemas.openxmlformats.org/drawingml/2006/main" noGrp="1"/>
-          </p:cNvSpPr>
-          <p:nvPr/>
-        </p:nvSpPr>
-        <p:spPr>
-          <a:xfrm xmlns:a="http://schemas.openxmlformats.org/drawingml/2006/main">
-            <a:off x="4191000" y="2000250"/>
-            <a:ext cx="762000" cy="457200"/>
-          </a:xfrm>
-          <a:prstGeom xmlns:a="http://schemas.openxmlformats.org/drawingml/2006/main" prst="rect">
-            <a:avLst/>
-          </a:prstGeom>
-          <a:noFill xmlns:a="http://schemas.openxmlformats.org/drawingml/2006/main"/>
-          <a:ln xmlns:a="http://schemas.openxmlformats.org/drawingml/2006/main" w="0">
-            <a:noFill/>
-            <a:prstDash val="solid"/>
-          </a:ln>
-        </p:spPr>
-        <p:txBody>
-          <a:bodyPr xmlns:a="http://schemas.openxmlformats.org/drawingml/2006/main"/>
-          <a:lstStyle xmlns:a="http://schemas.openxmlformats.org/drawingml/2006/main"/>
-          <a:p xmlns:a="http://schemas.openxmlformats.org/drawingml/2006/main">
-            <a:pPr algn="l">
-              <a:defRPr sz="2100" b="1">
-                <a:solidFill>
-                  <a:srgbClr val="F0A23A"/>
-                </a:solidFill>
-              </a:defRPr>
-            </a:pPr>
-            <a:r>
-              <a:rPr sz="2100" b="1">
-                <a:solidFill>
-                  <a:srgbClr val="F0A23A"/>
-                </a:solidFill>
-              </a:rPr>
-              <a:t>02</a:t>
-            </a:r>
-          </a:p>
-        </p:txBody>
-      </p:sp>
-      <p:sp>
-        <p:nvSpPr>
-          <p:cNvPr id="12" name="">
-            <a:extLst xmlns:a="http://schemas.openxmlformats.org/drawingml/2006/main">
-              <a:ext uri="{FF2B5EF4-FFF2-40B4-BE49-F238E27FC236}">
-                <a16:creationId xmlns:a16="http://schemas.microsoft.com/office/drawing/2014/main" id="{05FAB743-EB45-4A68-9C39-415065F58E54}"/>
-              </a:ext>
-            </a:extLst>
-          </p:cNvPr>
-          <p:cNvSpPr>
-            <a:spLocks xmlns:a="http://schemas.openxmlformats.org/drawingml/2006/main" noGrp="1"/>
-          </p:cNvSpPr>
-          <p:nvPr/>
-        </p:nvSpPr>
-        <p:spPr>
-          <a:xfrm xmlns:a="http://schemas.openxmlformats.org/drawingml/2006/main">
-            <a:off x="4191000" y="2619375"/>
-            <a:ext cx="2381250" cy="904875"/>
-          </a:xfrm>
-          <a:prstGeom xmlns:a="http://schemas.openxmlformats.org/drawingml/2006/main" prst="rect">
-            <a:avLst/>
-          </a:prstGeom>
-          <a:noFill xmlns:a="http://schemas.openxmlformats.org/drawingml/2006/main"/>
-          <a:ln xmlns:a="http://schemas.openxmlformats.org/drawingml/2006/main" w="0">
-            <a:noFill/>
-            <a:prstDash val="solid"/>
-          </a:ln>
-        </p:spPr>
-        <p:txBody>
-          <a:bodyPr xmlns:a="http://schemas.openxmlformats.org/drawingml/2006/main"/>
-          <a:lstStyle xmlns:a="http://schemas.openxmlformats.org/drawingml/2006/main"/>
-          <a:p xmlns:a="http://schemas.openxmlformats.org/drawingml/2006/main">
-            <a:pPr algn="l">
-              <a:defRPr sz="2100" b="1">
-                <a:solidFill>
-                  <a:srgbClr val="F5F7F6"/>
-                </a:solidFill>
-              </a:defRPr>
-            </a:pPr>
-            <a:r>
-              <a:rPr sz="2100" b="1">
-                <a:solidFill>
-                  <a:srgbClr val="F5F7F6"/>
-                </a:solidFill>
-              </a:rPr>
-              <a:t>Policy decides</a:t>
-            </a:r>
-          </a:p>
-          <a:p xmlns:a="http://schemas.openxmlformats.org/drawingml/2006/main">
-            <a:pPr algn="l">
-              <a:defRPr sz="2100" b="1">
-                <a:solidFill>
-                  <a:srgbClr val="F5F7F6"/>
-                </a:solidFill>
-              </a:defRPr>
-            </a:pPr>
-            <a:r>
-              <a:rPr sz="2100" b="1">
-                <a:solidFill>
-                  <a:srgbClr val="F5F7F6"/>
-                </a:solidFill>
-              </a:rPr>
-              <a:t>what is allowed</a:t>
-            </a:r>
-          </a:p>
-        </p:txBody>
-      </p:sp>
-      <p:sp>
-        <p:nvSpPr>
-          <p:cNvPr id="13" name="">
-            <a:extLst xmlns:a="http://schemas.openxmlformats.org/drawingml/2006/main">
-              <a:ext uri="{FF2B5EF4-FFF2-40B4-BE49-F238E27FC236}">
-                <a16:creationId xmlns:a16="http://schemas.microsoft.com/office/drawing/2014/main" id="{5A8BD530-6F0A-45CC-A309-C4E59231CE82}"/>
-              </a:ext>
-            </a:extLst>
-          </p:cNvPr>
-          <p:cNvSpPr>
-            <a:spLocks xmlns:a="http://schemas.openxmlformats.org/drawingml/2006/main" noGrp="1"/>
-          </p:cNvSpPr>
-          <p:nvPr/>
-        </p:nvSpPr>
-        <p:spPr>
-          <a:xfrm xmlns:a="http://schemas.openxmlformats.org/drawingml/2006/main">
-            <a:off x="4191000" y="3857625"/>
-            <a:ext cx="2381250" cy="1000125"/>
-          </a:xfrm>
-          <a:prstGeom xmlns:a="http://schemas.openxmlformats.org/drawingml/2006/main" prst="rect">
-            <a:avLst/>
-          </a:prstGeom>
-          <a:noFill xmlns:a="http://schemas.openxmlformats.org/drawingml/2006/main"/>
-          <a:ln xmlns:a="http://schemas.openxmlformats.org/drawingml/2006/main" w="0">
-            <a:noFill/>
-            <a:prstDash val="solid"/>
-          </a:ln>
-        </p:spPr>
-        <p:txBody>
-          <a:bodyPr xmlns:a="http://schemas.openxmlformats.org/drawingml/2006/main"/>
-          <a:lstStyle xmlns:a="http://schemas.openxmlformats.org/drawingml/2006/main"/>
-          <a:p xmlns:a="http://schemas.openxmlformats.org/drawingml/2006/main">
-            <a:pPr algn="l">
-              <a:defRPr sz="1350" b="0">
-                <a:solidFill>
-                  <a:srgbClr val="98A19F"/>
-                </a:solidFill>
-              </a:defRPr>
-            </a:pPr>
-            <a:r>
-              <a:rPr sz="1350" b="0">
-                <a:solidFill>
-                  <a:srgbClr val="98A19F"/>
-                </a:solidFill>
-              </a:rPr>
-              <a:t>Budget · unit price</a:t>
-            </a:r>
-          </a:p>
-          <a:p xmlns:a="http://schemas.openxmlformats.org/drawingml/2006/main">
-            <a:pPr algn="l">
-              <a:defRPr sz="1350" b="0">
-                <a:solidFill>
-                  <a:srgbClr val="98A19F"/>
-                </a:solidFill>
-              </a:defRPr>
-            </a:pPr>
-            <a:r>
-              <a:rPr sz="1350" b="0">
-                <a:solidFill>
-                  <a:srgbClr val="98A19F"/>
-                </a:solidFill>
-              </a:rPr>
-              <a:t>Seller · quantity · quality</a:t>
-            </a:r>
-          </a:p>
-        </p:txBody>
-      </p:sp>
-      <p:sp>
-        <p:nvSpPr>
-          <p:cNvPr id="14" name="">
-            <a:extLst xmlns:a="http://schemas.openxmlformats.org/drawingml/2006/main">
-              <a:ext uri="{FF2B5EF4-FFF2-40B4-BE49-F238E27FC236}">
-                <a16:creationId xmlns:a16="http://schemas.microsoft.com/office/drawing/2014/main" id="{A166B102-4266-45C3-AB3F-0164C4BFACCB}"/>
-              </a:ext>
-            </a:extLst>
-          </p:cNvPr>
-          <p:cNvSpPr>
-            <a:spLocks xmlns:a="http://schemas.openxmlformats.org/drawingml/2006/main" noGrp="1"/>
-          </p:cNvSpPr>
-          <p:nvPr/>
-        </p:nvSpPr>
-        <p:spPr>
-          <a:xfrm xmlns:a="http://schemas.openxmlformats.org/drawingml/2006/main">
-            <a:off x="7667625" y="2000250"/>
-            <a:ext cx="762000" cy="457200"/>
-          </a:xfrm>
-          <a:prstGeom xmlns:a="http://schemas.openxmlformats.org/drawingml/2006/main" prst="rect">
-            <a:avLst/>
-          </a:prstGeom>
-          <a:noFill xmlns:a="http://schemas.openxmlformats.org/drawingml/2006/main"/>
-          <a:ln xmlns:a="http://schemas.openxmlformats.org/drawingml/2006/main" w="0">
-            <a:noFill/>
-            <a:prstDash val="solid"/>
-          </a:ln>
-        </p:spPr>
-        <p:txBody>
-          <a:bodyPr xmlns:a="http://schemas.openxmlformats.org/drawingml/2006/main"/>
-          <a:lstStyle xmlns:a="http://schemas.openxmlformats.org/drawingml/2006/main"/>
-          <a:p xmlns:a="http://schemas.openxmlformats.org/drawingml/2006/main">
-            <a:pPr algn="l">
-              <a:defRPr sz="2100" b="1">
+              <a:t>JSON-RPC transport · streaming events · structured tasks and artifacts</a:t>
+            </a:r>
+          </a:p>
+        </p:txBody>
+      </p:sp>
+      <p:sp>
+        <p:nvSpPr>
+          <p:cNvPr id="17" name="">
+            <a:extLst xmlns:a="http://schemas.openxmlformats.org/drawingml/2006/main">
+              <a:ext uri="{FF2B5EF4-FFF2-40B4-BE49-F238E27FC236}">
+                <a16:creationId xmlns:a16="http://schemas.microsoft.com/office/drawing/2014/main" id="{8D93D246-E89E-41B9-9234-48F8DE74A8E1}"/>
+              </a:ext>
+            </a:extLst>
+          </p:cNvPr>
+          <p:cNvSpPr>
+            <a:spLocks xmlns:a="http://schemas.openxmlformats.org/drawingml/2006/main" noGrp="1"/>
+          </p:cNvSpPr>
+          <p:nvPr/>
+        </p:nvSpPr>
+        <p:spPr>
+          <a:xfrm xmlns:a="http://schemas.openxmlformats.org/drawingml/2006/main">
+            <a:off x="1809750" y="5238750"/>
+            <a:ext cx="8572500" cy="666750"/>
+          </a:xfrm>
+          <a:prstGeom xmlns:a="http://schemas.openxmlformats.org/drawingml/2006/main" prst="rect">
+            <a:avLst/>
+          </a:prstGeom>
+          <a:noFill xmlns:a="http://schemas.openxmlformats.org/drawingml/2006/main"/>
+          <a:ln xmlns:a="http://schemas.openxmlformats.org/drawingml/2006/main" w="0">
+            <a:noFill/>
+            <a:prstDash val="solid"/>
+          </a:ln>
+        </p:spPr>
+        <p:txBody>
+          <a:bodyPr xmlns:a="http://schemas.openxmlformats.org/drawingml/2006/main"/>
+          <a:lstStyle xmlns:a="http://schemas.openxmlformats.org/drawingml/2006/main"/>
+          <a:p xmlns:a="http://schemas.openxmlformats.org/drawingml/2006/main">
+            <a:pPr algn="ctr">
+              <a:defRPr sz="1875" b="1">
                 <a:solidFill>
                   <a:srgbClr val="F2ED55"/>
                 </a:solidFill>
               </a:defRPr>
             </a:pPr>
             <a:r>
-              <a:rPr sz="2100" b="1">
+              <a:rPr sz="1875" b="1">
                 <a:solidFill>
                   <a:srgbClr val="F2ED55"/>
                 </a:solidFill>
               </a:rPr>
-              <a:t>03</a:t>
-            </a:r>
-          </a:p>
-        </p:txBody>
-      </p:sp>
-      <p:sp>
-        <p:nvSpPr>
-          <p:cNvPr id="15" name="">
-            <a:extLst xmlns:a="http://schemas.openxmlformats.org/drawingml/2006/main">
-              <a:ext uri="{FF2B5EF4-FFF2-40B4-BE49-F238E27FC236}">
-                <a16:creationId xmlns:a16="http://schemas.microsoft.com/office/drawing/2014/main" id="{4A98037D-3AC3-4843-86B9-CCDD3AA14CDD}"/>
-              </a:ext>
-            </a:extLst>
-          </p:cNvPr>
-          <p:cNvSpPr>
-            <a:spLocks xmlns:a="http://schemas.openxmlformats.org/drawingml/2006/main" noGrp="1"/>
-          </p:cNvSpPr>
-          <p:nvPr/>
-        </p:nvSpPr>
-        <p:spPr>
-          <a:xfrm xmlns:a="http://schemas.openxmlformats.org/drawingml/2006/main">
-            <a:off x="7667625" y="2619375"/>
-            <a:ext cx="2476500" cy="904875"/>
-          </a:xfrm>
-          <a:prstGeom xmlns:a="http://schemas.openxmlformats.org/drawingml/2006/main" prst="rect">
-            <a:avLst/>
-          </a:prstGeom>
-          <a:noFill xmlns:a="http://schemas.openxmlformats.org/drawingml/2006/main"/>
-          <a:ln xmlns:a="http://schemas.openxmlformats.org/drawingml/2006/main" w="0">
-            <a:noFill/>
-            <a:prstDash val="solid"/>
-          </a:ln>
-        </p:spPr>
-        <p:txBody>
-          <a:bodyPr xmlns:a="http://schemas.openxmlformats.org/drawingml/2006/main"/>
-          <a:lstStyle xmlns:a="http://schemas.openxmlformats.org/drawingml/2006/main"/>
-          <a:p xmlns:a="http://schemas.openxmlformats.org/drawingml/2006/main">
-            <a:pPr algn="l">
-              <a:defRPr sz="2100" b="1">
-                <a:solidFill>
-                  <a:srgbClr val="F5F7F6"/>
-                </a:solidFill>
-              </a:defRPr>
-            </a:pPr>
-            <a:r>
-              <a:rPr sz="2100" b="1">
-                <a:solidFill>
-                  <a:srgbClr val="F5F7F6"/>
-                </a:solidFill>
-              </a:rPr>
-              <a:t>A human approves</a:t>
-            </a:r>
-          </a:p>
-          <a:p xmlns:a="http://schemas.openxmlformats.org/drawingml/2006/main">
-            <a:pPr algn="l">
-              <a:defRPr sz="2100" b="1">
-                <a:solidFill>
-                  <a:srgbClr val="F5F7F6"/>
-                </a:solidFill>
-              </a:defRPr>
-            </a:pPr>
-            <a:r>
-              <a:rPr sz="2100" b="1">
-                <a:solidFill>
-                  <a:srgbClr val="F5F7F6"/>
-                </a:solidFill>
-              </a:rPr>
-              <a:t>the exception</a:t>
-            </a:r>
-          </a:p>
-        </p:txBody>
-      </p:sp>
-      <p:sp>
-        <p:nvSpPr>
-          <p:cNvPr id="16" name="">
-            <a:extLst xmlns:a="http://schemas.openxmlformats.org/drawingml/2006/main">
-              <a:ext uri="{FF2B5EF4-FFF2-40B4-BE49-F238E27FC236}">
-                <a16:creationId xmlns:a16="http://schemas.microsoft.com/office/drawing/2014/main" id="{C68C6A7A-5DDA-461B-884D-71488BA48854}"/>
-              </a:ext>
-            </a:extLst>
-          </p:cNvPr>
-          <p:cNvSpPr>
-            <a:spLocks xmlns:a="http://schemas.openxmlformats.org/drawingml/2006/main" noGrp="1"/>
-          </p:cNvSpPr>
-          <p:nvPr/>
-        </p:nvSpPr>
-        <p:spPr>
-          <a:xfrm xmlns:a="http://schemas.openxmlformats.org/drawingml/2006/main">
-            <a:off x="7667625" y="3857625"/>
-            <a:ext cx="2381250" cy="762000"/>
-          </a:xfrm>
-          <a:prstGeom xmlns:a="http://schemas.openxmlformats.org/drawingml/2006/main" prst="rect">
-            <a:avLst/>
-          </a:prstGeom>
-          <a:noFill xmlns:a="http://schemas.openxmlformats.org/drawingml/2006/main"/>
-          <a:ln xmlns:a="http://schemas.openxmlformats.org/drawingml/2006/main" w="0">
-            <a:noFill/>
-            <a:prstDash val="solid"/>
-          </a:ln>
-        </p:spPr>
-        <p:txBody>
-          <a:bodyPr xmlns:a="http://schemas.openxmlformats.org/drawingml/2006/main"/>
-          <a:lstStyle xmlns:a="http://schemas.openxmlformats.org/drawingml/2006/main"/>
-          <a:p xmlns:a="http://schemas.openxmlformats.org/drawingml/2006/main">
-            <a:pPr algn="l">
-              <a:defRPr sz="1350" b="0">
-                <a:solidFill>
-                  <a:srgbClr val="98A19F"/>
-                </a:solidFill>
-              </a:defRPr>
-            </a:pPr>
-            <a:r>
-              <a:rPr sz="1350" b="0">
-                <a:solidFill>
-                  <a:srgbClr val="98A19F"/>
-                </a:solidFill>
-              </a:rPr>
-              <a:t>The workflow stops before payment</a:t>
-            </a:r>
-          </a:p>
-        </p:txBody>
-      </p:sp>
-      <p:sp>
-        <p:nvSpPr>
-          <p:cNvPr id="17" name="">
-            <a:extLst xmlns:a="http://schemas.openxmlformats.org/drawingml/2006/main">
-              <a:ext uri="{FF2B5EF4-FFF2-40B4-BE49-F238E27FC236}">
-                <a16:creationId xmlns:a16="http://schemas.microsoft.com/office/drawing/2014/main" id="{52FB4A01-D06F-4F46-BD68-500E1DB2D8A7}"/>
-              </a:ext>
-            </a:extLst>
-          </p:cNvPr>
-          <p:cNvSpPr>
-            <a:spLocks xmlns:a="http://schemas.openxmlformats.org/drawingml/2006/main" noGrp="1"/>
-          </p:cNvSpPr>
-          <p:nvPr/>
-        </p:nvSpPr>
-        <p:spPr>
-          <a:xfrm xmlns:a="http://schemas.openxmlformats.org/drawingml/2006/main">
-            <a:off x="10477500" y="2000250"/>
-            <a:ext cx="762000" cy="457200"/>
-          </a:xfrm>
-          <a:prstGeom xmlns:a="http://schemas.openxmlformats.org/drawingml/2006/main" prst="rect">
-            <a:avLst/>
-          </a:prstGeom>
-          <a:noFill xmlns:a="http://schemas.openxmlformats.org/drawingml/2006/main"/>
-          <a:ln xmlns:a="http://schemas.openxmlformats.org/drawingml/2006/main" w="0">
-            <a:noFill/>
-            <a:prstDash val="solid"/>
-          </a:ln>
-        </p:spPr>
-        <p:txBody>
-          <a:bodyPr xmlns:a="http://schemas.openxmlformats.org/drawingml/2006/main"/>
-          <a:lstStyle xmlns:a="http://schemas.openxmlformats.org/drawingml/2006/main"/>
-          <a:p xmlns:a="http://schemas.openxmlformats.org/drawingml/2006/main">
-            <a:pPr algn="l">
-              <a:defRPr sz="2100" b="1">
-                <a:solidFill>
-                  <a:srgbClr val="9270FF"/>
-                </a:solidFill>
-              </a:defRPr>
-            </a:pPr>
-            <a:r>
-              <a:rPr sz="2100" b="1">
-                <a:solidFill>
-                  <a:srgbClr val="9270FF"/>
-                </a:solidFill>
-              </a:rPr>
-              <a:t>04</a:t>
-            </a:r>
-          </a:p>
-        </p:txBody>
-      </p:sp>
-      <p:sp>
-        <p:nvSpPr>
-          <p:cNvPr id="18" name="">
-            <a:extLst xmlns:a="http://schemas.openxmlformats.org/drawingml/2006/main">
-              <a:ext uri="{FF2B5EF4-FFF2-40B4-BE49-F238E27FC236}">
-                <a16:creationId xmlns:a16="http://schemas.microsoft.com/office/drawing/2014/main" id="{37461CFC-712F-4E3E-B52A-FF094B7BE8FD}"/>
-              </a:ext>
-            </a:extLst>
-          </p:cNvPr>
-          <p:cNvSpPr>
-            <a:spLocks xmlns:a="http://schemas.openxmlformats.org/drawingml/2006/main" noGrp="1"/>
-          </p:cNvSpPr>
-          <p:nvPr/>
-        </p:nvSpPr>
-        <p:spPr>
-          <a:xfrm xmlns:a="http://schemas.openxmlformats.org/drawingml/2006/main">
-            <a:off x="9763125" y="2619375"/>
-            <a:ext cx="1809750" cy="904875"/>
-          </a:xfrm>
-          <a:prstGeom xmlns:a="http://schemas.openxmlformats.org/drawingml/2006/main" prst="rect">
-            <a:avLst/>
-          </a:prstGeom>
-          <a:noFill xmlns:a="http://schemas.openxmlformats.org/drawingml/2006/main"/>
-          <a:ln xmlns:a="http://schemas.openxmlformats.org/drawingml/2006/main" w="0">
-            <a:noFill/>
-            <a:prstDash val="solid"/>
-          </a:ln>
-        </p:spPr>
-        <p:txBody>
-          <a:bodyPr xmlns:a="http://schemas.openxmlformats.org/drawingml/2006/main"/>
-          <a:lstStyle xmlns:a="http://schemas.openxmlformats.org/drawingml/2006/main"/>
-          <a:p xmlns:a="http://schemas.openxmlformats.org/drawingml/2006/main">
-            <a:pPr algn="l">
-              <a:defRPr sz="1875" b="1">
-                <a:solidFill>
-                  <a:srgbClr val="F5F7F6"/>
-                </a:solidFill>
-              </a:defRPr>
-            </a:pPr>
-            <a:r>
-              <a:rPr sz="1875" b="1">
-                <a:solidFill>
-                  <a:srgbClr val="F5F7F6"/>
-                </a:solidFill>
-              </a:rPr>
-              <a:t>AP2 signs exact</a:t>
-            </a:r>
-          </a:p>
-          <a:p xmlns:a="http://schemas.openxmlformats.org/drawingml/2006/main">
-            <a:pPr algn="l">
-              <a:defRPr sz="1875" b="1">
-                <a:solidFill>
-                  <a:srgbClr val="F5F7F6"/>
-                </a:solidFill>
-              </a:defRPr>
-            </a:pPr>
-            <a:r>
-              <a:rPr sz="1875" b="1">
-                <a:solidFill>
-                  <a:srgbClr val="F5F7F6"/>
-                </a:solidFill>
-              </a:rPr>
-              <a:t>payment permission</a:t>
-            </a:r>
-          </a:p>
-        </p:txBody>
-      </p:sp>
-      <p:sp>
-        <p:nvSpPr>
-          <p:cNvPr id="19" name="">
-            <a:extLst xmlns:a="http://schemas.openxmlformats.org/drawingml/2006/main">
-              <a:ext uri="{FF2B5EF4-FFF2-40B4-BE49-F238E27FC236}">
-                <a16:creationId xmlns:a16="http://schemas.microsoft.com/office/drawing/2014/main" id="{84E216D0-F929-488C-9241-E927188D8467}"/>
-              </a:ext>
-            </a:extLst>
-          </p:cNvPr>
-          <p:cNvSpPr>
-            <a:spLocks xmlns:a="http://schemas.openxmlformats.org/drawingml/2006/main" noGrp="1"/>
-          </p:cNvSpPr>
-          <p:nvPr/>
-        </p:nvSpPr>
-        <p:spPr>
-          <a:xfrm xmlns:a="http://schemas.openxmlformats.org/drawingml/2006/main">
-            <a:off x="9763125" y="3857625"/>
-            <a:ext cx="1905000" cy="1000125"/>
-          </a:xfrm>
-          <a:prstGeom xmlns:a="http://schemas.openxmlformats.org/drawingml/2006/main" prst="rect">
-            <a:avLst/>
-          </a:prstGeom>
-          <a:noFill xmlns:a="http://schemas.openxmlformats.org/drawingml/2006/main"/>
-          <a:ln xmlns:a="http://schemas.openxmlformats.org/drawingml/2006/main" w="0">
-            <a:noFill/>
-            <a:prstDash val="solid"/>
-          </a:ln>
-        </p:spPr>
-        <p:txBody>
-          <a:bodyPr xmlns:a="http://schemas.openxmlformats.org/drawingml/2006/main"/>
-          <a:lstStyle xmlns:a="http://schemas.openxmlformats.org/drawingml/2006/main"/>
-          <a:p xmlns:a="http://schemas.openxmlformats.org/drawingml/2006/main">
-            <a:pPr algn="l">
-              <a:defRPr sz="1275" b="0">
-                <a:solidFill>
-                  <a:srgbClr val="98A19F"/>
-                </a:solidFill>
-              </a:defRPr>
-            </a:pPr>
-            <a:r>
-              <a:rPr sz="1275" b="0">
-                <a:solidFill>
-                  <a:srgbClr val="98A19F"/>
-                </a:solidFill>
-              </a:rPr>
-              <a:t>Buyer · seller · product</a:t>
-            </a:r>
-          </a:p>
-          <a:p xmlns:a="http://schemas.openxmlformats.org/drawingml/2006/main">
-            <a:pPr algn="l">
-              <a:defRPr sz="1275" b="0">
-                <a:solidFill>
-                  <a:srgbClr val="98A19F"/>
-                </a:solidFill>
-              </a:defRPr>
-            </a:pPr>
-            <a:r>
-              <a:rPr sz="1275" b="0">
-                <a:solidFill>
-                  <a:srgbClr val="98A19F"/>
-                </a:solidFill>
-              </a:rPr>
-              <a:t>Amount · recipient · expiry</a:t>
-            </a:r>
-          </a:p>
-        </p:txBody>
-      </p:sp>
-      <p:sp>
-        <p:nvSpPr>
-          <p:cNvPr id="20" name="">
-            <a:extLst xmlns:a="http://schemas.openxmlformats.org/drawingml/2006/main">
-              <a:ext uri="{FF2B5EF4-FFF2-40B4-BE49-F238E27FC236}">
-                <a16:creationId xmlns:a16="http://schemas.microsoft.com/office/drawing/2014/main" id="{5F439525-5ABB-49F1-AB0D-DAAF55DC3199}"/>
-              </a:ext>
-            </a:extLst>
-          </p:cNvPr>
-          <p:cNvSpPr>
-            <a:spLocks xmlns:a="http://schemas.openxmlformats.org/drawingml/2006/main" noGrp="1"/>
-          </p:cNvSpPr>
-          <p:nvPr/>
-        </p:nvSpPr>
-        <p:spPr>
-          <a:xfrm xmlns:a="http://schemas.openxmlformats.org/drawingml/2006/main">
-            <a:off x="704850" y="5572125"/>
-            <a:ext cx="6667500" cy="381000"/>
-          </a:xfrm>
-          <a:prstGeom xmlns:a="http://schemas.openxmlformats.org/drawingml/2006/main" prst="rect">
-            <a:avLst/>
-          </a:prstGeom>
-          <a:noFill xmlns:a="http://schemas.openxmlformats.org/drawingml/2006/main"/>
-          <a:ln xmlns:a="http://schemas.openxmlformats.org/drawingml/2006/main" w="0">
-            <a:noFill/>
-            <a:prstDash val="solid"/>
-          </a:ln>
-        </p:spPr>
-        <p:txBody>
-          <a:bodyPr xmlns:a="http://schemas.openxmlformats.org/drawingml/2006/main"/>
-          <a:lstStyle xmlns:a="http://schemas.openxmlformats.org/drawingml/2006/main"/>
-          <a:p xmlns:a="http://schemas.openxmlformats.org/drawingml/2006/main">
-            <a:pPr algn="l">
-              <a:defRPr sz="2025" b="1">
-                <a:solidFill>
-                  <a:srgbClr val="F2ED55"/>
-                </a:solidFill>
-              </a:defRPr>
-            </a:pPr>
-            <a:r>
-              <a:rPr sz="2025" b="1">
-                <a:solidFill>
-                  <a:srgbClr val="F2ED55"/>
-                </a:solidFill>
-              </a:rPr>
-              <a:t>Agreement is not permission to spend.</a:t>
+              <a:t>Output: a structured commercial agreement for price, quantity, quality, and delivery. No payment permission yet.</a:t>
             </a:r>
           </a:p>
         </p:txBody>
@@ -7652,7 +8615,7 @@
     </p:spTree>
     <p:extLst>
       <p:ext uri="{BB962C8B-B14F-4D97-AF65-F5344CB8AC3E}">
-        <p14:creationId xmlns:p14="http://schemas.microsoft.com/office/powerpoint/2010/main" val="1772477648"/>
+        <p14:creationId xmlns:p14="http://schemas.microsoft.com/office/powerpoint/2010/main" val="1014539032"/>
       </p:ext>
     </p:extLst>
   </p:cSld>
@@ -7680,10 +8643,10 @@
       </p:grpSpPr>
       <p:sp>
         <p:nvSpPr>
-          <p:cNvPr id="11" name="">
-            <a:extLst xmlns:a="http://schemas.openxmlformats.org/drawingml/2006/main">
-              <a:ext uri="{FF2B5EF4-FFF2-40B4-BE49-F238E27FC236}">
-                <a16:creationId xmlns:a16="http://schemas.microsoft.com/office/drawing/2014/main" id="{61527308-CEC8-491C-9AB5-4858EC7263C9}"/>
+          <p:cNvPr id="12" name="">
+            <a:extLst xmlns:a="http://schemas.openxmlformats.org/drawingml/2006/main">
+              <a:ext uri="{FF2B5EF4-FFF2-40B4-BE49-F238E27FC236}">
+                <a16:creationId xmlns:a16="http://schemas.microsoft.com/office/drawing/2014/main" id="{B8E8C795-FA54-4553-AEA8-02046E70C11F}"/>
               </a:ext>
             </a:extLst>
           </p:cNvPr>
@@ -7723,7 +8686,7 @@
                   <a:srgbClr val="F2ED55"/>
                 </a:solidFill>
               </a:rPr>
-              <a:t>MONAD</a:t>
+              <a:t>POLICY + AP2</a:t>
             </a:r>
           </a:p>
         </p:txBody>
@@ -7733,7 +8696,7 @@
           <p:cNvPr id="2" name="">
             <a:extLst xmlns:a="http://schemas.openxmlformats.org/drawingml/2006/main">
               <a:ext uri="{FF2B5EF4-FFF2-40B4-BE49-F238E27FC236}">
-                <a16:creationId xmlns:a16="http://schemas.microsoft.com/office/drawing/2014/main" id="{B1785BBA-787F-4915-AF19-2418C08EBD2D}"/>
+                <a16:creationId xmlns:a16="http://schemas.microsoft.com/office/drawing/2014/main" id="{B8A1D154-69C5-4E0F-B4E8-048E30520032}"/>
               </a:ext>
             </a:extLst>
           </p:cNvPr>
@@ -7773,7 +8736,7 @@
                   <a:srgbClr val="F5F7F6"/>
                 </a:solidFill>
               </a:rPr>
-              <a:t>Monad settles native machine commerce.</a:t>
+              <a:t>Agreement becomes exact, signed payment authority.</a:t>
             </a:r>
           </a:p>
         </p:txBody>
@@ -7783,7 +8746,7 @@
           <p:cNvPr id="3" name="">
             <a:extLst xmlns:a="http://schemas.openxmlformats.org/drawingml/2006/main">
               <a:ext uri="{FF2B5EF4-FFF2-40B4-BE49-F238E27FC236}">
-                <a16:creationId xmlns:a16="http://schemas.microsoft.com/office/drawing/2014/main" id="{09115DA9-C2EF-466A-BBEF-3EDACFB59042}"/>
+                <a16:creationId xmlns:a16="http://schemas.microsoft.com/office/drawing/2014/main" id="{9718C900-463E-41A3-9499-94256B777C46}"/>
               </a:ext>
             </a:extLst>
           </p:cNvPr>
@@ -7816,7 +8779,7 @@
           <p:cNvPr id="4" name="">
             <a:extLst xmlns:a="http://schemas.openxmlformats.org/drawingml/2006/main">
               <a:ext uri="{FF2B5EF4-FFF2-40B4-BE49-F238E27FC236}">
-                <a16:creationId xmlns:a16="http://schemas.microsoft.com/office/drawing/2014/main" id="{8550926B-083A-4233-AB05-83CC784CEF1B}"/>
+                <a16:creationId xmlns:a16="http://schemas.microsoft.com/office/drawing/2014/main" id="{3B805174-45E6-4838-9851-4B51455B858D}"/>
               </a:ext>
             </a:extLst>
           </p:cNvPr>
@@ -7861,297 +8824,263 @@
           </a:p>
         </p:txBody>
       </p:sp>
-      <p:sp>
-        <p:nvSpPr>
-          <p:cNvPr id="5" name="">
-            <a:extLst xmlns:a="http://schemas.openxmlformats.org/drawingml/2006/main">
-              <a:ext uri="{FF2B5EF4-FFF2-40B4-BE49-F238E27FC236}">
-                <a16:creationId xmlns:a16="http://schemas.microsoft.com/office/drawing/2014/main" id="{C34ED398-1B50-4454-9C29-ADBA3750B91C}"/>
-              </a:ext>
-            </a:extLst>
-          </p:cNvPr>
-          <p:cNvSpPr>
-            <a:spLocks xmlns:a="http://schemas.openxmlformats.org/drawingml/2006/main" noGrp="1"/>
-          </p:cNvSpPr>
-          <p:nvPr/>
-        </p:nvSpPr>
-        <p:spPr>
-          <a:xfrm xmlns:a="http://schemas.openxmlformats.org/drawingml/2006/main">
-            <a:off x="609600" y="1666875"/>
-            <a:ext cx="2381250" cy="819150"/>
-          </a:xfrm>
-          <a:prstGeom xmlns:a="http://schemas.openxmlformats.org/drawingml/2006/main" prst="rect">
-            <a:avLst/>
-          </a:prstGeom>
-          <a:noFill xmlns:a="http://schemas.openxmlformats.org/drawingml/2006/main"/>
-          <a:ln xmlns:a="http://schemas.openxmlformats.org/drawingml/2006/main" w="0">
-            <a:noFill/>
-            <a:prstDash val="solid"/>
-          </a:ln>
-        </p:spPr>
-        <p:txBody>
-          <a:bodyPr xmlns:a="http://schemas.openxmlformats.org/drawingml/2006/main"/>
-          <a:lstStyle xmlns:a="http://schemas.openxmlformats.org/drawingml/2006/main"/>
-          <a:p xmlns:a="http://schemas.openxmlformats.org/drawingml/2006/main">
-            <a:pPr algn="l">
-              <a:defRPr sz="4800" b="1">
-                <a:solidFill>
-                  <a:srgbClr val="9270FF"/>
-                </a:solidFill>
-              </a:defRPr>
-            </a:pPr>
-            <a:r>
-              <a:rPr sz="4800" b="1">
-                <a:solidFill>
-                  <a:srgbClr val="9270FF"/>
-                </a:solidFill>
-              </a:rPr>
-              <a:t>x402</a:t>
-            </a:r>
-          </a:p>
-        </p:txBody>
-      </p:sp>
-      <p:sp>
-        <p:nvSpPr>
-          <p:cNvPr id="6" name="">
-            <a:extLst xmlns:a="http://schemas.openxmlformats.org/drawingml/2006/main">
-              <a:ext uri="{FF2B5EF4-FFF2-40B4-BE49-F238E27FC236}">
-                <a16:creationId xmlns:a16="http://schemas.microsoft.com/office/drawing/2014/main" id="{522706ED-03F5-4157-9873-75761BB931C2}"/>
-              </a:ext>
-            </a:extLst>
-          </p:cNvPr>
-          <p:cNvSpPr>
-            <a:spLocks xmlns:a="http://schemas.openxmlformats.org/drawingml/2006/main" noGrp="1"/>
-          </p:cNvSpPr>
-          <p:nvPr/>
-        </p:nvSpPr>
-        <p:spPr>
-          <a:xfrm xmlns:a="http://schemas.openxmlformats.org/drawingml/2006/main">
-            <a:off x="609600" y="2571750"/>
-            <a:ext cx="4191000" cy="904875"/>
-          </a:xfrm>
-          <a:prstGeom xmlns:a="http://schemas.openxmlformats.org/drawingml/2006/main" prst="rect">
-            <a:avLst/>
-          </a:prstGeom>
-          <a:noFill xmlns:a="http://schemas.openxmlformats.org/drawingml/2006/main"/>
-          <a:ln xmlns:a="http://schemas.openxmlformats.org/drawingml/2006/main" w="0">
-            <a:noFill/>
-            <a:prstDash val="solid"/>
-          </a:ln>
-        </p:spPr>
-        <p:txBody>
-          <a:bodyPr xmlns:a="http://schemas.openxmlformats.org/drawingml/2006/main"/>
-          <a:lstStyle xmlns:a="http://schemas.openxmlformats.org/drawingml/2006/main"/>
-          <a:p xmlns:a="http://schemas.openxmlformats.org/drawingml/2006/main">
-            <a:pPr algn="l">
-              <a:defRPr sz="1725" b="1">
-                <a:solidFill>
-                  <a:srgbClr val="F5F7F6"/>
-                </a:solidFill>
-              </a:defRPr>
-            </a:pPr>
-            <a:r>
-              <a:rPr sz="1725" b="1">
-                <a:solidFill>
-                  <a:srgbClr val="F5F7F6"/>
-                </a:solidFill>
-              </a:rPr>
-              <a:t>The protected API returns a result only after test USDC settlement is verified.</a:t>
-            </a:r>
-          </a:p>
-        </p:txBody>
-      </p:sp>
-      <p:sp>
-        <p:nvSpPr>
-          <p:cNvPr id="7" name="">
-            <a:extLst xmlns:a="http://schemas.openxmlformats.org/drawingml/2006/main">
-              <a:ext uri="{FF2B5EF4-FFF2-40B4-BE49-F238E27FC236}">
-                <a16:creationId xmlns:a16="http://schemas.microsoft.com/office/drawing/2014/main" id="{56A5B43E-F9EE-416C-A889-6A225E430650}"/>
-              </a:ext>
-            </a:extLst>
-          </p:cNvPr>
-          <p:cNvSpPr>
-            <a:spLocks xmlns:a="http://schemas.openxmlformats.org/drawingml/2006/main" noGrp="1"/>
-          </p:cNvSpPr>
-          <p:nvPr/>
-        </p:nvSpPr>
-        <p:spPr>
-          <a:xfrm xmlns:a="http://schemas.openxmlformats.org/drawingml/2006/main">
-            <a:off x="609600" y="3762375"/>
-            <a:ext cx="3810000" cy="1619250"/>
-          </a:xfrm>
-          <a:prstGeom xmlns:a="http://schemas.openxmlformats.org/drawingml/2006/main" prst="rect">
-            <a:avLst/>
-          </a:prstGeom>
-          <a:noFill xmlns:a="http://schemas.openxmlformats.org/drawingml/2006/main"/>
-          <a:ln xmlns:a="http://schemas.openxmlformats.org/drawingml/2006/main" w="0">
-            <a:noFill/>
-            <a:prstDash val="solid"/>
-          </a:ln>
-        </p:spPr>
-        <p:txBody>
-          <a:bodyPr xmlns:a="http://schemas.openxmlformats.org/drawingml/2006/main"/>
-          <a:lstStyle xmlns:a="http://schemas.openxmlformats.org/drawingml/2006/main"/>
-          <a:p xmlns:a="http://schemas.openxmlformats.org/drawingml/2006/main">
-            <a:pPr algn="l">
-              <a:defRPr sz="1350" b="0">
-                <a:solidFill>
-                  <a:srgbClr val="98A19F"/>
-                </a:solidFill>
-              </a:defRPr>
-            </a:pPr>
-            <a:r>
-              <a:rPr sz="1350" b="0">
-                <a:solidFill>
-                  <a:srgbClr val="98A19F"/>
-                </a:solidFill>
-              </a:rPr>
-              <a:t>Buyer and seller wallets</a:t>
-            </a:r>
-          </a:p>
-          <a:p xmlns:a="http://schemas.openxmlformats.org/drawingml/2006/main">
-            <a:pPr algn="l">
-              <a:defRPr sz="1350" b="0">
-                <a:solidFill>
-                  <a:srgbClr val="98A19F"/>
-                </a:solidFill>
-              </a:defRPr>
-            </a:pPr>
-            <a:r>
-              <a:rPr sz="1350" b="0">
-                <a:solidFill>
-                  <a:srgbClr val="98A19F"/>
-                </a:solidFill>
-              </a:rPr>
-              <a:t>Monad Testnet USDC</a:t>
-            </a:r>
-          </a:p>
-          <a:p xmlns:a="http://schemas.openxmlformats.org/drawingml/2006/main">
-            <a:pPr algn="l">
-              <a:defRPr sz="1350" b="0">
-                <a:solidFill>
-                  <a:srgbClr val="98A19F"/>
-                </a:solidFill>
-              </a:defRPr>
-            </a:pPr>
-            <a:r>
-              <a:rPr sz="1350" b="0">
-                <a:solidFill>
-                  <a:srgbClr val="98A19F"/>
-                </a:solidFill>
-              </a:rPr>
-              <a:t>x402 facilitator</a:t>
-            </a:r>
-          </a:p>
-          <a:p xmlns:a="http://schemas.openxmlformats.org/drawingml/2006/main">
-            <a:pPr algn="l">
-              <a:defRPr sz="1350" b="0">
-                <a:solidFill>
-                  <a:srgbClr val="98A19F"/>
-                </a:solidFill>
-              </a:defRPr>
-            </a:pPr>
-            <a:r>
-              <a:rPr sz="1350" b="0">
-                <a:solidFill>
-                  <a:srgbClr val="98A19F"/>
-                </a:solidFill>
-              </a:rPr>
-              <a:t>AP2 authorization binding</a:t>
-            </a:r>
-          </a:p>
-          <a:p xmlns:a="http://schemas.openxmlformats.org/drawingml/2006/main">
-            <a:pPr algn="l">
-              <a:defRPr sz="1350" b="0">
-                <a:solidFill>
-                  <a:srgbClr val="98A19F"/>
-                </a:solidFill>
-              </a:defRPr>
-            </a:pPr>
-            <a:r>
-              <a:rPr sz="1350" b="0">
-                <a:solidFill>
-                  <a:srgbClr val="98A19F"/>
-                </a:solidFill>
-              </a:rPr>
-              <a:t>Settlement response verification</a:t>
-            </a:r>
-          </a:p>
-        </p:txBody>
-      </p:sp>
       <p:pic>
         <p:nvPicPr>
-          <p:cNvPr id="18" name=""/>
+          <p:cNvPr id="16" name=""/>
           <p:cNvPicPr>
             <a:picLocks xmlns:a="http://schemas.openxmlformats.org/drawingml/2006/main" noChangeAspect="1"/>
           </p:cNvPicPr>
           <p:nvPr/>
         </p:nvPicPr>
         <p:blipFill>
-          <a:blip xmlns:r="http://schemas.openxmlformats.org/officeDocument/2006/relationships" xmlns:a="http://schemas.openxmlformats.org/drawingml/2006/main" r:embed="R886ce1e155374ab5"/>
-          <a:srcRect xmlns:a="http://schemas.openxmlformats.org/drawingml/2006/main" l="10465" t="0" r="10465" b="0"/>
+          <a:blip xmlns:r="http://schemas.openxmlformats.org/officeDocument/2006/relationships" xmlns:a="http://schemas.openxmlformats.org/drawingml/2006/main" r:embed="Rad00fc23d8134aa8"/>
+          <a:srcRect xmlns:a="http://schemas.openxmlformats.org/drawingml/2006/main" l="13721" t="0" r="13721" b="0"/>
           <a:stretch xmlns:a="http://schemas.openxmlformats.org/drawingml/2006/main">
             <a:fillRect l="0" t="0" r="0" b="0"/>
           </a:stretch>
         </p:blipFill>
         <p:spPr>
           <a:xfrm xmlns:a="http://schemas.openxmlformats.org/drawingml/2006/main">
-            <a:off x="5191125" y="1619250"/>
-            <a:ext cx="6334125" cy="3905250"/>
+            <a:off x="523875" y="1619250"/>
+            <a:ext cx="6096000" cy="4095750"/>
           </a:xfrm>
           <a:prstGeom xmlns:a="http://schemas.openxmlformats.org/drawingml/2006/main" prst="roundRect">
             <a:avLst>
-              <a:gd name="adj" fmla="val 2927"/>
+              <a:gd name="adj" fmla="val 2791"/>
             </a:avLst>
           </a:prstGeom>
         </p:spPr>
       </p:pic>
       <p:sp>
         <p:nvSpPr>
+          <p:cNvPr id="6" name="">
+            <a:extLst xmlns:a="http://schemas.openxmlformats.org/drawingml/2006/main">
+              <a:ext uri="{FF2B5EF4-FFF2-40B4-BE49-F238E27FC236}">
+                <a16:creationId xmlns:a16="http://schemas.microsoft.com/office/drawing/2014/main" id="{CC7A76BD-B50C-4B36-8ED0-1E47860952B6}"/>
+              </a:ext>
+            </a:extLst>
+          </p:cNvPr>
+          <p:cNvSpPr>
+            <a:spLocks xmlns:a="http://schemas.openxmlformats.org/drawingml/2006/main" noGrp="1"/>
+          </p:cNvSpPr>
+          <p:nvPr/>
+        </p:nvSpPr>
+        <p:spPr>
+          <a:xfrm xmlns:a="http://schemas.openxmlformats.org/drawingml/2006/main">
+            <a:off x="7096125" y="1714500"/>
+            <a:ext cx="3429000" cy="381000"/>
+          </a:xfrm>
+          <a:prstGeom xmlns:a="http://schemas.openxmlformats.org/drawingml/2006/main" prst="rect">
+            <a:avLst/>
+          </a:prstGeom>
+          <a:noFill xmlns:a="http://schemas.openxmlformats.org/drawingml/2006/main"/>
+          <a:ln xmlns:a="http://schemas.openxmlformats.org/drawingml/2006/main" w="0">
+            <a:noFill/>
+            <a:prstDash val="solid"/>
+          </a:ln>
+        </p:spPr>
+        <p:txBody>
+          <a:bodyPr xmlns:a="http://schemas.openxmlformats.org/drawingml/2006/main"/>
+          <a:lstStyle xmlns:a="http://schemas.openxmlformats.org/drawingml/2006/main"/>
+          <a:p xmlns:a="http://schemas.openxmlformats.org/drawingml/2006/main">
+            <a:pPr algn="l">
+              <a:defRPr sz="1950" b="1">
+                <a:solidFill>
+                  <a:srgbClr val="F0A23A"/>
+                </a:solidFill>
+              </a:defRPr>
+            </a:pPr>
+            <a:r>
+              <a:rPr sz="1950" b="1">
+                <a:solidFill>
+                  <a:srgbClr val="F0A23A"/>
+                </a:solidFill>
+              </a:rPr>
+              <a:t>Deterministic policy</a:t>
+            </a:r>
+          </a:p>
+        </p:txBody>
+      </p:sp>
+      <p:sp>
+        <p:nvSpPr>
+          <p:cNvPr id="7" name="">
+            <a:extLst xmlns:a="http://schemas.openxmlformats.org/drawingml/2006/main">
+              <a:ext uri="{FF2B5EF4-FFF2-40B4-BE49-F238E27FC236}">
+                <a16:creationId xmlns:a16="http://schemas.microsoft.com/office/drawing/2014/main" id="{BD2AB47C-C0D0-446B-9F8A-1A4FBB566797}"/>
+              </a:ext>
+            </a:extLst>
+          </p:cNvPr>
+          <p:cNvSpPr>
+            <a:spLocks xmlns:a="http://schemas.openxmlformats.org/drawingml/2006/main" noGrp="1"/>
+          </p:cNvSpPr>
+          <p:nvPr/>
+        </p:nvSpPr>
+        <p:spPr>
+          <a:xfrm xmlns:a="http://schemas.openxmlformats.org/drawingml/2006/main">
+            <a:off x="7096125" y="2190750"/>
+            <a:ext cx="3905250" cy="619125"/>
+          </a:xfrm>
+          <a:prstGeom xmlns:a="http://schemas.openxmlformats.org/drawingml/2006/main" prst="rect">
+            <a:avLst/>
+          </a:prstGeom>
+          <a:noFill xmlns:a="http://schemas.openxmlformats.org/drawingml/2006/main"/>
+          <a:ln xmlns:a="http://schemas.openxmlformats.org/drawingml/2006/main" w="0">
+            <a:noFill/>
+            <a:prstDash val="solid"/>
+          </a:ln>
+        </p:spPr>
+        <p:txBody>
+          <a:bodyPr xmlns:a="http://schemas.openxmlformats.org/drawingml/2006/main"/>
+          <a:lstStyle xmlns:a="http://schemas.openxmlformats.org/drawingml/2006/main"/>
+          <a:p xmlns:a="http://schemas.openxmlformats.org/drawingml/2006/main">
+            <a:pPr algn="l">
+              <a:defRPr sz="1350" b="0">
+                <a:solidFill>
+                  <a:srgbClr val="98A19F"/>
+                </a:solidFill>
+              </a:defRPr>
+            </a:pPr>
+            <a:r>
+              <a:rPr sz="1350" b="0">
+                <a:solidFill>
+                  <a:srgbClr val="98A19F"/>
+                </a:solidFill>
+              </a:rPr>
+              <a:t>Budget · unit price · seller · product · quantity · quality</a:t>
+            </a:r>
+          </a:p>
+        </p:txBody>
+      </p:sp>
+      <p:sp>
+        <p:nvSpPr>
+          <p:cNvPr id="8" name="">
+            <a:extLst xmlns:a="http://schemas.openxmlformats.org/drawingml/2006/main">
+              <a:ext uri="{FF2B5EF4-FFF2-40B4-BE49-F238E27FC236}">
+                <a16:creationId xmlns:a16="http://schemas.microsoft.com/office/drawing/2014/main" id="{FD16FE7B-71E7-47DA-83EF-D32E5A381398}"/>
+              </a:ext>
+            </a:extLst>
+          </p:cNvPr>
+          <p:cNvSpPr>
+            <a:spLocks xmlns:a="http://schemas.openxmlformats.org/drawingml/2006/main" noGrp="1"/>
+          </p:cNvSpPr>
+          <p:nvPr/>
+        </p:nvSpPr>
+        <p:spPr>
+          <a:xfrm xmlns:a="http://schemas.openxmlformats.org/drawingml/2006/main">
+            <a:off x="7096125" y="3095625"/>
+            <a:ext cx="3429000" cy="381000"/>
+          </a:xfrm>
+          <a:prstGeom xmlns:a="http://schemas.openxmlformats.org/drawingml/2006/main" prst="rect">
+            <a:avLst/>
+          </a:prstGeom>
+          <a:noFill xmlns:a="http://schemas.openxmlformats.org/drawingml/2006/main"/>
+          <a:ln xmlns:a="http://schemas.openxmlformats.org/drawingml/2006/main" w="0">
+            <a:noFill/>
+            <a:prstDash val="solid"/>
+          </a:ln>
+        </p:spPr>
+        <p:txBody>
+          <a:bodyPr xmlns:a="http://schemas.openxmlformats.org/drawingml/2006/main"/>
+          <a:lstStyle xmlns:a="http://schemas.openxmlformats.org/drawingml/2006/main"/>
+          <a:p xmlns:a="http://schemas.openxmlformats.org/drawingml/2006/main">
+            <a:pPr algn="l">
+              <a:defRPr sz="1950" b="1">
+                <a:solidFill>
+                  <a:srgbClr val="F2ED55"/>
+                </a:solidFill>
+              </a:defRPr>
+            </a:pPr>
+            <a:r>
+              <a:rPr sz="1950" b="1">
+                <a:solidFill>
+                  <a:srgbClr val="F2ED55"/>
+                </a:solidFill>
+              </a:rPr>
+              <a:t>Human checkpoint</a:t>
+            </a:r>
+          </a:p>
+        </p:txBody>
+      </p:sp>
+      <p:sp>
+        <p:nvSpPr>
           <p:cNvPr id="9" name="">
             <a:extLst xmlns:a="http://schemas.openxmlformats.org/drawingml/2006/main">
               <a:ext uri="{FF2B5EF4-FFF2-40B4-BE49-F238E27FC236}">
-                <a16:creationId xmlns:a16="http://schemas.microsoft.com/office/drawing/2014/main" id="{56B0216B-A2C1-4772-9045-671AE2EE1DE0}"/>
-              </a:ext>
-            </a:extLst>
-          </p:cNvPr>
-          <p:cNvSpPr>
-            <a:spLocks xmlns:a="http://schemas.openxmlformats.org/drawingml/2006/main" noGrp="1"/>
-          </p:cNvSpPr>
-          <p:nvPr/>
-        </p:nvSpPr>
-        <p:spPr>
-          <a:xfrm xmlns:a="http://schemas.openxmlformats.org/drawingml/2006/main">
-            <a:off x="5191125" y="5810250"/>
-            <a:ext cx="2476500" cy="266700"/>
-          </a:xfrm>
-          <a:prstGeom xmlns:a="http://schemas.openxmlformats.org/drawingml/2006/main" prst="rect">
-            <a:avLst/>
-          </a:prstGeom>
-          <a:noFill xmlns:a="http://schemas.openxmlformats.org/drawingml/2006/main"/>
-          <a:ln xmlns:a="http://schemas.openxmlformats.org/drawingml/2006/main" w="0">
-            <a:noFill/>
-            <a:prstDash val="solid"/>
-          </a:ln>
-        </p:spPr>
-        <p:txBody>
-          <a:bodyPr xmlns:a="http://schemas.openxmlformats.org/drawingml/2006/main"/>
-          <a:lstStyle xmlns:a="http://schemas.openxmlformats.org/drawingml/2006/main"/>
-          <a:p xmlns:a="http://schemas.openxmlformats.org/drawingml/2006/main">
-            <a:pPr algn="l">
-              <a:defRPr sz="1275" b="1">
-                <a:solidFill>
-                  <a:srgbClr val="F2ED55"/>
-                </a:solidFill>
-              </a:defRPr>
-            </a:pPr>
-            <a:r>
-              <a:rPr sz="1275" b="1">
-                <a:solidFill>
-                  <a:srgbClr val="F2ED55"/>
-                </a:solidFill>
-              </a:rPr>
-              <a:t>Optional high-value path</a:t>
+                <a16:creationId xmlns:a16="http://schemas.microsoft.com/office/drawing/2014/main" id="{A85EF34C-D594-4FB2-AD2B-80460AAB725C}"/>
+              </a:ext>
+            </a:extLst>
+          </p:cNvPr>
+          <p:cNvSpPr>
+            <a:spLocks xmlns:a="http://schemas.openxmlformats.org/drawingml/2006/main" noGrp="1"/>
+          </p:cNvSpPr>
+          <p:nvPr/>
+        </p:nvSpPr>
+        <p:spPr>
+          <a:xfrm xmlns:a="http://schemas.openxmlformats.org/drawingml/2006/main">
+            <a:off x="7096125" y="3571875"/>
+            <a:ext cx="3714750" cy="952500"/>
+          </a:xfrm>
+          <a:prstGeom xmlns:a="http://schemas.openxmlformats.org/drawingml/2006/main" prst="rect">
+            <a:avLst/>
+          </a:prstGeom>
+          <a:noFill xmlns:a="http://schemas.openxmlformats.org/drawingml/2006/main"/>
+          <a:ln xmlns:a="http://schemas.openxmlformats.org/drawingml/2006/main" w="0">
+            <a:noFill/>
+            <a:prstDash val="solid"/>
+          </a:ln>
+        </p:spPr>
+        <p:txBody>
+          <a:bodyPr xmlns:a="http://schemas.openxmlformats.org/drawingml/2006/main"/>
+          <a:lstStyle xmlns:a="http://schemas.openxmlformats.org/drawingml/2006/main"/>
+          <a:p xmlns:a="http://schemas.openxmlformats.org/drawingml/2006/main">
+            <a:pPr algn="l">
+              <a:defRPr sz="1425" b="0">
+                <a:solidFill>
+                  <a:srgbClr val="F5F7F6"/>
+                </a:solidFill>
+              </a:defRPr>
+            </a:pPr>
+            <a:r>
+              <a:rPr sz="1425" b="0">
+                <a:solidFill>
+                  <a:srgbClr val="F5F7F6"/>
+                </a:solidFill>
+              </a:rPr>
+              <a:t>$1,450 negotiated</a:t>
+            </a:r>
+          </a:p>
+          <a:p xmlns:a="http://schemas.openxmlformats.org/drawingml/2006/main">
+            <a:pPr algn="l">
+              <a:defRPr sz="1425" b="0">
+                <a:solidFill>
+                  <a:srgbClr val="F5F7F6"/>
+                </a:solidFill>
+              </a:defRPr>
+            </a:pPr>
+            <a:r>
+              <a:rPr sz="1425" b="0">
+                <a:solidFill>
+                  <a:srgbClr val="F5F7F6"/>
+                </a:solidFill>
+              </a:rPr>
+              <a:t>$500 automatic limit</a:t>
+            </a:r>
+          </a:p>
+          <a:p xmlns:a="http://schemas.openxmlformats.org/drawingml/2006/main">
+            <a:pPr algn="l">
+              <a:defRPr sz="1425" b="0">
+                <a:solidFill>
+                  <a:srgbClr val="F5F7F6"/>
+                </a:solidFill>
+              </a:defRPr>
+            </a:pPr>
+            <a:r>
+              <a:rPr sz="1425" b="0">
+                <a:solidFill>
+                  <a:srgbClr val="F5F7F6"/>
+                </a:solidFill>
+              </a:rPr>
+              <a:t>Nothing moves until approval</a:t>
             </a:r>
           </a:p>
         </p:txBody>
@@ -8161,47 +9090,97 @@
           <p:cNvPr id="10" name="">
             <a:extLst xmlns:a="http://schemas.openxmlformats.org/drawingml/2006/main">
               <a:ext uri="{FF2B5EF4-FFF2-40B4-BE49-F238E27FC236}">
-                <a16:creationId xmlns:a16="http://schemas.microsoft.com/office/drawing/2014/main" id="{E0427EBD-229B-444D-B82D-16B2E86E01AA}"/>
-              </a:ext>
-            </a:extLst>
-          </p:cNvPr>
-          <p:cNvSpPr>
-            <a:spLocks xmlns:a="http://schemas.openxmlformats.org/drawingml/2006/main" noGrp="1"/>
-          </p:cNvSpPr>
-          <p:nvPr/>
-        </p:nvSpPr>
-        <p:spPr>
-          <a:xfrm xmlns:a="http://schemas.openxmlformats.org/drawingml/2006/main">
-            <a:off x="7715250" y="5772150"/>
-            <a:ext cx="3810000" cy="523875"/>
-          </a:xfrm>
-          <a:prstGeom xmlns:a="http://schemas.openxmlformats.org/drawingml/2006/main" prst="rect">
-            <a:avLst/>
-          </a:prstGeom>
-          <a:noFill xmlns:a="http://schemas.openxmlformats.org/drawingml/2006/main"/>
-          <a:ln xmlns:a="http://schemas.openxmlformats.org/drawingml/2006/main" w="0">
-            <a:noFill/>
-            <a:prstDash val="solid"/>
-          </a:ln>
-        </p:spPr>
-        <p:txBody>
-          <a:bodyPr xmlns:a="http://schemas.openxmlformats.org/drawingml/2006/main"/>
-          <a:lstStyle xmlns:a="http://schemas.openxmlformats.org/drawingml/2006/main"/>
-          <a:p xmlns:a="http://schemas.openxmlformats.org/drawingml/2006/main">
-            <a:pPr algn="l">
-              <a:defRPr sz="1200" b="0">
-                <a:solidFill>
-                  <a:srgbClr val="98A19F"/>
-                </a:solidFill>
-              </a:defRPr>
-            </a:pPr>
-            <a:r>
-              <a:rPr sz="1200" b="0">
-                <a:solidFill>
-                  <a:srgbClr val="98A19F"/>
-                </a:solidFill>
-              </a:rPr>
-              <a:t>A deployed Solidity escrow records buyer, merchant, amount, deposit, expiry, and commercial terms.</a:t>
+                <a16:creationId xmlns:a16="http://schemas.microsoft.com/office/drawing/2014/main" id="{E9ADE26C-27F3-44E7-9E09-67690976CD56}"/>
+              </a:ext>
+            </a:extLst>
+          </p:cNvPr>
+          <p:cNvSpPr>
+            <a:spLocks xmlns:a="http://schemas.openxmlformats.org/drawingml/2006/main" noGrp="1"/>
+          </p:cNvSpPr>
+          <p:nvPr/>
+        </p:nvSpPr>
+        <p:spPr>
+          <a:xfrm xmlns:a="http://schemas.openxmlformats.org/drawingml/2006/main">
+            <a:off x="7096125" y="4857750"/>
+            <a:ext cx="3429000" cy="381000"/>
+          </a:xfrm>
+          <a:prstGeom xmlns:a="http://schemas.openxmlformats.org/drawingml/2006/main" prst="rect">
+            <a:avLst/>
+          </a:prstGeom>
+          <a:noFill xmlns:a="http://schemas.openxmlformats.org/drawingml/2006/main"/>
+          <a:ln xmlns:a="http://schemas.openxmlformats.org/drawingml/2006/main" w="0">
+            <a:noFill/>
+            <a:prstDash val="solid"/>
+          </a:ln>
+        </p:spPr>
+        <p:txBody>
+          <a:bodyPr xmlns:a="http://schemas.openxmlformats.org/drawingml/2006/main"/>
+          <a:lstStyle xmlns:a="http://schemas.openxmlformats.org/drawingml/2006/main"/>
+          <a:p xmlns:a="http://schemas.openxmlformats.org/drawingml/2006/main">
+            <a:pPr algn="l">
+              <a:defRPr sz="1950" b="1">
+                <a:solidFill>
+                  <a:srgbClr val="9270FF"/>
+                </a:solidFill>
+              </a:defRPr>
+            </a:pPr>
+            <a:r>
+              <a:rPr sz="1950" b="1">
+                <a:solidFill>
+                  <a:srgbClr val="9270FF"/>
+                </a:solidFill>
+              </a:rPr>
+              <a:t>Official AP2 mandate</a:t>
+            </a:r>
+          </a:p>
+        </p:txBody>
+      </p:sp>
+      <p:sp>
+        <p:nvSpPr>
+          <p:cNvPr id="11" name="">
+            <a:extLst xmlns:a="http://schemas.openxmlformats.org/drawingml/2006/main">
+              <a:ext uri="{FF2B5EF4-FFF2-40B4-BE49-F238E27FC236}">
+                <a16:creationId xmlns:a16="http://schemas.microsoft.com/office/drawing/2014/main" id="{0DCEE3BF-E877-4E47-82F6-1CEB44F9DC22}"/>
+              </a:ext>
+            </a:extLst>
+          </p:cNvPr>
+          <p:cNvSpPr>
+            <a:spLocks xmlns:a="http://schemas.openxmlformats.org/drawingml/2006/main" noGrp="1"/>
+          </p:cNvSpPr>
+          <p:nvPr/>
+        </p:nvSpPr>
+        <p:spPr>
+          <a:xfrm xmlns:a="http://schemas.openxmlformats.org/drawingml/2006/main">
+            <a:off x="7096125" y="5334000"/>
+            <a:ext cx="4000500" cy="762000"/>
+          </a:xfrm>
+          <a:prstGeom xmlns:a="http://schemas.openxmlformats.org/drawingml/2006/main" prst="rect">
+            <a:avLst/>
+          </a:prstGeom>
+          <a:noFill xmlns:a="http://schemas.openxmlformats.org/drawingml/2006/main"/>
+          <a:ln xmlns:a="http://schemas.openxmlformats.org/drawingml/2006/main" w="0">
+            <a:noFill/>
+            <a:prstDash val="solid"/>
+          </a:ln>
+        </p:spPr>
+        <p:txBody>
+          <a:bodyPr xmlns:a="http://schemas.openxmlformats.org/drawingml/2006/main"/>
+          <a:lstStyle xmlns:a="http://schemas.openxmlformats.org/drawingml/2006/main"/>
+          <a:p xmlns:a="http://schemas.openxmlformats.org/drawingml/2006/main">
+            <a:pPr algn="l">
+              <a:defRPr sz="1350" b="0">
+                <a:solidFill>
+                  <a:srgbClr val="98A19F"/>
+                </a:solidFill>
+              </a:defRPr>
+            </a:pPr>
+            <a:r>
+              <a:rPr sz="1350" b="0">
+                <a:solidFill>
+                  <a:srgbClr val="98A19F"/>
+                </a:solidFill>
+              </a:rPr>
+              <a:t>Buyer · seller · product · exact and maximum amount · payment method · recipient · expiration</a:t>
             </a:r>
           </a:p>
         </p:txBody>
@@ -8209,7 +9188,7 @@
     </p:spTree>
     <p:extLst>
       <p:ext uri="{BB962C8B-B14F-4D97-AF65-F5344CB8AC3E}">
-        <p14:creationId xmlns:p14="http://schemas.microsoft.com/office/powerpoint/2010/main" val="573600095"/>
+        <p14:creationId xmlns:p14="http://schemas.microsoft.com/office/powerpoint/2010/main" val="825485630"/>
       </p:ext>
     </p:extLst>
   </p:cSld>
@@ -8237,10 +9216,10 @@
       </p:grpSpPr>
       <p:sp>
         <p:nvSpPr>
-          <p:cNvPr id="11" name="">
-            <a:extLst xmlns:a="http://schemas.openxmlformats.org/drawingml/2006/main">
-              <a:ext uri="{FF2B5EF4-FFF2-40B4-BE49-F238E27FC236}">
-                <a16:creationId xmlns:a16="http://schemas.microsoft.com/office/drawing/2014/main" id="{01D22634-1B57-4157-A2F3-061A595FD80B}"/>
+          <p:cNvPr id="18" name="">
+            <a:extLst xmlns:a="http://schemas.openxmlformats.org/drawingml/2006/main">
+              <a:ext uri="{FF2B5EF4-FFF2-40B4-BE49-F238E27FC236}">
+                <a16:creationId xmlns:a16="http://schemas.microsoft.com/office/drawing/2014/main" id="{9FE5612F-4AAF-4677-99CE-FBEC3C5AC0DD}"/>
               </a:ext>
             </a:extLst>
           </p:cNvPr>
@@ -8280,7 +9259,7 @@
                   <a:srgbClr val="F2ED55"/>
                 </a:solidFill>
               </a:rPr>
-              <a:t>RAIN</a:t>
+              <a:t>PAYMENT ROUTER</a:t>
             </a:r>
           </a:p>
         </p:txBody>
@@ -8290,7 +9269,7 @@
           <p:cNvPr id="2" name="">
             <a:extLst xmlns:a="http://schemas.openxmlformats.org/drawingml/2006/main">
               <a:ext uri="{FF2B5EF4-FFF2-40B4-BE49-F238E27FC236}">
-                <a16:creationId xmlns:a16="http://schemas.microsoft.com/office/drawing/2014/main" id="{02344D3B-9AEE-4730-BCCD-BE42C9825EDF}"/>
+                <a16:creationId xmlns:a16="http://schemas.microsoft.com/office/drawing/2014/main" id="{C17362F8-6F7D-419D-9BF9-BD7D6714B676}"/>
               </a:ext>
             </a:extLst>
           </p:cNvPr>
@@ -8330,7 +9309,7 @@
                   <a:srgbClr val="F5F7F6"/>
                 </a:solidFill>
               </a:rPr>
-              <a:t>Rain reaches the merchants that do not speak agent-native payments.</a:t>
+              <a:t>One policy layer chooses the payment rail.</a:t>
             </a:r>
           </a:p>
         </p:txBody>
@@ -8340,7 +9319,7 @@
           <p:cNvPr id="3" name="">
             <a:extLst xmlns:a="http://schemas.openxmlformats.org/drawingml/2006/main">
               <a:ext uri="{FF2B5EF4-FFF2-40B4-BE49-F238E27FC236}">
-                <a16:creationId xmlns:a16="http://schemas.microsoft.com/office/drawing/2014/main" id="{FA630F47-59E3-47A8-86FD-923B30EE57DD}"/>
+                <a16:creationId xmlns:a16="http://schemas.microsoft.com/office/drawing/2014/main" id="{4187E949-BBEA-4736-BA7A-ADFB334F44EE}"/>
               </a:ext>
             </a:extLst>
           </p:cNvPr>
@@ -8373,7 +9352,7 @@
           <p:cNvPr id="4" name="">
             <a:extLst xmlns:a="http://schemas.openxmlformats.org/drawingml/2006/main">
               <a:ext uri="{FF2B5EF4-FFF2-40B4-BE49-F238E27FC236}">
-                <a16:creationId xmlns:a16="http://schemas.microsoft.com/office/drawing/2014/main" id="{FA0E057D-1A9A-469D-B72F-9EA55DF1D686}"/>
+                <a16:creationId xmlns:a16="http://schemas.microsoft.com/office/drawing/2014/main" id="{C26803C2-AAC7-48DF-BC9B-BD5665B831B4}"/>
               </a:ext>
             </a:extLst>
           </p:cNvPr>
@@ -8418,101 +9397,378 @@
           </a:p>
         </p:txBody>
       </p:sp>
-      <p:pic>
-        <p:nvPicPr>
-          <p:cNvPr id="15" name=""/>
-          <p:cNvPicPr>
-            <a:picLocks xmlns:a="http://schemas.openxmlformats.org/drawingml/2006/main" noChangeAspect="1"/>
-          </p:cNvPicPr>
-          <p:nvPr/>
-        </p:nvPicPr>
-        <p:blipFill>
-          <a:blip xmlns:r="http://schemas.openxmlformats.org/officeDocument/2006/relationships" xmlns:a="http://schemas.openxmlformats.org/drawingml/2006/main" r:embed="R27fe8651a76f4844"/>
-          <a:srcRect xmlns:a="http://schemas.openxmlformats.org/drawingml/2006/main" l="8619" t="0" r="8619" b="0"/>
-          <a:stretch xmlns:a="http://schemas.openxmlformats.org/drawingml/2006/main">
-            <a:fillRect l="0" t="0" r="0" b="0"/>
-          </a:stretch>
-        </p:blipFill>
-        <p:spPr>
-          <a:xfrm xmlns:a="http://schemas.openxmlformats.org/drawingml/2006/main">
-            <a:off x="523875" y="1619250"/>
-            <a:ext cx="6953250" cy="4095750"/>
+      <p:sp>
+        <p:nvSpPr>
+          <p:cNvPr id="5" name="">
+            <a:extLst xmlns:a="http://schemas.openxmlformats.org/drawingml/2006/main">
+              <a:ext uri="{FF2B5EF4-FFF2-40B4-BE49-F238E27FC236}">
+                <a16:creationId xmlns:a16="http://schemas.microsoft.com/office/drawing/2014/main" id="{0CA41860-E4F7-45CB-B476-BAF7731971B7}"/>
+              </a:ext>
+            </a:extLst>
+          </p:cNvPr>
+          <p:cNvSpPr>
+            <a:spLocks xmlns:a="http://schemas.openxmlformats.org/drawingml/2006/main" noGrp="1"/>
+          </p:cNvSpPr>
+          <p:nvPr/>
+        </p:nvSpPr>
+        <p:spPr>
+          <a:xfrm xmlns:a="http://schemas.openxmlformats.org/drawingml/2006/main">
+            <a:off x="523875" y="1714500"/>
+            <a:ext cx="3333750" cy="3619500"/>
           </a:xfrm>
           <a:prstGeom xmlns:a="http://schemas.openxmlformats.org/drawingml/2006/main" prst="roundRect">
             <a:avLst>
-              <a:gd name="adj" fmla="val 2791"/>
+              <a:gd name="adj" fmla="val 3429"/>
             </a:avLst>
           </a:prstGeom>
-        </p:spPr>
-      </p:pic>
+          <a:solidFill xmlns:a="http://schemas.openxmlformats.org/drawingml/2006/main">
+            <a:srgbClr val="16201F"/>
+          </a:solidFill>
+          <a:ln xmlns:a="http://schemas.openxmlformats.org/drawingml/2006/main" w="9525">
+            <a:solidFill>
+              <a:srgbClr val="9270FF"/>
+            </a:solidFill>
+            <a:prstDash val="solid"/>
+          </a:ln>
+        </p:spPr>
+      </p:sp>
       <p:sp>
         <p:nvSpPr>
           <p:cNvPr id="6" name="">
             <a:extLst xmlns:a="http://schemas.openxmlformats.org/drawingml/2006/main">
               <a:ext uri="{FF2B5EF4-FFF2-40B4-BE49-F238E27FC236}">
-                <a16:creationId xmlns:a16="http://schemas.microsoft.com/office/drawing/2014/main" id="{D56A1FE4-ED42-43A7-B69D-537CD119EF47}"/>
-              </a:ext>
-            </a:extLst>
-          </p:cNvPr>
-          <p:cNvSpPr>
-            <a:spLocks xmlns:a="http://schemas.openxmlformats.org/drawingml/2006/main" noGrp="1"/>
-          </p:cNvSpPr>
-          <p:nvPr/>
-        </p:nvSpPr>
-        <p:spPr>
-          <a:xfrm xmlns:a="http://schemas.openxmlformats.org/drawingml/2006/main">
-            <a:off x="7905750" y="1809750"/>
-            <a:ext cx="2857500" cy="400050"/>
-          </a:xfrm>
-          <a:prstGeom xmlns:a="http://schemas.openxmlformats.org/drawingml/2006/main" prst="rect">
-            <a:avLst/>
-          </a:prstGeom>
-          <a:noFill xmlns:a="http://schemas.openxmlformats.org/drawingml/2006/main"/>
-          <a:ln xmlns:a="http://schemas.openxmlformats.org/drawingml/2006/main" w="0">
-            <a:noFill/>
-            <a:prstDash val="solid"/>
-          </a:ln>
-        </p:spPr>
-        <p:txBody>
-          <a:bodyPr xmlns:a="http://schemas.openxmlformats.org/drawingml/2006/main"/>
-          <a:lstStyle xmlns:a="http://schemas.openxmlformats.org/drawingml/2006/main"/>
-          <a:p xmlns:a="http://schemas.openxmlformats.org/drawingml/2006/main">
-            <a:pPr algn="l">
-              <a:defRPr sz="2025" b="1">
+                <a16:creationId xmlns:a16="http://schemas.microsoft.com/office/drawing/2014/main" id="{B339CA41-F5F6-4271-A8F8-F400F9C02B50}"/>
+              </a:ext>
+            </a:extLst>
+          </p:cNvPr>
+          <p:cNvSpPr>
+            <a:spLocks xmlns:a="http://schemas.openxmlformats.org/drawingml/2006/main" noGrp="1"/>
+          </p:cNvSpPr>
+          <p:nvPr/>
+        </p:nvSpPr>
+        <p:spPr>
+          <a:xfrm xmlns:a="http://schemas.openxmlformats.org/drawingml/2006/main">
+            <a:off x="809625" y="2047875"/>
+            <a:ext cx="1714500" cy="552450"/>
+          </a:xfrm>
+          <a:prstGeom xmlns:a="http://schemas.openxmlformats.org/drawingml/2006/main" prst="rect">
+            <a:avLst/>
+          </a:prstGeom>
+          <a:noFill xmlns:a="http://schemas.openxmlformats.org/drawingml/2006/main"/>
+          <a:ln xmlns:a="http://schemas.openxmlformats.org/drawingml/2006/main" w="0">
+            <a:noFill/>
+            <a:prstDash val="solid"/>
+          </a:ln>
+        </p:spPr>
+        <p:txBody>
+          <a:bodyPr xmlns:a="http://schemas.openxmlformats.org/drawingml/2006/main"/>
+          <a:lstStyle xmlns:a="http://schemas.openxmlformats.org/drawingml/2006/main"/>
+          <a:p xmlns:a="http://schemas.openxmlformats.org/drawingml/2006/main">
+            <a:pPr algn="l">
+              <a:defRPr sz="3000" b="1">
+                <a:solidFill>
+                  <a:srgbClr val="9270FF"/>
+                </a:solidFill>
+              </a:defRPr>
+            </a:pPr>
+            <a:r>
+              <a:rPr sz="3000" b="1">
+                <a:solidFill>
+                  <a:srgbClr val="9270FF"/>
+                </a:solidFill>
+              </a:rPr>
+              <a:t>$0.01</a:t>
+            </a:r>
+          </a:p>
+        </p:txBody>
+      </p:sp>
+      <p:sp>
+        <p:nvSpPr>
+          <p:cNvPr id="7" name="">
+            <a:extLst xmlns:a="http://schemas.openxmlformats.org/drawingml/2006/main">
+              <a:ext uri="{FF2B5EF4-FFF2-40B4-BE49-F238E27FC236}">
+                <a16:creationId xmlns:a16="http://schemas.microsoft.com/office/drawing/2014/main" id="{D7D129F6-CA2D-48C3-BD26-48E1C03ADC1E}"/>
+              </a:ext>
+            </a:extLst>
+          </p:cNvPr>
+          <p:cNvSpPr>
+            <a:spLocks xmlns:a="http://schemas.openxmlformats.org/drawingml/2006/main" noGrp="1"/>
+          </p:cNvSpPr>
+          <p:nvPr/>
+        </p:nvSpPr>
+        <p:spPr>
+          <a:xfrm xmlns:a="http://schemas.openxmlformats.org/drawingml/2006/main">
+            <a:off x="809625" y="2714625"/>
+            <a:ext cx="2476500" cy="361950"/>
+          </a:xfrm>
+          <a:prstGeom xmlns:a="http://schemas.openxmlformats.org/drawingml/2006/main" prst="rect">
+            <a:avLst/>
+          </a:prstGeom>
+          <a:noFill xmlns:a="http://schemas.openxmlformats.org/drawingml/2006/main"/>
+          <a:ln xmlns:a="http://schemas.openxmlformats.org/drawingml/2006/main" w="0">
+            <a:noFill/>
+            <a:prstDash val="solid"/>
+          </a:ln>
+        </p:spPr>
+        <p:txBody>
+          <a:bodyPr xmlns:a="http://schemas.openxmlformats.org/drawingml/2006/main"/>
+          <a:lstStyle xmlns:a="http://schemas.openxmlformats.org/drawingml/2006/main"/>
+          <a:p xmlns:a="http://schemas.openxmlformats.org/drawingml/2006/main">
+            <a:pPr algn="l">
+              <a:defRPr sz="1950" b="1">
+                <a:solidFill>
+                  <a:srgbClr val="F5F7F6"/>
+                </a:solidFill>
+              </a:defRPr>
+            </a:pPr>
+            <a:r>
+              <a:rPr sz="1950" b="1">
+                <a:solidFill>
+                  <a:srgbClr val="F5F7F6"/>
+                </a:solidFill>
+              </a:rPr>
+              <a:t>Monad x402</a:t>
+            </a:r>
+          </a:p>
+        </p:txBody>
+      </p:sp>
+      <p:sp>
+        <p:nvSpPr>
+          <p:cNvPr id="8" name="">
+            <a:extLst xmlns:a="http://schemas.openxmlformats.org/drawingml/2006/main">
+              <a:ext uri="{FF2B5EF4-FFF2-40B4-BE49-F238E27FC236}">
+                <a16:creationId xmlns:a16="http://schemas.microsoft.com/office/drawing/2014/main" id="{1F4AA50F-90E6-4B7B-85BA-003E29778FC0}"/>
+              </a:ext>
+            </a:extLst>
+          </p:cNvPr>
+          <p:cNvSpPr>
+            <a:spLocks xmlns:a="http://schemas.openxmlformats.org/drawingml/2006/main" noGrp="1"/>
+          </p:cNvSpPr>
+          <p:nvPr/>
+        </p:nvSpPr>
+        <p:spPr>
+          <a:xfrm xmlns:a="http://schemas.openxmlformats.org/drawingml/2006/main">
+            <a:off x="809625" y="3286125"/>
+            <a:ext cx="2571750" cy="1143000"/>
+          </a:xfrm>
+          <a:prstGeom xmlns:a="http://schemas.openxmlformats.org/drawingml/2006/main" prst="rect">
+            <a:avLst/>
+          </a:prstGeom>
+          <a:noFill xmlns:a="http://schemas.openxmlformats.org/drawingml/2006/main"/>
+          <a:ln xmlns:a="http://schemas.openxmlformats.org/drawingml/2006/main" w="0">
+            <a:noFill/>
+            <a:prstDash val="solid"/>
+          </a:ln>
+        </p:spPr>
+        <p:txBody>
+          <a:bodyPr xmlns:a="http://schemas.openxmlformats.org/drawingml/2006/main"/>
+          <a:lstStyle xmlns:a="http://schemas.openxmlformats.org/drawingml/2006/main"/>
+          <a:p xmlns:a="http://schemas.openxmlformats.org/drawingml/2006/main">
+            <a:pPr algn="l">
+              <a:defRPr sz="1350" b="0">
+                <a:solidFill>
+                  <a:srgbClr val="98A19F"/>
+                </a:solidFill>
+              </a:defRPr>
+            </a:pPr>
+            <a:r>
+              <a:rPr sz="1350" b="0">
+                <a:solidFill>
+                  <a:srgbClr val="98A19F"/>
+                </a:solidFill>
+              </a:rPr>
+              <a:t>Machine-readable APIs and data</a:t>
+            </a:r>
+          </a:p>
+          <a:p xmlns:a="http://schemas.openxmlformats.org/drawingml/2006/main">
+            <a:pPr algn="l">
+              <a:defRPr sz="1350" b="0">
+                <a:solidFill>
+                  <a:srgbClr val="98A19F"/>
+                </a:solidFill>
+              </a:defRPr>
+            </a:pPr>
+            <a:r>
+              <a:rPr sz="1350" b="0">
+                <a:solidFill>
+                  <a:srgbClr val="98A19F"/>
+                </a:solidFill>
+              </a:rPr>
+              <a:t>Test USDC settlement</a:t>
+            </a:r>
+          </a:p>
+          <a:p xmlns:a="http://schemas.openxmlformats.org/drawingml/2006/main">
+            <a:pPr algn="l">
+              <a:defRPr sz="1350" b="0">
+                <a:solidFill>
+                  <a:srgbClr val="98A19F"/>
+                </a:solidFill>
+              </a:defRPr>
+            </a:pPr>
+            <a:r>
+              <a:rPr sz="1350" b="0">
+                <a:solidFill>
+                  <a:srgbClr val="98A19F"/>
+                </a:solidFill>
+              </a:rPr>
+              <a:t>Protected result released after verification</a:t>
+            </a:r>
+          </a:p>
+        </p:txBody>
+      </p:sp>
+      <p:sp>
+        <p:nvSpPr>
+          <p:cNvPr id="9" name="">
+            <a:extLst xmlns:a="http://schemas.openxmlformats.org/drawingml/2006/main">
+              <a:ext uri="{FF2B5EF4-FFF2-40B4-BE49-F238E27FC236}">
+                <a16:creationId xmlns:a16="http://schemas.microsoft.com/office/drawing/2014/main" id="{5F3F4E89-3309-4C6C-80D3-A0B58951831D}"/>
+              </a:ext>
+            </a:extLst>
+          </p:cNvPr>
+          <p:cNvSpPr>
+            <a:spLocks xmlns:a="http://schemas.openxmlformats.org/drawingml/2006/main" noGrp="1"/>
+          </p:cNvSpPr>
+          <p:nvPr/>
+        </p:nvSpPr>
+        <p:spPr>
+          <a:xfrm xmlns:a="http://schemas.openxmlformats.org/drawingml/2006/main">
+            <a:off x="4429125" y="1714500"/>
+            <a:ext cx="3333750" cy="3619500"/>
+          </a:xfrm>
+          <a:prstGeom xmlns:a="http://schemas.openxmlformats.org/drawingml/2006/main" prst="roundRect">
+            <a:avLst>
+              <a:gd name="adj" fmla="val 3429"/>
+            </a:avLst>
+          </a:prstGeom>
+          <a:solidFill xmlns:a="http://schemas.openxmlformats.org/drawingml/2006/main">
+            <a:srgbClr val="16201F"/>
+          </a:solidFill>
+          <a:ln xmlns:a="http://schemas.openxmlformats.org/drawingml/2006/main" w="9525">
+            <a:solidFill>
+              <a:srgbClr val="42BDEA"/>
+            </a:solidFill>
+            <a:prstDash val="solid"/>
+          </a:ln>
+        </p:spPr>
+      </p:sp>
+      <p:sp>
+        <p:nvSpPr>
+          <p:cNvPr id="10" name="">
+            <a:extLst xmlns:a="http://schemas.openxmlformats.org/drawingml/2006/main">
+              <a:ext uri="{FF2B5EF4-FFF2-40B4-BE49-F238E27FC236}">
+                <a16:creationId xmlns:a16="http://schemas.microsoft.com/office/drawing/2014/main" id="{6E663AFC-9204-4B00-9B12-4EFAE42C1B38}"/>
+              </a:ext>
+            </a:extLst>
+          </p:cNvPr>
+          <p:cNvSpPr>
+            <a:spLocks xmlns:a="http://schemas.openxmlformats.org/drawingml/2006/main" noGrp="1"/>
+          </p:cNvSpPr>
+          <p:nvPr/>
+        </p:nvSpPr>
+        <p:spPr>
+          <a:xfrm xmlns:a="http://schemas.openxmlformats.org/drawingml/2006/main">
+            <a:off x="4714875" y="2047875"/>
+            <a:ext cx="1714500" cy="552450"/>
+          </a:xfrm>
+          <a:prstGeom xmlns:a="http://schemas.openxmlformats.org/drawingml/2006/main" prst="rect">
+            <a:avLst/>
+          </a:prstGeom>
+          <a:noFill xmlns:a="http://schemas.openxmlformats.org/drawingml/2006/main"/>
+          <a:ln xmlns:a="http://schemas.openxmlformats.org/drawingml/2006/main" w="0">
+            <a:noFill/>
+            <a:prstDash val="solid"/>
+          </a:ln>
+        </p:spPr>
+        <p:txBody>
+          <a:bodyPr xmlns:a="http://schemas.openxmlformats.org/drawingml/2006/main"/>
+          <a:lstStyle xmlns:a="http://schemas.openxmlformats.org/drawingml/2006/main"/>
+          <a:p xmlns:a="http://schemas.openxmlformats.org/drawingml/2006/main">
+            <a:pPr algn="l">
+              <a:defRPr sz="3000" b="1">
                 <a:solidFill>
                   <a:srgbClr val="42BDEA"/>
                 </a:solidFill>
               </a:defRPr>
             </a:pPr>
             <a:r>
-              <a:rPr sz="2025" b="1">
+              <a:rPr sz="3000" b="1">
                 <a:solidFill>
                   <a:srgbClr val="42BDEA"/>
                 </a:solidFill>
               </a:rPr>
-              <a:t>Scoped card</a:t>
-            </a:r>
-          </a:p>
-        </p:txBody>
-      </p:sp>
-      <p:sp>
-        <p:nvSpPr>
-          <p:cNvPr id="7" name="">
-            <a:extLst xmlns:a="http://schemas.openxmlformats.org/drawingml/2006/main">
-              <a:ext uri="{FF2B5EF4-FFF2-40B4-BE49-F238E27FC236}">
-                <a16:creationId xmlns:a16="http://schemas.microsoft.com/office/drawing/2014/main" id="{0479B3B0-2FAA-4355-8D27-2BC4EC3D38B5}"/>
-              </a:ext>
-            </a:extLst>
-          </p:cNvPr>
-          <p:cNvSpPr>
-            <a:spLocks xmlns:a="http://schemas.openxmlformats.org/drawingml/2006/main" noGrp="1"/>
-          </p:cNvSpPr>
-          <p:nvPr/>
-        </p:nvSpPr>
-        <p:spPr>
-          <a:xfrm xmlns:a="http://schemas.openxmlformats.org/drawingml/2006/main">
-            <a:off x="7905750" y="2305050"/>
-            <a:ext cx="3143250" cy="952500"/>
+              <a:t>$464</a:t>
+            </a:r>
+          </a:p>
+        </p:txBody>
+      </p:sp>
+      <p:sp>
+        <p:nvSpPr>
+          <p:cNvPr id="11" name="">
+            <a:extLst xmlns:a="http://schemas.openxmlformats.org/drawingml/2006/main">
+              <a:ext uri="{FF2B5EF4-FFF2-40B4-BE49-F238E27FC236}">
+                <a16:creationId xmlns:a16="http://schemas.microsoft.com/office/drawing/2014/main" id="{198308D6-8FCE-445C-88B2-939562C398D1}"/>
+              </a:ext>
+            </a:extLst>
+          </p:cNvPr>
+          <p:cNvSpPr>
+            <a:spLocks xmlns:a="http://schemas.openxmlformats.org/drawingml/2006/main" noGrp="1"/>
+          </p:cNvSpPr>
+          <p:nvPr/>
+        </p:nvSpPr>
+        <p:spPr>
+          <a:xfrm xmlns:a="http://schemas.openxmlformats.org/drawingml/2006/main">
+            <a:off x="4714875" y="2714625"/>
+            <a:ext cx="2571750" cy="361950"/>
+          </a:xfrm>
+          <a:prstGeom xmlns:a="http://schemas.openxmlformats.org/drawingml/2006/main" prst="rect">
+            <a:avLst/>
+          </a:prstGeom>
+          <a:noFill xmlns:a="http://schemas.openxmlformats.org/drawingml/2006/main"/>
+          <a:ln xmlns:a="http://schemas.openxmlformats.org/drawingml/2006/main" w="0">
+            <a:noFill/>
+            <a:prstDash val="solid"/>
+          </a:ln>
+        </p:spPr>
+        <p:txBody>
+          <a:bodyPr xmlns:a="http://schemas.openxmlformats.org/drawingml/2006/main"/>
+          <a:lstStyle xmlns:a="http://schemas.openxmlformats.org/drawingml/2006/main"/>
+          <a:p xmlns:a="http://schemas.openxmlformats.org/drawingml/2006/main">
+            <a:pPr algn="l">
+              <a:defRPr sz="1950" b="1">
+                <a:solidFill>
+                  <a:srgbClr val="F5F7F6"/>
+                </a:solidFill>
+              </a:defRPr>
+            </a:pPr>
+            <a:r>
+              <a:rPr sz="1950" b="1">
+                <a:solidFill>
+                  <a:srgbClr val="F5F7F6"/>
+                </a:solidFill>
+              </a:rPr>
+              <a:t>Rain scoped card</a:t>
+            </a:r>
+          </a:p>
+        </p:txBody>
+      </p:sp>
+      <p:sp>
+        <p:nvSpPr>
+          <p:cNvPr id="12" name="">
+            <a:extLst xmlns:a="http://schemas.openxmlformats.org/drawingml/2006/main">
+              <a:ext uri="{FF2B5EF4-FFF2-40B4-BE49-F238E27FC236}">
+                <a16:creationId xmlns:a16="http://schemas.microsoft.com/office/drawing/2014/main" id="{1AF4920F-081A-43BB-8623-DA24A061268D}"/>
+              </a:ext>
+            </a:extLst>
+          </p:cNvPr>
+          <p:cNvSpPr>
+            <a:spLocks xmlns:a="http://schemas.openxmlformats.org/drawingml/2006/main" noGrp="1"/>
+          </p:cNvSpPr>
+          <p:nvPr/>
+        </p:nvSpPr>
+        <p:spPr>
+          <a:xfrm xmlns:a="http://schemas.openxmlformats.org/drawingml/2006/main">
+            <a:off x="4714875" y="3286125"/>
+            <a:ext cx="2619375" cy="1143000"/>
           </a:xfrm>
           <a:prstGeom xmlns:a="http://schemas.openxmlformats.org/drawingml/2006/main" prst="rect">
             <a:avLst/>
@@ -8540,7 +9796,7 @@
                   <a:srgbClr val="98A19F"/>
                 </a:solidFill>
               </a:rPr>
-              <a:t>Exact amount</a:t>
+              <a:t>Traditional upstream vendor</a:t>
             </a:r>
           </a:p>
           <a:p xmlns:a="http://schemas.openxmlformats.org/drawingml/2006/main">
@@ -8557,7 +9813,7 @@
                   <a:srgbClr val="98A19F"/>
                 </a:solidFill>
               </a:rPr>
-              <a:t>Merchant-category restriction</a:t>
+              <a:t>Exact amount, MCC, and expiry</a:t>
             </a:r>
           </a:p>
           <a:p xmlns:a="http://schemas.openxmlformats.org/drawingml/2006/main">
@@ -8574,79 +9830,164 @@
                   <a:srgbClr val="98A19F"/>
                 </a:solidFill>
               </a:rPr>
-              <a:t>One-hour expiration</a:t>
-            </a:r>
-          </a:p>
-        </p:txBody>
-      </p:sp>
-      <p:sp>
-        <p:nvSpPr>
-          <p:cNvPr id="8" name="">
-            <a:extLst xmlns:a="http://schemas.openxmlformats.org/drawingml/2006/main">
-              <a:ext uri="{FF2B5EF4-FFF2-40B4-BE49-F238E27FC236}">
-                <a16:creationId xmlns:a16="http://schemas.microsoft.com/office/drawing/2014/main" id="{14EF7421-2E34-451C-B596-B019E714280A}"/>
-              </a:ext>
-            </a:extLst>
-          </p:cNvPr>
-          <p:cNvSpPr>
-            <a:spLocks xmlns:a="http://schemas.openxmlformats.org/drawingml/2006/main" noGrp="1"/>
-          </p:cNvSpPr>
-          <p:nvPr/>
-        </p:nvSpPr>
-        <p:spPr>
-          <a:xfrm xmlns:a="http://schemas.openxmlformats.org/drawingml/2006/main">
-            <a:off x="7905750" y="3638550"/>
-            <a:ext cx="2857500" cy="400050"/>
-          </a:xfrm>
-          <a:prstGeom xmlns:a="http://schemas.openxmlformats.org/drawingml/2006/main" prst="rect">
-            <a:avLst/>
-          </a:prstGeom>
-          <a:noFill xmlns:a="http://schemas.openxmlformats.org/drawingml/2006/main"/>
-          <a:ln xmlns:a="http://schemas.openxmlformats.org/drawingml/2006/main" w="0">
-            <a:noFill/>
-            <a:prstDash val="solid"/>
-          </a:ln>
-        </p:spPr>
-        <p:txBody>
-          <a:bodyPr xmlns:a="http://schemas.openxmlformats.org/drawingml/2006/main"/>
-          <a:lstStyle xmlns:a="http://schemas.openxmlformats.org/drawingml/2006/main"/>
-          <a:p xmlns:a="http://schemas.openxmlformats.org/drawingml/2006/main">
-            <a:pPr algn="l">
-              <a:defRPr sz="2025" b="1">
+              <a:t>Bad merchant declined; good purchase settles</a:t>
+            </a:r>
+          </a:p>
+        </p:txBody>
+      </p:sp>
+      <p:sp>
+        <p:nvSpPr>
+          <p:cNvPr id="13" name="">
+            <a:extLst xmlns:a="http://schemas.openxmlformats.org/drawingml/2006/main">
+              <a:ext uri="{FF2B5EF4-FFF2-40B4-BE49-F238E27FC236}">
+                <a16:creationId xmlns:a16="http://schemas.microsoft.com/office/drawing/2014/main" id="{6EFC1A65-B4D0-40E9-9528-78A32C414054}"/>
+              </a:ext>
+            </a:extLst>
+          </p:cNvPr>
+          <p:cNvSpPr>
+            <a:spLocks xmlns:a="http://schemas.openxmlformats.org/drawingml/2006/main" noGrp="1"/>
+          </p:cNvSpPr>
+          <p:nvPr/>
+        </p:nvSpPr>
+        <p:spPr>
+          <a:xfrm xmlns:a="http://schemas.openxmlformats.org/drawingml/2006/main">
+            <a:off x="8334375" y="1714500"/>
+            <a:ext cx="3333750" cy="3619500"/>
+          </a:xfrm>
+          <a:prstGeom xmlns:a="http://schemas.openxmlformats.org/drawingml/2006/main" prst="roundRect">
+            <a:avLst>
+              <a:gd name="adj" fmla="val 3429"/>
+            </a:avLst>
+          </a:prstGeom>
+          <a:solidFill xmlns:a="http://schemas.openxmlformats.org/drawingml/2006/main">
+            <a:srgbClr val="16201F"/>
+          </a:solidFill>
+          <a:ln xmlns:a="http://schemas.openxmlformats.org/drawingml/2006/main" w="9525">
+            <a:solidFill>
+              <a:srgbClr val="F2ED55"/>
+            </a:solidFill>
+            <a:prstDash val="solid"/>
+          </a:ln>
+        </p:spPr>
+      </p:sp>
+      <p:sp>
+        <p:nvSpPr>
+          <p:cNvPr id="14" name="">
+            <a:extLst xmlns:a="http://schemas.openxmlformats.org/drawingml/2006/main">
+              <a:ext uri="{FF2B5EF4-FFF2-40B4-BE49-F238E27FC236}">
+                <a16:creationId xmlns:a16="http://schemas.microsoft.com/office/drawing/2014/main" id="{56CA800A-5379-4E70-8752-8FD18E0C6BA1}"/>
+              </a:ext>
+            </a:extLst>
+          </p:cNvPr>
+          <p:cNvSpPr>
+            <a:spLocks xmlns:a="http://schemas.openxmlformats.org/drawingml/2006/main" noGrp="1"/>
+          </p:cNvSpPr>
+          <p:nvPr/>
+        </p:nvSpPr>
+        <p:spPr>
+          <a:xfrm xmlns:a="http://schemas.openxmlformats.org/drawingml/2006/main">
+            <a:off x="8620125" y="2047875"/>
+            <a:ext cx="2095500" cy="552450"/>
+          </a:xfrm>
+          <a:prstGeom xmlns:a="http://schemas.openxmlformats.org/drawingml/2006/main" prst="rect">
+            <a:avLst/>
+          </a:prstGeom>
+          <a:noFill xmlns:a="http://schemas.openxmlformats.org/drawingml/2006/main"/>
+          <a:ln xmlns:a="http://schemas.openxmlformats.org/drawingml/2006/main" w="0">
+            <a:noFill/>
+            <a:prstDash val="solid"/>
+          </a:ln>
+        </p:spPr>
+        <p:txBody>
+          <a:bodyPr xmlns:a="http://schemas.openxmlformats.org/drawingml/2006/main"/>
+          <a:lstStyle xmlns:a="http://schemas.openxmlformats.org/drawingml/2006/main"/>
+          <a:p xmlns:a="http://schemas.openxmlformats.org/drawingml/2006/main">
+            <a:pPr algn="l">
+              <a:defRPr sz="3000" b="1">
                 <a:solidFill>
                   <a:srgbClr val="F2ED55"/>
                 </a:solidFill>
               </a:defRPr>
             </a:pPr>
             <a:r>
-              <a:rPr sz="2025" b="1">
+              <a:rPr sz="3000" b="1">
                 <a:solidFill>
                   <a:srgbClr val="F2ED55"/>
                 </a:solidFill>
               </a:rPr>
-              <a:t>Policy proof</a:t>
-            </a:r>
-          </a:p>
-        </p:txBody>
-      </p:sp>
-      <p:sp>
-        <p:nvSpPr>
-          <p:cNvPr id="9" name="">
-            <a:extLst xmlns:a="http://schemas.openxmlformats.org/drawingml/2006/main">
-              <a:ext uri="{FF2B5EF4-FFF2-40B4-BE49-F238E27FC236}">
-                <a16:creationId xmlns:a16="http://schemas.microsoft.com/office/drawing/2014/main" id="{0226299F-50F4-4427-AA59-9D15284E6595}"/>
-              </a:ext>
-            </a:extLst>
-          </p:cNvPr>
-          <p:cNvSpPr>
-            <a:spLocks xmlns:a="http://schemas.openxmlformats.org/drawingml/2006/main" noGrp="1"/>
-          </p:cNvSpPr>
-          <p:nvPr/>
-        </p:nvSpPr>
-        <p:spPr>
-          <a:xfrm xmlns:a="http://schemas.openxmlformats.org/drawingml/2006/main">
-            <a:off x="7905750" y="4133850"/>
-            <a:ext cx="3143250" cy="1000125"/>
+              <a:t>$28,900</a:t>
+            </a:r>
+          </a:p>
+        </p:txBody>
+      </p:sp>
+      <p:sp>
+        <p:nvSpPr>
+          <p:cNvPr id="15" name="">
+            <a:extLst xmlns:a="http://schemas.openxmlformats.org/drawingml/2006/main">
+              <a:ext uri="{FF2B5EF4-FFF2-40B4-BE49-F238E27FC236}">
+                <a16:creationId xmlns:a16="http://schemas.microsoft.com/office/drawing/2014/main" id="{3E25B350-EA3F-463F-9E20-BB91B16E1DAD}"/>
+              </a:ext>
+            </a:extLst>
+          </p:cNvPr>
+          <p:cNvSpPr>
+            <a:spLocks xmlns:a="http://schemas.openxmlformats.org/drawingml/2006/main" noGrp="1"/>
+          </p:cNvSpPr>
+          <p:nvPr/>
+        </p:nvSpPr>
+        <p:spPr>
+          <a:xfrm xmlns:a="http://schemas.openxmlformats.org/drawingml/2006/main">
+            <a:off x="8620125" y="2714625"/>
+            <a:ext cx="2571750" cy="361950"/>
+          </a:xfrm>
+          <a:prstGeom xmlns:a="http://schemas.openxmlformats.org/drawingml/2006/main" prst="rect">
+            <a:avLst/>
+          </a:prstGeom>
+          <a:noFill xmlns:a="http://schemas.openxmlformats.org/drawingml/2006/main"/>
+          <a:ln xmlns:a="http://schemas.openxmlformats.org/drawingml/2006/main" w="0">
+            <a:noFill/>
+            <a:prstDash val="solid"/>
+          </a:ln>
+        </p:spPr>
+        <p:txBody>
+          <a:bodyPr xmlns:a="http://schemas.openxmlformats.org/drawingml/2006/main"/>
+          <a:lstStyle xmlns:a="http://schemas.openxmlformats.org/drawingml/2006/main"/>
+          <a:p xmlns:a="http://schemas.openxmlformats.org/drawingml/2006/main">
+            <a:pPr algn="l">
+              <a:defRPr sz="1950" b="1">
+                <a:solidFill>
+                  <a:srgbClr val="F5F7F6"/>
+                </a:solidFill>
+              </a:defRPr>
+            </a:pPr>
+            <a:r>
+              <a:rPr sz="1950" b="1">
+                <a:solidFill>
+                  <a:srgbClr val="F5F7F6"/>
+                </a:solidFill>
+              </a:rPr>
+              <a:t>Escrow or checkout</a:t>
+            </a:r>
+          </a:p>
+        </p:txBody>
+      </p:sp>
+      <p:sp>
+        <p:nvSpPr>
+          <p:cNvPr id="16" name="">
+            <a:extLst xmlns:a="http://schemas.openxmlformats.org/drawingml/2006/main">
+              <a:ext uri="{FF2B5EF4-FFF2-40B4-BE49-F238E27FC236}">
+                <a16:creationId xmlns:a16="http://schemas.microsoft.com/office/drawing/2014/main" id="{CAC6762E-11A1-482B-88D5-4E7BB32F99B8}"/>
+              </a:ext>
+            </a:extLst>
+          </p:cNvPr>
+          <p:cNvSpPr>
+            <a:spLocks xmlns:a="http://schemas.openxmlformats.org/drawingml/2006/main" noGrp="1"/>
+          </p:cNvSpPr>
+          <p:nvPr/>
+        </p:nvSpPr>
+        <p:spPr>
+          <a:xfrm xmlns:a="http://schemas.openxmlformats.org/drawingml/2006/main">
+            <a:off x="8620125" y="3286125"/>
+            <a:ext cx="2619375" cy="1143000"/>
           </a:xfrm>
           <a:prstGeom xmlns:a="http://schemas.openxmlformats.org/drawingml/2006/main" prst="rect">
             <a:avLst/>
@@ -8674,7 +10015,7 @@
                   <a:srgbClr val="98A19F"/>
                 </a:solidFill>
               </a:rPr>
-              <a:t>Mismatched merchant declines</a:t>
+              <a:t>High-value hardware or deposits</a:t>
             </a:r>
           </a:p>
           <a:p xmlns:a="http://schemas.openxmlformats.org/drawingml/2006/main">
@@ -8691,7 +10032,7 @@
                   <a:srgbClr val="98A19F"/>
                 </a:solidFill>
               </a:rPr>
-              <a:t>Approved procurement settles</a:t>
+              <a:t>Solidity commercial terms</a:t>
             </a:r>
           </a:p>
           <a:p xmlns:a="http://schemas.openxmlformats.org/drawingml/2006/main">
@@ -8708,57 +10049,57 @@
                   <a:srgbClr val="98A19F"/>
                 </a:solidFill>
               </a:rPr>
-              <a:t>Final transaction is retrieved</a:t>
-            </a:r>
-          </a:p>
-        </p:txBody>
-      </p:sp>
-      <p:sp>
-        <p:nvSpPr>
-          <p:cNvPr id="10" name="">
-            <a:extLst xmlns:a="http://schemas.openxmlformats.org/drawingml/2006/main">
-              <a:ext uri="{FF2B5EF4-FFF2-40B4-BE49-F238E27FC236}">
-                <a16:creationId xmlns:a16="http://schemas.microsoft.com/office/drawing/2014/main" id="{353262A9-FFAA-49C5-A6B1-D695600B7F51}"/>
-              </a:ext>
-            </a:extLst>
-          </p:cNvPr>
-          <p:cNvSpPr>
-            <a:spLocks xmlns:a="http://schemas.openxmlformats.org/drawingml/2006/main" noGrp="1"/>
-          </p:cNvSpPr>
-          <p:nvPr/>
-        </p:nvSpPr>
-        <p:spPr>
-          <a:xfrm xmlns:a="http://schemas.openxmlformats.org/drawingml/2006/main">
-            <a:off x="7905750" y="5572125"/>
-            <a:ext cx="3333750" cy="476250"/>
-          </a:xfrm>
-          <a:prstGeom xmlns:a="http://schemas.openxmlformats.org/drawingml/2006/main" prst="rect">
-            <a:avLst/>
-          </a:prstGeom>
-          <a:noFill xmlns:a="http://schemas.openxmlformats.org/drawingml/2006/main"/>
-          <a:ln xmlns:a="http://schemas.openxmlformats.org/drawingml/2006/main" w="0">
-            <a:noFill/>
-            <a:prstDash val="solid"/>
-          </a:ln>
-        </p:spPr>
-        <p:txBody>
-          <a:bodyPr xmlns:a="http://schemas.openxmlformats.org/drawingml/2006/main"/>
-          <a:lstStyle xmlns:a="http://schemas.openxmlformats.org/drawingml/2006/main"/>
-          <a:p xmlns:a="http://schemas.openxmlformats.org/drawingml/2006/main">
-            <a:pPr algn="l">
-              <a:defRPr sz="1500" b="1">
+              <a:t>Fund, release, refund, or cancel</a:t>
+            </a:r>
+          </a:p>
+        </p:txBody>
+      </p:sp>
+      <p:sp>
+        <p:nvSpPr>
+          <p:cNvPr id="17" name="">
+            <a:extLst xmlns:a="http://schemas.openxmlformats.org/drawingml/2006/main">
+              <a:ext uri="{FF2B5EF4-FFF2-40B4-BE49-F238E27FC236}">
+                <a16:creationId xmlns:a16="http://schemas.microsoft.com/office/drawing/2014/main" id="{9ED31532-8B6C-4F5E-B7B9-C76289670B98}"/>
+              </a:ext>
+            </a:extLst>
+          </p:cNvPr>
+          <p:cNvSpPr>
+            <a:spLocks xmlns:a="http://schemas.openxmlformats.org/drawingml/2006/main" noGrp="1"/>
+          </p:cNvSpPr>
+          <p:nvPr/>
+        </p:nvSpPr>
+        <p:spPr>
+          <a:xfrm xmlns:a="http://schemas.openxmlformats.org/drawingml/2006/main">
+            <a:off x="1047750" y="5810250"/>
+            <a:ext cx="10096500" cy="342900"/>
+          </a:xfrm>
+          <a:prstGeom xmlns:a="http://schemas.openxmlformats.org/drawingml/2006/main" prst="rect">
+            <a:avLst/>
+          </a:prstGeom>
+          <a:noFill xmlns:a="http://schemas.openxmlformats.org/drawingml/2006/main"/>
+          <a:ln xmlns:a="http://schemas.openxmlformats.org/drawingml/2006/main" w="0">
+            <a:noFill/>
+            <a:prstDash val="solid"/>
+          </a:ln>
+        </p:spPr>
+        <p:txBody>
+          <a:bodyPr xmlns:a="http://schemas.openxmlformats.org/drawingml/2006/main"/>
+          <a:lstStyle xmlns:a="http://schemas.openxmlformats.org/drawingml/2006/main"/>
+          <a:p xmlns:a="http://schemas.openxmlformats.org/drawingml/2006/main">
+            <a:pPr algn="ctr">
+              <a:defRPr sz="1800" b="1">
                 <a:solidFill>
                   <a:srgbClr val="F5F7F6"/>
                 </a:solidFill>
               </a:defRPr>
             </a:pPr>
             <a:r>
-              <a:rPr sz="1500" b="1">
+              <a:rPr sz="1800" b="1">
                 <a:solidFill>
                   <a:srgbClr val="F5F7F6"/>
                 </a:solidFill>
               </a:rPr>
-              <a:t>The agent never receives an unrestricted card.</a:t>
+              <a:t>Small machine purchase. Controlled merchant procurement. High-value commercial agreement.</a:t>
             </a:r>
           </a:p>
         </p:txBody>
@@ -8766,7 +10107,7 @@
     </p:spTree>
     <p:extLst>
       <p:ext uri="{BB962C8B-B14F-4D97-AF65-F5344CB8AC3E}">
-        <p14:creationId xmlns:p14="http://schemas.microsoft.com/office/powerpoint/2010/main" val="401902264"/>
+        <p14:creationId xmlns:p14="http://schemas.microsoft.com/office/powerpoint/2010/main" val="1285521283"/>
       </p:ext>
     </p:extLst>
   </p:cSld>
